--- a/assets/libreoffice_impr_njc/456c4488-c4c4-475f-b671-0556dac8696a/The Birthday Paradox.pptx
+++ b/assets/libreoffice_impr_njc/456c4488-c4c4-475f-b671-0556dac8696a/The Birthday Paradox.pptx
@@ -308,7 +308,7 @@
             <a:pPr algn="r">
               <a:buNone/>
             </a:pPr>
-            <a:fld id="{7E0EE982-4689-451A-84B0-851D79FF37B1}" type="slidenum">
+            <a:fld id="{0D66BADE-4011-40C4-8484-48FE0EDFC430}" type="slidenum">
               <a:rPr b="0" lang="en-HK" sz="1400" spc="-1" strike="noStrike">
                 <a:latin typeface="Times New Roman"/>
               </a:rPr>
@@ -356,7 +356,7 @@
         <p:spPr>
           <a:xfrm>
             <a:off x="685800" y="1143000"/>
-            <a:ext cx="5485680" cy="3085560"/>
+            <a:ext cx="5485320" cy="3085200"/>
           </a:xfrm>
           <a:prstGeom prst="rect">
             <a:avLst/>
@@ -379,7 +379,7 @@
         <p:spPr>
           <a:xfrm>
             <a:off x="685800" y="4400640"/>
-            <a:ext cx="5485680" cy="3599640"/>
+            <a:ext cx="5485320" cy="3599280"/>
           </a:xfrm>
           <a:prstGeom prst="rect">
             <a:avLst/>
@@ -413,7 +413,7 @@
         <p:spPr>
           <a:xfrm>
             <a:off x="3884760" y="8685360"/>
-            <a:ext cx="2971080" cy="457920"/>
+            <a:ext cx="2970720" cy="457560"/>
           </a:xfrm>
           <a:prstGeom prst="rect">
             <a:avLst/>
@@ -445,7 +445,7 @@
               </a:lnSpc>
               <a:buNone/>
             </a:pPr>
-            <a:fld id="{79DC31C1-7596-4B23-81C0-E4017F0D7E73}" type="slidenum">
+            <a:fld id="{B32A9CE2-732E-4119-917D-D142F2856DBA}" type="slidenum">
               <a:rPr b="0" lang="en-US" sz="1200" spc="-1" strike="noStrike">
                 <a:latin typeface="Times New Roman"/>
               </a:rPr>
@@ -492,7 +492,7 @@
         <p:spPr>
           <a:xfrm>
             <a:off x="685800" y="1143000"/>
-            <a:ext cx="5485680" cy="3085560"/>
+            <a:ext cx="5485320" cy="3085200"/>
           </a:xfrm>
           <a:prstGeom prst="rect">
             <a:avLst/>
@@ -515,7 +515,7 @@
         <p:spPr>
           <a:xfrm>
             <a:off x="685800" y="4400640"/>
-            <a:ext cx="5485680" cy="3599640"/>
+            <a:ext cx="5485320" cy="3599280"/>
           </a:xfrm>
           <a:prstGeom prst="rect">
             <a:avLst/>
@@ -549,7 +549,7 @@
         <p:spPr>
           <a:xfrm>
             <a:off x="3884760" y="8685360"/>
-            <a:ext cx="2971080" cy="457920"/>
+            <a:ext cx="2970720" cy="457560"/>
           </a:xfrm>
           <a:prstGeom prst="rect">
             <a:avLst/>
@@ -581,7 +581,7 @@
               </a:lnSpc>
               <a:buNone/>
             </a:pPr>
-            <a:fld id="{FA5B3949-4777-4F82-92E3-D3A51E76E5D7}" type="slidenum">
+            <a:fld id="{B7366A71-064F-4D81-8C73-2213E8679677}" type="slidenum">
               <a:rPr b="0" lang="en-US" sz="1200" spc="-1" strike="noStrike">
                 <a:latin typeface="Times New Roman"/>
               </a:rPr>
@@ -628,7 +628,7 @@
         <p:spPr>
           <a:xfrm>
             <a:off x="685800" y="1143000"/>
-            <a:ext cx="5485680" cy="3085560"/>
+            <a:ext cx="5485320" cy="3085200"/>
           </a:xfrm>
           <a:prstGeom prst="rect">
             <a:avLst/>
@@ -651,7 +651,7 @@
         <p:spPr>
           <a:xfrm>
             <a:off x="685800" y="4400640"/>
-            <a:ext cx="5485680" cy="3599640"/>
+            <a:ext cx="5485320" cy="3599280"/>
           </a:xfrm>
           <a:prstGeom prst="rect">
             <a:avLst/>
@@ -685,7 +685,7 @@
         <p:spPr>
           <a:xfrm>
             <a:off x="3884760" y="8685360"/>
-            <a:ext cx="2971080" cy="457920"/>
+            <a:ext cx="2970720" cy="457560"/>
           </a:xfrm>
           <a:prstGeom prst="rect">
             <a:avLst/>
@@ -717,7 +717,7 @@
               </a:lnSpc>
               <a:buNone/>
             </a:pPr>
-            <a:fld id="{7A50F49F-0009-4F55-AFED-10FF788551D9}" type="slidenum">
+            <a:fld id="{97C62A8E-85A1-4E91-9F1D-15F820BD3A6E}" type="slidenum">
               <a:rPr b="0" lang="en-US" sz="1200" spc="-1" strike="noStrike">
                 <a:latin typeface="Times New Roman"/>
               </a:rPr>
@@ -764,7 +764,7 @@
         <p:spPr>
           <a:xfrm>
             <a:off x="685800" y="1143000"/>
-            <a:ext cx="5485680" cy="3085560"/>
+            <a:ext cx="5485320" cy="3085200"/>
           </a:xfrm>
           <a:prstGeom prst="rect">
             <a:avLst/>
@@ -787,7 +787,7 @@
         <p:spPr>
           <a:xfrm>
             <a:off x="685800" y="4400640"/>
-            <a:ext cx="5485680" cy="3599640"/>
+            <a:ext cx="5485320" cy="3599280"/>
           </a:xfrm>
           <a:prstGeom prst="rect">
             <a:avLst/>
@@ -821,7 +821,7 @@
         <p:spPr>
           <a:xfrm>
             <a:off x="3884760" y="8685360"/>
-            <a:ext cx="2971080" cy="457920"/>
+            <a:ext cx="2970720" cy="457560"/>
           </a:xfrm>
           <a:prstGeom prst="rect">
             <a:avLst/>
@@ -853,7 +853,7 @@
               </a:lnSpc>
               <a:buNone/>
             </a:pPr>
-            <a:fld id="{FC20E250-240A-48A7-B4E3-EDC986AE221E}" type="slidenum">
+            <a:fld id="{BE4CF449-7C23-4390-BED1-188CE106F136}" type="slidenum">
               <a:rPr b="0" lang="en-US" sz="1200" spc="-1" strike="noStrike">
                 <a:latin typeface="Times New Roman"/>
               </a:rPr>
@@ -900,7 +900,7 @@
         <p:spPr>
           <a:xfrm>
             <a:off x="685800" y="1143000"/>
-            <a:ext cx="5485680" cy="3085560"/>
+            <a:ext cx="5485320" cy="3085200"/>
           </a:xfrm>
           <a:prstGeom prst="rect">
             <a:avLst/>
@@ -923,7 +923,7 @@
         <p:spPr>
           <a:xfrm>
             <a:off x="685800" y="4400640"/>
-            <a:ext cx="5485680" cy="3599640"/>
+            <a:ext cx="5485320" cy="3599280"/>
           </a:xfrm>
           <a:prstGeom prst="rect">
             <a:avLst/>
@@ -957,7 +957,7 @@
         <p:spPr>
           <a:xfrm>
             <a:off x="3884760" y="8685360"/>
-            <a:ext cx="2971080" cy="457920"/>
+            <a:ext cx="2970720" cy="457560"/>
           </a:xfrm>
           <a:prstGeom prst="rect">
             <a:avLst/>
@@ -989,7 +989,7 @@
               </a:lnSpc>
               <a:buNone/>
             </a:pPr>
-            <a:fld id="{89F54D69-73FC-46E7-A304-E7691373A229}" type="slidenum">
+            <a:fld id="{DF8B20E1-965F-4F66-86A1-BA551FB04B85}" type="slidenum">
               <a:rPr b="0" lang="en-US" sz="1200" spc="-1" strike="noStrike">
                 <a:latin typeface="Times New Roman"/>
               </a:rPr>
@@ -1036,7 +1036,7 @@
         <p:spPr>
           <a:xfrm>
             <a:off x="685800" y="1143000"/>
-            <a:ext cx="5485680" cy="3085560"/>
+            <a:ext cx="5485320" cy="3085200"/>
           </a:xfrm>
           <a:prstGeom prst="rect">
             <a:avLst/>
@@ -1059,7 +1059,7 @@
         <p:spPr>
           <a:xfrm>
             <a:off x="685800" y="4400640"/>
-            <a:ext cx="5485680" cy="3599640"/>
+            <a:ext cx="5485320" cy="3599280"/>
           </a:xfrm>
           <a:prstGeom prst="rect">
             <a:avLst/>
@@ -1093,7 +1093,7 @@
         <p:spPr>
           <a:xfrm>
             <a:off x="3884760" y="8685360"/>
-            <a:ext cx="2971080" cy="457920"/>
+            <a:ext cx="2970720" cy="457560"/>
           </a:xfrm>
           <a:prstGeom prst="rect">
             <a:avLst/>
@@ -1125,7 +1125,7 @@
               </a:lnSpc>
               <a:buNone/>
             </a:pPr>
-            <a:fld id="{C3B33954-51E3-46AF-BE52-24C0FC35C159}" type="slidenum">
+            <a:fld id="{719AD802-BF4C-4013-A1A2-DC7C56EB81B6}" type="slidenum">
               <a:rPr b="0" lang="en-US" sz="1200" spc="-1" strike="noStrike">
                 <a:latin typeface="Times New Roman"/>
               </a:rPr>
@@ -1172,7 +1172,7 @@
         <p:spPr>
           <a:xfrm>
             <a:off x="685800" y="1143000"/>
-            <a:ext cx="5485680" cy="3085560"/>
+            <a:ext cx="5485320" cy="3085200"/>
           </a:xfrm>
           <a:prstGeom prst="rect">
             <a:avLst/>
@@ -1195,7 +1195,7 @@
         <p:spPr>
           <a:xfrm>
             <a:off x="685800" y="4400640"/>
-            <a:ext cx="5485680" cy="3599640"/>
+            <a:ext cx="5485320" cy="3599280"/>
           </a:xfrm>
           <a:prstGeom prst="rect">
             <a:avLst/>
@@ -1229,7 +1229,7 @@
         <p:spPr>
           <a:xfrm>
             <a:off x="3884760" y="8685360"/>
-            <a:ext cx="2971080" cy="457920"/>
+            <a:ext cx="2970720" cy="457560"/>
           </a:xfrm>
           <a:prstGeom prst="rect">
             <a:avLst/>
@@ -1261,7 +1261,7 @@
               </a:lnSpc>
               <a:buNone/>
             </a:pPr>
-            <a:fld id="{6FF6769E-4FC6-4734-8DE8-E5D9A1F63AB2}" type="slidenum">
+            <a:fld id="{AE202DF4-DDA1-458B-8069-4A0EB192F3B3}" type="slidenum">
               <a:rPr b="0" lang="en-US" sz="1200" spc="-1" strike="noStrike">
                 <a:latin typeface="Times New Roman"/>
               </a:rPr>
@@ -1308,7 +1308,7 @@
         <p:spPr>
           <a:xfrm>
             <a:off x="685800" y="1143000"/>
-            <a:ext cx="5485680" cy="3085560"/>
+            <a:ext cx="5485320" cy="3085200"/>
           </a:xfrm>
           <a:prstGeom prst="rect">
             <a:avLst/>
@@ -1331,7 +1331,7 @@
         <p:spPr>
           <a:xfrm>
             <a:off x="685800" y="4400640"/>
-            <a:ext cx="5485680" cy="3599640"/>
+            <a:ext cx="5485320" cy="3599280"/>
           </a:xfrm>
           <a:prstGeom prst="rect">
             <a:avLst/>
@@ -1365,7 +1365,7 @@
         <p:spPr>
           <a:xfrm>
             <a:off x="3884760" y="8685360"/>
-            <a:ext cx="2971080" cy="457920"/>
+            <a:ext cx="2970720" cy="457560"/>
           </a:xfrm>
           <a:prstGeom prst="rect">
             <a:avLst/>
@@ -1397,7 +1397,7 @@
               </a:lnSpc>
               <a:buNone/>
             </a:pPr>
-            <a:fld id="{080EC286-B868-41B7-AA27-69804BA10257}" type="slidenum">
+            <a:fld id="{58381E91-4E86-4064-8790-89FDB7159FB0}" type="slidenum">
               <a:rPr b="0" lang="en-US" sz="1200" spc="-1" strike="noStrike">
                 <a:latin typeface="Times New Roman"/>
               </a:rPr>
@@ -1444,7 +1444,7 @@
         <p:spPr>
           <a:xfrm>
             <a:off x="685800" y="1143000"/>
-            <a:ext cx="5485680" cy="3085560"/>
+            <a:ext cx="5485320" cy="3085200"/>
           </a:xfrm>
           <a:prstGeom prst="rect">
             <a:avLst/>
@@ -1467,7 +1467,7 @@
         <p:spPr>
           <a:xfrm>
             <a:off x="685800" y="4400640"/>
-            <a:ext cx="5485680" cy="3599640"/>
+            <a:ext cx="5485320" cy="3599280"/>
           </a:xfrm>
           <a:prstGeom prst="rect">
             <a:avLst/>
@@ -1501,7 +1501,7 @@
         <p:spPr>
           <a:xfrm>
             <a:off x="3884760" y="8685360"/>
-            <a:ext cx="2971080" cy="457920"/>
+            <a:ext cx="2970720" cy="457560"/>
           </a:xfrm>
           <a:prstGeom prst="rect">
             <a:avLst/>
@@ -1533,7 +1533,7 @@
               </a:lnSpc>
               <a:buNone/>
             </a:pPr>
-            <a:fld id="{0673B64B-BF96-4676-B4AB-D3E3BF58CED0}" type="slidenum">
+            <a:fld id="{B2CB0070-2261-446B-993D-F5A726F642A5}" type="slidenum">
               <a:rPr b="0" lang="en-US" sz="1200" spc="-1" strike="noStrike">
                 <a:latin typeface="Times New Roman"/>
               </a:rPr>
@@ -1580,7 +1580,7 @@
         <p:spPr>
           <a:xfrm>
             <a:off x="685800" y="1143000"/>
-            <a:ext cx="5485680" cy="3085560"/>
+            <a:ext cx="5485320" cy="3085200"/>
           </a:xfrm>
           <a:prstGeom prst="rect">
             <a:avLst/>
@@ -1603,7 +1603,7 @@
         <p:spPr>
           <a:xfrm>
             <a:off x="685800" y="4400640"/>
-            <a:ext cx="5485680" cy="3599640"/>
+            <a:ext cx="5485320" cy="3599280"/>
           </a:xfrm>
           <a:prstGeom prst="rect">
             <a:avLst/>
@@ -1637,7 +1637,7 @@
         <p:spPr>
           <a:xfrm>
             <a:off x="3884760" y="8685360"/>
-            <a:ext cx="2971080" cy="457920"/>
+            <a:ext cx="2970720" cy="457560"/>
           </a:xfrm>
           <a:prstGeom prst="rect">
             <a:avLst/>
@@ -1669,7 +1669,7 @@
               </a:lnSpc>
               <a:buNone/>
             </a:pPr>
-            <a:fld id="{42AB0D73-B3D7-4870-8191-F480F356F2BD}" type="slidenum">
+            <a:fld id="{0F2D5B57-91EC-4C6C-9DBB-56059C4EE70A}" type="slidenum">
               <a:rPr b="0" lang="en-US" sz="1200" spc="-1" strike="noStrike">
                 <a:latin typeface="Times New Roman"/>
               </a:rPr>
@@ -1716,7 +1716,7 @@
         <p:spPr>
           <a:xfrm>
             <a:off x="685800" y="1143000"/>
-            <a:ext cx="5485680" cy="3085560"/>
+            <a:ext cx="5485320" cy="3085200"/>
           </a:xfrm>
           <a:prstGeom prst="rect">
             <a:avLst/>
@@ -1739,7 +1739,7 @@
         <p:spPr>
           <a:xfrm>
             <a:off x="685800" y="4400640"/>
-            <a:ext cx="5485680" cy="3599640"/>
+            <a:ext cx="5485320" cy="3599280"/>
           </a:xfrm>
           <a:prstGeom prst="rect">
             <a:avLst/>
@@ -1773,7 +1773,7 @@
         <p:spPr>
           <a:xfrm>
             <a:off x="3884760" y="8685360"/>
-            <a:ext cx="2971080" cy="457920"/>
+            <a:ext cx="2970720" cy="457560"/>
           </a:xfrm>
           <a:prstGeom prst="rect">
             <a:avLst/>
@@ -1805,7 +1805,7 @@
               </a:lnSpc>
               <a:buNone/>
             </a:pPr>
-            <a:fld id="{F5171460-D14B-4A4B-9A09-768D856783D3}" type="slidenum">
+            <a:fld id="{FF2A8E43-C0D9-468E-866E-2DE0ECECF529}" type="slidenum">
               <a:rPr b="0" lang="en-US" sz="1200" spc="-1" strike="noStrike">
                 <a:latin typeface="Times New Roman"/>
               </a:rPr>
@@ -1852,7 +1852,7 @@
         <p:spPr>
           <a:xfrm>
             <a:off x="685800" y="1143000"/>
-            <a:ext cx="5485680" cy="3085560"/>
+            <a:ext cx="5485320" cy="3085200"/>
           </a:xfrm>
           <a:prstGeom prst="rect">
             <a:avLst/>
@@ -1875,7 +1875,7 @@
         <p:spPr>
           <a:xfrm>
             <a:off x="685800" y="4400640"/>
-            <a:ext cx="5485680" cy="3599640"/>
+            <a:ext cx="5485320" cy="3599280"/>
           </a:xfrm>
           <a:prstGeom prst="rect">
             <a:avLst/>
@@ -1909,7 +1909,7 @@
         <p:spPr>
           <a:xfrm>
             <a:off x="3884760" y="8685360"/>
-            <a:ext cx="2971080" cy="457920"/>
+            <a:ext cx="2970720" cy="457560"/>
           </a:xfrm>
           <a:prstGeom prst="rect">
             <a:avLst/>
@@ -1941,7 +1941,7 @@
               </a:lnSpc>
               <a:buNone/>
             </a:pPr>
-            <a:fld id="{DF368674-BF42-4B6D-8C70-C5D558026E1E}" type="slidenum">
+            <a:fld id="{C640F1B0-508C-40AD-A894-EBE79F361C1A}" type="slidenum">
               <a:rPr b="0" lang="en-US" sz="1200" spc="-1" strike="noStrike">
                 <a:latin typeface="Times New Roman"/>
               </a:rPr>
@@ -1988,7 +1988,7 @@
         <p:spPr>
           <a:xfrm>
             <a:off x="685800" y="1143000"/>
-            <a:ext cx="5485680" cy="3085560"/>
+            <a:ext cx="5485320" cy="3085200"/>
           </a:xfrm>
           <a:prstGeom prst="rect">
             <a:avLst/>
@@ -2011,7 +2011,7 @@
         <p:spPr>
           <a:xfrm>
             <a:off x="685800" y="4400640"/>
-            <a:ext cx="5485680" cy="3599640"/>
+            <a:ext cx="5485320" cy="3599280"/>
           </a:xfrm>
           <a:prstGeom prst="rect">
             <a:avLst/>
@@ -2045,7 +2045,7 @@
         <p:spPr>
           <a:xfrm>
             <a:off x="3884760" y="8685360"/>
-            <a:ext cx="2971080" cy="457920"/>
+            <a:ext cx="2970720" cy="457560"/>
           </a:xfrm>
           <a:prstGeom prst="rect">
             <a:avLst/>
@@ -2077,7 +2077,7 @@
               </a:lnSpc>
               <a:buNone/>
             </a:pPr>
-            <a:fld id="{7F28A7EF-EA1E-4D0D-A63D-95A7D2827723}" type="slidenum">
+            <a:fld id="{F602E20A-BC7B-4986-B3BB-7EE40AC02F05}" type="slidenum">
               <a:rPr b="0" lang="en-US" sz="1200" spc="-1" strike="noStrike">
                 <a:latin typeface="Times New Roman"/>
               </a:rPr>
@@ -2124,7 +2124,7 @@
         <p:spPr>
           <a:xfrm>
             <a:off x="685800" y="1143000"/>
-            <a:ext cx="5485680" cy="3085560"/>
+            <a:ext cx="5485320" cy="3085200"/>
           </a:xfrm>
           <a:prstGeom prst="rect">
             <a:avLst/>
@@ -2147,7 +2147,7 @@
         <p:spPr>
           <a:xfrm>
             <a:off x="685800" y="4400640"/>
-            <a:ext cx="5485680" cy="3599640"/>
+            <a:ext cx="5485320" cy="3599280"/>
           </a:xfrm>
           <a:prstGeom prst="rect">
             <a:avLst/>
@@ -2181,7 +2181,7 @@
         <p:spPr>
           <a:xfrm>
             <a:off x="3884760" y="8685360"/>
-            <a:ext cx="2971080" cy="457920"/>
+            <a:ext cx="2970720" cy="457560"/>
           </a:xfrm>
           <a:prstGeom prst="rect">
             <a:avLst/>
@@ -2213,7 +2213,7 @@
               </a:lnSpc>
               <a:buNone/>
             </a:pPr>
-            <a:fld id="{58861274-A5BB-4489-855E-AF457C134C56}" type="slidenum">
+            <a:fld id="{2E5F0C3E-7776-4D58-AAA7-A3AE1507B992}" type="slidenum">
               <a:rPr b="0" lang="en-US" sz="1200" spc="-1" strike="noStrike">
                 <a:latin typeface="Times New Roman"/>
               </a:rPr>
@@ -2260,7 +2260,7 @@
         <p:spPr>
           <a:xfrm>
             <a:off x="685800" y="1143000"/>
-            <a:ext cx="5485680" cy="3085560"/>
+            <a:ext cx="5485320" cy="3085200"/>
           </a:xfrm>
           <a:prstGeom prst="rect">
             <a:avLst/>
@@ -2283,7 +2283,7 @@
         <p:spPr>
           <a:xfrm>
             <a:off x="685800" y="4400640"/>
-            <a:ext cx="5485680" cy="3599640"/>
+            <a:ext cx="5485320" cy="3599280"/>
           </a:xfrm>
           <a:prstGeom prst="rect">
             <a:avLst/>
@@ -2317,7 +2317,7 @@
         <p:spPr>
           <a:xfrm>
             <a:off x="3884760" y="8685360"/>
-            <a:ext cx="2971080" cy="457920"/>
+            <a:ext cx="2970720" cy="457560"/>
           </a:xfrm>
           <a:prstGeom prst="rect">
             <a:avLst/>
@@ -2349,7 +2349,7 @@
               </a:lnSpc>
               <a:buNone/>
             </a:pPr>
-            <a:fld id="{F6476D48-2DD9-4A61-88AE-C999F57B4AC2}" type="slidenum">
+            <a:fld id="{B5950926-3B44-4016-BB6B-3604D22AEAE6}" type="slidenum">
               <a:rPr b="0" lang="en-US" sz="1200" spc="-1" strike="noStrike">
                 <a:latin typeface="Times New Roman"/>
               </a:rPr>
@@ -2396,7 +2396,7 @@
         <p:spPr>
           <a:xfrm>
             <a:off x="685800" y="1143000"/>
-            <a:ext cx="5485680" cy="3085560"/>
+            <a:ext cx="5485320" cy="3085200"/>
           </a:xfrm>
           <a:prstGeom prst="rect">
             <a:avLst/>
@@ -2419,7 +2419,7 @@
         <p:spPr>
           <a:xfrm>
             <a:off x="685800" y="4400640"/>
-            <a:ext cx="5485680" cy="3599640"/>
+            <a:ext cx="5485320" cy="3599280"/>
           </a:xfrm>
           <a:prstGeom prst="rect">
             <a:avLst/>
@@ -2453,7 +2453,7 @@
         <p:spPr>
           <a:xfrm>
             <a:off x="3884760" y="8685360"/>
-            <a:ext cx="2971080" cy="457920"/>
+            <a:ext cx="2970720" cy="457560"/>
           </a:xfrm>
           <a:prstGeom prst="rect">
             <a:avLst/>
@@ -2485,7 +2485,7 @@
               </a:lnSpc>
               <a:buNone/>
             </a:pPr>
-            <a:fld id="{79CF0E3E-4B00-44B0-92FD-A98A81EDC898}" type="slidenum">
+            <a:fld id="{C5903CB3-57E0-44DF-928C-3A5B9B2C5495}" type="slidenum">
               <a:rPr b="0" lang="en-US" sz="1200" spc="-1" strike="noStrike">
                 <a:latin typeface="Times New Roman"/>
               </a:rPr>
@@ -2532,7 +2532,7 @@
         <p:spPr>
           <a:xfrm>
             <a:off x="685800" y="1143000"/>
-            <a:ext cx="5485680" cy="3085560"/>
+            <a:ext cx="5485320" cy="3085200"/>
           </a:xfrm>
           <a:prstGeom prst="rect">
             <a:avLst/>
@@ -2555,7 +2555,7 @@
         <p:spPr>
           <a:xfrm>
             <a:off x="685800" y="4400640"/>
-            <a:ext cx="5485680" cy="3599640"/>
+            <a:ext cx="5485320" cy="3599280"/>
           </a:xfrm>
           <a:prstGeom prst="rect">
             <a:avLst/>
@@ -2589,7 +2589,7 @@
         <p:spPr>
           <a:xfrm>
             <a:off x="3884760" y="8685360"/>
-            <a:ext cx="2971080" cy="457920"/>
+            <a:ext cx="2970720" cy="457560"/>
           </a:xfrm>
           <a:prstGeom prst="rect">
             <a:avLst/>
@@ -2621,7 +2621,7 @@
               </a:lnSpc>
               <a:buNone/>
             </a:pPr>
-            <a:fld id="{A17DD273-4E8E-4729-BEEB-FB33FE72F314}" type="slidenum">
+            <a:fld id="{735717EC-4B92-4745-8755-76E6EFFE9E39}" type="slidenum">
               <a:rPr b="0" lang="en-US" sz="1200" spc="-1" strike="noStrike">
                 <a:latin typeface="Times New Roman"/>
               </a:rPr>
@@ -4465,7 +4465,7 @@
         <p:spPr>
           <a:xfrm>
             <a:off x="380880" y="1415520"/>
-            <a:ext cx="608760" cy="18360"/>
+            <a:ext cx="608400" cy="18000"/>
           </a:xfrm>
           <a:custGeom>
             <a:avLst/>
@@ -4516,7 +4516,7 @@
         <p:spPr>
           <a:xfrm>
             <a:off x="380880" y="1663200"/>
-            <a:ext cx="2152080" cy="189720"/>
+            <a:ext cx="2151720" cy="189360"/>
           </a:xfrm>
           <a:prstGeom prst="rect">
             <a:avLst/>
@@ -4544,17 +4544,17 @@
               <a:buNone/>
             </a:pPr>
             <a:r>
-              <a:rPr b="0" lang="en-US" sz="1050" spc="310" strike="noStrike">
+              <a:rPr b="0" i="1" lang="en-US" sz="1050" spc="307" strike="noStrike">
                 <a:solidFill>
                   <a:srgbClr val="86868b"/>
                 </a:solidFill>
-                <a:latin typeface="Liter"/>
+                <a:latin typeface="Times New Roman"/>
                 <a:ea typeface="Liter"/>
               </a:rPr>
               <a:t>Probability Theory</a:t>
             </a:r>
-            <a:endParaRPr b="0" lang="en-HK" sz="1050" spc="-1" strike="noStrike">
-              <a:latin typeface="Arial"/>
+            <a:endParaRPr b="0" i="1" lang="en-HK" sz="1050" spc="-1" strike="noStrike">
+              <a:latin typeface="Times New Roman"/>
             </a:endParaRPr>
           </a:p>
         </p:txBody>
@@ -4568,7 +4568,7 @@
         <p:spPr>
           <a:xfrm>
             <a:off x="380880" y="2310840"/>
-            <a:ext cx="6609600" cy="2171160"/>
+            <a:ext cx="6609240" cy="2170800"/>
           </a:xfrm>
           <a:prstGeom prst="rect">
             <a:avLst/>
@@ -4606,17 +4606,17 @@
               <a:t>The</a:t>
             </a:r>
             <a:r>
-              <a:rPr b="0" lang="en-US" sz="9000" spc="-225" strike="noStrike">
+              <a:rPr b="0" i="1" lang="en-US" sz="9000" spc="-225" strike="noStrike">
                 <a:solidFill>
                   <a:srgbClr val="1d1d1d"/>
                 </a:solidFill>
-                <a:latin typeface="Liter"/>
+                <a:latin typeface="Times New Roman"/>
                 <a:ea typeface="Liter"/>
               </a:rPr>
               <a:t> Birthday</a:t>
             </a:r>
-            <a:endParaRPr b="0" lang="en-HK" sz="9000" spc="-1" strike="noStrike">
-              <a:latin typeface="Arial"/>
+            <a:endParaRPr b="0" i="1" lang="en-HK" sz="9000" spc="-1" strike="noStrike">
+              <a:latin typeface="Times New Roman"/>
             </a:endParaRPr>
           </a:p>
           <a:p>
@@ -4627,17 +4627,17 @@
               <a:buNone/>
             </a:pPr>
             <a:r>
-              <a:rPr b="0" lang="en-US" sz="9000" spc="-225" strike="noStrike">
+              <a:rPr b="0" i="1" lang="en-US" sz="9000" spc="-225" strike="noStrike">
                 <a:solidFill>
                   <a:srgbClr val="1d1d1d"/>
                 </a:solidFill>
-                <a:latin typeface="Liter"/>
+                <a:latin typeface="Times New Roman"/>
                 <a:ea typeface="Liter"/>
               </a:rPr>
               <a:t>Paradox</a:t>
             </a:r>
-            <a:endParaRPr b="0" lang="en-HK" sz="9000" spc="-1" strike="noStrike">
-              <a:latin typeface="Arial"/>
+            <a:endParaRPr b="0" i="1" lang="en-HK" sz="9000" spc="-1" strike="noStrike">
+              <a:latin typeface="Times New Roman"/>
             </a:endParaRPr>
           </a:p>
         </p:txBody>
@@ -4651,7 +4651,7 @@
         <p:spPr>
           <a:xfrm>
             <a:off x="380880" y="4787640"/>
-            <a:ext cx="4266360" cy="465840"/>
+            <a:ext cx="4266000" cy="465480"/>
           </a:xfrm>
           <a:prstGeom prst="rect">
             <a:avLst/>
@@ -4683,33 +4683,13 @@
                 <a:solidFill>
                   <a:srgbClr val="86868b"/>
                 </a:solidFill>
-                <a:latin typeface="Liter"/>
-                <a:ea typeface="Liter"/>
-              </a:rPr>
-              <a:t>When </a:t>
-            </a:r>
-            <a:r>
-              <a:rPr b="0" i="1" lang="en-US" sz="2250" spc="-1" strike="noStrike">
-                <a:solidFill>
-                  <a:srgbClr val="86868b"/>
-                </a:solidFill>
                 <a:latin typeface="Times New Roman"/>
                 <a:ea typeface="Liter"/>
               </a:rPr>
-              <a:t>Probability</a:t>
-            </a:r>
-            <a:r>
-              <a:rPr b="0" i="1" lang="en-US" sz="2250" spc="-1" strike="noStrike">
-                <a:solidFill>
-                  <a:srgbClr val="86868b"/>
-                </a:solidFill>
-                <a:latin typeface="Liter"/>
-                <a:ea typeface="Liter"/>
-              </a:rPr>
-              <a:t> Defies Intuition</a:t>
+              <a:t>When Probability Defies Intuition</a:t>
             </a:r>
             <a:endParaRPr b="0" i="1" lang="en-HK" sz="2250" spc="-1" strike="noStrike">
-              <a:latin typeface="Arial"/>
+              <a:latin typeface="Times New Roman"/>
             </a:endParaRPr>
           </a:p>
         </p:txBody>
@@ -4723,7 +4703,7 @@
         <p:spPr>
           <a:xfrm>
             <a:off x="426240" y="6296040"/>
-            <a:ext cx="127800" cy="170640"/>
+            <a:ext cx="127440" cy="170280"/>
           </a:xfrm>
           <a:custGeom>
             <a:avLst/>
@@ -5028,7 +5008,7 @@
         <p:spPr>
           <a:xfrm>
             <a:off x="709560" y="6286680"/>
-            <a:ext cx="1561320" cy="189720"/>
+            <a:ext cx="1560960" cy="189360"/>
           </a:xfrm>
           <a:prstGeom prst="rect">
             <a:avLst/>
@@ -5056,17 +5036,17 @@
               <a:buNone/>
             </a:pPr>
             <a:r>
-              <a:rPr b="0" lang="en-US" sz="1050" spc="-1" strike="noStrike">
+              <a:rPr b="0" i="1" lang="en-US" sz="1050" spc="-1" strike="noStrike">
                 <a:solidFill>
                   <a:srgbClr val="86868b"/>
                 </a:solidFill>
-                <a:latin typeface="Liter"/>
+                <a:latin typeface="Times New Roman"/>
                 <a:ea typeface="Liter"/>
               </a:rPr>
               <a:t>Mathematical Exploration</a:t>
             </a:r>
-            <a:endParaRPr b="0" lang="en-HK" sz="1050" spc="-1" strike="noStrike">
-              <a:latin typeface="Arial"/>
+            <a:endParaRPr b="0" i="1" lang="en-HK" sz="1050" spc="-1" strike="noStrike">
+              <a:latin typeface="Times New Roman"/>
             </a:endParaRPr>
           </a:p>
         </p:txBody>
@@ -5080,7 +5060,7 @@
         <p:spPr>
           <a:xfrm>
             <a:off x="2689200" y="6296040"/>
-            <a:ext cx="170640" cy="170640"/>
+            <a:ext cx="170280" cy="170280"/>
           </a:xfrm>
           <a:custGeom>
             <a:avLst/>
@@ -5213,7 +5193,7 @@
         <p:spPr>
           <a:xfrm>
             <a:off x="2994120" y="6286680"/>
-            <a:ext cx="1399320" cy="189720"/>
+            <a:ext cx="1398960" cy="189360"/>
           </a:xfrm>
           <a:prstGeom prst="rect">
             <a:avLst/>
@@ -5241,17 +5221,17 @@
               <a:buNone/>
             </a:pPr>
             <a:r>
-              <a:rPr b="0" lang="en-US" sz="1050" spc="-1" strike="noStrike">
+              <a:rPr b="0" i="1" lang="en-US" sz="1050" spc="-1" strike="noStrike">
                 <a:solidFill>
                   <a:srgbClr val="86868b"/>
                 </a:solidFill>
-                <a:latin typeface="Liter"/>
+                <a:latin typeface="Times New Roman"/>
                 <a:ea typeface="Liter"/>
               </a:rPr>
               <a:t>Probability &amp; Statistics</a:t>
             </a:r>
-            <a:endParaRPr b="0" lang="en-HK" sz="1050" spc="-1" strike="noStrike">
-              <a:latin typeface="Arial"/>
+            <a:endParaRPr b="0" i="1" lang="en-HK" sz="1050" spc="-1" strike="noStrike">
+              <a:latin typeface="Times New Roman"/>
             </a:endParaRPr>
           </a:p>
         </p:txBody>
@@ -5302,7 +5282,7 @@
         <p:spPr>
           <a:xfrm>
             <a:off x="380880" y="380880"/>
-            <a:ext cx="11486520" cy="151560"/>
+            <a:ext cx="11486160" cy="151200"/>
           </a:xfrm>
           <a:prstGeom prst="rect">
             <a:avLst/>
@@ -5330,7 +5310,7 @@
               <a:buNone/>
             </a:pPr>
             <a:r>
-              <a:rPr b="0" lang="en-US" sz="900" spc="265" strike="noStrike">
+              <a:rPr b="0" lang="en-US" sz="900" spc="262" strike="noStrike">
                 <a:solidFill>
                   <a:srgbClr val="86868b"/>
                 </a:solidFill>
@@ -5354,7 +5334,7 @@
         <p:spPr>
           <a:xfrm>
             <a:off x="380880" y="609480"/>
-            <a:ext cx="11600640" cy="380160"/>
+            <a:ext cx="11600280" cy="379800"/>
           </a:xfrm>
           <a:prstGeom prst="rect">
             <a:avLst/>
@@ -5406,7 +5386,7 @@
         <p:spPr>
           <a:xfrm>
             <a:off x="380880" y="1995480"/>
-            <a:ext cx="5609520" cy="561240"/>
+            <a:ext cx="5609160" cy="560880"/>
           </a:xfrm>
           <a:prstGeom prst="rect">
             <a:avLst/>
@@ -5478,7 +5458,7 @@
         <p:spPr>
           <a:xfrm>
             <a:off x="385920" y="2786040"/>
-            <a:ext cx="5514120" cy="1418400"/>
+            <a:ext cx="5513760" cy="1418040"/>
           </a:xfrm>
           <a:custGeom>
             <a:avLst/>
@@ -5530,7 +5510,7 @@
         <p:spPr>
           <a:xfrm>
             <a:off x="619200" y="3019320"/>
-            <a:ext cx="5114160" cy="189720"/>
+            <a:ext cx="5113800" cy="189360"/>
           </a:xfrm>
           <a:prstGeom prst="rect">
             <a:avLst/>
@@ -5558,7 +5538,7 @@
               <a:buNone/>
             </a:pPr>
             <a:r>
-              <a:rPr b="0" lang="en-US" sz="1050" spc="205" strike="noStrike">
+              <a:rPr b="0" lang="en-US" sz="1050" spc="202" strike="noStrike">
                 <a:solidFill>
                   <a:srgbClr val="86868b"/>
                 </a:solidFill>
@@ -5582,7 +5562,7 @@
         <p:spPr>
           <a:xfrm>
             <a:off x="619200" y="3324240"/>
-            <a:ext cx="5190480" cy="342360"/>
+            <a:ext cx="5190120" cy="342000"/>
           </a:xfrm>
           <a:prstGeom prst="rect">
             <a:avLst/>
@@ -5634,7 +5614,7 @@
         <p:spPr>
           <a:xfrm>
             <a:off x="619200" y="3743280"/>
-            <a:ext cx="5123880" cy="227880"/>
+            <a:ext cx="5123520" cy="227520"/>
           </a:xfrm>
           <a:prstGeom prst="rect">
             <a:avLst/>
@@ -5686,7 +5666,7 @@
         <p:spPr>
           <a:xfrm>
             <a:off x="6296040" y="1995480"/>
-            <a:ext cx="18360" cy="685080"/>
+            <a:ext cx="18000" cy="684720"/>
           </a:xfrm>
           <a:custGeom>
             <a:avLst/>
@@ -5737,7 +5717,7 @@
         <p:spPr>
           <a:xfrm>
             <a:off x="6496200" y="1995480"/>
-            <a:ext cx="437400" cy="342360"/>
+            <a:ext cx="437040" cy="342000"/>
           </a:xfrm>
           <a:prstGeom prst="rect">
             <a:avLst/>
@@ -5789,7 +5769,7 @@
         <p:spPr>
           <a:xfrm>
             <a:off x="6906960" y="2095560"/>
-            <a:ext cx="532800" cy="227880"/>
+            <a:ext cx="532440" cy="227520"/>
           </a:xfrm>
           <a:prstGeom prst="rect">
             <a:avLst/>
@@ -5841,7 +5821,7 @@
         <p:spPr>
           <a:xfrm>
             <a:off x="6496200" y="2376360"/>
-            <a:ext cx="5428440" cy="304200"/>
+            <a:ext cx="5428080" cy="303840"/>
           </a:xfrm>
           <a:prstGeom prst="rect">
             <a:avLst/>
@@ -5893,7 +5873,7 @@
         <p:spPr>
           <a:xfrm>
             <a:off x="6296040" y="2833560"/>
-            <a:ext cx="18360" cy="990000"/>
+            <a:ext cx="18000" cy="989640"/>
           </a:xfrm>
           <a:custGeom>
             <a:avLst/>
@@ -5944,7 +5924,7 @@
         <p:spPr>
           <a:xfrm>
             <a:off x="6496200" y="2833560"/>
-            <a:ext cx="570960" cy="380160"/>
+            <a:ext cx="570600" cy="379800"/>
           </a:xfrm>
           <a:prstGeom prst="rect">
             <a:avLst/>
@@ -5996,7 +5976,7 @@
         <p:spPr>
           <a:xfrm>
             <a:off x="7011720" y="2943360"/>
-            <a:ext cx="599400" cy="266040"/>
+            <a:ext cx="599040" cy="265680"/>
           </a:xfrm>
           <a:prstGeom prst="rect">
             <a:avLst/>
@@ -6048,7 +6028,7 @@
         <p:spPr>
           <a:xfrm>
             <a:off x="6496200" y="3252960"/>
-            <a:ext cx="5457240" cy="342360"/>
+            <a:ext cx="5456880" cy="342000"/>
           </a:xfrm>
           <a:prstGeom prst="rect">
             <a:avLst/>
@@ -6100,7 +6080,7 @@
         <p:spPr>
           <a:xfrm>
             <a:off x="6496200" y="3633840"/>
-            <a:ext cx="5380920" cy="189720"/>
+            <a:ext cx="5380560" cy="189360"/>
           </a:xfrm>
           <a:prstGeom prst="rect">
             <a:avLst/>
@@ -6152,7 +6132,7 @@
         <p:spPr>
           <a:xfrm>
             <a:off x="6296040" y="3976560"/>
-            <a:ext cx="18360" cy="685080"/>
+            <a:ext cx="18000" cy="684720"/>
           </a:xfrm>
           <a:custGeom>
             <a:avLst/>
@@ -6203,7 +6183,7 @@
         <p:spPr>
           <a:xfrm>
             <a:off x="6496200" y="3976560"/>
-            <a:ext cx="484920" cy="342360"/>
+            <a:ext cx="484560" cy="342000"/>
           </a:xfrm>
           <a:prstGeom prst="rect">
             <a:avLst/>
@@ -6255,7 +6235,7 @@
         <p:spPr>
           <a:xfrm>
             <a:off x="6957360" y="4076640"/>
-            <a:ext cx="532800" cy="227880"/>
+            <a:ext cx="532440" cy="227520"/>
           </a:xfrm>
           <a:prstGeom prst="rect">
             <a:avLst/>
@@ -6307,7 +6287,7 @@
         <p:spPr>
           <a:xfrm>
             <a:off x="6496200" y="4357800"/>
-            <a:ext cx="5428440" cy="304200"/>
+            <a:ext cx="5428080" cy="303840"/>
           </a:xfrm>
           <a:prstGeom prst="rect">
             <a:avLst/>
@@ -6359,7 +6339,7 @@
         <p:spPr>
           <a:xfrm>
             <a:off x="380880" y="4971960"/>
-            <a:ext cx="11429280" cy="8640"/>
+            <a:ext cx="11428920" cy="8280"/>
           </a:xfrm>
           <a:custGeom>
             <a:avLst/>
@@ -6410,7 +6390,7 @@
         <p:spPr>
           <a:xfrm>
             <a:off x="390600" y="5253120"/>
-            <a:ext cx="170640" cy="151560"/>
+            <a:ext cx="170280" cy="151200"/>
           </a:xfrm>
           <a:custGeom>
             <a:avLst/>
@@ -6524,7 +6504,7 @@
         <p:spPr>
           <a:xfrm>
             <a:off x="628560" y="5205240"/>
-            <a:ext cx="11257920" cy="494640"/>
+            <a:ext cx="11257560" cy="494280"/>
           </a:xfrm>
           <a:prstGeom prst="rect">
             <a:avLst/>
@@ -6623,7 +6603,7 @@
         <p:spPr>
           <a:xfrm>
             <a:off x="380880" y="1850760"/>
-            <a:ext cx="761400" cy="18360"/>
+            <a:ext cx="761040" cy="18000"/>
           </a:xfrm>
           <a:custGeom>
             <a:avLst/>
@@ -6674,7 +6654,7 @@
         <p:spPr>
           <a:xfrm>
             <a:off x="380880" y="2174760"/>
-            <a:ext cx="9152640" cy="189720"/>
+            <a:ext cx="9152280" cy="189360"/>
           </a:xfrm>
           <a:prstGeom prst="rect">
             <a:avLst/>
@@ -6702,7 +6682,7 @@
               <a:buNone/>
             </a:pPr>
             <a:r>
-              <a:rPr b="0" lang="en-US" sz="1050" spc="310" strike="noStrike">
+              <a:rPr b="0" lang="en-US" sz="1050" spc="307" strike="noStrike">
                 <a:solidFill>
                   <a:srgbClr val="86868b"/>
                 </a:solidFill>
@@ -6726,7 +6706,7 @@
         <p:spPr>
           <a:xfrm>
             <a:off x="380880" y="2593800"/>
-            <a:ext cx="9543240" cy="1732680"/>
+            <a:ext cx="9542880" cy="1732320"/>
           </a:xfrm>
           <a:prstGeom prst="rect">
             <a:avLst/>
@@ -6799,7 +6779,7 @@
         <p:spPr>
           <a:xfrm>
             <a:off x="380880" y="4635720"/>
-            <a:ext cx="5600160" cy="370800"/>
+            <a:ext cx="5599800" cy="370440"/>
           </a:xfrm>
           <a:prstGeom prst="rect">
             <a:avLst/>
@@ -6851,7 +6831,7 @@
         <p:spPr>
           <a:xfrm>
             <a:off x="9471600" y="2476440"/>
-            <a:ext cx="3295080" cy="1904400"/>
+            <a:ext cx="3294720" cy="1904040"/>
           </a:xfrm>
           <a:prstGeom prst="rect">
             <a:avLst/>
@@ -6940,7 +6920,7 @@
         <p:spPr>
           <a:xfrm>
             <a:off x="380880" y="380880"/>
-            <a:ext cx="11486520" cy="151560"/>
+            <a:ext cx="11486160" cy="151200"/>
           </a:xfrm>
           <a:prstGeom prst="rect">
             <a:avLst/>
@@ -6968,7 +6948,7 @@
               <a:buNone/>
             </a:pPr>
             <a:r>
-              <a:rPr b="0" lang="en-US" sz="900" spc="265" strike="noStrike">
+              <a:rPr b="0" lang="en-US" sz="900" spc="262" strike="noStrike">
                 <a:solidFill>
                   <a:srgbClr val="86868b"/>
                 </a:solidFill>
@@ -6992,7 +6972,7 @@
         <p:spPr>
           <a:xfrm>
             <a:off x="380880" y="609480"/>
-            <a:ext cx="11600640" cy="380160"/>
+            <a:ext cx="11600280" cy="379800"/>
           </a:xfrm>
           <a:prstGeom prst="rect">
             <a:avLst/>
@@ -7044,7 +7024,7 @@
         <p:spPr>
           <a:xfrm>
             <a:off x="380880" y="2019240"/>
-            <a:ext cx="8628840" cy="618480"/>
+            <a:ext cx="8628480" cy="618120"/>
           </a:xfrm>
           <a:prstGeom prst="rect">
             <a:avLst/>
@@ -7136,7 +7116,7 @@
         <p:spPr>
           <a:xfrm>
             <a:off x="380880" y="3029040"/>
-            <a:ext cx="5523840" cy="18360"/>
+            <a:ext cx="5523480" cy="18000"/>
           </a:xfrm>
           <a:custGeom>
             <a:avLst/>
@@ -7187,7 +7167,7 @@
         <p:spPr>
           <a:xfrm>
             <a:off x="380880" y="3267000"/>
-            <a:ext cx="5590440" cy="189720"/>
+            <a:ext cx="5590080" cy="189360"/>
           </a:xfrm>
           <a:prstGeom prst="rect">
             <a:avLst/>
@@ -7215,7 +7195,7 @@
               <a:buNone/>
             </a:pPr>
             <a:r>
-              <a:rPr b="0" lang="en-US" sz="1050" spc="205" strike="noStrike">
+              <a:rPr b="0" lang="en-US" sz="1050" spc="202" strike="noStrike">
                 <a:solidFill>
                   <a:srgbClr val="86868b"/>
                 </a:solidFill>
@@ -7239,7 +7219,7 @@
         <p:spPr>
           <a:xfrm>
             <a:off x="380880" y="3610080"/>
-            <a:ext cx="5752440" cy="456480"/>
+            <a:ext cx="5752080" cy="456120"/>
           </a:xfrm>
           <a:prstGeom prst="rect">
             <a:avLst/>
@@ -7291,7 +7271,7 @@
         <p:spPr>
           <a:xfrm>
             <a:off x="380880" y="4143240"/>
-            <a:ext cx="5600160" cy="227880"/>
+            <a:ext cx="5599800" cy="227520"/>
           </a:xfrm>
           <a:prstGeom prst="rect">
             <a:avLst/>
@@ -7343,7 +7323,7 @@
         <p:spPr>
           <a:xfrm>
             <a:off x="380880" y="4524480"/>
-            <a:ext cx="5600160" cy="246960"/>
+            <a:ext cx="5599800" cy="246600"/>
           </a:xfrm>
           <a:prstGeom prst="rect">
             <a:avLst/>
@@ -7395,7 +7375,7 @@
         <p:spPr>
           <a:xfrm>
             <a:off x="380880" y="4886280"/>
-            <a:ext cx="5600160" cy="246960"/>
+            <a:ext cx="5599800" cy="246600"/>
           </a:xfrm>
           <a:prstGeom prst="rect">
             <a:avLst/>
@@ -7447,7 +7427,7 @@
         <p:spPr>
           <a:xfrm>
             <a:off x="6286680" y="3029040"/>
-            <a:ext cx="5523840" cy="18360"/>
+            <a:ext cx="5523480" cy="18000"/>
           </a:xfrm>
           <a:custGeom>
             <a:avLst/>
@@ -7498,7 +7478,7 @@
         <p:spPr>
           <a:xfrm>
             <a:off x="6286680" y="3267000"/>
-            <a:ext cx="5590440" cy="189720"/>
+            <a:ext cx="5590080" cy="189360"/>
           </a:xfrm>
           <a:prstGeom prst="rect">
             <a:avLst/>
@@ -7526,7 +7506,7 @@
               <a:buNone/>
             </a:pPr>
             <a:r>
-              <a:rPr b="0" lang="en-US" sz="1050" spc="205" strike="noStrike">
+              <a:rPr b="0" lang="en-US" sz="1050" spc="202" strike="noStrike">
                 <a:solidFill>
                   <a:srgbClr val="0071e3"/>
                 </a:solidFill>
@@ -7550,7 +7530,7 @@
         <p:spPr>
           <a:xfrm>
             <a:off x="6286680" y="3610080"/>
-            <a:ext cx="5752440" cy="456480"/>
+            <a:ext cx="5752080" cy="456120"/>
           </a:xfrm>
           <a:prstGeom prst="rect">
             <a:avLst/>
@@ -7602,7 +7582,7 @@
         <p:spPr>
           <a:xfrm>
             <a:off x="6286680" y="4143240"/>
-            <a:ext cx="5600160" cy="227880"/>
+            <a:ext cx="5599800" cy="227520"/>
           </a:xfrm>
           <a:prstGeom prst="rect">
             <a:avLst/>
@@ -7654,7 +7634,7 @@
         <p:spPr>
           <a:xfrm>
             <a:off x="6286680" y="4524480"/>
-            <a:ext cx="5600160" cy="246960"/>
+            <a:ext cx="5599800" cy="246600"/>
           </a:xfrm>
           <a:prstGeom prst="rect">
             <a:avLst/>
@@ -7706,7 +7686,7 @@
         <p:spPr>
           <a:xfrm>
             <a:off x="6286680" y="4886280"/>
-            <a:ext cx="5600160" cy="246960"/>
+            <a:ext cx="5599800" cy="246600"/>
           </a:xfrm>
           <a:prstGeom prst="rect">
             <a:avLst/>
@@ -7758,7 +7738,7 @@
         <p:spPr>
           <a:xfrm>
             <a:off x="380880" y="6091200"/>
-            <a:ext cx="11429280" cy="8640"/>
+            <a:ext cx="11428920" cy="8280"/>
           </a:xfrm>
           <a:custGeom>
             <a:avLst/>
@@ -7809,7 +7789,7 @@
         <p:spPr>
           <a:xfrm>
             <a:off x="399960" y="6286680"/>
-            <a:ext cx="151560" cy="151560"/>
+            <a:ext cx="151200" cy="151200"/>
           </a:xfrm>
           <a:custGeom>
             <a:avLst/>
@@ -7986,7 +7966,7 @@
         <p:spPr>
           <a:xfrm>
             <a:off x="628560" y="6248520"/>
-            <a:ext cx="11257920" cy="227880"/>
+            <a:ext cx="11257560" cy="227520"/>
           </a:xfrm>
           <a:prstGeom prst="rect">
             <a:avLst/>
@@ -8085,7 +8065,7 @@
         <p:spPr>
           <a:xfrm>
             <a:off x="380880" y="380880"/>
-            <a:ext cx="11486520" cy="151560"/>
+            <a:ext cx="11486160" cy="151200"/>
           </a:xfrm>
           <a:prstGeom prst="rect">
             <a:avLst/>
@@ -8113,7 +8093,7 @@
               <a:buNone/>
             </a:pPr>
             <a:r>
-              <a:rPr b="0" lang="en-US" sz="900" spc="265" strike="noStrike">
+              <a:rPr b="0" lang="en-US" sz="900" spc="262" strike="noStrike">
                 <a:solidFill>
                   <a:srgbClr val="86868b"/>
                 </a:solidFill>
@@ -8137,7 +8117,7 @@
         <p:spPr>
           <a:xfrm>
             <a:off x="380880" y="609480"/>
-            <a:ext cx="11600640" cy="380160"/>
+            <a:ext cx="11600280" cy="379800"/>
           </a:xfrm>
           <a:prstGeom prst="rect">
             <a:avLst/>
@@ -8189,7 +8169,7 @@
         <p:spPr>
           <a:xfrm>
             <a:off x="380880" y="1962000"/>
-            <a:ext cx="8628840" cy="618480"/>
+            <a:ext cx="8628480" cy="618120"/>
           </a:xfrm>
           <a:prstGeom prst="rect">
             <a:avLst/>
@@ -8261,7 +8241,7 @@
         <p:spPr>
           <a:xfrm>
             <a:off x="380880" y="2886120"/>
-            <a:ext cx="5590440" cy="189720"/>
+            <a:ext cx="5590080" cy="189360"/>
           </a:xfrm>
           <a:prstGeom prst="rect">
             <a:avLst/>
@@ -8289,7 +8269,7 @@
               <a:buNone/>
             </a:pPr>
             <a:r>
-              <a:rPr b="0" lang="en-US" sz="1050" spc="205" strike="noStrike">
+              <a:rPr b="0" lang="en-US" sz="1050" spc="202" strike="noStrike">
                 <a:solidFill>
                   <a:srgbClr val="86868b"/>
                 </a:solidFill>
@@ -8313,7 +8293,7 @@
         <p:spPr>
           <a:xfrm>
             <a:off x="380880" y="3228840"/>
-            <a:ext cx="990000" cy="227880"/>
+            <a:ext cx="989640" cy="227520"/>
           </a:xfrm>
           <a:prstGeom prst="rect">
             <a:avLst/>
@@ -8365,7 +8345,7 @@
         <p:spPr>
           <a:xfrm>
             <a:off x="1447920" y="3305160"/>
-            <a:ext cx="4457160" cy="75600"/>
+            <a:ext cx="4456800" cy="75240"/>
           </a:xfrm>
           <a:custGeom>
             <a:avLst/>
@@ -8416,7 +8396,7 @@
         <p:spPr>
           <a:xfrm>
             <a:off x="1447920" y="3305160"/>
-            <a:ext cx="894600" cy="75600"/>
+            <a:ext cx="894240" cy="75240"/>
           </a:xfrm>
           <a:custGeom>
             <a:avLst/>
@@ -8467,7 +8447,7 @@
         <p:spPr>
           <a:xfrm>
             <a:off x="380880" y="3571920"/>
-            <a:ext cx="990000" cy="227880"/>
+            <a:ext cx="989640" cy="227520"/>
           </a:xfrm>
           <a:prstGeom prst="rect">
             <a:avLst/>
@@ -8519,7 +8499,7 @@
         <p:spPr>
           <a:xfrm>
             <a:off x="1447920" y="3648240"/>
-            <a:ext cx="4457160" cy="75600"/>
+            <a:ext cx="4456800" cy="75240"/>
           </a:xfrm>
           <a:custGeom>
             <a:avLst/>
@@ -8570,7 +8550,7 @@
         <p:spPr>
           <a:xfrm>
             <a:off x="1447920" y="3648240"/>
-            <a:ext cx="1780560" cy="75600"/>
+            <a:ext cx="1780200" cy="75240"/>
           </a:xfrm>
           <a:custGeom>
             <a:avLst/>
@@ -8621,7 +8601,7 @@
         <p:spPr>
           <a:xfrm>
             <a:off x="380880" y="3914640"/>
-            <a:ext cx="990000" cy="227880"/>
+            <a:ext cx="989640" cy="227520"/>
           </a:xfrm>
           <a:prstGeom prst="rect">
             <a:avLst/>
@@ -8673,7 +8653,7 @@
         <p:spPr>
           <a:xfrm>
             <a:off x="1447920" y="3990960"/>
-            <a:ext cx="4457160" cy="75600"/>
+            <a:ext cx="4456800" cy="75240"/>
           </a:xfrm>
           <a:custGeom>
             <a:avLst/>
@@ -8724,7 +8704,7 @@
         <p:spPr>
           <a:xfrm>
             <a:off x="1447920" y="3990960"/>
-            <a:ext cx="2675880" cy="75600"/>
+            <a:ext cx="2675520" cy="75240"/>
           </a:xfrm>
           <a:custGeom>
             <a:avLst/>
@@ -8775,7 +8755,7 @@
         <p:spPr>
           <a:xfrm>
             <a:off x="380880" y="4295880"/>
-            <a:ext cx="5600160" cy="246960"/>
+            <a:ext cx="5599800" cy="246600"/>
           </a:xfrm>
           <a:prstGeom prst="rect">
             <a:avLst/>
@@ -8827,7 +8807,7 @@
         <p:spPr>
           <a:xfrm>
             <a:off x="6286680" y="2886120"/>
-            <a:ext cx="5590440" cy="189720"/>
+            <a:ext cx="5590080" cy="189360"/>
           </a:xfrm>
           <a:prstGeom prst="rect">
             <a:avLst/>
@@ -8855,7 +8835,7 @@
               <a:buNone/>
             </a:pPr>
             <a:r>
-              <a:rPr b="0" lang="en-US" sz="1050" spc="205" strike="noStrike">
+              <a:rPr b="0" lang="en-US" sz="1050" spc="202" strike="noStrike">
                 <a:solidFill>
                   <a:srgbClr val="0071e3"/>
                 </a:solidFill>
@@ -8879,7 +8859,7 @@
         <p:spPr>
           <a:xfrm>
             <a:off x="6286680" y="3228840"/>
-            <a:ext cx="990000" cy="227880"/>
+            <a:ext cx="989640" cy="227520"/>
           </a:xfrm>
           <a:prstGeom prst="rect">
             <a:avLst/>
@@ -8931,7 +8911,7 @@
         <p:spPr>
           <a:xfrm>
             <a:off x="7353360" y="3305160"/>
-            <a:ext cx="3695040" cy="75600"/>
+            <a:ext cx="3694680" cy="75240"/>
           </a:xfrm>
           <a:custGeom>
             <a:avLst/>
@@ -8982,7 +8962,7 @@
         <p:spPr>
           <a:xfrm>
             <a:off x="7353360" y="3305160"/>
-            <a:ext cx="447120" cy="75600"/>
+            <a:ext cx="446760" cy="75240"/>
           </a:xfrm>
           <a:custGeom>
             <a:avLst/>
@@ -9033,7 +9013,7 @@
         <p:spPr>
           <a:xfrm>
             <a:off x="11201400" y="3247920"/>
-            <a:ext cx="675720" cy="189720"/>
+            <a:ext cx="675360" cy="189360"/>
           </a:xfrm>
           <a:prstGeom prst="rect">
             <a:avLst/>
@@ -9085,7 +9065,7 @@
         <p:spPr>
           <a:xfrm>
             <a:off x="6286680" y="3571920"/>
-            <a:ext cx="990000" cy="227880"/>
+            <a:ext cx="989640" cy="227520"/>
           </a:xfrm>
           <a:prstGeom prst="rect">
             <a:avLst/>
@@ -9137,7 +9117,7 @@
         <p:spPr>
           <a:xfrm>
             <a:off x="7353360" y="3648240"/>
-            <a:ext cx="3695040" cy="75600"/>
+            <a:ext cx="3694680" cy="75240"/>
           </a:xfrm>
           <a:custGeom>
             <a:avLst/>
@@ -9188,7 +9168,7 @@
         <p:spPr>
           <a:xfrm>
             <a:off x="7353360" y="3648240"/>
-            <a:ext cx="1847160" cy="75600"/>
+            <a:ext cx="1846800" cy="75240"/>
           </a:xfrm>
           <a:custGeom>
             <a:avLst/>
@@ -9239,7 +9219,7 @@
         <p:spPr>
           <a:xfrm>
             <a:off x="11201400" y="3591000"/>
-            <a:ext cx="675720" cy="189720"/>
+            <a:ext cx="675360" cy="189360"/>
           </a:xfrm>
           <a:prstGeom prst="rect">
             <a:avLst/>
@@ -9291,7 +9271,7 @@
         <p:spPr>
           <a:xfrm>
             <a:off x="6286680" y="3990960"/>
-            <a:ext cx="990000" cy="227880"/>
+            <a:ext cx="989640" cy="227520"/>
           </a:xfrm>
           <a:prstGeom prst="rect">
             <a:avLst/>
@@ -9343,7 +9323,7 @@
         <p:spPr>
           <a:xfrm>
             <a:off x="7353360" y="4067280"/>
-            <a:ext cx="3695040" cy="75600"/>
+            <a:ext cx="3694680" cy="75240"/>
           </a:xfrm>
           <a:custGeom>
             <a:avLst/>
@@ -9394,7 +9374,7 @@
         <p:spPr>
           <a:xfrm>
             <a:off x="7353360" y="4067280"/>
-            <a:ext cx="3580560" cy="75600"/>
+            <a:ext cx="3580200" cy="75240"/>
           </a:xfrm>
           <a:custGeom>
             <a:avLst/>
@@ -9445,7 +9425,7 @@
         <p:spPr>
           <a:xfrm>
             <a:off x="11201400" y="3914640"/>
-            <a:ext cx="675720" cy="380160"/>
+            <a:ext cx="675360" cy="379800"/>
           </a:xfrm>
           <a:prstGeom prst="rect">
             <a:avLst/>
@@ -9497,7 +9477,7 @@
         <p:spPr>
           <a:xfrm>
             <a:off x="6286680" y="4448160"/>
-            <a:ext cx="5600160" cy="246960"/>
+            <a:ext cx="5599800" cy="246600"/>
           </a:xfrm>
           <a:prstGeom prst="rect">
             <a:avLst/>
@@ -9549,7 +9529,7 @@
         <p:spPr>
           <a:xfrm>
             <a:off x="380880" y="5005440"/>
-            <a:ext cx="11429280" cy="8640"/>
+            <a:ext cx="11428920" cy="8280"/>
           </a:xfrm>
           <a:custGeom>
             <a:avLst/>
@@ -9600,7 +9580,7 @@
         <p:spPr>
           <a:xfrm>
             <a:off x="399960" y="5286240"/>
-            <a:ext cx="151560" cy="151560"/>
+            <a:ext cx="151200" cy="151200"/>
           </a:xfrm>
           <a:custGeom>
             <a:avLst/>
@@ -9742,7 +9722,7 @@
         <p:spPr>
           <a:xfrm>
             <a:off x="628560" y="5238720"/>
-            <a:ext cx="11257920" cy="494640"/>
+            <a:ext cx="11257560" cy="494280"/>
           </a:xfrm>
           <a:prstGeom prst="rect">
             <a:avLst/>
@@ -9841,7 +9821,7 @@
         <p:spPr>
           <a:xfrm>
             <a:off x="380880" y="1850760"/>
-            <a:ext cx="761400" cy="18360"/>
+            <a:ext cx="761040" cy="18000"/>
           </a:xfrm>
           <a:custGeom>
             <a:avLst/>
@@ -9892,7 +9872,7 @@
         <p:spPr>
           <a:xfrm>
             <a:off x="380880" y="2174760"/>
-            <a:ext cx="9162360" cy="189720"/>
+            <a:ext cx="9162000" cy="189360"/>
           </a:xfrm>
           <a:prstGeom prst="rect">
             <a:avLst/>
@@ -9920,7 +9900,7 @@
               <a:buNone/>
             </a:pPr>
             <a:r>
-              <a:rPr b="0" lang="en-US" sz="1050" spc="310" strike="noStrike">
+              <a:rPr b="0" lang="en-US" sz="1050" spc="307" strike="noStrike">
                 <a:solidFill>
                   <a:srgbClr val="86868b"/>
                 </a:solidFill>
@@ -9944,7 +9924,7 @@
         <p:spPr>
           <a:xfrm>
             <a:off x="380880" y="2593800"/>
-            <a:ext cx="9552960" cy="1732680"/>
+            <a:ext cx="9552600" cy="1732320"/>
           </a:xfrm>
           <a:prstGeom prst="rect">
             <a:avLst/>
@@ -10017,7 +9997,7 @@
         <p:spPr>
           <a:xfrm>
             <a:off x="380880" y="4635720"/>
-            <a:ext cx="5600160" cy="370800"/>
+            <a:ext cx="5599800" cy="370440"/>
           </a:xfrm>
           <a:prstGeom prst="rect">
             <a:avLst/>
@@ -10069,7 +10049,7 @@
         <p:spPr>
           <a:xfrm>
             <a:off x="9473400" y="2476440"/>
-            <a:ext cx="3285360" cy="1904400"/>
+            <a:ext cx="3285000" cy="1904040"/>
           </a:xfrm>
           <a:prstGeom prst="rect">
             <a:avLst/>
@@ -10158,7 +10138,7 @@
         <p:spPr>
           <a:xfrm>
             <a:off x="380880" y="380880"/>
-            <a:ext cx="11486520" cy="151560"/>
+            <a:ext cx="11486160" cy="151200"/>
           </a:xfrm>
           <a:prstGeom prst="rect">
             <a:avLst/>
@@ -10186,7 +10166,7 @@
               <a:buNone/>
             </a:pPr>
             <a:r>
-              <a:rPr b="0" lang="en-US" sz="900" spc="265" strike="noStrike">
+              <a:rPr b="0" lang="en-US" sz="900" spc="262" strike="noStrike">
                 <a:solidFill>
                   <a:srgbClr val="86868b"/>
                 </a:solidFill>
@@ -10210,7 +10190,7 @@
         <p:spPr>
           <a:xfrm>
             <a:off x="380880" y="609480"/>
-            <a:ext cx="11600640" cy="380160"/>
+            <a:ext cx="11600280" cy="379800"/>
           </a:xfrm>
           <a:prstGeom prst="rect">
             <a:avLst/>
@@ -10262,7 +10242,7 @@
         <p:spPr>
           <a:xfrm>
             <a:off x="380880" y="1848960"/>
-            <a:ext cx="5609520" cy="561240"/>
+            <a:ext cx="5609160" cy="560880"/>
           </a:xfrm>
           <a:prstGeom prst="rect">
             <a:avLst/>
@@ -10334,7 +10314,7 @@
         <p:spPr>
           <a:xfrm>
             <a:off x="380880" y="2596680"/>
-            <a:ext cx="5600160" cy="494640"/>
+            <a:ext cx="5599800" cy="494280"/>
           </a:xfrm>
           <a:prstGeom prst="rect">
             <a:avLst/>
@@ -10396,7 +10376,7 @@
         <p:spPr>
           <a:xfrm>
             <a:off x="380880" y="3244320"/>
-            <a:ext cx="5600160" cy="494640"/>
+            <a:ext cx="5599800" cy="494280"/>
           </a:xfrm>
           <a:prstGeom prst="rect">
             <a:avLst/>
@@ -10448,7 +10428,7 @@
         <p:spPr>
           <a:xfrm>
             <a:off x="6296040" y="1848960"/>
-            <a:ext cx="18360" cy="799560"/>
+            <a:ext cx="18000" cy="799200"/>
           </a:xfrm>
           <a:custGeom>
             <a:avLst/>
@@ -10499,7 +10479,7 @@
         <p:spPr>
           <a:xfrm>
             <a:off x="6496200" y="1848960"/>
-            <a:ext cx="5380920" cy="189720"/>
+            <a:ext cx="5380560" cy="189360"/>
           </a:xfrm>
           <a:prstGeom prst="rect">
             <a:avLst/>
@@ -10527,7 +10507,7 @@
               <a:buNone/>
             </a:pPr>
             <a:r>
-              <a:rPr b="0" lang="en-US" sz="1050" spc="205" strike="noStrike">
+              <a:rPr b="0" lang="en-US" sz="1050" spc="202" strike="noStrike">
                 <a:solidFill>
                   <a:srgbClr val="0071e3"/>
                 </a:solidFill>
@@ -10551,7 +10531,7 @@
         <p:spPr>
           <a:xfrm>
             <a:off x="6496200" y="2115720"/>
-            <a:ext cx="5428440" cy="304200"/>
+            <a:ext cx="5428080" cy="303840"/>
           </a:xfrm>
           <a:prstGeom prst="rect">
             <a:avLst/>
@@ -10603,7 +10583,7 @@
         <p:spPr>
           <a:xfrm>
             <a:off x="6496200" y="2458800"/>
-            <a:ext cx="5380920" cy="189720"/>
+            <a:ext cx="5380560" cy="189360"/>
           </a:xfrm>
           <a:prstGeom prst="rect">
             <a:avLst/>
@@ -10655,7 +10635,7 @@
         <p:spPr>
           <a:xfrm>
             <a:off x="6296040" y="2801520"/>
-            <a:ext cx="18360" cy="799560"/>
+            <a:ext cx="18000" cy="799200"/>
           </a:xfrm>
           <a:custGeom>
             <a:avLst/>
@@ -10706,7 +10686,7 @@
         <p:spPr>
           <a:xfrm>
             <a:off x="6496200" y="2801520"/>
-            <a:ext cx="5380920" cy="189720"/>
+            <a:ext cx="5380560" cy="189360"/>
           </a:xfrm>
           <a:prstGeom prst="rect">
             <a:avLst/>
@@ -10734,7 +10714,7 @@
               <a:buNone/>
             </a:pPr>
             <a:r>
-              <a:rPr b="0" lang="en-US" sz="1050" spc="205" strike="noStrike">
+              <a:rPr b="0" lang="en-US" sz="1050" spc="202" strike="noStrike">
                 <a:solidFill>
                   <a:srgbClr val="86868b"/>
                 </a:solidFill>
@@ -10758,7 +10738,7 @@
         <p:spPr>
           <a:xfrm>
             <a:off x="6496200" y="3068280"/>
-            <a:ext cx="5428440" cy="304200"/>
+            <a:ext cx="5428080" cy="303840"/>
           </a:xfrm>
           <a:prstGeom prst="rect">
             <a:avLst/>
@@ -10810,7 +10790,7 @@
         <p:spPr>
           <a:xfrm>
             <a:off x="6496200" y="3411000"/>
-            <a:ext cx="5380920" cy="189720"/>
+            <a:ext cx="5380560" cy="189360"/>
           </a:xfrm>
           <a:prstGeom prst="rect">
             <a:avLst/>
@@ -10862,7 +10842,7 @@
         <p:spPr>
           <a:xfrm>
             <a:off x="6296040" y="3754080"/>
-            <a:ext cx="18360" cy="799560"/>
+            <a:ext cx="18000" cy="799200"/>
           </a:xfrm>
           <a:custGeom>
             <a:avLst/>
@@ -10913,7 +10893,7 @@
         <p:spPr>
           <a:xfrm>
             <a:off x="6496200" y="3754080"/>
-            <a:ext cx="5380920" cy="189720"/>
+            <a:ext cx="5380560" cy="189360"/>
           </a:xfrm>
           <a:prstGeom prst="rect">
             <a:avLst/>
@@ -10941,7 +10921,7 @@
               <a:buNone/>
             </a:pPr>
             <a:r>
-              <a:rPr b="0" lang="en-US" sz="1050" spc="205" strike="noStrike">
+              <a:rPr b="0" lang="en-US" sz="1050" spc="202" strike="noStrike">
                 <a:solidFill>
                   <a:srgbClr val="86868b"/>
                 </a:solidFill>
@@ -10965,7 +10945,7 @@
         <p:spPr>
           <a:xfrm>
             <a:off x="6496200" y="4020840"/>
-            <a:ext cx="5428440" cy="304200"/>
+            <a:ext cx="5428080" cy="303840"/>
           </a:xfrm>
           <a:prstGeom prst="rect">
             <a:avLst/>
@@ -11017,7 +10997,7 @@
         <p:spPr>
           <a:xfrm>
             <a:off x="6496200" y="4363560"/>
-            <a:ext cx="5380920" cy="189720"/>
+            <a:ext cx="5380560" cy="189360"/>
           </a:xfrm>
           <a:prstGeom prst="rect">
             <a:avLst/>
@@ -11069,7 +11049,7 @@
         <p:spPr>
           <a:xfrm>
             <a:off x="380880" y="4787640"/>
-            <a:ext cx="11429280" cy="8640"/>
+            <a:ext cx="11428920" cy="8280"/>
           </a:xfrm>
           <a:custGeom>
             <a:avLst/>
@@ -11120,7 +11100,7 @@
         <p:spPr>
           <a:xfrm>
             <a:off x="380880" y="5020920"/>
-            <a:ext cx="11495880" cy="189720"/>
+            <a:ext cx="11495520" cy="189360"/>
           </a:xfrm>
           <a:prstGeom prst="rect">
             <a:avLst/>
@@ -11148,7 +11128,7 @@
               <a:buNone/>
             </a:pPr>
             <a:r>
-              <a:rPr b="0" lang="en-US" sz="1050" spc="205" strike="noStrike">
+              <a:rPr b="0" lang="en-US" sz="1050" spc="202" strike="noStrike">
                 <a:solidFill>
                   <a:srgbClr val="86868b"/>
                 </a:solidFill>
@@ -11172,7 +11152,7 @@
         <p:spPr>
           <a:xfrm>
             <a:off x="380880" y="5363640"/>
-            <a:ext cx="189720" cy="151560"/>
+            <a:ext cx="189360" cy="151200"/>
           </a:xfrm>
           <a:custGeom>
             <a:avLst/>
@@ -11414,7 +11394,7 @@
         <p:spPr>
           <a:xfrm>
             <a:off x="628560" y="5325840"/>
-            <a:ext cx="3485520" cy="227880"/>
+            <a:ext cx="3485160" cy="227520"/>
           </a:xfrm>
           <a:prstGeom prst="rect">
             <a:avLst/>
@@ -11466,7 +11446,7 @@
         <p:spPr>
           <a:xfrm>
             <a:off x="380880" y="5630400"/>
-            <a:ext cx="3723480" cy="218520"/>
+            <a:ext cx="3723120" cy="218160"/>
           </a:xfrm>
           <a:prstGeom prst="rect">
             <a:avLst/>
@@ -11518,7 +11498,7 @@
         <p:spPr>
           <a:xfrm>
             <a:off x="4286160" y="5363640"/>
-            <a:ext cx="151560" cy="151560"/>
+            <a:ext cx="151200" cy="151200"/>
           </a:xfrm>
           <a:custGeom>
             <a:avLst/>
@@ -11616,7 +11596,7 @@
         <p:spPr>
           <a:xfrm>
             <a:off x="4514760" y="5325840"/>
-            <a:ext cx="3485520" cy="227880"/>
+            <a:ext cx="3485160" cy="227520"/>
           </a:xfrm>
           <a:prstGeom prst="rect">
             <a:avLst/>
@@ -11668,7 +11648,7 @@
         <p:spPr>
           <a:xfrm>
             <a:off x="4267080" y="5630400"/>
-            <a:ext cx="3723480" cy="218520"/>
+            <a:ext cx="3723120" cy="218160"/>
           </a:xfrm>
           <a:prstGeom prst="rect">
             <a:avLst/>
@@ -11720,7 +11700,7 @@
         <p:spPr>
           <a:xfrm>
             <a:off x="8172360" y="5363640"/>
-            <a:ext cx="151560" cy="151560"/>
+            <a:ext cx="151200" cy="151200"/>
           </a:xfrm>
           <a:custGeom>
             <a:avLst/>
@@ -11857,7 +11837,7 @@
         <p:spPr>
           <a:xfrm>
             <a:off x="8400960" y="5325840"/>
-            <a:ext cx="3485520" cy="227880"/>
+            <a:ext cx="3485160" cy="227520"/>
           </a:xfrm>
           <a:prstGeom prst="rect">
             <a:avLst/>
@@ -11909,7 +11889,7 @@
         <p:spPr>
           <a:xfrm>
             <a:off x="8153280" y="5630400"/>
-            <a:ext cx="3723480" cy="218520"/>
+            <a:ext cx="3723120" cy="218160"/>
           </a:xfrm>
           <a:prstGeom prst="rect">
             <a:avLst/>
@@ -11998,7 +11978,7 @@
         <p:spPr>
           <a:xfrm>
             <a:off x="380880" y="380880"/>
-            <a:ext cx="11486520" cy="151560"/>
+            <a:ext cx="11486160" cy="151200"/>
           </a:xfrm>
           <a:prstGeom prst="rect">
             <a:avLst/>
@@ -12026,7 +12006,7 @@
               <a:buNone/>
             </a:pPr>
             <a:r>
-              <a:rPr b="0" lang="en-US" sz="900" spc="265" strike="noStrike">
+              <a:rPr b="0" lang="en-US" sz="900" spc="262" strike="noStrike">
                 <a:solidFill>
                   <a:srgbClr val="86868b"/>
                 </a:solidFill>
@@ -12050,7 +12030,7 @@
         <p:spPr>
           <a:xfrm>
             <a:off x="380880" y="609480"/>
-            <a:ext cx="11600640" cy="380160"/>
+            <a:ext cx="11600280" cy="379800"/>
           </a:xfrm>
           <a:prstGeom prst="rect">
             <a:avLst/>
@@ -12102,7 +12082,7 @@
         <p:spPr>
           <a:xfrm>
             <a:off x="380880" y="1886040"/>
-            <a:ext cx="3656880" cy="8640"/>
+            <a:ext cx="3656520" cy="8280"/>
           </a:xfrm>
           <a:custGeom>
             <a:avLst/>
@@ -12153,7 +12133,7 @@
         <p:spPr>
           <a:xfrm>
             <a:off x="409680" y="2081160"/>
-            <a:ext cx="227880" cy="227880"/>
+            <a:ext cx="227520" cy="227520"/>
           </a:xfrm>
           <a:custGeom>
             <a:avLst/>
@@ -12354,7 +12334,7 @@
         <p:spPr>
           <a:xfrm>
             <a:off x="380880" y="2424240"/>
-            <a:ext cx="3752280" cy="266040"/>
+            <a:ext cx="3751920" cy="265680"/>
           </a:xfrm>
           <a:prstGeom prst="rect">
             <a:avLst/>
@@ -12406,7 +12386,7 @@
         <p:spPr>
           <a:xfrm>
             <a:off x="380880" y="2843280"/>
-            <a:ext cx="3733200" cy="494640"/>
+            <a:ext cx="3732840" cy="494280"/>
           </a:xfrm>
           <a:prstGeom prst="rect">
             <a:avLst/>
@@ -12458,7 +12438,7 @@
         <p:spPr>
           <a:xfrm>
             <a:off x="4267080" y="1886040"/>
-            <a:ext cx="3656880" cy="8640"/>
+            <a:ext cx="3656520" cy="8280"/>
           </a:xfrm>
           <a:custGeom>
             <a:avLst/>
@@ -12509,7 +12489,7 @@
         <p:spPr>
           <a:xfrm>
             <a:off x="4324320" y="2081160"/>
-            <a:ext cx="170640" cy="227880"/>
+            <a:ext cx="170280" cy="227520"/>
           </a:xfrm>
           <a:custGeom>
             <a:avLst/>
@@ -12641,7 +12621,7 @@
         <p:spPr>
           <a:xfrm>
             <a:off x="4267080" y="2424240"/>
-            <a:ext cx="3752280" cy="266040"/>
+            <a:ext cx="3751920" cy="265680"/>
           </a:xfrm>
           <a:prstGeom prst="rect">
             <a:avLst/>
@@ -12693,7 +12673,7 @@
         <p:spPr>
           <a:xfrm>
             <a:off x="4267080" y="2843280"/>
-            <a:ext cx="3733200" cy="494640"/>
+            <a:ext cx="3732840" cy="494280"/>
           </a:xfrm>
           <a:prstGeom prst="rect">
             <a:avLst/>
@@ -12745,7 +12725,7 @@
         <p:spPr>
           <a:xfrm>
             <a:off x="8153280" y="1886040"/>
-            <a:ext cx="3656880" cy="8640"/>
+            <a:ext cx="3656520" cy="8280"/>
           </a:xfrm>
           <a:custGeom>
             <a:avLst/>
@@ -12796,7 +12776,7 @@
         <p:spPr>
           <a:xfrm>
             <a:off x="8182080" y="2081160"/>
-            <a:ext cx="227880" cy="227880"/>
+            <a:ext cx="227520" cy="227520"/>
           </a:xfrm>
           <a:custGeom>
             <a:avLst/>
@@ -13019,7 +12999,7 @@
         <p:spPr>
           <a:xfrm>
             <a:off x="8153280" y="2424240"/>
-            <a:ext cx="3752280" cy="266040"/>
+            <a:ext cx="3751920" cy="265680"/>
           </a:xfrm>
           <a:prstGeom prst="rect">
             <a:avLst/>
@@ -13071,7 +13051,7 @@
         <p:spPr>
           <a:xfrm>
             <a:off x="8153280" y="2843280"/>
-            <a:ext cx="3733200" cy="494640"/>
+            <a:ext cx="3732840" cy="494280"/>
           </a:xfrm>
           <a:prstGeom prst="rect">
             <a:avLst/>
@@ -13123,7 +13103,7 @@
         <p:spPr>
           <a:xfrm>
             <a:off x="380880" y="3571920"/>
-            <a:ext cx="3656880" cy="8640"/>
+            <a:ext cx="3656520" cy="8280"/>
           </a:xfrm>
           <a:custGeom>
             <a:avLst/>
@@ -13174,7 +13154,7 @@
         <p:spPr>
           <a:xfrm>
             <a:off x="380880" y="3767040"/>
-            <a:ext cx="285120" cy="227880"/>
+            <a:ext cx="284760" cy="227520"/>
           </a:xfrm>
           <a:custGeom>
             <a:avLst/>
@@ -13390,7 +13370,7 @@
         <p:spPr>
           <a:xfrm>
             <a:off x="380880" y="4110120"/>
-            <a:ext cx="3752280" cy="266040"/>
+            <a:ext cx="3751920" cy="265680"/>
           </a:xfrm>
           <a:prstGeom prst="rect">
             <a:avLst/>
@@ -13442,7 +13422,7 @@
         <p:spPr>
           <a:xfrm>
             <a:off x="380880" y="4529160"/>
-            <a:ext cx="3733200" cy="742320"/>
+            <a:ext cx="3732840" cy="741960"/>
           </a:xfrm>
           <a:prstGeom prst="rect">
             <a:avLst/>
@@ -13494,7 +13474,7 @@
         <p:spPr>
           <a:xfrm>
             <a:off x="4267080" y="3571920"/>
-            <a:ext cx="3656880" cy="8640"/>
+            <a:ext cx="3656520" cy="8280"/>
           </a:xfrm>
           <a:custGeom>
             <a:avLst/>
@@ -13545,7 +13525,7 @@
         <p:spPr>
           <a:xfrm>
             <a:off x="4324320" y="3767040"/>
-            <a:ext cx="170640" cy="227880"/>
+            <a:ext cx="170280" cy="227520"/>
           </a:xfrm>
           <a:custGeom>
             <a:avLst/>
@@ -13744,7 +13724,7 @@
         <p:spPr>
           <a:xfrm>
             <a:off x="4267080" y="4110120"/>
-            <a:ext cx="3752280" cy="266040"/>
+            <a:ext cx="3751920" cy="265680"/>
           </a:xfrm>
           <a:prstGeom prst="rect">
             <a:avLst/>
@@ -13796,7 +13776,7 @@
         <p:spPr>
           <a:xfrm>
             <a:off x="4267080" y="4529160"/>
-            <a:ext cx="3733200" cy="494640"/>
+            <a:ext cx="3732840" cy="494280"/>
           </a:xfrm>
           <a:prstGeom prst="rect">
             <a:avLst/>
@@ -13848,7 +13828,7 @@
         <p:spPr>
           <a:xfrm>
             <a:off x="8153280" y="3571920"/>
-            <a:ext cx="3656880" cy="8640"/>
+            <a:ext cx="3656520" cy="8280"/>
           </a:xfrm>
           <a:custGeom>
             <a:avLst/>
@@ -13899,7 +13879,7 @@
         <p:spPr>
           <a:xfrm>
             <a:off x="8182080" y="3767040"/>
-            <a:ext cx="227880" cy="227880"/>
+            <a:ext cx="227520" cy="227520"/>
           </a:xfrm>
           <a:custGeom>
             <a:avLst/>
@@ -14138,7 +14118,7 @@
         <p:spPr>
           <a:xfrm>
             <a:off x="8153280" y="4110120"/>
-            <a:ext cx="3752280" cy="266040"/>
+            <a:ext cx="3751920" cy="265680"/>
           </a:xfrm>
           <a:prstGeom prst="rect">
             <a:avLst/>
@@ -14190,7 +14170,7 @@
         <p:spPr>
           <a:xfrm>
             <a:off x="8153280" y="4529160"/>
-            <a:ext cx="3733200" cy="494640"/>
+            <a:ext cx="3732840" cy="494280"/>
           </a:xfrm>
           <a:prstGeom prst="rect">
             <a:avLst/>
@@ -14242,7 +14222,7 @@
         <p:spPr>
           <a:xfrm>
             <a:off x="380880" y="6091200"/>
-            <a:ext cx="11429280" cy="8640"/>
+            <a:ext cx="11428920" cy="8280"/>
           </a:xfrm>
           <a:custGeom>
             <a:avLst/>
@@ -14293,7 +14273,7 @@
         <p:spPr>
           <a:xfrm>
             <a:off x="399960" y="6286680"/>
-            <a:ext cx="151560" cy="151560"/>
+            <a:ext cx="151200" cy="151200"/>
           </a:xfrm>
           <a:custGeom>
             <a:avLst/>
@@ -14470,7 +14450,7 @@
         <p:spPr>
           <a:xfrm>
             <a:off x="628560" y="6248520"/>
-            <a:ext cx="11257920" cy="227880"/>
+            <a:ext cx="11257560" cy="227520"/>
           </a:xfrm>
           <a:prstGeom prst="rect">
             <a:avLst/>
@@ -14569,7 +14549,7 @@
         <p:spPr>
           <a:xfrm>
             <a:off x="380880" y="380880"/>
-            <a:ext cx="608760" cy="18360"/>
+            <a:ext cx="608400" cy="18000"/>
           </a:xfrm>
           <a:custGeom>
             <a:avLst/>
@@ -14620,7 +14600,7 @@
         <p:spPr>
           <a:xfrm>
             <a:off x="380880" y="628560"/>
-            <a:ext cx="11495880" cy="189720"/>
+            <a:ext cx="11495520" cy="189360"/>
           </a:xfrm>
           <a:prstGeom prst="rect">
             <a:avLst/>
@@ -14648,7 +14628,7 @@
               <a:buNone/>
             </a:pPr>
             <a:r>
-              <a:rPr b="0" lang="en-US" sz="1050" spc="310" strike="noStrike">
+              <a:rPr b="0" lang="en-US" sz="1050" spc="307" strike="noStrike">
                 <a:solidFill>
                   <a:srgbClr val="86868b"/>
                 </a:solidFill>
@@ -14672,7 +14652,7 @@
         <p:spPr>
           <a:xfrm>
             <a:off x="380880" y="971640"/>
-            <a:ext cx="11715120" cy="570960"/>
+            <a:ext cx="11714760" cy="570600"/>
           </a:xfrm>
           <a:prstGeom prst="rect">
             <a:avLst/>
@@ -14724,7 +14704,7 @@
         <p:spPr>
           <a:xfrm>
             <a:off x="385920" y="2714760"/>
-            <a:ext cx="370800" cy="370800"/>
+            <a:ext cx="370440" cy="370440"/>
           </a:xfrm>
           <a:custGeom>
             <a:avLst/>
@@ -14776,7 +14756,7 @@
         <p:spPr>
           <a:xfrm>
             <a:off x="338040" y="2709720"/>
-            <a:ext cx="447120" cy="361080"/>
+            <a:ext cx="446760" cy="360720"/>
           </a:xfrm>
           <a:prstGeom prst="rect">
             <a:avLst/>
@@ -14828,7 +14808,7 @@
         <p:spPr>
           <a:xfrm>
             <a:off x="914400" y="2709720"/>
-            <a:ext cx="5047560" cy="266040"/>
+            <a:ext cx="5047200" cy="265680"/>
           </a:xfrm>
           <a:prstGeom prst="rect">
             <a:avLst/>
@@ -14880,7 +14860,7 @@
         <p:spPr>
           <a:xfrm>
             <a:off x="914400" y="3052800"/>
-            <a:ext cx="5028480" cy="494640"/>
+            <a:ext cx="5028120" cy="494280"/>
           </a:xfrm>
           <a:prstGeom prst="rect">
             <a:avLst/>
@@ -14952,7 +14932,7 @@
         <p:spPr>
           <a:xfrm>
             <a:off x="6329520" y="2714760"/>
-            <a:ext cx="370800" cy="370800"/>
+            <a:ext cx="370440" cy="370440"/>
           </a:xfrm>
           <a:custGeom>
             <a:avLst/>
@@ -15004,7 +14984,7 @@
         <p:spPr>
           <a:xfrm>
             <a:off x="6281640" y="2709720"/>
-            <a:ext cx="447120" cy="361080"/>
+            <a:ext cx="446760" cy="360720"/>
           </a:xfrm>
           <a:prstGeom prst="rect">
             <a:avLst/>
@@ -15056,7 +15036,7 @@
         <p:spPr>
           <a:xfrm>
             <a:off x="6858000" y="2709720"/>
-            <a:ext cx="5047560" cy="266040"/>
+            <a:ext cx="5047200" cy="265680"/>
           </a:xfrm>
           <a:prstGeom prst="rect">
             <a:avLst/>
@@ -15108,7 +15088,7 @@
         <p:spPr>
           <a:xfrm>
             <a:off x="6858000" y="3052800"/>
-            <a:ext cx="5028480" cy="494640"/>
+            <a:ext cx="5028120" cy="494280"/>
           </a:xfrm>
           <a:prstGeom prst="rect">
             <a:avLst/>
@@ -15180,7 +15160,7 @@
         <p:spPr>
           <a:xfrm>
             <a:off x="385920" y="3781440"/>
-            <a:ext cx="370800" cy="370800"/>
+            <a:ext cx="370440" cy="370440"/>
           </a:xfrm>
           <a:custGeom>
             <a:avLst/>
@@ -15232,7 +15212,7 @@
         <p:spPr>
           <a:xfrm>
             <a:off x="338040" y="3776760"/>
-            <a:ext cx="447120" cy="361080"/>
+            <a:ext cx="446760" cy="360720"/>
           </a:xfrm>
           <a:prstGeom prst="rect">
             <a:avLst/>
@@ -15284,7 +15264,7 @@
         <p:spPr>
           <a:xfrm>
             <a:off x="914400" y="3776760"/>
-            <a:ext cx="5047560" cy="266040"/>
+            <a:ext cx="5047200" cy="265680"/>
           </a:xfrm>
           <a:prstGeom prst="rect">
             <a:avLst/>
@@ -15336,7 +15316,7 @@
         <p:spPr>
           <a:xfrm>
             <a:off x="914400" y="4119480"/>
-            <a:ext cx="5028480" cy="494640"/>
+            <a:ext cx="5028120" cy="494280"/>
           </a:xfrm>
           <a:prstGeom prst="rect">
             <a:avLst/>
@@ -15428,7 +15408,7 @@
         <p:spPr>
           <a:xfrm>
             <a:off x="6329520" y="3781440"/>
-            <a:ext cx="370800" cy="370800"/>
+            <a:ext cx="370440" cy="370440"/>
           </a:xfrm>
           <a:custGeom>
             <a:avLst/>
@@ -15480,7 +15460,7 @@
         <p:spPr>
           <a:xfrm>
             <a:off x="6281640" y="3776760"/>
-            <a:ext cx="447120" cy="361080"/>
+            <a:ext cx="446760" cy="360720"/>
           </a:xfrm>
           <a:prstGeom prst="rect">
             <a:avLst/>
@@ -15532,7 +15512,7 @@
         <p:spPr>
           <a:xfrm>
             <a:off x="6858000" y="3776760"/>
-            <a:ext cx="5047560" cy="266040"/>
+            <a:ext cx="5047200" cy="265680"/>
           </a:xfrm>
           <a:prstGeom prst="rect">
             <a:avLst/>
@@ -15584,7 +15564,7 @@
         <p:spPr>
           <a:xfrm>
             <a:off x="6858000" y="4119480"/>
-            <a:ext cx="5028480" cy="494640"/>
+            <a:ext cx="5028120" cy="494280"/>
           </a:xfrm>
           <a:prstGeom prst="rect">
             <a:avLst/>
@@ -15656,7 +15636,7 @@
         <p:spPr>
           <a:xfrm>
             <a:off x="380880" y="5634000"/>
-            <a:ext cx="11429280" cy="8640"/>
+            <a:ext cx="11428920" cy="8280"/>
           </a:xfrm>
           <a:custGeom>
             <a:avLst/>
@@ -15707,7 +15687,7 @@
         <p:spPr>
           <a:xfrm>
             <a:off x="380880" y="5867280"/>
-            <a:ext cx="7771680" cy="304200"/>
+            <a:ext cx="7771320" cy="303840"/>
           </a:xfrm>
           <a:prstGeom prst="rect">
             <a:avLst/>
@@ -15759,7 +15739,7 @@
         <p:spPr>
           <a:xfrm>
             <a:off x="380880" y="6248520"/>
-            <a:ext cx="7733520" cy="227880"/>
+            <a:ext cx="7733160" cy="227520"/>
           </a:xfrm>
           <a:prstGeom prst="rect">
             <a:avLst/>
@@ -15821,7 +15801,7 @@
         <p:spPr>
           <a:xfrm>
             <a:off x="10064160" y="5981760"/>
-            <a:ext cx="1742400" cy="189720"/>
+            <a:ext cx="1742040" cy="189360"/>
           </a:xfrm>
           <a:prstGeom prst="rect">
             <a:avLst/>
@@ -15873,7 +15853,7 @@
         <p:spPr>
           <a:xfrm>
             <a:off x="10073880" y="6210360"/>
-            <a:ext cx="1732680" cy="151560"/>
+            <a:ext cx="1732320" cy="151200"/>
           </a:xfrm>
           <a:prstGeom prst="rect">
             <a:avLst/>
@@ -15962,7 +15942,7 @@
         <p:spPr>
           <a:xfrm>
             <a:off x="380880" y="380880"/>
-            <a:ext cx="11486520" cy="151560"/>
+            <a:ext cx="11486160" cy="151200"/>
           </a:xfrm>
           <a:prstGeom prst="rect">
             <a:avLst/>
@@ -15990,7 +15970,7 @@
               <a:buNone/>
             </a:pPr>
             <a:r>
-              <a:rPr b="0" lang="en-US" sz="900" spc="265" strike="noStrike">
+              <a:rPr b="0" lang="en-US" sz="900" spc="262" strike="noStrike">
                 <a:solidFill>
                   <a:srgbClr val="86868b"/>
                 </a:solidFill>
@@ -16014,7 +15994,7 @@
         <p:spPr>
           <a:xfrm>
             <a:off x="380880" y="647640"/>
-            <a:ext cx="11657880" cy="456480"/>
+            <a:ext cx="11657520" cy="456120"/>
           </a:xfrm>
           <a:prstGeom prst="rect">
             <a:avLst/>
@@ -16066,7 +16046,7 @@
         <p:spPr>
           <a:xfrm>
             <a:off x="380880" y="1714680"/>
-            <a:ext cx="875520" cy="570960"/>
+            <a:ext cx="875160" cy="570600"/>
           </a:xfrm>
           <a:prstGeom prst="rect">
             <a:avLst/>
@@ -16118,7 +16098,7 @@
         <p:spPr>
           <a:xfrm>
             <a:off x="1202760" y="1790640"/>
-            <a:ext cx="4628520" cy="304200"/>
+            <a:ext cx="4628160" cy="303840"/>
           </a:xfrm>
           <a:prstGeom prst="rect">
             <a:avLst/>
@@ -16170,7 +16150,7 @@
         <p:spPr>
           <a:xfrm>
             <a:off x="1202760" y="2209680"/>
-            <a:ext cx="4590360" cy="494640"/>
+            <a:ext cx="4590000" cy="494280"/>
           </a:xfrm>
           <a:prstGeom prst="rect">
             <a:avLst/>
@@ -16222,7 +16202,7 @@
         <p:spPr>
           <a:xfrm>
             <a:off x="6477120" y="1714680"/>
-            <a:ext cx="980280" cy="570960"/>
+            <a:ext cx="979920" cy="570600"/>
           </a:xfrm>
           <a:prstGeom prst="rect">
             <a:avLst/>
@@ -16274,7 +16254,7 @@
         <p:spPr>
           <a:xfrm>
             <a:off x="7402320" y="1790640"/>
-            <a:ext cx="4523760" cy="304200"/>
+            <a:ext cx="4523400" cy="303840"/>
           </a:xfrm>
           <a:prstGeom prst="rect">
             <a:avLst/>
@@ -16326,7 +16306,7 @@
         <p:spPr>
           <a:xfrm>
             <a:off x="7402320" y="2209680"/>
-            <a:ext cx="4485600" cy="494640"/>
+            <a:ext cx="4485240" cy="494280"/>
           </a:xfrm>
           <a:prstGeom prst="rect">
             <a:avLst/>
@@ -16378,7 +16358,7 @@
         <p:spPr>
           <a:xfrm>
             <a:off x="380880" y="4324320"/>
-            <a:ext cx="990000" cy="570960"/>
+            <a:ext cx="989640" cy="570600"/>
           </a:xfrm>
           <a:prstGeom prst="rect">
             <a:avLst/>
@@ -16430,7 +16410,7 @@
         <p:spPr>
           <a:xfrm>
             <a:off x="1311480" y="4400640"/>
-            <a:ext cx="4514040" cy="304200"/>
+            <a:ext cx="4513680" cy="303840"/>
           </a:xfrm>
           <a:prstGeom prst="rect">
             <a:avLst/>
@@ -16482,7 +16462,7 @@
         <p:spPr>
           <a:xfrm>
             <a:off x="1311480" y="4819680"/>
-            <a:ext cx="4475880" cy="494640"/>
+            <a:ext cx="4475520" cy="494280"/>
           </a:xfrm>
           <a:prstGeom prst="rect">
             <a:avLst/>
@@ -16534,7 +16514,7 @@
         <p:spPr>
           <a:xfrm>
             <a:off x="6477120" y="4324320"/>
-            <a:ext cx="990000" cy="570960"/>
+            <a:ext cx="989640" cy="570600"/>
           </a:xfrm>
           <a:prstGeom prst="rect">
             <a:avLst/>
@@ -16586,7 +16566,7 @@
         <p:spPr>
           <a:xfrm>
             <a:off x="7407000" y="4400640"/>
-            <a:ext cx="4514040" cy="304200"/>
+            <a:ext cx="4513680" cy="303840"/>
           </a:xfrm>
           <a:prstGeom prst="rect">
             <a:avLst/>
@@ -16638,7 +16618,7 @@
         <p:spPr>
           <a:xfrm>
             <a:off x="7407000" y="4819680"/>
-            <a:ext cx="4475880" cy="246960"/>
+            <a:ext cx="4475520" cy="246600"/>
           </a:xfrm>
           <a:prstGeom prst="rect">
             <a:avLst/>
@@ -16727,7 +16707,7 @@
         <p:spPr>
           <a:xfrm>
             <a:off x="380880" y="1665000"/>
-            <a:ext cx="761400" cy="18360"/>
+            <a:ext cx="761040" cy="18000"/>
           </a:xfrm>
           <a:custGeom>
             <a:avLst/>
@@ -16778,7 +16758,7 @@
         <p:spPr>
           <a:xfrm>
             <a:off x="380880" y="1989000"/>
-            <a:ext cx="9514800" cy="189720"/>
+            <a:ext cx="9514440" cy="189360"/>
           </a:xfrm>
           <a:prstGeom prst="rect">
             <a:avLst/>
@@ -16806,7 +16786,7 @@
               <a:buNone/>
             </a:pPr>
             <a:r>
-              <a:rPr b="0" lang="en-US" sz="1050" spc="310" strike="noStrike">
+              <a:rPr b="0" lang="en-US" sz="1050" spc="307" strike="noStrike">
                 <a:solidFill>
                   <a:srgbClr val="86868b"/>
                 </a:solidFill>
@@ -16830,7 +16810,7 @@
         <p:spPr>
           <a:xfrm>
             <a:off x="380880" y="2408040"/>
-            <a:ext cx="9905400" cy="1732680"/>
+            <a:ext cx="9905040" cy="1732320"/>
           </a:xfrm>
           <a:prstGeom prst="rect">
             <a:avLst/>
@@ -16903,7 +16883,7 @@
         <p:spPr>
           <a:xfrm>
             <a:off x="380880" y="4449960"/>
-            <a:ext cx="5600160" cy="742320"/>
+            <a:ext cx="5599800" cy="741960"/>
           </a:xfrm>
           <a:prstGeom prst="rect">
             <a:avLst/>
@@ -16955,7 +16935,7 @@
         <p:spPr>
           <a:xfrm>
             <a:off x="9833760" y="2476440"/>
-            <a:ext cx="2932920" cy="1904400"/>
+            <a:ext cx="2932560" cy="1904040"/>
           </a:xfrm>
           <a:prstGeom prst="rect">
             <a:avLst/>
@@ -17044,7 +17024,7 @@
         <p:spPr>
           <a:xfrm>
             <a:off x="380880" y="380880"/>
-            <a:ext cx="11486520" cy="151560"/>
+            <a:ext cx="11486160" cy="151200"/>
           </a:xfrm>
           <a:prstGeom prst="rect">
             <a:avLst/>
@@ -17072,7 +17052,7 @@
               <a:buNone/>
             </a:pPr>
             <a:r>
-              <a:rPr b="0" lang="en-US" sz="900" spc="265" strike="noStrike">
+              <a:rPr b="0" lang="en-US" sz="900" spc="262" strike="noStrike">
                 <a:solidFill>
                   <a:srgbClr val="86868b"/>
                 </a:solidFill>
@@ -17096,7 +17076,7 @@
         <p:spPr>
           <a:xfrm>
             <a:off x="380880" y="609480"/>
-            <a:ext cx="11600640" cy="380160"/>
+            <a:ext cx="11600280" cy="379800"/>
           </a:xfrm>
           <a:prstGeom prst="rect">
             <a:avLst/>
@@ -17124,19 +17104,21 @@
               <a:buNone/>
             </a:pPr>
             <a:r>
-              <a:rPr b="0" lang="en-US" sz="2700" spc="-1" strike="noStrike">
+              <a:rPr b="1" lang="en-US" sz="2700" spc="-1" strike="noStrike" u="sng">
                 <a:solidFill>
                   <a:srgbClr val="800080"/>
                 </a:solidFill>
+                <a:uFillTx/>
                 <a:latin typeface="Liter"/>
                 <a:ea typeface="Liter"/>
               </a:rPr>
               <a:t>The Surprising Question</a:t>
             </a:r>
-            <a:endParaRPr b="0" lang="en-HK" sz="2700" spc="-1" strike="noStrike">
+            <a:endParaRPr b="1" lang="en-HK" sz="2700" spc="-1" strike="noStrike" u="sng">
               <a:solidFill>
                 <a:srgbClr val="800080"/>
               </a:solidFill>
+              <a:uFillTx/>
               <a:latin typeface="Arial"/>
             </a:endParaRPr>
           </a:p>
@@ -17151,7 +17133,7 @@
         <p:spPr>
           <a:xfrm>
             <a:off x="380880" y="1824120"/>
-            <a:ext cx="8647920" cy="742320"/>
+            <a:ext cx="8647560" cy="741960"/>
           </a:xfrm>
           <a:prstGeom prst="rect">
             <a:avLst/>
@@ -17213,7 +17195,7 @@
         <p:spPr>
           <a:xfrm>
             <a:off x="380880" y="3338640"/>
-            <a:ext cx="5485680" cy="18360"/>
+            <a:ext cx="5485320" cy="18000"/>
           </a:xfrm>
           <a:custGeom>
             <a:avLst/>
@@ -17264,7 +17246,7 @@
         <p:spPr>
           <a:xfrm>
             <a:off x="380880" y="3576600"/>
-            <a:ext cx="5552280" cy="189720"/>
+            <a:ext cx="5551920" cy="189360"/>
           </a:xfrm>
           <a:prstGeom prst="rect">
             <a:avLst/>
@@ -17292,7 +17274,7 @@
               <a:buNone/>
             </a:pPr>
             <a:r>
-              <a:rPr b="0" lang="en-US" sz="1050" spc="205" strike="noStrike">
+              <a:rPr b="0" lang="en-US" sz="1050" spc="202" strike="noStrike">
                 <a:solidFill>
                   <a:srgbClr val="86868b"/>
                 </a:solidFill>
@@ -17316,7 +17298,7 @@
         <p:spPr>
           <a:xfrm>
             <a:off x="380880" y="3919680"/>
-            <a:ext cx="1837440" cy="685080"/>
+            <a:ext cx="1837080" cy="684720"/>
           </a:xfrm>
           <a:prstGeom prst="rect">
             <a:avLst/>
@@ -17368,7 +17350,7 @@
         <p:spPr>
           <a:xfrm>
             <a:off x="1991160" y="4286160"/>
-            <a:ext cx="666000" cy="266040"/>
+            <a:ext cx="665640" cy="265680"/>
           </a:xfrm>
           <a:prstGeom prst="rect">
             <a:avLst/>
@@ -17420,7 +17402,7 @@
         <p:spPr>
           <a:xfrm>
             <a:off x="380880" y="4757760"/>
-            <a:ext cx="5562000" cy="246960"/>
+            <a:ext cx="5561640" cy="246600"/>
           </a:xfrm>
           <a:prstGeom prst="rect">
             <a:avLst/>
@@ -17472,7 +17454,7 @@
         <p:spPr>
           <a:xfrm>
             <a:off x="6324480" y="3338640"/>
-            <a:ext cx="5485680" cy="18360"/>
+            <a:ext cx="5485320" cy="18000"/>
           </a:xfrm>
           <a:custGeom>
             <a:avLst/>
@@ -17523,7 +17505,7 @@
         <p:spPr>
           <a:xfrm>
             <a:off x="6324480" y="3576600"/>
-            <a:ext cx="5552280" cy="189720"/>
+            <a:ext cx="5551920" cy="189360"/>
           </a:xfrm>
           <a:prstGeom prst="rect">
             <a:avLst/>
@@ -17551,7 +17533,7 @@
               <a:buNone/>
             </a:pPr>
             <a:r>
-              <a:rPr b="0" lang="en-US" sz="1050" spc="205" strike="noStrike">
+              <a:rPr b="0" lang="en-US" sz="1050" spc="202" strike="noStrike">
                 <a:solidFill>
                   <a:srgbClr val="0071e3"/>
                 </a:solidFill>
@@ -17575,7 +17557,7 @@
         <p:spPr>
           <a:xfrm>
             <a:off x="6324480" y="3919680"/>
-            <a:ext cx="1142280" cy="685080"/>
+            <a:ext cx="1141920" cy="684720"/>
           </a:xfrm>
           <a:prstGeom prst="rect">
             <a:avLst/>
@@ -17627,7 +17609,7 @@
         <p:spPr>
           <a:xfrm>
             <a:off x="7242120" y="4286160"/>
-            <a:ext cx="666000" cy="266040"/>
+            <a:ext cx="665640" cy="265680"/>
           </a:xfrm>
           <a:prstGeom prst="rect">
             <a:avLst/>
@@ -17679,7 +17661,7 @@
         <p:spPr>
           <a:xfrm>
             <a:off x="6324480" y="4757760"/>
-            <a:ext cx="5562000" cy="494640"/>
+            <a:ext cx="5561640" cy="494280"/>
           </a:xfrm>
           <a:prstGeom prst="rect">
             <a:avLst/>
@@ -17751,7 +17733,7 @@
         <p:spPr>
           <a:xfrm>
             <a:off x="380880" y="6014880"/>
-            <a:ext cx="11429280" cy="8640"/>
+            <a:ext cx="11428920" cy="8280"/>
           </a:xfrm>
           <a:custGeom>
             <a:avLst/>
@@ -17802,7 +17784,7 @@
         <p:spPr>
           <a:xfrm>
             <a:off x="419040" y="6286680"/>
-            <a:ext cx="113760" cy="151560"/>
+            <a:ext cx="113400" cy="151200"/>
           </a:xfrm>
           <a:custGeom>
             <a:avLst/>
@@ -17934,7 +17916,7 @@
         <p:spPr>
           <a:xfrm>
             <a:off x="628560" y="6248520"/>
-            <a:ext cx="11257920" cy="227880"/>
+            <a:ext cx="11257560" cy="227520"/>
           </a:xfrm>
           <a:prstGeom prst="rect">
             <a:avLst/>
@@ -18033,7 +18015,7 @@
         <p:spPr>
           <a:xfrm>
             <a:off x="380880" y="380880"/>
-            <a:ext cx="11486520" cy="151560"/>
+            <a:ext cx="11486160" cy="151200"/>
           </a:xfrm>
           <a:prstGeom prst="rect">
             <a:avLst/>
@@ -18061,7 +18043,7 @@
               <a:buNone/>
             </a:pPr>
             <a:r>
-              <a:rPr b="0" lang="en-US" sz="900" spc="265" strike="noStrike">
+              <a:rPr b="0" lang="en-US" sz="900" spc="262" strike="noStrike">
                 <a:solidFill>
                   <a:srgbClr val="86868b"/>
                 </a:solidFill>
@@ -18085,7 +18067,7 @@
         <p:spPr>
           <a:xfrm>
             <a:off x="380880" y="609480"/>
-            <a:ext cx="11600640" cy="380160"/>
+            <a:ext cx="11600280" cy="379800"/>
           </a:xfrm>
           <a:prstGeom prst="rect">
             <a:avLst/>
@@ -18137,7 +18119,7 @@
         <p:spPr>
           <a:xfrm>
             <a:off x="380880" y="1219320"/>
-            <a:ext cx="6114240" cy="5257080"/>
+            <a:ext cx="6113880" cy="5256720"/>
           </a:xfrm>
           <a:prstGeom prst="roundRect">
             <a:avLst>
@@ -18169,7 +18151,7 @@
         <p:spPr>
           <a:xfrm>
             <a:off x="6814080" y="1504800"/>
-            <a:ext cx="18360" cy="990000"/>
+            <a:ext cx="18000" cy="989640"/>
           </a:xfrm>
           <a:custGeom>
             <a:avLst/>
@@ -18220,7 +18202,7 @@
         <p:spPr>
           <a:xfrm>
             <a:off x="7014240" y="1504800"/>
-            <a:ext cx="570960" cy="380160"/>
+            <a:ext cx="570600" cy="379800"/>
           </a:xfrm>
           <a:prstGeom prst="rect">
             <a:avLst/>
@@ -18272,7 +18254,7 @@
         <p:spPr>
           <a:xfrm>
             <a:off x="7530120" y="1614600"/>
-            <a:ext cx="599400" cy="266040"/>
+            <a:ext cx="599040" cy="265680"/>
           </a:xfrm>
           <a:prstGeom prst="rect">
             <a:avLst/>
@@ -18324,7 +18306,7 @@
         <p:spPr>
           <a:xfrm>
             <a:off x="7014240" y="1924200"/>
-            <a:ext cx="4942800" cy="342360"/>
+            <a:ext cx="4942440" cy="342000"/>
           </a:xfrm>
           <a:prstGeom prst="rect">
             <a:avLst/>
@@ -18376,7 +18358,7 @@
         <p:spPr>
           <a:xfrm>
             <a:off x="7014240" y="2305080"/>
-            <a:ext cx="4866480" cy="189720"/>
+            <a:ext cx="4866120" cy="189360"/>
           </a:xfrm>
           <a:prstGeom prst="rect">
             <a:avLst/>
@@ -18428,7 +18410,7 @@
         <p:spPr>
           <a:xfrm>
             <a:off x="6814080" y="2647800"/>
-            <a:ext cx="18360" cy="723240"/>
+            <a:ext cx="18000" cy="722880"/>
           </a:xfrm>
           <a:custGeom>
             <a:avLst/>
@@ -18479,7 +18461,7 @@
         <p:spPr>
           <a:xfrm>
             <a:off x="7014240" y="2647800"/>
-            <a:ext cx="494640" cy="342360"/>
+            <a:ext cx="494280" cy="342000"/>
           </a:xfrm>
           <a:prstGeom prst="rect">
             <a:avLst/>
@@ -18531,7 +18513,7 @@
         <p:spPr>
           <a:xfrm>
             <a:off x="7479360" y="2747880"/>
-            <a:ext cx="532800" cy="227880"/>
+            <a:ext cx="532440" cy="227520"/>
           </a:xfrm>
           <a:prstGeom prst="rect">
             <a:avLst/>
@@ -18583,7 +18565,7 @@
         <p:spPr>
           <a:xfrm>
             <a:off x="7014240" y="3029040"/>
-            <a:ext cx="4914360" cy="304200"/>
+            <a:ext cx="4914000" cy="303840"/>
           </a:xfrm>
           <a:prstGeom prst="rect">
             <a:avLst/>
@@ -18635,7 +18617,7 @@
         <p:spPr>
           <a:xfrm>
             <a:off x="6814080" y="3524400"/>
-            <a:ext cx="18360" cy="723240"/>
+            <a:ext cx="18000" cy="722880"/>
           </a:xfrm>
           <a:custGeom>
             <a:avLst/>
@@ -18686,7 +18668,7 @@
         <p:spPr>
           <a:xfrm>
             <a:off x="7014240" y="3524400"/>
-            <a:ext cx="484920" cy="342360"/>
+            <a:ext cx="484560" cy="342000"/>
           </a:xfrm>
           <a:prstGeom prst="rect">
             <a:avLst/>
@@ -18738,7 +18720,7 @@
         <p:spPr>
           <a:xfrm>
             <a:off x="7475400" y="3624120"/>
-            <a:ext cx="532800" cy="227880"/>
+            <a:ext cx="532440" cy="227520"/>
           </a:xfrm>
           <a:prstGeom prst="rect">
             <a:avLst/>
@@ -18790,7 +18772,7 @@
         <p:spPr>
           <a:xfrm>
             <a:off x="7014240" y="3905280"/>
-            <a:ext cx="4914360" cy="304200"/>
+            <a:ext cx="4914000" cy="303840"/>
           </a:xfrm>
           <a:prstGeom prst="rect">
             <a:avLst/>
@@ -18842,7 +18824,7 @@
         <p:spPr>
           <a:xfrm>
             <a:off x="6814080" y="4400640"/>
-            <a:ext cx="18360" cy="723240"/>
+            <a:ext cx="18000" cy="722880"/>
           </a:xfrm>
           <a:custGeom>
             <a:avLst/>
@@ -18893,7 +18875,7 @@
         <p:spPr>
           <a:xfrm>
             <a:off x="7014240" y="4400640"/>
-            <a:ext cx="494640" cy="342360"/>
+            <a:ext cx="494280" cy="342000"/>
           </a:xfrm>
           <a:prstGeom prst="rect">
             <a:avLst/>
@@ -18945,7 +18927,7 @@
         <p:spPr>
           <a:xfrm>
             <a:off x="7481880" y="4500720"/>
-            <a:ext cx="532800" cy="227880"/>
+            <a:ext cx="532440" cy="227520"/>
           </a:xfrm>
           <a:prstGeom prst="rect">
             <a:avLst/>
@@ -18997,7 +18979,7 @@
         <p:spPr>
           <a:xfrm>
             <a:off x="7014240" y="4781520"/>
-            <a:ext cx="4914360" cy="304200"/>
+            <a:ext cx="4914000" cy="303840"/>
           </a:xfrm>
           <a:prstGeom prst="rect">
             <a:avLst/>
@@ -19049,7 +19031,7 @@
         <p:spPr>
           <a:xfrm>
             <a:off x="6814080" y="5276880"/>
-            <a:ext cx="18360" cy="913680"/>
+            <a:ext cx="18000" cy="913320"/>
           </a:xfrm>
           <a:custGeom>
             <a:avLst/>
@@ -19100,7 +19082,7 @@
         <p:spPr>
           <a:xfrm>
             <a:off x="7014240" y="5276880"/>
-            <a:ext cx="456480" cy="342360"/>
+            <a:ext cx="456120" cy="342000"/>
           </a:xfrm>
           <a:prstGeom prst="rect">
             <a:avLst/>
@@ -19152,7 +19134,7 @@
         <p:spPr>
           <a:xfrm>
             <a:off x="7439400" y="5376960"/>
-            <a:ext cx="532800" cy="227880"/>
+            <a:ext cx="532440" cy="227520"/>
           </a:xfrm>
           <a:prstGeom prst="rect">
             <a:avLst/>
@@ -19204,7 +19186,7 @@
         <p:spPr>
           <a:xfrm>
             <a:off x="7014240" y="5657760"/>
-            <a:ext cx="4914360" cy="304200"/>
+            <a:ext cx="4914000" cy="303840"/>
           </a:xfrm>
           <a:prstGeom prst="rect">
             <a:avLst/>
@@ -19256,7 +19238,7 @@
         <p:spPr>
           <a:xfrm>
             <a:off x="7014240" y="6000840"/>
-            <a:ext cx="4866480" cy="189720"/>
+            <a:ext cx="4866120" cy="189360"/>
           </a:xfrm>
           <a:prstGeom prst="rect">
             <a:avLst/>
@@ -19382,7 +19364,7 @@
         <p:spPr>
           <a:xfrm>
             <a:off x="380880" y="1850760"/>
-            <a:ext cx="761400" cy="18360"/>
+            <a:ext cx="761040" cy="18000"/>
           </a:xfrm>
           <a:custGeom>
             <a:avLst/>
@@ -19433,7 +19415,7 @@
         <p:spPr>
           <a:xfrm>
             <a:off x="380880" y="2174760"/>
-            <a:ext cx="9171720" cy="189720"/>
+            <a:ext cx="9171360" cy="189360"/>
           </a:xfrm>
           <a:prstGeom prst="rect">
             <a:avLst/>
@@ -19461,7 +19443,7 @@
               <a:buNone/>
             </a:pPr>
             <a:r>
-              <a:rPr b="0" lang="en-US" sz="1050" spc="310" strike="noStrike">
+              <a:rPr b="0" lang="en-US" sz="1050" spc="307" strike="noStrike">
                 <a:solidFill>
                   <a:srgbClr val="86868b"/>
                 </a:solidFill>
@@ -19485,7 +19467,7 @@
         <p:spPr>
           <a:xfrm>
             <a:off x="380880" y="2593800"/>
-            <a:ext cx="9562320" cy="1732680"/>
+            <a:ext cx="9561960" cy="1732320"/>
           </a:xfrm>
           <a:prstGeom prst="rect">
             <a:avLst/>
@@ -19558,7 +19540,7 @@
         <p:spPr>
           <a:xfrm>
             <a:off x="380880" y="4635720"/>
-            <a:ext cx="5600160" cy="370800"/>
+            <a:ext cx="5599800" cy="370440"/>
           </a:xfrm>
           <a:prstGeom prst="rect">
             <a:avLst/>
@@ -19610,7 +19592,7 @@
         <p:spPr>
           <a:xfrm>
             <a:off x="9488880" y="2476440"/>
-            <a:ext cx="3276000" cy="1904400"/>
+            <a:ext cx="3275640" cy="1904040"/>
           </a:xfrm>
           <a:prstGeom prst="rect">
             <a:avLst/>
@@ -19699,7 +19681,7 @@
         <p:spPr>
           <a:xfrm>
             <a:off x="380880" y="380880"/>
-            <a:ext cx="11486520" cy="151560"/>
+            <a:ext cx="11486160" cy="151200"/>
           </a:xfrm>
           <a:prstGeom prst="rect">
             <a:avLst/>
@@ -19727,7 +19709,7 @@
               <a:buNone/>
             </a:pPr>
             <a:r>
-              <a:rPr b="0" lang="en-US" sz="900" spc="265" strike="noStrike">
+              <a:rPr b="0" lang="en-US" sz="900" spc="262" strike="noStrike">
                 <a:solidFill>
                   <a:srgbClr val="86868b"/>
                 </a:solidFill>
@@ -19751,7 +19733,7 @@
         <p:spPr>
           <a:xfrm>
             <a:off x="380880" y="609480"/>
-            <a:ext cx="11600640" cy="380160"/>
+            <a:ext cx="11600280" cy="379800"/>
           </a:xfrm>
           <a:prstGeom prst="rect">
             <a:avLst/>
@@ -19803,7 +19785,7 @@
         <p:spPr>
           <a:xfrm>
             <a:off x="380880" y="1952640"/>
-            <a:ext cx="8628840" cy="618480"/>
+            <a:ext cx="8628480" cy="618120"/>
           </a:xfrm>
           <a:prstGeom prst="rect">
             <a:avLst/>
@@ -19895,7 +19877,7 @@
         <p:spPr>
           <a:xfrm>
             <a:off x="385920" y="2805120"/>
-            <a:ext cx="4028400" cy="808920"/>
+            <a:ext cx="4028040" cy="808560"/>
           </a:xfrm>
           <a:custGeom>
             <a:avLst/>
@@ -19947,7 +19929,7 @@
         <p:spPr>
           <a:xfrm>
             <a:off x="695160" y="3038400"/>
-            <a:ext cx="3552120" cy="342360"/>
+            <a:ext cx="3551760" cy="342000"/>
           </a:xfrm>
           <a:prstGeom prst="rect">
             <a:avLst/>
@@ -19999,7 +19981,7 @@
         <p:spPr>
           <a:xfrm>
             <a:off x="380880" y="4000680"/>
-            <a:ext cx="5590440" cy="189720"/>
+            <a:ext cx="5590080" cy="189360"/>
           </a:xfrm>
           <a:prstGeom prst="rect">
             <a:avLst/>
@@ -20027,7 +20009,7 @@
               <a:buNone/>
             </a:pPr>
             <a:r>
-              <a:rPr b="0" lang="en-US" sz="1050" spc="205" strike="noStrike">
+              <a:rPr b="0" lang="en-US" sz="1050" spc="202" strike="noStrike">
                 <a:solidFill>
                   <a:srgbClr val="86868b"/>
                 </a:solidFill>
@@ -20051,7 +20033,7 @@
         <p:spPr>
           <a:xfrm>
             <a:off x="380880" y="4343400"/>
-            <a:ext cx="5600160" cy="494640"/>
+            <a:ext cx="5599800" cy="494280"/>
           </a:xfrm>
           <a:prstGeom prst="rect">
             <a:avLst/>
@@ -20103,7 +20085,7 @@
         <p:spPr>
           <a:xfrm>
             <a:off x="380880" y="4991040"/>
-            <a:ext cx="5600160" cy="246960"/>
+            <a:ext cx="5599800" cy="246600"/>
           </a:xfrm>
           <a:prstGeom prst="rect">
             <a:avLst/>
@@ -20155,7 +20137,7 @@
         <p:spPr>
           <a:xfrm>
             <a:off x="6286680" y="4000680"/>
-            <a:ext cx="5590440" cy="189720"/>
+            <a:ext cx="5590080" cy="189360"/>
           </a:xfrm>
           <a:prstGeom prst="rect">
             <a:avLst/>
@@ -20183,7 +20165,7 @@
               <a:buNone/>
             </a:pPr>
             <a:r>
-              <a:rPr b="0" lang="en-US" sz="1050" spc="205" strike="noStrike">
+              <a:rPr b="0" lang="en-US" sz="1050" spc="202" strike="noStrike">
                 <a:solidFill>
                   <a:srgbClr val="86868b"/>
                 </a:solidFill>
@@ -20207,7 +20189,7 @@
         <p:spPr>
           <a:xfrm>
             <a:off x="6286680" y="4343400"/>
-            <a:ext cx="5600160" cy="494640"/>
+            <a:ext cx="5599800" cy="494280"/>
           </a:xfrm>
           <a:prstGeom prst="rect">
             <a:avLst/>
@@ -20259,7 +20241,7 @@
         <p:spPr>
           <a:xfrm>
             <a:off x="6286680" y="4991040"/>
-            <a:ext cx="5600160" cy="246960"/>
+            <a:ext cx="5599800" cy="246600"/>
           </a:xfrm>
           <a:prstGeom prst="rect">
             <a:avLst/>
@@ -20311,7 +20293,7 @@
         <p:spPr>
           <a:xfrm>
             <a:off x="380880" y="6129360"/>
-            <a:ext cx="11429280" cy="8640"/>
+            <a:ext cx="11428920" cy="8280"/>
           </a:xfrm>
           <a:custGeom>
             <a:avLst/>
@@ -20362,7 +20344,7 @@
         <p:spPr>
           <a:xfrm>
             <a:off x="399960" y="6315120"/>
-            <a:ext cx="132480" cy="132480"/>
+            <a:ext cx="132120" cy="132120"/>
           </a:xfrm>
           <a:custGeom>
             <a:avLst/>
@@ -20505,7 +20487,7 @@
         <p:spPr>
           <a:xfrm>
             <a:off x="609480" y="6286680"/>
-            <a:ext cx="11267280" cy="189720"/>
+            <a:ext cx="11266920" cy="189360"/>
           </a:xfrm>
           <a:prstGeom prst="rect">
             <a:avLst/>
@@ -20604,7 +20586,7 @@
         <p:spPr>
           <a:xfrm>
             <a:off x="380880" y="380880"/>
-            <a:ext cx="11486520" cy="151560"/>
+            <a:ext cx="11486160" cy="151200"/>
           </a:xfrm>
           <a:prstGeom prst="rect">
             <a:avLst/>
@@ -20632,7 +20614,7 @@
               <a:buNone/>
             </a:pPr>
             <a:r>
-              <a:rPr b="0" lang="en-US" sz="900" spc="265" strike="noStrike">
+              <a:rPr b="0" lang="en-US" sz="900" spc="262" strike="noStrike">
                 <a:solidFill>
                   <a:srgbClr val="86868b"/>
                 </a:solidFill>
@@ -20656,7 +20638,7 @@
         <p:spPr>
           <a:xfrm>
             <a:off x="380880" y="609480"/>
-            <a:ext cx="11600640" cy="380160"/>
+            <a:ext cx="11600280" cy="379800"/>
           </a:xfrm>
           <a:prstGeom prst="rect">
             <a:avLst/>
@@ -20708,7 +20690,7 @@
         <p:spPr>
           <a:xfrm>
             <a:off x="385920" y="1576440"/>
-            <a:ext cx="447120" cy="447120"/>
+            <a:ext cx="446760" cy="446760"/>
           </a:xfrm>
           <a:custGeom>
             <a:avLst/>
@@ -20760,7 +20742,7 @@
         <p:spPr>
           <a:xfrm>
             <a:off x="333360" y="1571760"/>
-            <a:ext cx="532800" cy="437400"/>
+            <a:ext cx="532440" cy="437040"/>
           </a:xfrm>
           <a:prstGeom prst="rect">
             <a:avLst/>
@@ -20812,7 +20794,7 @@
         <p:spPr>
           <a:xfrm>
             <a:off x="1066680" y="1533600"/>
-            <a:ext cx="10829160" cy="266040"/>
+            <a:ext cx="10828800" cy="265680"/>
           </a:xfrm>
           <a:prstGeom prst="rect">
             <a:avLst/>
@@ -20864,7 +20846,7 @@
         <p:spPr>
           <a:xfrm>
             <a:off x="1066680" y="1838160"/>
-            <a:ext cx="10819800" cy="227880"/>
+            <a:ext cx="10819440" cy="227520"/>
           </a:xfrm>
           <a:prstGeom prst="rect">
             <a:avLst/>
@@ -20926,7 +20908,7 @@
         <p:spPr>
           <a:xfrm>
             <a:off x="385920" y="2262240"/>
-            <a:ext cx="447120" cy="447120"/>
+            <a:ext cx="446760" cy="446760"/>
           </a:xfrm>
           <a:custGeom>
             <a:avLst/>
@@ -20978,7 +20960,7 @@
         <p:spPr>
           <a:xfrm>
             <a:off x="333360" y="2257560"/>
-            <a:ext cx="532800" cy="437400"/>
+            <a:ext cx="532440" cy="437040"/>
           </a:xfrm>
           <a:prstGeom prst="rect">
             <a:avLst/>
@@ -21030,7 +21012,7 @@
         <p:spPr>
           <a:xfrm>
             <a:off x="1066680" y="2219400"/>
-            <a:ext cx="10829160" cy="266040"/>
+            <a:ext cx="10828800" cy="265680"/>
           </a:xfrm>
           <a:prstGeom prst="rect">
             <a:avLst/>
@@ -21082,7 +21064,7 @@
         <p:spPr>
           <a:xfrm>
             <a:off x="1066680" y="2523960"/>
-            <a:ext cx="10819800" cy="227880"/>
+            <a:ext cx="10819440" cy="227520"/>
           </a:xfrm>
           <a:prstGeom prst="rect">
             <a:avLst/>
@@ -21144,7 +21126,7 @@
         <p:spPr>
           <a:xfrm>
             <a:off x="385920" y="2948040"/>
-            <a:ext cx="447120" cy="447120"/>
+            <a:ext cx="446760" cy="446760"/>
           </a:xfrm>
           <a:custGeom>
             <a:avLst/>
@@ -21196,7 +21178,7 @@
         <p:spPr>
           <a:xfrm>
             <a:off x="333360" y="2943360"/>
-            <a:ext cx="532800" cy="437400"/>
+            <a:ext cx="532440" cy="437040"/>
           </a:xfrm>
           <a:prstGeom prst="rect">
             <a:avLst/>
@@ -21248,7 +21230,7 @@
         <p:spPr>
           <a:xfrm>
             <a:off x="1066680" y="2905200"/>
-            <a:ext cx="10829160" cy="266040"/>
+            <a:ext cx="10828800" cy="265680"/>
           </a:xfrm>
           <a:prstGeom prst="rect">
             <a:avLst/>
@@ -21300,7 +21282,7 @@
         <p:spPr>
           <a:xfrm>
             <a:off x="1066680" y="3209760"/>
-            <a:ext cx="10819800" cy="227880"/>
+            <a:ext cx="10819440" cy="227520"/>
           </a:xfrm>
           <a:prstGeom prst="rect">
             <a:avLst/>
@@ -21362,7 +21344,7 @@
         <p:spPr>
           <a:xfrm>
             <a:off x="385920" y="3595680"/>
-            <a:ext cx="447120" cy="447120"/>
+            <a:ext cx="446760" cy="446760"/>
           </a:xfrm>
           <a:custGeom>
             <a:avLst/>
@@ -21414,7 +21396,7 @@
         <p:spPr>
           <a:xfrm>
             <a:off x="333360" y="3591000"/>
-            <a:ext cx="532800" cy="437400"/>
+            <a:ext cx="532440" cy="437040"/>
           </a:xfrm>
           <a:prstGeom prst="rect">
             <a:avLst/>
@@ -21466,7 +21448,7 @@
         <p:spPr>
           <a:xfrm>
             <a:off x="1066680" y="3686040"/>
-            <a:ext cx="10829160" cy="266040"/>
+            <a:ext cx="10828800" cy="265680"/>
           </a:xfrm>
           <a:prstGeom prst="rect">
             <a:avLst/>
@@ -21518,7 +21500,7 @@
         <p:spPr>
           <a:xfrm>
             <a:off x="385920" y="4243320"/>
-            <a:ext cx="447120" cy="447120"/>
+            <a:ext cx="446760" cy="446760"/>
           </a:xfrm>
           <a:custGeom>
             <a:avLst/>
@@ -21570,7 +21552,7 @@
         <p:spPr>
           <a:xfrm>
             <a:off x="333360" y="4238640"/>
-            <a:ext cx="532800" cy="437400"/>
+            <a:ext cx="532440" cy="437040"/>
           </a:xfrm>
           <a:prstGeom prst="rect">
             <a:avLst/>
@@ -21622,7 +21604,7 @@
         <p:spPr>
           <a:xfrm>
             <a:off x="1066680" y="4200480"/>
-            <a:ext cx="10829160" cy="266040"/>
+            <a:ext cx="10828800" cy="265680"/>
           </a:xfrm>
           <a:prstGeom prst="rect">
             <a:avLst/>
@@ -21674,7 +21656,7 @@
         <p:spPr>
           <a:xfrm>
             <a:off x="1066680" y="4505400"/>
-            <a:ext cx="10819800" cy="227880"/>
+            <a:ext cx="10819440" cy="227520"/>
           </a:xfrm>
           <a:prstGeom prst="rect">
             <a:avLst/>
@@ -21736,7 +21718,7 @@
         <p:spPr>
           <a:xfrm>
             <a:off x="380880" y="4971960"/>
-            <a:ext cx="11429280" cy="18360"/>
+            <a:ext cx="11428920" cy="18000"/>
           </a:xfrm>
           <a:custGeom>
             <a:avLst/>
@@ -21787,7 +21769,7 @@
         <p:spPr>
           <a:xfrm>
             <a:off x="380880" y="5210280"/>
-            <a:ext cx="11495880" cy="189720"/>
+            <a:ext cx="11495520" cy="189360"/>
           </a:xfrm>
           <a:prstGeom prst="rect">
             <a:avLst/>
@@ -21815,7 +21797,7 @@
               <a:buNone/>
             </a:pPr>
             <a:r>
-              <a:rPr b="0" lang="en-US" sz="1050" spc="205" strike="noStrike">
+              <a:rPr b="0" lang="en-US" sz="1050" spc="202" strike="noStrike">
                 <a:solidFill>
                   <a:srgbClr val="86868b"/>
                 </a:solidFill>
@@ -21839,7 +21821,7 @@
         <p:spPr>
           <a:xfrm>
             <a:off x="380880" y="5514840"/>
-            <a:ext cx="11524680" cy="266040"/>
+            <a:ext cx="11524320" cy="265680"/>
           </a:xfrm>
           <a:prstGeom prst="rect">
             <a:avLst/>
@@ -21891,7 +21873,7 @@
         <p:spPr>
           <a:xfrm>
             <a:off x="380880" y="5896080"/>
-            <a:ext cx="11514960" cy="266040"/>
+            <a:ext cx="11514600" cy="265680"/>
           </a:xfrm>
           <a:prstGeom prst="rect">
             <a:avLst/>

--- a/assets/libreoffice_impr_njc/456c4488-c4c4-475f-b671-0556dac8696a/The Birthday Paradox.pptx
+++ b/assets/libreoffice_impr_njc/456c4488-c4c4-475f-b671-0556dac8696a/The Birthday Paradox.pptx
@@ -308,7 +308,7 @@
             <a:pPr algn="r">
               <a:buNone/>
             </a:pPr>
-            <a:fld id="{0D66BADE-4011-40C4-8484-48FE0EDFC430}" type="slidenum">
+            <a:fld id="{5F482E9B-EC34-4EDF-A787-AB0F7FAA543E}" type="slidenum">
               <a:rPr b="0" lang="en-HK" sz="1400" spc="-1" strike="noStrike">
                 <a:latin typeface="Times New Roman"/>
               </a:rPr>
@@ -356,7 +356,7 @@
         <p:spPr>
           <a:xfrm>
             <a:off x="685800" y="1143000"/>
-            <a:ext cx="5485320" cy="3085200"/>
+            <a:ext cx="5484960" cy="3084840"/>
           </a:xfrm>
           <a:prstGeom prst="rect">
             <a:avLst/>
@@ -379,7 +379,7 @@
         <p:spPr>
           <a:xfrm>
             <a:off x="685800" y="4400640"/>
-            <a:ext cx="5485320" cy="3599280"/>
+            <a:ext cx="5484960" cy="3598920"/>
           </a:xfrm>
           <a:prstGeom prst="rect">
             <a:avLst/>
@@ -413,7 +413,7 @@
         <p:spPr>
           <a:xfrm>
             <a:off x="3884760" y="8685360"/>
-            <a:ext cx="2970720" cy="457560"/>
+            <a:ext cx="2970360" cy="457200"/>
           </a:xfrm>
           <a:prstGeom prst="rect">
             <a:avLst/>
@@ -445,7 +445,7 @@
               </a:lnSpc>
               <a:buNone/>
             </a:pPr>
-            <a:fld id="{B32A9CE2-732E-4119-917D-D142F2856DBA}" type="slidenum">
+            <a:fld id="{F269D744-2B15-480F-A704-99F9651D04E2}" type="slidenum">
               <a:rPr b="0" lang="en-US" sz="1200" spc="-1" strike="noStrike">
                 <a:latin typeface="Times New Roman"/>
               </a:rPr>
@@ -492,7 +492,7 @@
         <p:spPr>
           <a:xfrm>
             <a:off x="685800" y="1143000"/>
-            <a:ext cx="5485320" cy="3085200"/>
+            <a:ext cx="5484960" cy="3084840"/>
           </a:xfrm>
           <a:prstGeom prst="rect">
             <a:avLst/>
@@ -515,7 +515,7 @@
         <p:spPr>
           <a:xfrm>
             <a:off x="685800" y="4400640"/>
-            <a:ext cx="5485320" cy="3599280"/>
+            <a:ext cx="5484960" cy="3598920"/>
           </a:xfrm>
           <a:prstGeom prst="rect">
             <a:avLst/>
@@ -549,7 +549,7 @@
         <p:spPr>
           <a:xfrm>
             <a:off x="3884760" y="8685360"/>
-            <a:ext cx="2970720" cy="457560"/>
+            <a:ext cx="2970360" cy="457200"/>
           </a:xfrm>
           <a:prstGeom prst="rect">
             <a:avLst/>
@@ -581,7 +581,7 @@
               </a:lnSpc>
               <a:buNone/>
             </a:pPr>
-            <a:fld id="{B7366A71-064F-4D81-8C73-2213E8679677}" type="slidenum">
+            <a:fld id="{F41DF54C-D7FF-46BF-A17C-07B3F33D8487}" type="slidenum">
               <a:rPr b="0" lang="en-US" sz="1200" spc="-1" strike="noStrike">
                 <a:latin typeface="Times New Roman"/>
               </a:rPr>
@@ -628,7 +628,7 @@
         <p:spPr>
           <a:xfrm>
             <a:off x="685800" y="1143000"/>
-            <a:ext cx="5485320" cy="3085200"/>
+            <a:ext cx="5484960" cy="3084840"/>
           </a:xfrm>
           <a:prstGeom prst="rect">
             <a:avLst/>
@@ -651,7 +651,7 @@
         <p:spPr>
           <a:xfrm>
             <a:off x="685800" y="4400640"/>
-            <a:ext cx="5485320" cy="3599280"/>
+            <a:ext cx="5484960" cy="3598920"/>
           </a:xfrm>
           <a:prstGeom prst="rect">
             <a:avLst/>
@@ -685,7 +685,7 @@
         <p:spPr>
           <a:xfrm>
             <a:off x="3884760" y="8685360"/>
-            <a:ext cx="2970720" cy="457560"/>
+            <a:ext cx="2970360" cy="457200"/>
           </a:xfrm>
           <a:prstGeom prst="rect">
             <a:avLst/>
@@ -717,7 +717,7 @@
               </a:lnSpc>
               <a:buNone/>
             </a:pPr>
-            <a:fld id="{97C62A8E-85A1-4E91-9F1D-15F820BD3A6E}" type="slidenum">
+            <a:fld id="{4C10C9D2-6D70-4137-B232-629919AD9CD2}" type="slidenum">
               <a:rPr b="0" lang="en-US" sz="1200" spc="-1" strike="noStrike">
                 <a:latin typeface="Times New Roman"/>
               </a:rPr>
@@ -764,7 +764,7 @@
         <p:spPr>
           <a:xfrm>
             <a:off x="685800" y="1143000"/>
-            <a:ext cx="5485320" cy="3085200"/>
+            <a:ext cx="5484960" cy="3084840"/>
           </a:xfrm>
           <a:prstGeom prst="rect">
             <a:avLst/>
@@ -787,7 +787,7 @@
         <p:spPr>
           <a:xfrm>
             <a:off x="685800" y="4400640"/>
-            <a:ext cx="5485320" cy="3599280"/>
+            <a:ext cx="5484960" cy="3598920"/>
           </a:xfrm>
           <a:prstGeom prst="rect">
             <a:avLst/>
@@ -821,7 +821,7 @@
         <p:spPr>
           <a:xfrm>
             <a:off x="3884760" y="8685360"/>
-            <a:ext cx="2970720" cy="457560"/>
+            <a:ext cx="2970360" cy="457200"/>
           </a:xfrm>
           <a:prstGeom prst="rect">
             <a:avLst/>
@@ -853,7 +853,7 @@
               </a:lnSpc>
               <a:buNone/>
             </a:pPr>
-            <a:fld id="{BE4CF449-7C23-4390-BED1-188CE106F136}" type="slidenum">
+            <a:fld id="{41C93D0C-2D17-41C5-9FF1-9E08672C07DA}" type="slidenum">
               <a:rPr b="0" lang="en-US" sz="1200" spc="-1" strike="noStrike">
                 <a:latin typeface="Times New Roman"/>
               </a:rPr>
@@ -900,7 +900,7 @@
         <p:spPr>
           <a:xfrm>
             <a:off x="685800" y="1143000"/>
-            <a:ext cx="5485320" cy="3085200"/>
+            <a:ext cx="5484960" cy="3084840"/>
           </a:xfrm>
           <a:prstGeom prst="rect">
             <a:avLst/>
@@ -923,7 +923,7 @@
         <p:spPr>
           <a:xfrm>
             <a:off x="685800" y="4400640"/>
-            <a:ext cx="5485320" cy="3599280"/>
+            <a:ext cx="5484960" cy="3598920"/>
           </a:xfrm>
           <a:prstGeom prst="rect">
             <a:avLst/>
@@ -957,7 +957,7 @@
         <p:spPr>
           <a:xfrm>
             <a:off x="3884760" y="8685360"/>
-            <a:ext cx="2970720" cy="457560"/>
+            <a:ext cx="2970360" cy="457200"/>
           </a:xfrm>
           <a:prstGeom prst="rect">
             <a:avLst/>
@@ -989,7 +989,7 @@
               </a:lnSpc>
               <a:buNone/>
             </a:pPr>
-            <a:fld id="{DF8B20E1-965F-4F66-86A1-BA551FB04B85}" type="slidenum">
+            <a:fld id="{531A743F-1B4F-4B08-BFAD-822573C0479D}" type="slidenum">
               <a:rPr b="0" lang="en-US" sz="1200" spc="-1" strike="noStrike">
                 <a:latin typeface="Times New Roman"/>
               </a:rPr>
@@ -1036,7 +1036,7 @@
         <p:spPr>
           <a:xfrm>
             <a:off x="685800" y="1143000"/>
-            <a:ext cx="5485320" cy="3085200"/>
+            <a:ext cx="5484960" cy="3084840"/>
           </a:xfrm>
           <a:prstGeom prst="rect">
             <a:avLst/>
@@ -1059,7 +1059,7 @@
         <p:spPr>
           <a:xfrm>
             <a:off x="685800" y="4400640"/>
-            <a:ext cx="5485320" cy="3599280"/>
+            <a:ext cx="5484960" cy="3598920"/>
           </a:xfrm>
           <a:prstGeom prst="rect">
             <a:avLst/>
@@ -1093,7 +1093,7 @@
         <p:spPr>
           <a:xfrm>
             <a:off x="3884760" y="8685360"/>
-            <a:ext cx="2970720" cy="457560"/>
+            <a:ext cx="2970360" cy="457200"/>
           </a:xfrm>
           <a:prstGeom prst="rect">
             <a:avLst/>
@@ -1125,7 +1125,7 @@
               </a:lnSpc>
               <a:buNone/>
             </a:pPr>
-            <a:fld id="{719AD802-BF4C-4013-A1A2-DC7C56EB81B6}" type="slidenum">
+            <a:fld id="{AF8E0D96-87C4-4DC6-B350-9638831E0FD2}" type="slidenum">
               <a:rPr b="0" lang="en-US" sz="1200" spc="-1" strike="noStrike">
                 <a:latin typeface="Times New Roman"/>
               </a:rPr>
@@ -1172,7 +1172,7 @@
         <p:spPr>
           <a:xfrm>
             <a:off x="685800" y="1143000"/>
-            <a:ext cx="5485320" cy="3085200"/>
+            <a:ext cx="5484960" cy="3084840"/>
           </a:xfrm>
           <a:prstGeom prst="rect">
             <a:avLst/>
@@ -1195,7 +1195,7 @@
         <p:spPr>
           <a:xfrm>
             <a:off x="685800" y="4400640"/>
-            <a:ext cx="5485320" cy="3599280"/>
+            <a:ext cx="5484960" cy="3598920"/>
           </a:xfrm>
           <a:prstGeom prst="rect">
             <a:avLst/>
@@ -1229,7 +1229,7 @@
         <p:spPr>
           <a:xfrm>
             <a:off x="3884760" y="8685360"/>
-            <a:ext cx="2970720" cy="457560"/>
+            <a:ext cx="2970360" cy="457200"/>
           </a:xfrm>
           <a:prstGeom prst="rect">
             <a:avLst/>
@@ -1261,7 +1261,7 @@
               </a:lnSpc>
               <a:buNone/>
             </a:pPr>
-            <a:fld id="{AE202DF4-DDA1-458B-8069-4A0EB192F3B3}" type="slidenum">
+            <a:fld id="{4F5DA12C-7576-474F-8BF8-DC9436A93E4F}" type="slidenum">
               <a:rPr b="0" lang="en-US" sz="1200" spc="-1" strike="noStrike">
                 <a:latin typeface="Times New Roman"/>
               </a:rPr>
@@ -1308,7 +1308,7 @@
         <p:spPr>
           <a:xfrm>
             <a:off x="685800" y="1143000"/>
-            <a:ext cx="5485320" cy="3085200"/>
+            <a:ext cx="5484960" cy="3084840"/>
           </a:xfrm>
           <a:prstGeom prst="rect">
             <a:avLst/>
@@ -1331,7 +1331,7 @@
         <p:spPr>
           <a:xfrm>
             <a:off x="685800" y="4400640"/>
-            <a:ext cx="5485320" cy="3599280"/>
+            <a:ext cx="5484960" cy="3598920"/>
           </a:xfrm>
           <a:prstGeom prst="rect">
             <a:avLst/>
@@ -1365,7 +1365,7 @@
         <p:spPr>
           <a:xfrm>
             <a:off x="3884760" y="8685360"/>
-            <a:ext cx="2970720" cy="457560"/>
+            <a:ext cx="2970360" cy="457200"/>
           </a:xfrm>
           <a:prstGeom prst="rect">
             <a:avLst/>
@@ -1397,7 +1397,7 @@
               </a:lnSpc>
               <a:buNone/>
             </a:pPr>
-            <a:fld id="{58381E91-4E86-4064-8790-89FDB7159FB0}" type="slidenum">
+            <a:fld id="{9B278011-EFD0-40DE-90AE-8D4B4D4EEA04}" type="slidenum">
               <a:rPr b="0" lang="en-US" sz="1200" spc="-1" strike="noStrike">
                 <a:latin typeface="Times New Roman"/>
               </a:rPr>
@@ -1444,7 +1444,7 @@
         <p:spPr>
           <a:xfrm>
             <a:off x="685800" y="1143000"/>
-            <a:ext cx="5485320" cy="3085200"/>
+            <a:ext cx="5484960" cy="3084840"/>
           </a:xfrm>
           <a:prstGeom prst="rect">
             <a:avLst/>
@@ -1467,7 +1467,7 @@
         <p:spPr>
           <a:xfrm>
             <a:off x="685800" y="4400640"/>
-            <a:ext cx="5485320" cy="3599280"/>
+            <a:ext cx="5484960" cy="3598920"/>
           </a:xfrm>
           <a:prstGeom prst="rect">
             <a:avLst/>
@@ -1501,7 +1501,7 @@
         <p:spPr>
           <a:xfrm>
             <a:off x="3884760" y="8685360"/>
-            <a:ext cx="2970720" cy="457560"/>
+            <a:ext cx="2970360" cy="457200"/>
           </a:xfrm>
           <a:prstGeom prst="rect">
             <a:avLst/>
@@ -1533,7 +1533,7 @@
               </a:lnSpc>
               <a:buNone/>
             </a:pPr>
-            <a:fld id="{B2CB0070-2261-446B-993D-F5A726F642A5}" type="slidenum">
+            <a:fld id="{D9629482-1AA1-4DBB-B075-2317B8EC4010}" type="slidenum">
               <a:rPr b="0" lang="en-US" sz="1200" spc="-1" strike="noStrike">
                 <a:latin typeface="Times New Roman"/>
               </a:rPr>
@@ -1580,7 +1580,7 @@
         <p:spPr>
           <a:xfrm>
             <a:off x="685800" y="1143000"/>
-            <a:ext cx="5485320" cy="3085200"/>
+            <a:ext cx="5484960" cy="3084840"/>
           </a:xfrm>
           <a:prstGeom prst="rect">
             <a:avLst/>
@@ -1603,7 +1603,7 @@
         <p:spPr>
           <a:xfrm>
             <a:off x="685800" y="4400640"/>
-            <a:ext cx="5485320" cy="3599280"/>
+            <a:ext cx="5484960" cy="3598920"/>
           </a:xfrm>
           <a:prstGeom prst="rect">
             <a:avLst/>
@@ -1637,7 +1637,7 @@
         <p:spPr>
           <a:xfrm>
             <a:off x="3884760" y="8685360"/>
-            <a:ext cx="2970720" cy="457560"/>
+            <a:ext cx="2970360" cy="457200"/>
           </a:xfrm>
           <a:prstGeom prst="rect">
             <a:avLst/>
@@ -1669,7 +1669,7 @@
               </a:lnSpc>
               <a:buNone/>
             </a:pPr>
-            <a:fld id="{0F2D5B57-91EC-4C6C-9DBB-56059C4EE70A}" type="slidenum">
+            <a:fld id="{6F5A2478-DF59-4584-849D-7227046C8272}" type="slidenum">
               <a:rPr b="0" lang="en-US" sz="1200" spc="-1" strike="noStrike">
                 <a:latin typeface="Times New Roman"/>
               </a:rPr>
@@ -1716,7 +1716,7 @@
         <p:spPr>
           <a:xfrm>
             <a:off x="685800" y="1143000"/>
-            <a:ext cx="5485320" cy="3085200"/>
+            <a:ext cx="5484960" cy="3084840"/>
           </a:xfrm>
           <a:prstGeom prst="rect">
             <a:avLst/>
@@ -1739,7 +1739,7 @@
         <p:spPr>
           <a:xfrm>
             <a:off x="685800" y="4400640"/>
-            <a:ext cx="5485320" cy="3599280"/>
+            <a:ext cx="5484960" cy="3598920"/>
           </a:xfrm>
           <a:prstGeom prst="rect">
             <a:avLst/>
@@ -1773,7 +1773,7 @@
         <p:spPr>
           <a:xfrm>
             <a:off x="3884760" y="8685360"/>
-            <a:ext cx="2970720" cy="457560"/>
+            <a:ext cx="2970360" cy="457200"/>
           </a:xfrm>
           <a:prstGeom prst="rect">
             <a:avLst/>
@@ -1805,7 +1805,7 @@
               </a:lnSpc>
               <a:buNone/>
             </a:pPr>
-            <a:fld id="{FF2A8E43-C0D9-468E-866E-2DE0ECECF529}" type="slidenum">
+            <a:fld id="{FFDD16EA-3464-4612-B3BC-863AEBFD32B3}" type="slidenum">
               <a:rPr b="0" lang="en-US" sz="1200" spc="-1" strike="noStrike">
                 <a:latin typeface="Times New Roman"/>
               </a:rPr>
@@ -1852,7 +1852,7 @@
         <p:spPr>
           <a:xfrm>
             <a:off x="685800" y="1143000"/>
-            <a:ext cx="5485320" cy="3085200"/>
+            <a:ext cx="5484960" cy="3084840"/>
           </a:xfrm>
           <a:prstGeom prst="rect">
             <a:avLst/>
@@ -1875,7 +1875,7 @@
         <p:spPr>
           <a:xfrm>
             <a:off x="685800" y="4400640"/>
-            <a:ext cx="5485320" cy="3599280"/>
+            <a:ext cx="5484960" cy="3598920"/>
           </a:xfrm>
           <a:prstGeom prst="rect">
             <a:avLst/>
@@ -1909,7 +1909,7 @@
         <p:spPr>
           <a:xfrm>
             <a:off x="3884760" y="8685360"/>
-            <a:ext cx="2970720" cy="457560"/>
+            <a:ext cx="2970360" cy="457200"/>
           </a:xfrm>
           <a:prstGeom prst="rect">
             <a:avLst/>
@@ -1941,7 +1941,7 @@
               </a:lnSpc>
               <a:buNone/>
             </a:pPr>
-            <a:fld id="{C640F1B0-508C-40AD-A894-EBE79F361C1A}" type="slidenum">
+            <a:fld id="{7D70DC3C-420A-43E2-BA59-A6581B11A928}" type="slidenum">
               <a:rPr b="0" lang="en-US" sz="1200" spc="-1" strike="noStrike">
                 <a:latin typeface="Times New Roman"/>
               </a:rPr>
@@ -1988,7 +1988,7 @@
         <p:spPr>
           <a:xfrm>
             <a:off x="685800" y="1143000"/>
-            <a:ext cx="5485320" cy="3085200"/>
+            <a:ext cx="5484960" cy="3084840"/>
           </a:xfrm>
           <a:prstGeom prst="rect">
             <a:avLst/>
@@ -2011,7 +2011,7 @@
         <p:spPr>
           <a:xfrm>
             <a:off x="685800" y="4400640"/>
-            <a:ext cx="5485320" cy="3599280"/>
+            <a:ext cx="5484960" cy="3598920"/>
           </a:xfrm>
           <a:prstGeom prst="rect">
             <a:avLst/>
@@ -2045,7 +2045,7 @@
         <p:spPr>
           <a:xfrm>
             <a:off x="3884760" y="8685360"/>
-            <a:ext cx="2970720" cy="457560"/>
+            <a:ext cx="2970360" cy="457200"/>
           </a:xfrm>
           <a:prstGeom prst="rect">
             <a:avLst/>
@@ -2077,7 +2077,7 @@
               </a:lnSpc>
               <a:buNone/>
             </a:pPr>
-            <a:fld id="{F602E20A-BC7B-4986-B3BB-7EE40AC02F05}" type="slidenum">
+            <a:fld id="{B0EC055A-0B50-413E-AEBA-650F488E59F6}" type="slidenum">
               <a:rPr b="0" lang="en-US" sz="1200" spc="-1" strike="noStrike">
                 <a:latin typeface="Times New Roman"/>
               </a:rPr>
@@ -2124,7 +2124,7 @@
         <p:spPr>
           <a:xfrm>
             <a:off x="685800" y="1143000"/>
-            <a:ext cx="5485320" cy="3085200"/>
+            <a:ext cx="5484960" cy="3084840"/>
           </a:xfrm>
           <a:prstGeom prst="rect">
             <a:avLst/>
@@ -2147,7 +2147,7 @@
         <p:spPr>
           <a:xfrm>
             <a:off x="685800" y="4400640"/>
-            <a:ext cx="5485320" cy="3599280"/>
+            <a:ext cx="5484960" cy="3598920"/>
           </a:xfrm>
           <a:prstGeom prst="rect">
             <a:avLst/>
@@ -2181,7 +2181,7 @@
         <p:spPr>
           <a:xfrm>
             <a:off x="3884760" y="8685360"/>
-            <a:ext cx="2970720" cy="457560"/>
+            <a:ext cx="2970360" cy="457200"/>
           </a:xfrm>
           <a:prstGeom prst="rect">
             <a:avLst/>
@@ -2213,7 +2213,7 @@
               </a:lnSpc>
               <a:buNone/>
             </a:pPr>
-            <a:fld id="{2E5F0C3E-7776-4D58-AAA7-A3AE1507B992}" type="slidenum">
+            <a:fld id="{CDF30C09-8891-469B-A094-D00D46A5F482}" type="slidenum">
               <a:rPr b="0" lang="en-US" sz="1200" spc="-1" strike="noStrike">
                 <a:latin typeface="Times New Roman"/>
               </a:rPr>
@@ -2260,7 +2260,7 @@
         <p:spPr>
           <a:xfrm>
             <a:off x="685800" y="1143000"/>
-            <a:ext cx="5485320" cy="3085200"/>
+            <a:ext cx="5484960" cy="3084840"/>
           </a:xfrm>
           <a:prstGeom prst="rect">
             <a:avLst/>
@@ -2283,7 +2283,7 @@
         <p:spPr>
           <a:xfrm>
             <a:off x="685800" y="4400640"/>
-            <a:ext cx="5485320" cy="3599280"/>
+            <a:ext cx="5484960" cy="3598920"/>
           </a:xfrm>
           <a:prstGeom prst="rect">
             <a:avLst/>
@@ -2317,7 +2317,7 @@
         <p:spPr>
           <a:xfrm>
             <a:off x="3884760" y="8685360"/>
-            <a:ext cx="2970720" cy="457560"/>
+            <a:ext cx="2970360" cy="457200"/>
           </a:xfrm>
           <a:prstGeom prst="rect">
             <a:avLst/>
@@ -2349,7 +2349,7 @@
               </a:lnSpc>
               <a:buNone/>
             </a:pPr>
-            <a:fld id="{B5950926-3B44-4016-BB6B-3604D22AEAE6}" type="slidenum">
+            <a:fld id="{353DC3A8-013F-4F2B-84A0-E5177A9051F4}" type="slidenum">
               <a:rPr b="0" lang="en-US" sz="1200" spc="-1" strike="noStrike">
                 <a:latin typeface="Times New Roman"/>
               </a:rPr>
@@ -2396,7 +2396,7 @@
         <p:spPr>
           <a:xfrm>
             <a:off x="685800" y="1143000"/>
-            <a:ext cx="5485320" cy="3085200"/>
+            <a:ext cx="5484960" cy="3084840"/>
           </a:xfrm>
           <a:prstGeom prst="rect">
             <a:avLst/>
@@ -2419,7 +2419,7 @@
         <p:spPr>
           <a:xfrm>
             <a:off x="685800" y="4400640"/>
-            <a:ext cx="5485320" cy="3599280"/>
+            <a:ext cx="5484960" cy="3598920"/>
           </a:xfrm>
           <a:prstGeom prst="rect">
             <a:avLst/>
@@ -2453,7 +2453,7 @@
         <p:spPr>
           <a:xfrm>
             <a:off x="3884760" y="8685360"/>
-            <a:ext cx="2970720" cy="457560"/>
+            <a:ext cx="2970360" cy="457200"/>
           </a:xfrm>
           <a:prstGeom prst="rect">
             <a:avLst/>
@@ -2485,7 +2485,7 @@
               </a:lnSpc>
               <a:buNone/>
             </a:pPr>
-            <a:fld id="{C5903CB3-57E0-44DF-928C-3A5B9B2C5495}" type="slidenum">
+            <a:fld id="{3D694038-8904-4D42-B89D-46D3AA140051}" type="slidenum">
               <a:rPr b="0" lang="en-US" sz="1200" spc="-1" strike="noStrike">
                 <a:latin typeface="Times New Roman"/>
               </a:rPr>
@@ -2532,7 +2532,7 @@
         <p:spPr>
           <a:xfrm>
             <a:off x="685800" y="1143000"/>
-            <a:ext cx="5485320" cy="3085200"/>
+            <a:ext cx="5484960" cy="3084840"/>
           </a:xfrm>
           <a:prstGeom prst="rect">
             <a:avLst/>
@@ -2555,7 +2555,7 @@
         <p:spPr>
           <a:xfrm>
             <a:off x="685800" y="4400640"/>
-            <a:ext cx="5485320" cy="3599280"/>
+            <a:ext cx="5484960" cy="3598920"/>
           </a:xfrm>
           <a:prstGeom prst="rect">
             <a:avLst/>
@@ -2589,7 +2589,7 @@
         <p:spPr>
           <a:xfrm>
             <a:off x="3884760" y="8685360"/>
-            <a:ext cx="2970720" cy="457560"/>
+            <a:ext cx="2970360" cy="457200"/>
           </a:xfrm>
           <a:prstGeom prst="rect">
             <a:avLst/>
@@ -2621,7 +2621,7 @@
               </a:lnSpc>
               <a:buNone/>
             </a:pPr>
-            <a:fld id="{735717EC-4B92-4745-8755-76E6EFFE9E39}" type="slidenum">
+            <a:fld id="{7CB8DD9B-B62F-499C-AB37-B68664EFF37D}" type="slidenum">
               <a:rPr b="0" lang="en-US" sz="1200" spc="-1" strike="noStrike">
                 <a:latin typeface="Times New Roman"/>
               </a:rPr>
@@ -4465,7 +4465,7 @@
         <p:spPr>
           <a:xfrm>
             <a:off x="380880" y="1415520"/>
-            <a:ext cx="608400" cy="18000"/>
+            <a:ext cx="608040" cy="17640"/>
           </a:xfrm>
           <a:custGeom>
             <a:avLst/>
@@ -4516,7 +4516,7 @@
         <p:spPr>
           <a:xfrm>
             <a:off x="380880" y="1663200"/>
-            <a:ext cx="2151720" cy="189360"/>
+            <a:ext cx="2151360" cy="189000"/>
           </a:xfrm>
           <a:prstGeom prst="rect">
             <a:avLst/>
@@ -4544,7 +4544,7 @@
               <a:buNone/>
             </a:pPr>
             <a:r>
-              <a:rPr b="0" i="1" lang="en-US" sz="1050" spc="307" strike="noStrike">
+              <a:rPr b="0" i="1" lang="en-US" sz="1050" spc="304" strike="noStrike">
                 <a:solidFill>
                   <a:srgbClr val="86868b"/>
                 </a:solidFill>
@@ -4553,8 +4553,8 @@
               </a:rPr>
               <a:t>Probability Theory</a:t>
             </a:r>
-            <a:endParaRPr b="0" i="1" lang="en-HK" sz="1050" spc="-1" strike="noStrike">
-              <a:latin typeface="Times New Roman"/>
+            <a:endParaRPr b="0" lang="en-HK" sz="1050" spc="-1" strike="noStrike">
+              <a:latin typeface="Arial"/>
             </a:endParaRPr>
           </a:p>
         </p:txBody>
@@ -4568,7 +4568,7 @@
         <p:spPr>
           <a:xfrm>
             <a:off x="380880" y="2310840"/>
-            <a:ext cx="6609240" cy="2170800"/>
+            <a:ext cx="6608880" cy="2170440"/>
           </a:xfrm>
           <a:prstGeom prst="rect">
             <a:avLst/>
@@ -4596,100 +4596,90 @@
               <a:buNone/>
             </a:pPr>
             <a:r>
-              <a:rPr b="0" i="1" lang="en-US" sz="9000" spc="-225" strike="noStrike">
+              <a:rPr b="0" lang="en-US" sz="9000" spc="-225" strike="noStrike">
                 <a:solidFill>
                   <a:srgbClr val="1d1d1d"/>
                 </a:solidFill>
                 <a:latin typeface="Times New Roman"/>
                 <a:ea typeface="Liter"/>
               </a:rPr>
-              <a:t>The</a:t>
-            </a:r>
-            <a:r>
-              <a:rPr b="0" i="1" lang="en-US" sz="9000" spc="-225" strike="noStrike">
+              <a:t>The Birthday</a:t>
+            </a:r>
+            <a:endParaRPr b="0" lang="en-HK" sz="9000" spc="-1" strike="noStrike">
+              <a:latin typeface="Arial"/>
+            </a:endParaRPr>
+          </a:p>
+          <a:p>
+            <a:pPr>
+              <a:lnSpc>
+                <a:spcPct val="80000"/>
+              </a:lnSpc>
+              <a:buNone/>
+            </a:pPr>
+            <a:r>
+              <a:rPr b="0" lang="en-US" sz="9000" spc="-225" strike="noStrike">
                 <a:solidFill>
                   <a:srgbClr val="1d1d1d"/>
                 </a:solidFill>
                 <a:latin typeface="Times New Roman"/>
                 <a:ea typeface="Liter"/>
               </a:rPr>
-              <a:t> Birthday</a:t>
-            </a:r>
-            <a:endParaRPr b="0" i="1" lang="en-HK" sz="9000" spc="-1" strike="noStrike">
-              <a:latin typeface="Times New Roman"/>
-            </a:endParaRPr>
-          </a:p>
+              <a:t>Paradox</a:t>
+            </a:r>
+            <a:endParaRPr b="0" lang="en-HK" sz="9000" spc="-1" strike="noStrike">
+              <a:latin typeface="Arial"/>
+            </a:endParaRPr>
+          </a:p>
+        </p:txBody>
+      </p:sp>
+      <p:sp>
+        <p:nvSpPr>
+          <p:cNvPr id="47" name="Text 3"/>
+          <p:cNvSpPr/>
+          <p:nvPr/>
+        </p:nvSpPr>
+        <p:spPr>
+          <a:xfrm>
+            <a:off x="380880" y="4787640"/>
+            <a:ext cx="4265640" cy="465120"/>
+          </a:xfrm>
+          <a:prstGeom prst="rect">
+            <a:avLst/>
+          </a:prstGeom>
+          <a:noFill/>
+          <a:ln w="0">
+            <a:noFill/>
+          </a:ln>
+        </p:spPr>
+        <p:style>
+          <a:lnRef idx="0"/>
+          <a:fillRef idx="0"/>
+          <a:effectRef idx="0"/>
+          <a:fontRef idx="minor"/>
+        </p:style>
+        <p:txBody>
+          <a:bodyPr lIns="0" rIns="0" tIns="0" bIns="0" anchor="ctr">
+            <a:noAutofit/>
+          </a:bodyPr>
           <a:p>
             <a:pPr>
               <a:lnSpc>
-                <a:spcPct val="80000"/>
-              </a:lnSpc>
-              <a:buNone/>
-            </a:pPr>
-            <a:r>
-              <a:rPr b="0" i="1" lang="en-US" sz="9000" spc="-225" strike="noStrike">
-                <a:solidFill>
-                  <a:srgbClr val="1d1d1d"/>
+                <a:spcPct val="140000"/>
+              </a:lnSpc>
+              <a:buNone/>
+            </a:pPr>
+            <a:r>
+              <a:rPr b="0" lang="en-US" sz="2250" spc="-1" strike="noStrike">
+                <a:solidFill>
+                  <a:srgbClr val="86868b"/>
                 </a:solidFill>
                 <a:latin typeface="Times New Roman"/>
                 <a:ea typeface="Liter"/>
               </a:rPr>
-              <a:t>Paradox</a:t>
-            </a:r>
-            <a:endParaRPr b="0" i="1" lang="en-HK" sz="9000" spc="-1" strike="noStrike">
-              <a:latin typeface="Times New Roman"/>
-            </a:endParaRPr>
-          </a:p>
-        </p:txBody>
-      </p:sp>
-      <p:sp>
-        <p:nvSpPr>
-          <p:cNvPr id="47" name="Text 3"/>
-          <p:cNvSpPr/>
-          <p:nvPr/>
-        </p:nvSpPr>
-        <p:spPr>
-          <a:xfrm>
-            <a:off x="380880" y="4787640"/>
-            <a:ext cx="4266000" cy="465480"/>
-          </a:xfrm>
-          <a:prstGeom prst="rect">
-            <a:avLst/>
-          </a:prstGeom>
-          <a:noFill/>
-          <a:ln w="0">
-            <a:noFill/>
-          </a:ln>
-        </p:spPr>
-        <p:style>
-          <a:lnRef idx="0"/>
-          <a:fillRef idx="0"/>
-          <a:effectRef idx="0"/>
-          <a:fontRef idx="minor"/>
-        </p:style>
-        <p:txBody>
-          <a:bodyPr lIns="0" rIns="0" tIns="0" bIns="0" anchor="ctr">
-            <a:noAutofit/>
-          </a:bodyPr>
-          <a:p>
-            <a:pPr>
-              <a:lnSpc>
-                <a:spcPct val="140000"/>
-              </a:lnSpc>
-              <a:buNone/>
-            </a:pPr>
-            <a:r>
-              <a:rPr b="0" i="1" lang="en-US" sz="2250" spc="-1" strike="noStrike">
-                <a:solidFill>
-                  <a:srgbClr val="86868b"/>
-                </a:solidFill>
-                <a:latin typeface="Times New Roman"/>
-                <a:ea typeface="Liter"/>
-              </a:rPr>
               <a:t>When Probability Defies Intuition</a:t>
             </a:r>
-            <a:endParaRPr b="0" i="1" lang="en-HK" sz="2250" spc="-1" strike="noStrike">
-              <a:latin typeface="Times New Roman"/>
+            <a:endParaRPr b="0" lang="en-HK" sz="2250" spc="-1" strike="noStrike">
+              <a:latin typeface="Arial"/>
             </a:endParaRPr>
           </a:p>
         </p:txBody>
@@ -4703,7 +4693,7 @@
         <p:spPr>
           <a:xfrm>
             <a:off x="426240" y="6296040"/>
-            <a:ext cx="127440" cy="170280"/>
+            <a:ext cx="127080" cy="169920"/>
           </a:xfrm>
           <a:custGeom>
             <a:avLst/>
@@ -5008,7 +4998,7 @@
         <p:spPr>
           <a:xfrm>
             <a:off x="709560" y="6286680"/>
-            <a:ext cx="1560960" cy="189360"/>
+            <a:ext cx="1560600" cy="189000"/>
           </a:xfrm>
           <a:prstGeom prst="rect">
             <a:avLst/>
@@ -5036,7 +5026,7 @@
               <a:buNone/>
             </a:pPr>
             <a:r>
-              <a:rPr b="0" i="1" lang="en-US" sz="1050" spc="-1" strike="noStrike">
+              <a:rPr b="0" lang="en-US" sz="1050" spc="-1" strike="noStrike">
                 <a:solidFill>
                   <a:srgbClr val="86868b"/>
                 </a:solidFill>
@@ -5045,8 +5035,8 @@
               </a:rPr>
               <a:t>Mathematical Exploration</a:t>
             </a:r>
-            <a:endParaRPr b="0" i="1" lang="en-HK" sz="1050" spc="-1" strike="noStrike">
-              <a:latin typeface="Times New Roman"/>
+            <a:endParaRPr b="0" lang="en-HK" sz="1050" spc="-1" strike="noStrike">
+              <a:latin typeface="Arial"/>
             </a:endParaRPr>
           </a:p>
         </p:txBody>
@@ -5060,7 +5050,7 @@
         <p:spPr>
           <a:xfrm>
             <a:off x="2689200" y="6296040"/>
-            <a:ext cx="170280" cy="170280"/>
+            <a:ext cx="169920" cy="169920"/>
           </a:xfrm>
           <a:custGeom>
             <a:avLst/>
@@ -5193,7 +5183,7 @@
         <p:spPr>
           <a:xfrm>
             <a:off x="2994120" y="6286680"/>
-            <a:ext cx="1398960" cy="189360"/>
+            <a:ext cx="1398600" cy="189000"/>
           </a:xfrm>
           <a:prstGeom prst="rect">
             <a:avLst/>
@@ -5221,7 +5211,7 @@
               <a:buNone/>
             </a:pPr>
             <a:r>
-              <a:rPr b="0" i="1" lang="en-US" sz="1050" spc="-1" strike="noStrike">
+              <a:rPr b="0" lang="en-US" sz="1050" spc="-1" strike="noStrike">
                 <a:solidFill>
                   <a:srgbClr val="86868b"/>
                 </a:solidFill>
@@ -5230,8 +5220,8 @@
               </a:rPr>
               <a:t>Probability &amp; Statistics</a:t>
             </a:r>
-            <a:endParaRPr b="0" i="1" lang="en-HK" sz="1050" spc="-1" strike="noStrike">
-              <a:latin typeface="Times New Roman"/>
+            <a:endParaRPr b="0" lang="en-HK" sz="1050" spc="-1" strike="noStrike">
+              <a:latin typeface="Arial"/>
             </a:endParaRPr>
           </a:p>
         </p:txBody>
@@ -5282,7 +5272,7 @@
         <p:spPr>
           <a:xfrm>
             <a:off x="380880" y="380880"/>
-            <a:ext cx="11486160" cy="151200"/>
+            <a:ext cx="11485800" cy="150840"/>
           </a:xfrm>
           <a:prstGeom prst="rect">
             <a:avLst/>
@@ -5310,7 +5300,7 @@
               <a:buNone/>
             </a:pPr>
             <a:r>
-              <a:rPr b="0" lang="en-US" sz="900" spc="262" strike="noStrike">
+              <a:rPr b="0" lang="en-US" sz="900" spc="259" strike="noStrike">
                 <a:solidFill>
                   <a:srgbClr val="86868b"/>
                 </a:solidFill>
@@ -5334,7 +5324,7 @@
         <p:spPr>
           <a:xfrm>
             <a:off x="380880" y="609480"/>
-            <a:ext cx="11600280" cy="379800"/>
+            <a:ext cx="11599920" cy="379440"/>
           </a:xfrm>
           <a:prstGeom prst="rect">
             <a:avLst/>
@@ -5386,7 +5376,7 @@
         <p:spPr>
           <a:xfrm>
             <a:off x="380880" y="1995480"/>
-            <a:ext cx="5609160" cy="560880"/>
+            <a:ext cx="5608800" cy="560520"/>
           </a:xfrm>
           <a:prstGeom prst="rect">
             <a:avLst/>
@@ -5458,7 +5448,7 @@
         <p:spPr>
           <a:xfrm>
             <a:off x="385920" y="2786040"/>
-            <a:ext cx="5513760" cy="1418040"/>
+            <a:ext cx="5513400" cy="1417680"/>
           </a:xfrm>
           <a:custGeom>
             <a:avLst/>
@@ -5510,7 +5500,7 @@
         <p:spPr>
           <a:xfrm>
             <a:off x="619200" y="3019320"/>
-            <a:ext cx="5113800" cy="189360"/>
+            <a:ext cx="5113440" cy="189000"/>
           </a:xfrm>
           <a:prstGeom prst="rect">
             <a:avLst/>
@@ -5538,7 +5528,7 @@
               <a:buNone/>
             </a:pPr>
             <a:r>
-              <a:rPr b="0" lang="en-US" sz="1050" spc="202" strike="noStrike">
+              <a:rPr b="0" lang="en-US" sz="1050" spc="199" strike="noStrike">
                 <a:solidFill>
                   <a:srgbClr val="86868b"/>
                 </a:solidFill>
@@ -5562,7 +5552,7 @@
         <p:spPr>
           <a:xfrm>
             <a:off x="619200" y="3324240"/>
-            <a:ext cx="5190120" cy="342000"/>
+            <a:ext cx="5189760" cy="341640"/>
           </a:xfrm>
           <a:prstGeom prst="rect">
             <a:avLst/>
@@ -5614,7 +5604,7 @@
         <p:spPr>
           <a:xfrm>
             <a:off x="619200" y="3743280"/>
-            <a:ext cx="5123520" cy="227520"/>
+            <a:ext cx="5123160" cy="227160"/>
           </a:xfrm>
           <a:prstGeom prst="rect">
             <a:avLst/>
@@ -5666,7 +5656,7 @@
         <p:spPr>
           <a:xfrm>
             <a:off x="6296040" y="1995480"/>
-            <a:ext cx="18000" cy="684720"/>
+            <a:ext cx="17640" cy="684360"/>
           </a:xfrm>
           <a:custGeom>
             <a:avLst/>
@@ -5717,7 +5707,7 @@
         <p:spPr>
           <a:xfrm>
             <a:off x="6496200" y="1995480"/>
-            <a:ext cx="437040" cy="342000"/>
+            <a:ext cx="436680" cy="341640"/>
           </a:xfrm>
           <a:prstGeom prst="rect">
             <a:avLst/>
@@ -5769,7 +5759,7 @@
         <p:spPr>
           <a:xfrm>
             <a:off x="6906960" y="2095560"/>
-            <a:ext cx="532440" cy="227520"/>
+            <a:ext cx="532080" cy="227160"/>
           </a:xfrm>
           <a:prstGeom prst="rect">
             <a:avLst/>
@@ -5821,7 +5811,7 @@
         <p:spPr>
           <a:xfrm>
             <a:off x="6496200" y="2376360"/>
-            <a:ext cx="5428080" cy="303840"/>
+            <a:ext cx="5427720" cy="303480"/>
           </a:xfrm>
           <a:prstGeom prst="rect">
             <a:avLst/>
@@ -5873,7 +5863,7 @@
         <p:spPr>
           <a:xfrm>
             <a:off x="6296040" y="2833560"/>
-            <a:ext cx="18000" cy="989640"/>
+            <a:ext cx="17640" cy="989280"/>
           </a:xfrm>
           <a:custGeom>
             <a:avLst/>
@@ -5924,7 +5914,7 @@
         <p:spPr>
           <a:xfrm>
             <a:off x="6496200" y="2833560"/>
-            <a:ext cx="570600" cy="379800"/>
+            <a:ext cx="570240" cy="379440"/>
           </a:xfrm>
           <a:prstGeom prst="rect">
             <a:avLst/>
@@ -5976,7 +5966,7 @@
         <p:spPr>
           <a:xfrm>
             <a:off x="7011720" y="2943360"/>
-            <a:ext cx="599040" cy="265680"/>
+            <a:ext cx="598680" cy="265320"/>
           </a:xfrm>
           <a:prstGeom prst="rect">
             <a:avLst/>
@@ -6028,7 +6018,7 @@
         <p:spPr>
           <a:xfrm>
             <a:off x="6496200" y="3252960"/>
-            <a:ext cx="5456880" cy="342000"/>
+            <a:ext cx="5456520" cy="341640"/>
           </a:xfrm>
           <a:prstGeom prst="rect">
             <a:avLst/>
@@ -6080,7 +6070,7 @@
         <p:spPr>
           <a:xfrm>
             <a:off x="6496200" y="3633840"/>
-            <a:ext cx="5380560" cy="189360"/>
+            <a:ext cx="5380200" cy="189000"/>
           </a:xfrm>
           <a:prstGeom prst="rect">
             <a:avLst/>
@@ -6132,7 +6122,7 @@
         <p:spPr>
           <a:xfrm>
             <a:off x="6296040" y="3976560"/>
-            <a:ext cx="18000" cy="684720"/>
+            <a:ext cx="17640" cy="684360"/>
           </a:xfrm>
           <a:custGeom>
             <a:avLst/>
@@ -6183,7 +6173,7 @@
         <p:spPr>
           <a:xfrm>
             <a:off x="6496200" y="3976560"/>
-            <a:ext cx="484560" cy="342000"/>
+            <a:ext cx="484200" cy="341640"/>
           </a:xfrm>
           <a:prstGeom prst="rect">
             <a:avLst/>
@@ -6235,7 +6225,7 @@
         <p:spPr>
           <a:xfrm>
             <a:off x="6957360" y="4076640"/>
-            <a:ext cx="532440" cy="227520"/>
+            <a:ext cx="532080" cy="227160"/>
           </a:xfrm>
           <a:prstGeom prst="rect">
             <a:avLst/>
@@ -6287,7 +6277,7 @@
         <p:spPr>
           <a:xfrm>
             <a:off x="6496200" y="4357800"/>
-            <a:ext cx="5428080" cy="303840"/>
+            <a:ext cx="5427720" cy="303480"/>
           </a:xfrm>
           <a:prstGeom prst="rect">
             <a:avLst/>
@@ -6339,7 +6329,7 @@
         <p:spPr>
           <a:xfrm>
             <a:off x="380880" y="4971960"/>
-            <a:ext cx="11428920" cy="8280"/>
+            <a:ext cx="11428560" cy="7920"/>
           </a:xfrm>
           <a:custGeom>
             <a:avLst/>
@@ -6390,7 +6380,7 @@
         <p:spPr>
           <a:xfrm>
             <a:off x="390600" y="5253120"/>
-            <a:ext cx="170280" cy="151200"/>
+            <a:ext cx="169920" cy="150840"/>
           </a:xfrm>
           <a:custGeom>
             <a:avLst/>
@@ -6504,7 +6494,7 @@
         <p:spPr>
           <a:xfrm>
             <a:off x="628560" y="5205240"/>
-            <a:ext cx="11257560" cy="494280"/>
+            <a:ext cx="11257200" cy="493920"/>
           </a:xfrm>
           <a:prstGeom prst="rect">
             <a:avLst/>
@@ -6603,7 +6593,7 @@
         <p:spPr>
           <a:xfrm>
             <a:off x="380880" y="1850760"/>
-            <a:ext cx="761040" cy="18000"/>
+            <a:ext cx="760680" cy="17640"/>
           </a:xfrm>
           <a:custGeom>
             <a:avLst/>
@@ -6654,7 +6644,7 @@
         <p:spPr>
           <a:xfrm>
             <a:off x="380880" y="2174760"/>
-            <a:ext cx="9152280" cy="189360"/>
+            <a:ext cx="9151920" cy="189000"/>
           </a:xfrm>
           <a:prstGeom prst="rect">
             <a:avLst/>
@@ -6682,7 +6672,7 @@
               <a:buNone/>
             </a:pPr>
             <a:r>
-              <a:rPr b="0" lang="en-US" sz="1050" spc="307" strike="noStrike">
+              <a:rPr b="0" lang="en-US" sz="1050" spc="304" strike="noStrike">
                 <a:solidFill>
                   <a:srgbClr val="86868b"/>
                 </a:solidFill>
@@ -6706,7 +6696,7 @@
         <p:spPr>
           <a:xfrm>
             <a:off x="380880" y="2593800"/>
-            <a:ext cx="9542880" cy="1732320"/>
+            <a:ext cx="9542520" cy="1731960"/>
           </a:xfrm>
           <a:prstGeom prst="rect">
             <a:avLst/>
@@ -6779,7 +6769,7 @@
         <p:spPr>
           <a:xfrm>
             <a:off x="380880" y="4635720"/>
-            <a:ext cx="5599800" cy="370440"/>
+            <a:ext cx="5599440" cy="370080"/>
           </a:xfrm>
           <a:prstGeom prst="rect">
             <a:avLst/>
@@ -6831,7 +6821,7 @@
         <p:spPr>
           <a:xfrm>
             <a:off x="9471600" y="2476440"/>
-            <a:ext cx="3294720" cy="1904040"/>
+            <a:ext cx="3294360" cy="1903680"/>
           </a:xfrm>
           <a:prstGeom prst="rect">
             <a:avLst/>
@@ -6920,7 +6910,7 @@
         <p:spPr>
           <a:xfrm>
             <a:off x="380880" y="380880"/>
-            <a:ext cx="11486160" cy="151200"/>
+            <a:ext cx="11485800" cy="150840"/>
           </a:xfrm>
           <a:prstGeom prst="rect">
             <a:avLst/>
@@ -6948,7 +6938,7 @@
               <a:buNone/>
             </a:pPr>
             <a:r>
-              <a:rPr b="0" lang="en-US" sz="900" spc="262" strike="noStrike">
+              <a:rPr b="0" lang="en-US" sz="900" spc="259" strike="noStrike">
                 <a:solidFill>
                   <a:srgbClr val="86868b"/>
                 </a:solidFill>
@@ -6972,7 +6962,7 @@
         <p:spPr>
           <a:xfrm>
             <a:off x="380880" y="609480"/>
-            <a:ext cx="11600280" cy="379800"/>
+            <a:ext cx="11599920" cy="379440"/>
           </a:xfrm>
           <a:prstGeom prst="rect">
             <a:avLst/>
@@ -7024,7 +7014,7 @@
         <p:spPr>
           <a:xfrm>
             <a:off x="380880" y="2019240"/>
-            <a:ext cx="8628480" cy="618120"/>
+            <a:ext cx="8628120" cy="617760"/>
           </a:xfrm>
           <a:prstGeom prst="rect">
             <a:avLst/>
@@ -7116,7 +7106,7 @@
         <p:spPr>
           <a:xfrm>
             <a:off x="380880" y="3029040"/>
-            <a:ext cx="5523480" cy="18000"/>
+            <a:ext cx="5523120" cy="17640"/>
           </a:xfrm>
           <a:custGeom>
             <a:avLst/>
@@ -7167,7 +7157,7 @@
         <p:spPr>
           <a:xfrm>
             <a:off x="380880" y="3267000"/>
-            <a:ext cx="5590080" cy="189360"/>
+            <a:ext cx="5589720" cy="189000"/>
           </a:xfrm>
           <a:prstGeom prst="rect">
             <a:avLst/>
@@ -7195,7 +7185,7 @@
               <a:buNone/>
             </a:pPr>
             <a:r>
-              <a:rPr b="0" lang="en-US" sz="1050" spc="202" strike="noStrike">
+              <a:rPr b="0" lang="en-US" sz="1050" spc="199" strike="noStrike">
                 <a:solidFill>
                   <a:srgbClr val="86868b"/>
                 </a:solidFill>
@@ -7219,7 +7209,7 @@
         <p:spPr>
           <a:xfrm>
             <a:off x="380880" y="3610080"/>
-            <a:ext cx="5752080" cy="456120"/>
+            <a:ext cx="5751720" cy="455760"/>
           </a:xfrm>
           <a:prstGeom prst="rect">
             <a:avLst/>
@@ -7271,7 +7261,7 @@
         <p:spPr>
           <a:xfrm>
             <a:off x="380880" y="4143240"/>
-            <a:ext cx="5599800" cy="227520"/>
+            <a:ext cx="5599440" cy="227160"/>
           </a:xfrm>
           <a:prstGeom prst="rect">
             <a:avLst/>
@@ -7323,7 +7313,7 @@
         <p:spPr>
           <a:xfrm>
             <a:off x="380880" y="4524480"/>
-            <a:ext cx="5599800" cy="246600"/>
+            <a:ext cx="5599440" cy="246240"/>
           </a:xfrm>
           <a:prstGeom prst="rect">
             <a:avLst/>
@@ -7375,7 +7365,7 @@
         <p:spPr>
           <a:xfrm>
             <a:off x="380880" y="4886280"/>
-            <a:ext cx="5599800" cy="246600"/>
+            <a:ext cx="5599440" cy="246240"/>
           </a:xfrm>
           <a:prstGeom prst="rect">
             <a:avLst/>
@@ -7427,7 +7417,7 @@
         <p:spPr>
           <a:xfrm>
             <a:off x="6286680" y="3029040"/>
-            <a:ext cx="5523480" cy="18000"/>
+            <a:ext cx="5523120" cy="17640"/>
           </a:xfrm>
           <a:custGeom>
             <a:avLst/>
@@ -7478,7 +7468,7 @@
         <p:spPr>
           <a:xfrm>
             <a:off x="6286680" y="3267000"/>
-            <a:ext cx="5590080" cy="189360"/>
+            <a:ext cx="5589720" cy="189000"/>
           </a:xfrm>
           <a:prstGeom prst="rect">
             <a:avLst/>
@@ -7506,7 +7496,7 @@
               <a:buNone/>
             </a:pPr>
             <a:r>
-              <a:rPr b="0" lang="en-US" sz="1050" spc="202" strike="noStrike">
+              <a:rPr b="0" lang="en-US" sz="1050" spc="199" strike="noStrike">
                 <a:solidFill>
                   <a:srgbClr val="0071e3"/>
                 </a:solidFill>
@@ -7530,7 +7520,7 @@
         <p:spPr>
           <a:xfrm>
             <a:off x="6286680" y="3610080"/>
-            <a:ext cx="5752080" cy="456120"/>
+            <a:ext cx="5751720" cy="455760"/>
           </a:xfrm>
           <a:prstGeom prst="rect">
             <a:avLst/>
@@ -7582,7 +7572,7 @@
         <p:spPr>
           <a:xfrm>
             <a:off x="6286680" y="4143240"/>
-            <a:ext cx="5599800" cy="227520"/>
+            <a:ext cx="5599440" cy="227160"/>
           </a:xfrm>
           <a:prstGeom prst="rect">
             <a:avLst/>
@@ -7634,7 +7624,7 @@
         <p:spPr>
           <a:xfrm>
             <a:off x="6286680" y="4524480"/>
-            <a:ext cx="5599800" cy="246600"/>
+            <a:ext cx="5599440" cy="246240"/>
           </a:xfrm>
           <a:prstGeom prst="rect">
             <a:avLst/>
@@ -7686,7 +7676,7 @@
         <p:spPr>
           <a:xfrm>
             <a:off x="6286680" y="4886280"/>
-            <a:ext cx="5599800" cy="246600"/>
+            <a:ext cx="5599440" cy="246240"/>
           </a:xfrm>
           <a:prstGeom prst="rect">
             <a:avLst/>
@@ -7738,7 +7728,7 @@
         <p:spPr>
           <a:xfrm>
             <a:off x="380880" y="6091200"/>
-            <a:ext cx="11428920" cy="8280"/>
+            <a:ext cx="11428560" cy="7920"/>
           </a:xfrm>
           <a:custGeom>
             <a:avLst/>
@@ -7789,7 +7779,7 @@
         <p:spPr>
           <a:xfrm>
             <a:off x="399960" y="6286680"/>
-            <a:ext cx="151200" cy="151200"/>
+            <a:ext cx="150840" cy="150840"/>
           </a:xfrm>
           <a:custGeom>
             <a:avLst/>
@@ -7966,7 +7956,7 @@
         <p:spPr>
           <a:xfrm>
             <a:off x="628560" y="6248520"/>
-            <a:ext cx="11257560" cy="227520"/>
+            <a:ext cx="11257200" cy="227160"/>
           </a:xfrm>
           <a:prstGeom prst="rect">
             <a:avLst/>
@@ -8065,7 +8055,7 @@
         <p:spPr>
           <a:xfrm>
             <a:off x="380880" y="380880"/>
-            <a:ext cx="11486160" cy="151200"/>
+            <a:ext cx="11485800" cy="150840"/>
           </a:xfrm>
           <a:prstGeom prst="rect">
             <a:avLst/>
@@ -8093,7 +8083,7 @@
               <a:buNone/>
             </a:pPr>
             <a:r>
-              <a:rPr b="0" lang="en-US" sz="900" spc="262" strike="noStrike">
+              <a:rPr b="0" lang="en-US" sz="900" spc="259" strike="noStrike">
                 <a:solidFill>
                   <a:srgbClr val="86868b"/>
                 </a:solidFill>
@@ -8117,7 +8107,7 @@
         <p:spPr>
           <a:xfrm>
             <a:off x="380880" y="609480"/>
-            <a:ext cx="11600280" cy="379800"/>
+            <a:ext cx="11599920" cy="379440"/>
           </a:xfrm>
           <a:prstGeom prst="rect">
             <a:avLst/>
@@ -8169,7 +8159,7 @@
         <p:spPr>
           <a:xfrm>
             <a:off x="380880" y="1962000"/>
-            <a:ext cx="8628480" cy="618120"/>
+            <a:ext cx="8628120" cy="617760"/>
           </a:xfrm>
           <a:prstGeom prst="rect">
             <a:avLst/>
@@ -8241,7 +8231,7 @@
         <p:spPr>
           <a:xfrm>
             <a:off x="380880" y="2886120"/>
-            <a:ext cx="5590080" cy="189360"/>
+            <a:ext cx="5589720" cy="189000"/>
           </a:xfrm>
           <a:prstGeom prst="rect">
             <a:avLst/>
@@ -8269,7 +8259,7 @@
               <a:buNone/>
             </a:pPr>
             <a:r>
-              <a:rPr b="0" lang="en-US" sz="1050" spc="202" strike="noStrike">
+              <a:rPr b="0" lang="en-US" sz="1050" spc="199" strike="noStrike">
                 <a:solidFill>
                   <a:srgbClr val="86868b"/>
                 </a:solidFill>
@@ -8293,7 +8283,7 @@
         <p:spPr>
           <a:xfrm>
             <a:off x="380880" y="3228840"/>
-            <a:ext cx="989640" cy="227520"/>
+            <a:ext cx="989280" cy="227160"/>
           </a:xfrm>
           <a:prstGeom prst="rect">
             <a:avLst/>
@@ -8345,7 +8335,7 @@
         <p:spPr>
           <a:xfrm>
             <a:off x="1447920" y="3305160"/>
-            <a:ext cx="4456800" cy="75240"/>
+            <a:ext cx="4456440" cy="74880"/>
           </a:xfrm>
           <a:custGeom>
             <a:avLst/>
@@ -8396,7 +8386,7 @@
         <p:spPr>
           <a:xfrm>
             <a:off x="1447920" y="3305160"/>
-            <a:ext cx="894240" cy="75240"/>
+            <a:ext cx="893880" cy="74880"/>
           </a:xfrm>
           <a:custGeom>
             <a:avLst/>
@@ -8447,7 +8437,7 @@
         <p:spPr>
           <a:xfrm>
             <a:off x="380880" y="3571920"/>
-            <a:ext cx="989640" cy="227520"/>
+            <a:ext cx="989280" cy="227160"/>
           </a:xfrm>
           <a:prstGeom prst="rect">
             <a:avLst/>
@@ -8499,7 +8489,7 @@
         <p:spPr>
           <a:xfrm>
             <a:off x="1447920" y="3648240"/>
-            <a:ext cx="4456800" cy="75240"/>
+            <a:ext cx="4456440" cy="74880"/>
           </a:xfrm>
           <a:custGeom>
             <a:avLst/>
@@ -8550,7 +8540,7 @@
         <p:spPr>
           <a:xfrm>
             <a:off x="1447920" y="3648240"/>
-            <a:ext cx="1780200" cy="75240"/>
+            <a:ext cx="1779840" cy="74880"/>
           </a:xfrm>
           <a:custGeom>
             <a:avLst/>
@@ -8601,7 +8591,7 @@
         <p:spPr>
           <a:xfrm>
             <a:off x="380880" y="3914640"/>
-            <a:ext cx="989640" cy="227520"/>
+            <a:ext cx="989280" cy="227160"/>
           </a:xfrm>
           <a:prstGeom prst="rect">
             <a:avLst/>
@@ -8653,7 +8643,7 @@
         <p:spPr>
           <a:xfrm>
             <a:off x="1447920" y="3990960"/>
-            <a:ext cx="4456800" cy="75240"/>
+            <a:ext cx="4456440" cy="74880"/>
           </a:xfrm>
           <a:custGeom>
             <a:avLst/>
@@ -8704,7 +8694,7 @@
         <p:spPr>
           <a:xfrm>
             <a:off x="1447920" y="3990960"/>
-            <a:ext cx="2675520" cy="75240"/>
+            <a:ext cx="2675160" cy="74880"/>
           </a:xfrm>
           <a:custGeom>
             <a:avLst/>
@@ -8755,7 +8745,7 @@
         <p:spPr>
           <a:xfrm>
             <a:off x="380880" y="4295880"/>
-            <a:ext cx="5599800" cy="246600"/>
+            <a:ext cx="5599440" cy="246240"/>
           </a:xfrm>
           <a:prstGeom prst="rect">
             <a:avLst/>
@@ -8807,7 +8797,7 @@
         <p:spPr>
           <a:xfrm>
             <a:off x="6286680" y="2886120"/>
-            <a:ext cx="5590080" cy="189360"/>
+            <a:ext cx="5589720" cy="189000"/>
           </a:xfrm>
           <a:prstGeom prst="rect">
             <a:avLst/>
@@ -8835,7 +8825,7 @@
               <a:buNone/>
             </a:pPr>
             <a:r>
-              <a:rPr b="0" lang="en-US" sz="1050" spc="202" strike="noStrike">
+              <a:rPr b="0" lang="en-US" sz="1050" spc="199" strike="noStrike">
                 <a:solidFill>
                   <a:srgbClr val="0071e3"/>
                 </a:solidFill>
@@ -8859,7 +8849,7 @@
         <p:spPr>
           <a:xfrm>
             <a:off x="6286680" y="3228840"/>
-            <a:ext cx="989640" cy="227520"/>
+            <a:ext cx="989280" cy="227160"/>
           </a:xfrm>
           <a:prstGeom prst="rect">
             <a:avLst/>
@@ -8911,7 +8901,7 @@
         <p:spPr>
           <a:xfrm>
             <a:off x="7353360" y="3305160"/>
-            <a:ext cx="3694680" cy="75240"/>
+            <a:ext cx="3694320" cy="74880"/>
           </a:xfrm>
           <a:custGeom>
             <a:avLst/>
@@ -8962,7 +8952,7 @@
         <p:spPr>
           <a:xfrm>
             <a:off x="7353360" y="3305160"/>
-            <a:ext cx="446760" cy="75240"/>
+            <a:ext cx="446400" cy="74880"/>
           </a:xfrm>
           <a:custGeom>
             <a:avLst/>
@@ -9013,7 +9003,7 @@
         <p:spPr>
           <a:xfrm>
             <a:off x="11201400" y="3247920"/>
-            <a:ext cx="675360" cy="189360"/>
+            <a:ext cx="675000" cy="189000"/>
           </a:xfrm>
           <a:prstGeom prst="rect">
             <a:avLst/>
@@ -9065,7 +9055,7 @@
         <p:spPr>
           <a:xfrm>
             <a:off x="6286680" y="3571920"/>
-            <a:ext cx="989640" cy="227520"/>
+            <a:ext cx="989280" cy="227160"/>
           </a:xfrm>
           <a:prstGeom prst="rect">
             <a:avLst/>
@@ -9117,7 +9107,7 @@
         <p:spPr>
           <a:xfrm>
             <a:off x="7353360" y="3648240"/>
-            <a:ext cx="3694680" cy="75240"/>
+            <a:ext cx="3694320" cy="74880"/>
           </a:xfrm>
           <a:custGeom>
             <a:avLst/>
@@ -9168,7 +9158,7 @@
         <p:spPr>
           <a:xfrm>
             <a:off x="7353360" y="3648240"/>
-            <a:ext cx="1846800" cy="75240"/>
+            <a:ext cx="1846440" cy="74880"/>
           </a:xfrm>
           <a:custGeom>
             <a:avLst/>
@@ -9219,7 +9209,7 @@
         <p:spPr>
           <a:xfrm>
             <a:off x="11201400" y="3591000"/>
-            <a:ext cx="675360" cy="189360"/>
+            <a:ext cx="675000" cy="189000"/>
           </a:xfrm>
           <a:prstGeom prst="rect">
             <a:avLst/>
@@ -9271,7 +9261,7 @@
         <p:spPr>
           <a:xfrm>
             <a:off x="6286680" y="3990960"/>
-            <a:ext cx="989640" cy="227520"/>
+            <a:ext cx="989280" cy="227160"/>
           </a:xfrm>
           <a:prstGeom prst="rect">
             <a:avLst/>
@@ -9323,7 +9313,7 @@
         <p:spPr>
           <a:xfrm>
             <a:off x="7353360" y="4067280"/>
-            <a:ext cx="3694680" cy="75240"/>
+            <a:ext cx="3694320" cy="74880"/>
           </a:xfrm>
           <a:custGeom>
             <a:avLst/>
@@ -9374,7 +9364,7 @@
         <p:spPr>
           <a:xfrm>
             <a:off x="7353360" y="4067280"/>
-            <a:ext cx="3580200" cy="75240"/>
+            <a:ext cx="3579840" cy="74880"/>
           </a:xfrm>
           <a:custGeom>
             <a:avLst/>
@@ -9425,7 +9415,7 @@
         <p:spPr>
           <a:xfrm>
             <a:off x="11201400" y="3914640"/>
-            <a:ext cx="675360" cy="379800"/>
+            <a:ext cx="675000" cy="379440"/>
           </a:xfrm>
           <a:prstGeom prst="rect">
             <a:avLst/>
@@ -9477,7 +9467,7 @@
         <p:spPr>
           <a:xfrm>
             <a:off x="6286680" y="4448160"/>
-            <a:ext cx="5599800" cy="246600"/>
+            <a:ext cx="5599440" cy="246240"/>
           </a:xfrm>
           <a:prstGeom prst="rect">
             <a:avLst/>
@@ -9529,7 +9519,7 @@
         <p:spPr>
           <a:xfrm>
             <a:off x="380880" y="5005440"/>
-            <a:ext cx="11428920" cy="8280"/>
+            <a:ext cx="11428560" cy="7920"/>
           </a:xfrm>
           <a:custGeom>
             <a:avLst/>
@@ -9580,7 +9570,7 @@
         <p:spPr>
           <a:xfrm>
             <a:off x="399960" y="5286240"/>
-            <a:ext cx="151200" cy="151200"/>
+            <a:ext cx="150840" cy="150840"/>
           </a:xfrm>
           <a:custGeom>
             <a:avLst/>
@@ -9722,7 +9712,7 @@
         <p:spPr>
           <a:xfrm>
             <a:off x="628560" y="5238720"/>
-            <a:ext cx="11257560" cy="494280"/>
+            <a:ext cx="11257200" cy="493920"/>
           </a:xfrm>
           <a:prstGeom prst="rect">
             <a:avLst/>
@@ -9821,7 +9811,7 @@
         <p:spPr>
           <a:xfrm>
             <a:off x="380880" y="1850760"/>
-            <a:ext cx="761040" cy="18000"/>
+            <a:ext cx="760680" cy="17640"/>
           </a:xfrm>
           <a:custGeom>
             <a:avLst/>
@@ -9872,7 +9862,7 @@
         <p:spPr>
           <a:xfrm>
             <a:off x="380880" y="2174760"/>
-            <a:ext cx="9162000" cy="189360"/>
+            <a:ext cx="9161640" cy="189000"/>
           </a:xfrm>
           <a:prstGeom prst="rect">
             <a:avLst/>
@@ -9900,7 +9890,7 @@
               <a:buNone/>
             </a:pPr>
             <a:r>
-              <a:rPr b="0" lang="en-US" sz="1050" spc="307" strike="noStrike">
+              <a:rPr b="0" lang="en-US" sz="1050" spc="304" strike="noStrike">
                 <a:solidFill>
                   <a:srgbClr val="86868b"/>
                 </a:solidFill>
@@ -9924,7 +9914,7 @@
         <p:spPr>
           <a:xfrm>
             <a:off x="380880" y="2593800"/>
-            <a:ext cx="9552600" cy="1732320"/>
+            <a:ext cx="9552240" cy="1731960"/>
           </a:xfrm>
           <a:prstGeom prst="rect">
             <a:avLst/>
@@ -9997,7 +9987,7 @@
         <p:spPr>
           <a:xfrm>
             <a:off x="380880" y="4635720"/>
-            <a:ext cx="5599800" cy="370440"/>
+            <a:ext cx="5599440" cy="370080"/>
           </a:xfrm>
           <a:prstGeom prst="rect">
             <a:avLst/>
@@ -10049,7 +10039,7 @@
         <p:spPr>
           <a:xfrm>
             <a:off x="9473400" y="2476440"/>
-            <a:ext cx="3285000" cy="1904040"/>
+            <a:ext cx="3284640" cy="1903680"/>
           </a:xfrm>
           <a:prstGeom prst="rect">
             <a:avLst/>
@@ -10138,7 +10128,7 @@
         <p:spPr>
           <a:xfrm>
             <a:off x="380880" y="380880"/>
-            <a:ext cx="11486160" cy="151200"/>
+            <a:ext cx="11485800" cy="150840"/>
           </a:xfrm>
           <a:prstGeom prst="rect">
             <a:avLst/>
@@ -10166,7 +10156,7 @@
               <a:buNone/>
             </a:pPr>
             <a:r>
-              <a:rPr b="0" lang="en-US" sz="900" spc="262" strike="noStrike">
+              <a:rPr b="0" lang="en-US" sz="900" spc="259" strike="noStrike">
                 <a:solidFill>
                   <a:srgbClr val="86868b"/>
                 </a:solidFill>
@@ -10190,7 +10180,7 @@
         <p:spPr>
           <a:xfrm>
             <a:off x="380880" y="609480"/>
-            <a:ext cx="11600280" cy="379800"/>
+            <a:ext cx="11599920" cy="379440"/>
           </a:xfrm>
           <a:prstGeom prst="rect">
             <a:avLst/>
@@ -10242,7 +10232,7 @@
         <p:spPr>
           <a:xfrm>
             <a:off x="380880" y="1848960"/>
-            <a:ext cx="5609160" cy="560880"/>
+            <a:ext cx="5608800" cy="560520"/>
           </a:xfrm>
           <a:prstGeom prst="rect">
             <a:avLst/>
@@ -10314,7 +10304,7 @@
         <p:spPr>
           <a:xfrm>
             <a:off x="380880" y="2596680"/>
-            <a:ext cx="5599800" cy="494280"/>
+            <a:ext cx="5599440" cy="493920"/>
           </a:xfrm>
           <a:prstGeom prst="rect">
             <a:avLst/>
@@ -10376,7 +10366,7 @@
         <p:spPr>
           <a:xfrm>
             <a:off x="380880" y="3244320"/>
-            <a:ext cx="5599800" cy="494280"/>
+            <a:ext cx="5599440" cy="493920"/>
           </a:xfrm>
           <a:prstGeom prst="rect">
             <a:avLst/>
@@ -10428,7 +10418,7 @@
         <p:spPr>
           <a:xfrm>
             <a:off x="6296040" y="1848960"/>
-            <a:ext cx="18000" cy="799200"/>
+            <a:ext cx="17640" cy="798840"/>
           </a:xfrm>
           <a:custGeom>
             <a:avLst/>
@@ -10479,7 +10469,7 @@
         <p:spPr>
           <a:xfrm>
             <a:off x="6496200" y="1848960"/>
-            <a:ext cx="5380560" cy="189360"/>
+            <a:ext cx="5380200" cy="189000"/>
           </a:xfrm>
           <a:prstGeom prst="rect">
             <a:avLst/>
@@ -10507,7 +10497,7 @@
               <a:buNone/>
             </a:pPr>
             <a:r>
-              <a:rPr b="0" lang="en-US" sz="1050" spc="202" strike="noStrike">
+              <a:rPr b="0" lang="en-US" sz="1050" spc="199" strike="noStrike">
                 <a:solidFill>
                   <a:srgbClr val="0071e3"/>
                 </a:solidFill>
@@ -10531,7 +10521,7 @@
         <p:spPr>
           <a:xfrm>
             <a:off x="6496200" y="2115720"/>
-            <a:ext cx="5428080" cy="303840"/>
+            <a:ext cx="5427720" cy="303480"/>
           </a:xfrm>
           <a:prstGeom prst="rect">
             <a:avLst/>
@@ -10583,7 +10573,7 @@
         <p:spPr>
           <a:xfrm>
             <a:off x="6496200" y="2458800"/>
-            <a:ext cx="5380560" cy="189360"/>
+            <a:ext cx="5380200" cy="189000"/>
           </a:xfrm>
           <a:prstGeom prst="rect">
             <a:avLst/>
@@ -10635,7 +10625,7 @@
         <p:spPr>
           <a:xfrm>
             <a:off x="6296040" y="2801520"/>
-            <a:ext cx="18000" cy="799200"/>
+            <a:ext cx="17640" cy="798840"/>
           </a:xfrm>
           <a:custGeom>
             <a:avLst/>
@@ -10686,7 +10676,7 @@
         <p:spPr>
           <a:xfrm>
             <a:off x="6496200" y="2801520"/>
-            <a:ext cx="5380560" cy="189360"/>
+            <a:ext cx="5380200" cy="189000"/>
           </a:xfrm>
           <a:prstGeom prst="rect">
             <a:avLst/>
@@ -10714,7 +10704,7 @@
               <a:buNone/>
             </a:pPr>
             <a:r>
-              <a:rPr b="0" lang="en-US" sz="1050" spc="202" strike="noStrike">
+              <a:rPr b="0" lang="en-US" sz="1050" spc="199" strike="noStrike">
                 <a:solidFill>
                   <a:srgbClr val="86868b"/>
                 </a:solidFill>
@@ -10738,7 +10728,7 @@
         <p:spPr>
           <a:xfrm>
             <a:off x="6496200" y="3068280"/>
-            <a:ext cx="5428080" cy="303840"/>
+            <a:ext cx="5427720" cy="303480"/>
           </a:xfrm>
           <a:prstGeom prst="rect">
             <a:avLst/>
@@ -10790,7 +10780,7 @@
         <p:spPr>
           <a:xfrm>
             <a:off x="6496200" y="3411000"/>
-            <a:ext cx="5380560" cy="189360"/>
+            <a:ext cx="5380200" cy="189000"/>
           </a:xfrm>
           <a:prstGeom prst="rect">
             <a:avLst/>
@@ -10842,7 +10832,7 @@
         <p:spPr>
           <a:xfrm>
             <a:off x="6296040" y="3754080"/>
-            <a:ext cx="18000" cy="799200"/>
+            <a:ext cx="17640" cy="798840"/>
           </a:xfrm>
           <a:custGeom>
             <a:avLst/>
@@ -10893,7 +10883,7 @@
         <p:spPr>
           <a:xfrm>
             <a:off x="6496200" y="3754080"/>
-            <a:ext cx="5380560" cy="189360"/>
+            <a:ext cx="5380200" cy="189000"/>
           </a:xfrm>
           <a:prstGeom prst="rect">
             <a:avLst/>
@@ -10921,7 +10911,7 @@
               <a:buNone/>
             </a:pPr>
             <a:r>
-              <a:rPr b="0" lang="en-US" sz="1050" spc="202" strike="noStrike">
+              <a:rPr b="0" lang="en-US" sz="1050" spc="199" strike="noStrike">
                 <a:solidFill>
                   <a:srgbClr val="86868b"/>
                 </a:solidFill>
@@ -10945,7 +10935,7 @@
         <p:spPr>
           <a:xfrm>
             <a:off x="6496200" y="4020840"/>
-            <a:ext cx="5428080" cy="303840"/>
+            <a:ext cx="5427720" cy="303480"/>
           </a:xfrm>
           <a:prstGeom prst="rect">
             <a:avLst/>
@@ -10997,7 +10987,7 @@
         <p:spPr>
           <a:xfrm>
             <a:off x="6496200" y="4363560"/>
-            <a:ext cx="5380560" cy="189360"/>
+            <a:ext cx="5380200" cy="189000"/>
           </a:xfrm>
           <a:prstGeom prst="rect">
             <a:avLst/>
@@ -11049,7 +11039,7 @@
         <p:spPr>
           <a:xfrm>
             <a:off x="380880" y="4787640"/>
-            <a:ext cx="11428920" cy="8280"/>
+            <a:ext cx="11428560" cy="7920"/>
           </a:xfrm>
           <a:custGeom>
             <a:avLst/>
@@ -11100,7 +11090,7 @@
         <p:spPr>
           <a:xfrm>
             <a:off x="380880" y="5020920"/>
-            <a:ext cx="11495520" cy="189360"/>
+            <a:ext cx="11495160" cy="189000"/>
           </a:xfrm>
           <a:prstGeom prst="rect">
             <a:avLst/>
@@ -11128,7 +11118,7 @@
               <a:buNone/>
             </a:pPr>
             <a:r>
-              <a:rPr b="0" lang="en-US" sz="1050" spc="202" strike="noStrike">
+              <a:rPr b="0" lang="en-US" sz="1050" spc="199" strike="noStrike">
                 <a:solidFill>
                   <a:srgbClr val="86868b"/>
                 </a:solidFill>
@@ -11152,7 +11142,7 @@
         <p:spPr>
           <a:xfrm>
             <a:off x="380880" y="5363640"/>
-            <a:ext cx="189360" cy="151200"/>
+            <a:ext cx="189000" cy="150840"/>
           </a:xfrm>
           <a:custGeom>
             <a:avLst/>
@@ -11394,7 +11384,7 @@
         <p:spPr>
           <a:xfrm>
             <a:off x="628560" y="5325840"/>
-            <a:ext cx="3485160" cy="227520"/>
+            <a:ext cx="3484800" cy="227160"/>
           </a:xfrm>
           <a:prstGeom prst="rect">
             <a:avLst/>
@@ -11446,7 +11436,7 @@
         <p:spPr>
           <a:xfrm>
             <a:off x="380880" y="5630400"/>
-            <a:ext cx="3723120" cy="218160"/>
+            <a:ext cx="3722760" cy="217800"/>
           </a:xfrm>
           <a:prstGeom prst="rect">
             <a:avLst/>
@@ -11498,7 +11488,7 @@
         <p:spPr>
           <a:xfrm>
             <a:off x="4286160" y="5363640"/>
-            <a:ext cx="151200" cy="151200"/>
+            <a:ext cx="150840" cy="150840"/>
           </a:xfrm>
           <a:custGeom>
             <a:avLst/>
@@ -11596,7 +11586,7 @@
         <p:spPr>
           <a:xfrm>
             <a:off x="4514760" y="5325840"/>
-            <a:ext cx="3485160" cy="227520"/>
+            <a:ext cx="3484800" cy="227160"/>
           </a:xfrm>
           <a:prstGeom prst="rect">
             <a:avLst/>
@@ -11648,7 +11638,7 @@
         <p:spPr>
           <a:xfrm>
             <a:off x="4267080" y="5630400"/>
-            <a:ext cx="3723120" cy="218160"/>
+            <a:ext cx="3722760" cy="217800"/>
           </a:xfrm>
           <a:prstGeom prst="rect">
             <a:avLst/>
@@ -11700,7 +11690,7 @@
         <p:spPr>
           <a:xfrm>
             <a:off x="8172360" y="5363640"/>
-            <a:ext cx="151200" cy="151200"/>
+            <a:ext cx="150840" cy="150840"/>
           </a:xfrm>
           <a:custGeom>
             <a:avLst/>
@@ -11837,7 +11827,7 @@
         <p:spPr>
           <a:xfrm>
             <a:off x="8400960" y="5325840"/>
-            <a:ext cx="3485160" cy="227520"/>
+            <a:ext cx="3484800" cy="227160"/>
           </a:xfrm>
           <a:prstGeom prst="rect">
             <a:avLst/>
@@ -11889,7 +11879,7 @@
         <p:spPr>
           <a:xfrm>
             <a:off x="8153280" y="5630400"/>
-            <a:ext cx="3723120" cy="218160"/>
+            <a:ext cx="3722760" cy="217800"/>
           </a:xfrm>
           <a:prstGeom prst="rect">
             <a:avLst/>
@@ -11978,7 +11968,7 @@
         <p:spPr>
           <a:xfrm>
             <a:off x="380880" y="380880"/>
-            <a:ext cx="11486160" cy="151200"/>
+            <a:ext cx="11485800" cy="150840"/>
           </a:xfrm>
           <a:prstGeom prst="rect">
             <a:avLst/>
@@ -12006,7 +11996,7 @@
               <a:buNone/>
             </a:pPr>
             <a:r>
-              <a:rPr b="0" lang="en-US" sz="900" spc="262" strike="noStrike">
+              <a:rPr b="0" lang="en-US" sz="900" spc="259" strike="noStrike">
                 <a:solidFill>
                   <a:srgbClr val="86868b"/>
                 </a:solidFill>
@@ -12030,7 +12020,7 @@
         <p:spPr>
           <a:xfrm>
             <a:off x="380880" y="609480"/>
-            <a:ext cx="11600280" cy="379800"/>
+            <a:ext cx="11599920" cy="379440"/>
           </a:xfrm>
           <a:prstGeom prst="rect">
             <a:avLst/>
@@ -12082,7 +12072,7 @@
         <p:spPr>
           <a:xfrm>
             <a:off x="380880" y="1886040"/>
-            <a:ext cx="3656520" cy="8280"/>
+            <a:ext cx="3656160" cy="7920"/>
           </a:xfrm>
           <a:custGeom>
             <a:avLst/>
@@ -12133,7 +12123,7 @@
         <p:spPr>
           <a:xfrm>
             <a:off x="409680" y="2081160"/>
-            <a:ext cx="227520" cy="227520"/>
+            <a:ext cx="227160" cy="227160"/>
           </a:xfrm>
           <a:custGeom>
             <a:avLst/>
@@ -12334,7 +12324,7 @@
         <p:spPr>
           <a:xfrm>
             <a:off x="380880" y="2424240"/>
-            <a:ext cx="3751920" cy="265680"/>
+            <a:ext cx="3751560" cy="265320"/>
           </a:xfrm>
           <a:prstGeom prst="rect">
             <a:avLst/>
@@ -12386,7 +12376,7 @@
         <p:spPr>
           <a:xfrm>
             <a:off x="380880" y="2843280"/>
-            <a:ext cx="3732840" cy="494280"/>
+            <a:ext cx="3732480" cy="493920"/>
           </a:xfrm>
           <a:prstGeom prst="rect">
             <a:avLst/>
@@ -12438,7 +12428,7 @@
         <p:spPr>
           <a:xfrm>
             <a:off x="4267080" y="1886040"/>
-            <a:ext cx="3656520" cy="8280"/>
+            <a:ext cx="3656160" cy="7920"/>
           </a:xfrm>
           <a:custGeom>
             <a:avLst/>
@@ -12489,7 +12479,7 @@
         <p:spPr>
           <a:xfrm>
             <a:off x="4324320" y="2081160"/>
-            <a:ext cx="170280" cy="227520"/>
+            <a:ext cx="169920" cy="227160"/>
           </a:xfrm>
           <a:custGeom>
             <a:avLst/>
@@ -12621,7 +12611,7 @@
         <p:spPr>
           <a:xfrm>
             <a:off x="4267080" y="2424240"/>
-            <a:ext cx="3751920" cy="265680"/>
+            <a:ext cx="3751560" cy="265320"/>
           </a:xfrm>
           <a:prstGeom prst="rect">
             <a:avLst/>
@@ -12673,7 +12663,7 @@
         <p:spPr>
           <a:xfrm>
             <a:off x="4267080" y="2843280"/>
-            <a:ext cx="3732840" cy="494280"/>
+            <a:ext cx="3732480" cy="493920"/>
           </a:xfrm>
           <a:prstGeom prst="rect">
             <a:avLst/>
@@ -12725,7 +12715,7 @@
         <p:spPr>
           <a:xfrm>
             <a:off x="8153280" y="1886040"/>
-            <a:ext cx="3656520" cy="8280"/>
+            <a:ext cx="3656160" cy="7920"/>
           </a:xfrm>
           <a:custGeom>
             <a:avLst/>
@@ -12776,7 +12766,7 @@
         <p:spPr>
           <a:xfrm>
             <a:off x="8182080" y="2081160"/>
-            <a:ext cx="227520" cy="227520"/>
+            <a:ext cx="227160" cy="227160"/>
           </a:xfrm>
           <a:custGeom>
             <a:avLst/>
@@ -12999,7 +12989,7 @@
         <p:spPr>
           <a:xfrm>
             <a:off x="8153280" y="2424240"/>
-            <a:ext cx="3751920" cy="265680"/>
+            <a:ext cx="3751560" cy="265320"/>
           </a:xfrm>
           <a:prstGeom prst="rect">
             <a:avLst/>
@@ -13051,7 +13041,7 @@
         <p:spPr>
           <a:xfrm>
             <a:off x="8153280" y="2843280"/>
-            <a:ext cx="3732840" cy="494280"/>
+            <a:ext cx="3732480" cy="493920"/>
           </a:xfrm>
           <a:prstGeom prst="rect">
             <a:avLst/>
@@ -13103,7 +13093,7 @@
         <p:spPr>
           <a:xfrm>
             <a:off x="380880" y="3571920"/>
-            <a:ext cx="3656520" cy="8280"/>
+            <a:ext cx="3656160" cy="7920"/>
           </a:xfrm>
           <a:custGeom>
             <a:avLst/>
@@ -13154,7 +13144,7 @@
         <p:spPr>
           <a:xfrm>
             <a:off x="380880" y="3767040"/>
-            <a:ext cx="284760" cy="227520"/>
+            <a:ext cx="284400" cy="227160"/>
           </a:xfrm>
           <a:custGeom>
             <a:avLst/>
@@ -13370,7 +13360,7 @@
         <p:spPr>
           <a:xfrm>
             <a:off x="380880" y="4110120"/>
-            <a:ext cx="3751920" cy="265680"/>
+            <a:ext cx="3751560" cy="265320"/>
           </a:xfrm>
           <a:prstGeom prst="rect">
             <a:avLst/>
@@ -13422,7 +13412,7 @@
         <p:spPr>
           <a:xfrm>
             <a:off x="380880" y="4529160"/>
-            <a:ext cx="3732840" cy="741960"/>
+            <a:ext cx="3732480" cy="741600"/>
           </a:xfrm>
           <a:prstGeom prst="rect">
             <a:avLst/>
@@ -13474,7 +13464,7 @@
         <p:spPr>
           <a:xfrm>
             <a:off x="4267080" y="3571920"/>
-            <a:ext cx="3656520" cy="8280"/>
+            <a:ext cx="3656160" cy="7920"/>
           </a:xfrm>
           <a:custGeom>
             <a:avLst/>
@@ -13525,7 +13515,7 @@
         <p:spPr>
           <a:xfrm>
             <a:off x="4324320" y="3767040"/>
-            <a:ext cx="170280" cy="227520"/>
+            <a:ext cx="169920" cy="227160"/>
           </a:xfrm>
           <a:custGeom>
             <a:avLst/>
@@ -13724,7 +13714,7 @@
         <p:spPr>
           <a:xfrm>
             <a:off x="4267080" y="4110120"/>
-            <a:ext cx="3751920" cy="265680"/>
+            <a:ext cx="3751560" cy="265320"/>
           </a:xfrm>
           <a:prstGeom prst="rect">
             <a:avLst/>
@@ -13776,7 +13766,7 @@
         <p:spPr>
           <a:xfrm>
             <a:off x="4267080" y="4529160"/>
-            <a:ext cx="3732840" cy="494280"/>
+            <a:ext cx="3732480" cy="493920"/>
           </a:xfrm>
           <a:prstGeom prst="rect">
             <a:avLst/>
@@ -13828,7 +13818,7 @@
         <p:spPr>
           <a:xfrm>
             <a:off x="8153280" y="3571920"/>
-            <a:ext cx="3656520" cy="8280"/>
+            <a:ext cx="3656160" cy="7920"/>
           </a:xfrm>
           <a:custGeom>
             <a:avLst/>
@@ -13879,7 +13869,7 @@
         <p:spPr>
           <a:xfrm>
             <a:off x="8182080" y="3767040"/>
-            <a:ext cx="227520" cy="227520"/>
+            <a:ext cx="227160" cy="227160"/>
           </a:xfrm>
           <a:custGeom>
             <a:avLst/>
@@ -14118,7 +14108,7 @@
         <p:spPr>
           <a:xfrm>
             <a:off x="8153280" y="4110120"/>
-            <a:ext cx="3751920" cy="265680"/>
+            <a:ext cx="3751560" cy="265320"/>
           </a:xfrm>
           <a:prstGeom prst="rect">
             <a:avLst/>
@@ -14170,7 +14160,7 @@
         <p:spPr>
           <a:xfrm>
             <a:off x="8153280" y="4529160"/>
-            <a:ext cx="3732840" cy="494280"/>
+            <a:ext cx="3732480" cy="493920"/>
           </a:xfrm>
           <a:prstGeom prst="rect">
             <a:avLst/>
@@ -14222,7 +14212,7 @@
         <p:spPr>
           <a:xfrm>
             <a:off x="380880" y="6091200"/>
-            <a:ext cx="11428920" cy="8280"/>
+            <a:ext cx="11428560" cy="7920"/>
           </a:xfrm>
           <a:custGeom>
             <a:avLst/>
@@ -14273,7 +14263,7 @@
         <p:spPr>
           <a:xfrm>
             <a:off x="399960" y="6286680"/>
-            <a:ext cx="151200" cy="151200"/>
+            <a:ext cx="150840" cy="150840"/>
           </a:xfrm>
           <a:custGeom>
             <a:avLst/>
@@ -14450,7 +14440,7 @@
         <p:spPr>
           <a:xfrm>
             <a:off x="628560" y="6248520"/>
-            <a:ext cx="11257560" cy="227520"/>
+            <a:ext cx="11257200" cy="227160"/>
           </a:xfrm>
           <a:prstGeom prst="rect">
             <a:avLst/>
@@ -14549,7 +14539,7 @@
         <p:spPr>
           <a:xfrm>
             <a:off x="380880" y="380880"/>
-            <a:ext cx="608400" cy="18000"/>
+            <a:ext cx="608040" cy="17640"/>
           </a:xfrm>
           <a:custGeom>
             <a:avLst/>
@@ -14600,7 +14590,7 @@
         <p:spPr>
           <a:xfrm>
             <a:off x="380880" y="628560"/>
-            <a:ext cx="11495520" cy="189360"/>
+            <a:ext cx="11495160" cy="189000"/>
           </a:xfrm>
           <a:prstGeom prst="rect">
             <a:avLst/>
@@ -14628,7 +14618,7 @@
               <a:buNone/>
             </a:pPr>
             <a:r>
-              <a:rPr b="0" lang="en-US" sz="1050" spc="307" strike="noStrike">
+              <a:rPr b="0" lang="en-US" sz="1050" spc="304" strike="noStrike">
                 <a:solidFill>
                   <a:srgbClr val="86868b"/>
                 </a:solidFill>
@@ -14652,7 +14642,7 @@
         <p:spPr>
           <a:xfrm>
             <a:off x="380880" y="971640"/>
-            <a:ext cx="11714760" cy="570600"/>
+            <a:ext cx="11714400" cy="570240"/>
           </a:xfrm>
           <a:prstGeom prst="rect">
             <a:avLst/>
@@ -14704,7 +14694,7 @@
         <p:spPr>
           <a:xfrm>
             <a:off x="385920" y="2714760"/>
-            <a:ext cx="370440" cy="370440"/>
+            <a:ext cx="370080" cy="370080"/>
           </a:xfrm>
           <a:custGeom>
             <a:avLst/>
@@ -14756,7 +14746,7 @@
         <p:spPr>
           <a:xfrm>
             <a:off x="338040" y="2709720"/>
-            <a:ext cx="446760" cy="360720"/>
+            <a:ext cx="446400" cy="360360"/>
           </a:xfrm>
           <a:prstGeom prst="rect">
             <a:avLst/>
@@ -14808,7 +14798,7 @@
         <p:spPr>
           <a:xfrm>
             <a:off x="914400" y="2709720"/>
-            <a:ext cx="5047200" cy="265680"/>
+            <a:ext cx="5046840" cy="265320"/>
           </a:xfrm>
           <a:prstGeom prst="rect">
             <a:avLst/>
@@ -14860,7 +14850,7 @@
         <p:spPr>
           <a:xfrm>
             <a:off x="914400" y="3052800"/>
-            <a:ext cx="5028120" cy="494280"/>
+            <a:ext cx="5027760" cy="493920"/>
           </a:xfrm>
           <a:prstGeom prst="rect">
             <a:avLst/>
@@ -14932,7 +14922,7 @@
         <p:spPr>
           <a:xfrm>
             <a:off x="6329520" y="2714760"/>
-            <a:ext cx="370440" cy="370440"/>
+            <a:ext cx="370080" cy="370080"/>
           </a:xfrm>
           <a:custGeom>
             <a:avLst/>
@@ -14984,7 +14974,7 @@
         <p:spPr>
           <a:xfrm>
             <a:off x="6281640" y="2709720"/>
-            <a:ext cx="446760" cy="360720"/>
+            <a:ext cx="446400" cy="360360"/>
           </a:xfrm>
           <a:prstGeom prst="rect">
             <a:avLst/>
@@ -15036,7 +15026,7 @@
         <p:spPr>
           <a:xfrm>
             <a:off x="6858000" y="2709720"/>
-            <a:ext cx="5047200" cy="265680"/>
+            <a:ext cx="5046840" cy="265320"/>
           </a:xfrm>
           <a:prstGeom prst="rect">
             <a:avLst/>
@@ -15088,7 +15078,7 @@
         <p:spPr>
           <a:xfrm>
             <a:off x="6858000" y="3052800"/>
-            <a:ext cx="5028120" cy="494280"/>
+            <a:ext cx="5027760" cy="493920"/>
           </a:xfrm>
           <a:prstGeom prst="rect">
             <a:avLst/>
@@ -15160,7 +15150,7 @@
         <p:spPr>
           <a:xfrm>
             <a:off x="385920" y="3781440"/>
-            <a:ext cx="370440" cy="370440"/>
+            <a:ext cx="370080" cy="370080"/>
           </a:xfrm>
           <a:custGeom>
             <a:avLst/>
@@ -15212,7 +15202,7 @@
         <p:spPr>
           <a:xfrm>
             <a:off x="338040" y="3776760"/>
-            <a:ext cx="446760" cy="360720"/>
+            <a:ext cx="446400" cy="360360"/>
           </a:xfrm>
           <a:prstGeom prst="rect">
             <a:avLst/>
@@ -15264,7 +15254,7 @@
         <p:spPr>
           <a:xfrm>
             <a:off x="914400" y="3776760"/>
-            <a:ext cx="5047200" cy="265680"/>
+            <a:ext cx="5046840" cy="265320"/>
           </a:xfrm>
           <a:prstGeom prst="rect">
             <a:avLst/>
@@ -15316,7 +15306,7 @@
         <p:spPr>
           <a:xfrm>
             <a:off x="914400" y="4119480"/>
-            <a:ext cx="5028120" cy="494280"/>
+            <a:ext cx="5027760" cy="493920"/>
           </a:xfrm>
           <a:prstGeom prst="rect">
             <a:avLst/>
@@ -15408,7 +15398,7 @@
         <p:spPr>
           <a:xfrm>
             <a:off x="6329520" y="3781440"/>
-            <a:ext cx="370440" cy="370440"/>
+            <a:ext cx="370080" cy="370080"/>
           </a:xfrm>
           <a:custGeom>
             <a:avLst/>
@@ -15460,7 +15450,7 @@
         <p:spPr>
           <a:xfrm>
             <a:off x="6281640" y="3776760"/>
-            <a:ext cx="446760" cy="360720"/>
+            <a:ext cx="446400" cy="360360"/>
           </a:xfrm>
           <a:prstGeom prst="rect">
             <a:avLst/>
@@ -15512,7 +15502,7 @@
         <p:spPr>
           <a:xfrm>
             <a:off x="6858000" y="3776760"/>
-            <a:ext cx="5047200" cy="265680"/>
+            <a:ext cx="5046840" cy="265320"/>
           </a:xfrm>
           <a:prstGeom prst="rect">
             <a:avLst/>
@@ -15564,7 +15554,7 @@
         <p:spPr>
           <a:xfrm>
             <a:off x="6858000" y="4119480"/>
-            <a:ext cx="5028120" cy="494280"/>
+            <a:ext cx="5027760" cy="493920"/>
           </a:xfrm>
           <a:prstGeom prst="rect">
             <a:avLst/>
@@ -15636,7 +15626,7 @@
         <p:spPr>
           <a:xfrm>
             <a:off x="380880" y="5634000"/>
-            <a:ext cx="11428920" cy="8280"/>
+            <a:ext cx="11428560" cy="7920"/>
           </a:xfrm>
           <a:custGeom>
             <a:avLst/>
@@ -15687,7 +15677,7 @@
         <p:spPr>
           <a:xfrm>
             <a:off x="380880" y="5867280"/>
-            <a:ext cx="7771320" cy="303840"/>
+            <a:ext cx="7770960" cy="303480"/>
           </a:xfrm>
           <a:prstGeom prst="rect">
             <a:avLst/>
@@ -15739,7 +15729,7 @@
         <p:spPr>
           <a:xfrm>
             <a:off x="380880" y="6248520"/>
-            <a:ext cx="7733160" cy="227520"/>
+            <a:ext cx="7732800" cy="227160"/>
           </a:xfrm>
           <a:prstGeom prst="rect">
             <a:avLst/>
@@ -15801,7 +15791,7 @@
         <p:spPr>
           <a:xfrm>
             <a:off x="10064160" y="5981760"/>
-            <a:ext cx="1742040" cy="189360"/>
+            <a:ext cx="1741680" cy="189000"/>
           </a:xfrm>
           <a:prstGeom prst="rect">
             <a:avLst/>
@@ -15853,7 +15843,7 @@
         <p:spPr>
           <a:xfrm>
             <a:off x="10073880" y="6210360"/>
-            <a:ext cx="1732320" cy="151200"/>
+            <a:ext cx="1731960" cy="150840"/>
           </a:xfrm>
           <a:prstGeom prst="rect">
             <a:avLst/>
@@ -15942,7 +15932,7 @@
         <p:spPr>
           <a:xfrm>
             <a:off x="380880" y="380880"/>
-            <a:ext cx="11486160" cy="151200"/>
+            <a:ext cx="11485800" cy="150840"/>
           </a:xfrm>
           <a:prstGeom prst="rect">
             <a:avLst/>
@@ -15970,7 +15960,7 @@
               <a:buNone/>
             </a:pPr>
             <a:r>
-              <a:rPr b="0" lang="en-US" sz="900" spc="262" strike="noStrike">
+              <a:rPr b="0" lang="en-US" sz="900" spc="259" strike="noStrike">
                 <a:solidFill>
                   <a:srgbClr val="86868b"/>
                 </a:solidFill>
@@ -15994,7 +15984,7 @@
         <p:spPr>
           <a:xfrm>
             <a:off x="380880" y="647640"/>
-            <a:ext cx="11657520" cy="456120"/>
+            <a:ext cx="11657160" cy="455760"/>
           </a:xfrm>
           <a:prstGeom prst="rect">
             <a:avLst/>
@@ -16046,7 +16036,7 @@
         <p:spPr>
           <a:xfrm>
             <a:off x="380880" y="1714680"/>
-            <a:ext cx="875160" cy="570600"/>
+            <a:ext cx="874800" cy="570240"/>
           </a:xfrm>
           <a:prstGeom prst="rect">
             <a:avLst/>
@@ -16098,7 +16088,7 @@
         <p:spPr>
           <a:xfrm>
             <a:off x="1202760" y="1790640"/>
-            <a:ext cx="4628160" cy="303840"/>
+            <a:ext cx="4627800" cy="303480"/>
           </a:xfrm>
           <a:prstGeom prst="rect">
             <a:avLst/>
@@ -16150,7 +16140,7 @@
         <p:spPr>
           <a:xfrm>
             <a:off x="1202760" y="2209680"/>
-            <a:ext cx="4590000" cy="494280"/>
+            <a:ext cx="4589640" cy="493920"/>
           </a:xfrm>
           <a:prstGeom prst="rect">
             <a:avLst/>
@@ -16202,7 +16192,7 @@
         <p:spPr>
           <a:xfrm>
             <a:off x="6477120" y="1714680"/>
-            <a:ext cx="979920" cy="570600"/>
+            <a:ext cx="979560" cy="570240"/>
           </a:xfrm>
           <a:prstGeom prst="rect">
             <a:avLst/>
@@ -16254,7 +16244,7 @@
         <p:spPr>
           <a:xfrm>
             <a:off x="7402320" y="1790640"/>
-            <a:ext cx="4523400" cy="303840"/>
+            <a:ext cx="4523040" cy="303480"/>
           </a:xfrm>
           <a:prstGeom prst="rect">
             <a:avLst/>
@@ -16306,7 +16296,7 @@
         <p:spPr>
           <a:xfrm>
             <a:off x="7402320" y="2209680"/>
-            <a:ext cx="4485240" cy="494280"/>
+            <a:ext cx="4484880" cy="493920"/>
           </a:xfrm>
           <a:prstGeom prst="rect">
             <a:avLst/>
@@ -16358,7 +16348,7 @@
         <p:spPr>
           <a:xfrm>
             <a:off x="380880" y="4324320"/>
-            <a:ext cx="989640" cy="570600"/>
+            <a:ext cx="989280" cy="570240"/>
           </a:xfrm>
           <a:prstGeom prst="rect">
             <a:avLst/>
@@ -16410,7 +16400,7 @@
         <p:spPr>
           <a:xfrm>
             <a:off x="1311480" y="4400640"/>
-            <a:ext cx="4513680" cy="303840"/>
+            <a:ext cx="4513320" cy="303480"/>
           </a:xfrm>
           <a:prstGeom prst="rect">
             <a:avLst/>
@@ -16462,7 +16452,7 @@
         <p:spPr>
           <a:xfrm>
             <a:off x="1311480" y="4819680"/>
-            <a:ext cx="4475520" cy="494280"/>
+            <a:ext cx="4475160" cy="493920"/>
           </a:xfrm>
           <a:prstGeom prst="rect">
             <a:avLst/>
@@ -16514,7 +16504,7 @@
         <p:spPr>
           <a:xfrm>
             <a:off x="6477120" y="4324320"/>
-            <a:ext cx="989640" cy="570600"/>
+            <a:ext cx="989280" cy="570240"/>
           </a:xfrm>
           <a:prstGeom prst="rect">
             <a:avLst/>
@@ -16566,7 +16556,7 @@
         <p:spPr>
           <a:xfrm>
             <a:off x="7407000" y="4400640"/>
-            <a:ext cx="4513680" cy="303840"/>
+            <a:ext cx="4513320" cy="303480"/>
           </a:xfrm>
           <a:prstGeom prst="rect">
             <a:avLst/>
@@ -16618,7 +16608,7 @@
         <p:spPr>
           <a:xfrm>
             <a:off x="7407000" y="4819680"/>
-            <a:ext cx="4475520" cy="246600"/>
+            <a:ext cx="4475160" cy="246240"/>
           </a:xfrm>
           <a:prstGeom prst="rect">
             <a:avLst/>
@@ -16707,7 +16697,7 @@
         <p:spPr>
           <a:xfrm>
             <a:off x="380880" y="1665000"/>
-            <a:ext cx="761040" cy="18000"/>
+            <a:ext cx="760680" cy="17640"/>
           </a:xfrm>
           <a:custGeom>
             <a:avLst/>
@@ -16758,7 +16748,7 @@
         <p:spPr>
           <a:xfrm>
             <a:off x="380880" y="1989000"/>
-            <a:ext cx="9514440" cy="189360"/>
+            <a:ext cx="9514080" cy="189000"/>
           </a:xfrm>
           <a:prstGeom prst="rect">
             <a:avLst/>
@@ -16786,7 +16776,7 @@
               <a:buNone/>
             </a:pPr>
             <a:r>
-              <a:rPr b="0" lang="en-US" sz="1050" spc="307" strike="noStrike">
+              <a:rPr b="0" lang="en-US" sz="1050" spc="304" strike="noStrike">
                 <a:solidFill>
                   <a:srgbClr val="86868b"/>
                 </a:solidFill>
@@ -16810,7 +16800,7 @@
         <p:spPr>
           <a:xfrm>
             <a:off x="380880" y="2408040"/>
-            <a:ext cx="9905040" cy="1732320"/>
+            <a:ext cx="9904680" cy="1731960"/>
           </a:xfrm>
           <a:prstGeom prst="rect">
             <a:avLst/>
@@ -16883,7 +16873,7 @@
         <p:spPr>
           <a:xfrm>
             <a:off x="380880" y="4449960"/>
-            <a:ext cx="5599800" cy="741960"/>
+            <a:ext cx="5599440" cy="741600"/>
           </a:xfrm>
           <a:prstGeom prst="rect">
             <a:avLst/>
@@ -16935,7 +16925,7 @@
         <p:spPr>
           <a:xfrm>
             <a:off x="9833760" y="2476440"/>
-            <a:ext cx="2932560" cy="1904040"/>
+            <a:ext cx="2932200" cy="1903680"/>
           </a:xfrm>
           <a:prstGeom prst="rect">
             <a:avLst/>
@@ -17024,7 +17014,7 @@
         <p:spPr>
           <a:xfrm>
             <a:off x="380880" y="380880"/>
-            <a:ext cx="11486160" cy="151200"/>
+            <a:ext cx="11485800" cy="150840"/>
           </a:xfrm>
           <a:prstGeom prst="rect">
             <a:avLst/>
@@ -17052,7 +17042,7 @@
               <a:buNone/>
             </a:pPr>
             <a:r>
-              <a:rPr b="0" lang="en-US" sz="900" spc="262" strike="noStrike">
+              <a:rPr b="0" lang="en-US" sz="900" spc="259" strike="noStrike">
                 <a:solidFill>
                   <a:srgbClr val="86868b"/>
                 </a:solidFill>
@@ -17076,7 +17066,7 @@
         <p:spPr>
           <a:xfrm>
             <a:off x="380880" y="609480"/>
-            <a:ext cx="11600280" cy="379800"/>
+            <a:ext cx="11599920" cy="379440"/>
           </a:xfrm>
           <a:prstGeom prst="rect">
             <a:avLst/>
@@ -17104,21 +17094,19 @@
               <a:buNone/>
             </a:pPr>
             <a:r>
-              <a:rPr b="1" lang="en-US" sz="2700" spc="-1" strike="noStrike" u="sng">
+              <a:rPr b="0" lang="en-US" sz="2700" spc="-1" strike="noStrike">
                 <a:solidFill>
                   <a:srgbClr val="800080"/>
                 </a:solidFill>
-                <a:uFillTx/>
                 <a:latin typeface="Liter"/>
                 <a:ea typeface="Liter"/>
               </a:rPr>
               <a:t>The Surprising Question</a:t>
             </a:r>
-            <a:endParaRPr b="1" lang="en-HK" sz="2700" spc="-1" strike="noStrike" u="sng">
+            <a:endParaRPr b="0" lang="en-HK" sz="2700" spc="-1" strike="noStrike">
               <a:solidFill>
                 <a:srgbClr val="800080"/>
               </a:solidFill>
-              <a:uFillTx/>
               <a:latin typeface="Arial"/>
             </a:endParaRPr>
           </a:p>
@@ -17133,7 +17121,7 @@
         <p:spPr>
           <a:xfrm>
             <a:off x="380880" y="1824120"/>
-            <a:ext cx="8647560" cy="741960"/>
+            <a:ext cx="8647200" cy="741600"/>
           </a:xfrm>
           <a:prstGeom prst="rect">
             <a:avLst/>
@@ -17195,7 +17183,7 @@
         <p:spPr>
           <a:xfrm>
             <a:off x="380880" y="3338640"/>
-            <a:ext cx="5485320" cy="18000"/>
+            <a:ext cx="5484960" cy="17640"/>
           </a:xfrm>
           <a:custGeom>
             <a:avLst/>
@@ -17246,7 +17234,7 @@
         <p:spPr>
           <a:xfrm>
             <a:off x="380880" y="3576600"/>
-            <a:ext cx="5551920" cy="189360"/>
+            <a:ext cx="5551560" cy="189000"/>
           </a:xfrm>
           <a:prstGeom prst="rect">
             <a:avLst/>
@@ -17274,7 +17262,7 @@
               <a:buNone/>
             </a:pPr>
             <a:r>
-              <a:rPr b="0" lang="en-US" sz="1050" spc="202" strike="noStrike">
+              <a:rPr b="0" lang="en-US" sz="1050" spc="199" strike="noStrike">
                 <a:solidFill>
                   <a:srgbClr val="86868b"/>
                 </a:solidFill>
@@ -17298,7 +17286,7 @@
         <p:spPr>
           <a:xfrm>
             <a:off x="380880" y="3919680"/>
-            <a:ext cx="1837080" cy="684720"/>
+            <a:ext cx="1836720" cy="684360"/>
           </a:xfrm>
           <a:prstGeom prst="rect">
             <a:avLst/>
@@ -17350,7 +17338,7 @@
         <p:spPr>
           <a:xfrm>
             <a:off x="1991160" y="4286160"/>
-            <a:ext cx="665640" cy="265680"/>
+            <a:ext cx="665280" cy="265320"/>
           </a:xfrm>
           <a:prstGeom prst="rect">
             <a:avLst/>
@@ -17402,7 +17390,7 @@
         <p:spPr>
           <a:xfrm>
             <a:off x="380880" y="4757760"/>
-            <a:ext cx="5561640" cy="246600"/>
+            <a:ext cx="5561280" cy="246240"/>
           </a:xfrm>
           <a:prstGeom prst="rect">
             <a:avLst/>
@@ -17454,7 +17442,7 @@
         <p:spPr>
           <a:xfrm>
             <a:off x="6324480" y="3338640"/>
-            <a:ext cx="5485320" cy="18000"/>
+            <a:ext cx="5484960" cy="17640"/>
           </a:xfrm>
           <a:custGeom>
             <a:avLst/>
@@ -17505,7 +17493,7 @@
         <p:spPr>
           <a:xfrm>
             <a:off x="6324480" y="3576600"/>
-            <a:ext cx="5551920" cy="189360"/>
+            <a:ext cx="5551560" cy="189000"/>
           </a:xfrm>
           <a:prstGeom prst="rect">
             <a:avLst/>
@@ -17533,7 +17521,7 @@
               <a:buNone/>
             </a:pPr>
             <a:r>
-              <a:rPr b="0" lang="en-US" sz="1050" spc="202" strike="noStrike">
+              <a:rPr b="0" lang="en-US" sz="1050" spc="199" strike="noStrike">
                 <a:solidFill>
                   <a:srgbClr val="0071e3"/>
                 </a:solidFill>
@@ -17557,7 +17545,7 @@
         <p:spPr>
           <a:xfrm>
             <a:off x="6324480" y="3919680"/>
-            <a:ext cx="1141920" cy="684720"/>
+            <a:ext cx="1141560" cy="684360"/>
           </a:xfrm>
           <a:prstGeom prst="rect">
             <a:avLst/>
@@ -17609,7 +17597,7 @@
         <p:spPr>
           <a:xfrm>
             <a:off x="7242120" y="4286160"/>
-            <a:ext cx="665640" cy="265680"/>
+            <a:ext cx="665280" cy="265320"/>
           </a:xfrm>
           <a:prstGeom prst="rect">
             <a:avLst/>
@@ -17661,7 +17649,7 @@
         <p:spPr>
           <a:xfrm>
             <a:off x="6324480" y="4757760"/>
-            <a:ext cx="5561640" cy="494280"/>
+            <a:ext cx="5561280" cy="493920"/>
           </a:xfrm>
           <a:prstGeom prst="rect">
             <a:avLst/>
@@ -17733,7 +17721,7 @@
         <p:spPr>
           <a:xfrm>
             <a:off x="380880" y="6014880"/>
-            <a:ext cx="11428920" cy="8280"/>
+            <a:ext cx="11428560" cy="7920"/>
           </a:xfrm>
           <a:custGeom>
             <a:avLst/>
@@ -17784,7 +17772,7 @@
         <p:spPr>
           <a:xfrm>
             <a:off x="419040" y="6286680"/>
-            <a:ext cx="113400" cy="151200"/>
+            <a:ext cx="113040" cy="150840"/>
           </a:xfrm>
           <a:custGeom>
             <a:avLst/>
@@ -17916,7 +17904,7 @@
         <p:spPr>
           <a:xfrm>
             <a:off x="628560" y="6248520"/>
-            <a:ext cx="11257560" cy="227520"/>
+            <a:ext cx="11257200" cy="227160"/>
           </a:xfrm>
           <a:prstGeom prst="rect">
             <a:avLst/>
@@ -18015,7 +18003,7 @@
         <p:spPr>
           <a:xfrm>
             <a:off x="380880" y="380880"/>
-            <a:ext cx="11486160" cy="151200"/>
+            <a:ext cx="11485800" cy="150840"/>
           </a:xfrm>
           <a:prstGeom prst="rect">
             <a:avLst/>
@@ -18043,7 +18031,7 @@
               <a:buNone/>
             </a:pPr>
             <a:r>
-              <a:rPr b="0" lang="en-US" sz="900" spc="262" strike="noStrike">
+              <a:rPr b="0" lang="en-US" sz="900" spc="259" strike="noStrike">
                 <a:solidFill>
                   <a:srgbClr val="86868b"/>
                 </a:solidFill>
@@ -18067,7 +18055,7 @@
         <p:spPr>
           <a:xfrm>
             <a:off x="380880" y="609480"/>
-            <a:ext cx="11600280" cy="379800"/>
+            <a:ext cx="11599920" cy="379440"/>
           </a:xfrm>
           <a:prstGeom prst="rect">
             <a:avLst/>
@@ -18119,7 +18107,7 @@
         <p:spPr>
           <a:xfrm>
             <a:off x="380880" y="1219320"/>
-            <a:ext cx="6113880" cy="5256720"/>
+            <a:ext cx="6113520" cy="5256360"/>
           </a:xfrm>
           <a:prstGeom prst="roundRect">
             <a:avLst>
@@ -18151,7 +18139,7 @@
         <p:spPr>
           <a:xfrm>
             <a:off x="6814080" y="1504800"/>
-            <a:ext cx="18000" cy="989640"/>
+            <a:ext cx="17640" cy="989280"/>
           </a:xfrm>
           <a:custGeom>
             <a:avLst/>
@@ -18202,7 +18190,7 @@
         <p:spPr>
           <a:xfrm>
             <a:off x="7014240" y="1504800"/>
-            <a:ext cx="570600" cy="379800"/>
+            <a:ext cx="570240" cy="379440"/>
           </a:xfrm>
           <a:prstGeom prst="rect">
             <a:avLst/>
@@ -18254,7 +18242,7 @@
         <p:spPr>
           <a:xfrm>
             <a:off x="7530120" y="1614600"/>
-            <a:ext cx="599040" cy="265680"/>
+            <a:ext cx="598680" cy="265320"/>
           </a:xfrm>
           <a:prstGeom prst="rect">
             <a:avLst/>
@@ -18306,7 +18294,7 @@
         <p:spPr>
           <a:xfrm>
             <a:off x="7014240" y="1924200"/>
-            <a:ext cx="4942440" cy="342000"/>
+            <a:ext cx="4942080" cy="341640"/>
           </a:xfrm>
           <a:prstGeom prst="rect">
             <a:avLst/>
@@ -18358,7 +18346,7 @@
         <p:spPr>
           <a:xfrm>
             <a:off x="7014240" y="2305080"/>
-            <a:ext cx="4866120" cy="189360"/>
+            <a:ext cx="4865760" cy="189000"/>
           </a:xfrm>
           <a:prstGeom prst="rect">
             <a:avLst/>
@@ -18410,7 +18398,7 @@
         <p:spPr>
           <a:xfrm>
             <a:off x="6814080" y="2647800"/>
-            <a:ext cx="18000" cy="722880"/>
+            <a:ext cx="17640" cy="722520"/>
           </a:xfrm>
           <a:custGeom>
             <a:avLst/>
@@ -18461,7 +18449,7 @@
         <p:spPr>
           <a:xfrm>
             <a:off x="7014240" y="2647800"/>
-            <a:ext cx="494280" cy="342000"/>
+            <a:ext cx="493920" cy="341640"/>
           </a:xfrm>
           <a:prstGeom prst="rect">
             <a:avLst/>
@@ -18513,7 +18501,7 @@
         <p:spPr>
           <a:xfrm>
             <a:off x="7479360" y="2747880"/>
-            <a:ext cx="532440" cy="227520"/>
+            <a:ext cx="532080" cy="227160"/>
           </a:xfrm>
           <a:prstGeom prst="rect">
             <a:avLst/>
@@ -18565,7 +18553,7 @@
         <p:spPr>
           <a:xfrm>
             <a:off x="7014240" y="3029040"/>
-            <a:ext cx="4914000" cy="303840"/>
+            <a:ext cx="4913640" cy="303480"/>
           </a:xfrm>
           <a:prstGeom prst="rect">
             <a:avLst/>
@@ -18617,7 +18605,7 @@
         <p:spPr>
           <a:xfrm>
             <a:off x="6814080" y="3524400"/>
-            <a:ext cx="18000" cy="722880"/>
+            <a:ext cx="17640" cy="722520"/>
           </a:xfrm>
           <a:custGeom>
             <a:avLst/>
@@ -18668,7 +18656,7 @@
         <p:spPr>
           <a:xfrm>
             <a:off x="7014240" y="3524400"/>
-            <a:ext cx="484560" cy="342000"/>
+            <a:ext cx="484200" cy="341640"/>
           </a:xfrm>
           <a:prstGeom prst="rect">
             <a:avLst/>
@@ -18720,7 +18708,7 @@
         <p:spPr>
           <a:xfrm>
             <a:off x="7475400" y="3624120"/>
-            <a:ext cx="532440" cy="227520"/>
+            <a:ext cx="532080" cy="227160"/>
           </a:xfrm>
           <a:prstGeom prst="rect">
             <a:avLst/>
@@ -18772,7 +18760,7 @@
         <p:spPr>
           <a:xfrm>
             <a:off x="7014240" y="3905280"/>
-            <a:ext cx="4914000" cy="303840"/>
+            <a:ext cx="4913640" cy="303480"/>
           </a:xfrm>
           <a:prstGeom prst="rect">
             <a:avLst/>
@@ -18824,7 +18812,7 @@
         <p:spPr>
           <a:xfrm>
             <a:off x="6814080" y="4400640"/>
-            <a:ext cx="18000" cy="722880"/>
+            <a:ext cx="17640" cy="722520"/>
           </a:xfrm>
           <a:custGeom>
             <a:avLst/>
@@ -18875,7 +18863,7 @@
         <p:spPr>
           <a:xfrm>
             <a:off x="7014240" y="4400640"/>
-            <a:ext cx="494280" cy="342000"/>
+            <a:ext cx="493920" cy="341640"/>
           </a:xfrm>
           <a:prstGeom prst="rect">
             <a:avLst/>
@@ -18927,7 +18915,7 @@
         <p:spPr>
           <a:xfrm>
             <a:off x="7481880" y="4500720"/>
-            <a:ext cx="532440" cy="227520"/>
+            <a:ext cx="532080" cy="227160"/>
           </a:xfrm>
           <a:prstGeom prst="rect">
             <a:avLst/>
@@ -18979,7 +18967,7 @@
         <p:spPr>
           <a:xfrm>
             <a:off x="7014240" y="4781520"/>
-            <a:ext cx="4914000" cy="303840"/>
+            <a:ext cx="4913640" cy="303480"/>
           </a:xfrm>
           <a:prstGeom prst="rect">
             <a:avLst/>
@@ -19031,7 +19019,7 @@
         <p:spPr>
           <a:xfrm>
             <a:off x="6814080" y="5276880"/>
-            <a:ext cx="18000" cy="913320"/>
+            <a:ext cx="17640" cy="912960"/>
           </a:xfrm>
           <a:custGeom>
             <a:avLst/>
@@ -19082,7 +19070,7 @@
         <p:spPr>
           <a:xfrm>
             <a:off x="7014240" y="5276880"/>
-            <a:ext cx="456120" cy="342000"/>
+            <a:ext cx="455760" cy="341640"/>
           </a:xfrm>
           <a:prstGeom prst="rect">
             <a:avLst/>
@@ -19134,7 +19122,7 @@
         <p:spPr>
           <a:xfrm>
             <a:off x="7439400" y="5376960"/>
-            <a:ext cx="532440" cy="227520"/>
+            <a:ext cx="532080" cy="227160"/>
           </a:xfrm>
           <a:prstGeom prst="rect">
             <a:avLst/>
@@ -19186,7 +19174,7 @@
         <p:spPr>
           <a:xfrm>
             <a:off x="7014240" y="5657760"/>
-            <a:ext cx="4914000" cy="303840"/>
+            <a:ext cx="4913640" cy="303480"/>
           </a:xfrm>
           <a:prstGeom prst="rect">
             <a:avLst/>
@@ -19238,7 +19226,7 @@
         <p:spPr>
           <a:xfrm>
             <a:off x="7014240" y="6000840"/>
-            <a:ext cx="4866120" cy="189360"/>
+            <a:ext cx="4865760" cy="189000"/>
           </a:xfrm>
           <a:prstGeom prst="rect">
             <a:avLst/>
@@ -19364,7 +19352,7 @@
         <p:spPr>
           <a:xfrm>
             <a:off x="380880" y="1850760"/>
-            <a:ext cx="761040" cy="18000"/>
+            <a:ext cx="760680" cy="17640"/>
           </a:xfrm>
           <a:custGeom>
             <a:avLst/>
@@ -19415,7 +19403,7 @@
         <p:spPr>
           <a:xfrm>
             <a:off x="380880" y="2174760"/>
-            <a:ext cx="9171360" cy="189360"/>
+            <a:ext cx="9171000" cy="189000"/>
           </a:xfrm>
           <a:prstGeom prst="rect">
             <a:avLst/>
@@ -19443,7 +19431,7 @@
               <a:buNone/>
             </a:pPr>
             <a:r>
-              <a:rPr b="0" lang="en-US" sz="1050" spc="307" strike="noStrike">
+              <a:rPr b="0" lang="en-US" sz="1050" spc="304" strike="noStrike">
                 <a:solidFill>
                   <a:srgbClr val="86868b"/>
                 </a:solidFill>
@@ -19467,7 +19455,7 @@
         <p:spPr>
           <a:xfrm>
             <a:off x="380880" y="2593800"/>
-            <a:ext cx="9561960" cy="1732320"/>
+            <a:ext cx="9561600" cy="1731960"/>
           </a:xfrm>
           <a:prstGeom prst="rect">
             <a:avLst/>
@@ -19540,7 +19528,7 @@
         <p:spPr>
           <a:xfrm>
             <a:off x="380880" y="4635720"/>
-            <a:ext cx="5599800" cy="370440"/>
+            <a:ext cx="5599440" cy="370080"/>
           </a:xfrm>
           <a:prstGeom prst="rect">
             <a:avLst/>
@@ -19592,7 +19580,7 @@
         <p:spPr>
           <a:xfrm>
             <a:off x="9488880" y="2476440"/>
-            <a:ext cx="3275640" cy="1904040"/>
+            <a:ext cx="3275280" cy="1903680"/>
           </a:xfrm>
           <a:prstGeom prst="rect">
             <a:avLst/>
@@ -19681,7 +19669,7 @@
         <p:spPr>
           <a:xfrm>
             <a:off x="380880" y="380880"/>
-            <a:ext cx="11486160" cy="151200"/>
+            <a:ext cx="11485800" cy="150840"/>
           </a:xfrm>
           <a:prstGeom prst="rect">
             <a:avLst/>
@@ -19709,7 +19697,7 @@
               <a:buNone/>
             </a:pPr>
             <a:r>
-              <a:rPr b="0" lang="en-US" sz="900" spc="262" strike="noStrike">
+              <a:rPr b="0" lang="en-US" sz="900" spc="259" strike="noStrike">
                 <a:solidFill>
                   <a:srgbClr val="86868b"/>
                 </a:solidFill>
@@ -19733,7 +19721,7 @@
         <p:spPr>
           <a:xfrm>
             <a:off x="380880" y="609480"/>
-            <a:ext cx="11600280" cy="379800"/>
+            <a:ext cx="11599920" cy="379440"/>
           </a:xfrm>
           <a:prstGeom prst="rect">
             <a:avLst/>
@@ -19785,7 +19773,7 @@
         <p:spPr>
           <a:xfrm>
             <a:off x="380880" y="1952640"/>
-            <a:ext cx="8628480" cy="618120"/>
+            <a:ext cx="8628120" cy="617760"/>
           </a:xfrm>
           <a:prstGeom prst="rect">
             <a:avLst/>
@@ -19877,7 +19865,7 @@
         <p:spPr>
           <a:xfrm>
             <a:off x="385920" y="2805120"/>
-            <a:ext cx="4028040" cy="808560"/>
+            <a:ext cx="4027680" cy="808200"/>
           </a:xfrm>
           <a:custGeom>
             <a:avLst/>
@@ -19929,7 +19917,7 @@
         <p:spPr>
           <a:xfrm>
             <a:off x="695160" y="3038400"/>
-            <a:ext cx="3551760" cy="342000"/>
+            <a:ext cx="3551400" cy="341640"/>
           </a:xfrm>
           <a:prstGeom prst="rect">
             <a:avLst/>
@@ -19981,7 +19969,7 @@
         <p:spPr>
           <a:xfrm>
             <a:off x="380880" y="4000680"/>
-            <a:ext cx="5590080" cy="189360"/>
+            <a:ext cx="5589720" cy="189000"/>
           </a:xfrm>
           <a:prstGeom prst="rect">
             <a:avLst/>
@@ -20009,7 +19997,7 @@
               <a:buNone/>
             </a:pPr>
             <a:r>
-              <a:rPr b="0" lang="en-US" sz="1050" spc="202" strike="noStrike">
+              <a:rPr b="0" lang="en-US" sz="1050" spc="199" strike="noStrike">
                 <a:solidFill>
                   <a:srgbClr val="86868b"/>
                 </a:solidFill>
@@ -20033,7 +20021,7 @@
         <p:spPr>
           <a:xfrm>
             <a:off x="380880" y="4343400"/>
-            <a:ext cx="5599800" cy="494280"/>
+            <a:ext cx="5599440" cy="493920"/>
           </a:xfrm>
           <a:prstGeom prst="rect">
             <a:avLst/>
@@ -20085,7 +20073,7 @@
         <p:spPr>
           <a:xfrm>
             <a:off x="380880" y="4991040"/>
-            <a:ext cx="5599800" cy="246600"/>
+            <a:ext cx="5599440" cy="246240"/>
           </a:xfrm>
           <a:prstGeom prst="rect">
             <a:avLst/>
@@ -20137,7 +20125,7 @@
         <p:spPr>
           <a:xfrm>
             <a:off x="6286680" y="4000680"/>
-            <a:ext cx="5590080" cy="189360"/>
+            <a:ext cx="5589720" cy="189000"/>
           </a:xfrm>
           <a:prstGeom prst="rect">
             <a:avLst/>
@@ -20165,7 +20153,7 @@
               <a:buNone/>
             </a:pPr>
             <a:r>
-              <a:rPr b="0" lang="en-US" sz="1050" spc="202" strike="noStrike">
+              <a:rPr b="0" lang="en-US" sz="1050" spc="199" strike="noStrike">
                 <a:solidFill>
                   <a:srgbClr val="86868b"/>
                 </a:solidFill>
@@ -20189,7 +20177,7 @@
         <p:spPr>
           <a:xfrm>
             <a:off x="6286680" y="4343400"/>
-            <a:ext cx="5599800" cy="494280"/>
+            <a:ext cx="5599440" cy="493920"/>
           </a:xfrm>
           <a:prstGeom prst="rect">
             <a:avLst/>
@@ -20241,7 +20229,7 @@
         <p:spPr>
           <a:xfrm>
             <a:off x="6286680" y="4991040"/>
-            <a:ext cx="5599800" cy="246600"/>
+            <a:ext cx="5599440" cy="246240"/>
           </a:xfrm>
           <a:prstGeom prst="rect">
             <a:avLst/>
@@ -20293,7 +20281,7 @@
         <p:spPr>
           <a:xfrm>
             <a:off x="380880" y="6129360"/>
-            <a:ext cx="11428920" cy="8280"/>
+            <a:ext cx="11428560" cy="7920"/>
           </a:xfrm>
           <a:custGeom>
             <a:avLst/>
@@ -20344,7 +20332,7 @@
         <p:spPr>
           <a:xfrm>
             <a:off x="399960" y="6315120"/>
-            <a:ext cx="132120" cy="132120"/>
+            <a:ext cx="131760" cy="131760"/>
           </a:xfrm>
           <a:custGeom>
             <a:avLst/>
@@ -20487,7 +20475,7 @@
         <p:spPr>
           <a:xfrm>
             <a:off x="609480" y="6286680"/>
-            <a:ext cx="11266920" cy="189360"/>
+            <a:ext cx="11266560" cy="189000"/>
           </a:xfrm>
           <a:prstGeom prst="rect">
             <a:avLst/>
@@ -20586,7 +20574,7 @@
         <p:spPr>
           <a:xfrm>
             <a:off x="380880" y="380880"/>
-            <a:ext cx="11486160" cy="151200"/>
+            <a:ext cx="11485800" cy="150840"/>
           </a:xfrm>
           <a:prstGeom prst="rect">
             <a:avLst/>
@@ -20614,7 +20602,7 @@
               <a:buNone/>
             </a:pPr>
             <a:r>
-              <a:rPr b="0" lang="en-US" sz="900" spc="262" strike="noStrike">
+              <a:rPr b="0" lang="en-US" sz="900" spc="259" strike="noStrike">
                 <a:solidFill>
                   <a:srgbClr val="86868b"/>
                 </a:solidFill>
@@ -20638,7 +20626,7 @@
         <p:spPr>
           <a:xfrm>
             <a:off x="380880" y="609480"/>
-            <a:ext cx="11600280" cy="379800"/>
+            <a:ext cx="11599920" cy="379440"/>
           </a:xfrm>
           <a:prstGeom prst="rect">
             <a:avLst/>
@@ -20690,7 +20678,7 @@
         <p:spPr>
           <a:xfrm>
             <a:off x="385920" y="1576440"/>
-            <a:ext cx="446760" cy="446760"/>
+            <a:ext cx="446400" cy="446400"/>
           </a:xfrm>
           <a:custGeom>
             <a:avLst/>
@@ -20742,7 +20730,7 @@
         <p:spPr>
           <a:xfrm>
             <a:off x="333360" y="1571760"/>
-            <a:ext cx="532440" cy="437040"/>
+            <a:ext cx="532080" cy="436680"/>
           </a:xfrm>
           <a:prstGeom prst="rect">
             <a:avLst/>
@@ -20794,7 +20782,7 @@
         <p:spPr>
           <a:xfrm>
             <a:off x="1066680" y="1533600"/>
-            <a:ext cx="10828800" cy="265680"/>
+            <a:ext cx="10828440" cy="265320"/>
           </a:xfrm>
           <a:prstGeom prst="rect">
             <a:avLst/>
@@ -20846,7 +20834,7 @@
         <p:spPr>
           <a:xfrm>
             <a:off x="1066680" y="1838160"/>
-            <a:ext cx="10819440" cy="227520"/>
+            <a:ext cx="10819080" cy="227160"/>
           </a:xfrm>
           <a:prstGeom prst="rect">
             <a:avLst/>
@@ -20908,7 +20896,7 @@
         <p:spPr>
           <a:xfrm>
             <a:off x="385920" y="2262240"/>
-            <a:ext cx="446760" cy="446760"/>
+            <a:ext cx="446400" cy="446400"/>
           </a:xfrm>
           <a:custGeom>
             <a:avLst/>
@@ -20960,7 +20948,7 @@
         <p:spPr>
           <a:xfrm>
             <a:off x="333360" y="2257560"/>
-            <a:ext cx="532440" cy="437040"/>
+            <a:ext cx="532080" cy="436680"/>
           </a:xfrm>
           <a:prstGeom prst="rect">
             <a:avLst/>
@@ -21012,7 +21000,7 @@
         <p:spPr>
           <a:xfrm>
             <a:off x="1066680" y="2219400"/>
-            <a:ext cx="10828800" cy="265680"/>
+            <a:ext cx="10828440" cy="265320"/>
           </a:xfrm>
           <a:prstGeom prst="rect">
             <a:avLst/>
@@ -21064,7 +21052,7 @@
         <p:spPr>
           <a:xfrm>
             <a:off x="1066680" y="2523960"/>
-            <a:ext cx="10819440" cy="227520"/>
+            <a:ext cx="10819080" cy="227160"/>
           </a:xfrm>
           <a:prstGeom prst="rect">
             <a:avLst/>
@@ -21126,7 +21114,7 @@
         <p:spPr>
           <a:xfrm>
             <a:off x="385920" y="2948040"/>
-            <a:ext cx="446760" cy="446760"/>
+            <a:ext cx="446400" cy="446400"/>
           </a:xfrm>
           <a:custGeom>
             <a:avLst/>
@@ -21178,7 +21166,7 @@
         <p:spPr>
           <a:xfrm>
             <a:off x="333360" y="2943360"/>
-            <a:ext cx="532440" cy="437040"/>
+            <a:ext cx="532080" cy="436680"/>
           </a:xfrm>
           <a:prstGeom prst="rect">
             <a:avLst/>
@@ -21230,7 +21218,7 @@
         <p:spPr>
           <a:xfrm>
             <a:off x="1066680" y="2905200"/>
-            <a:ext cx="10828800" cy="265680"/>
+            <a:ext cx="10828440" cy="265320"/>
           </a:xfrm>
           <a:prstGeom prst="rect">
             <a:avLst/>
@@ -21282,7 +21270,7 @@
         <p:spPr>
           <a:xfrm>
             <a:off x="1066680" y="3209760"/>
-            <a:ext cx="10819440" cy="227520"/>
+            <a:ext cx="10819080" cy="227160"/>
           </a:xfrm>
           <a:prstGeom prst="rect">
             <a:avLst/>
@@ -21344,7 +21332,7 @@
         <p:spPr>
           <a:xfrm>
             <a:off x="385920" y="3595680"/>
-            <a:ext cx="446760" cy="446760"/>
+            <a:ext cx="446400" cy="446400"/>
           </a:xfrm>
           <a:custGeom>
             <a:avLst/>
@@ -21396,7 +21384,7 @@
         <p:spPr>
           <a:xfrm>
             <a:off x="333360" y="3591000"/>
-            <a:ext cx="532440" cy="437040"/>
+            <a:ext cx="532080" cy="436680"/>
           </a:xfrm>
           <a:prstGeom prst="rect">
             <a:avLst/>
@@ -21448,7 +21436,7 @@
         <p:spPr>
           <a:xfrm>
             <a:off x="1066680" y="3686040"/>
-            <a:ext cx="10828800" cy="265680"/>
+            <a:ext cx="10828440" cy="265320"/>
           </a:xfrm>
           <a:prstGeom prst="rect">
             <a:avLst/>
@@ -21500,7 +21488,7 @@
         <p:spPr>
           <a:xfrm>
             <a:off x="385920" y="4243320"/>
-            <a:ext cx="446760" cy="446760"/>
+            <a:ext cx="446400" cy="446400"/>
           </a:xfrm>
           <a:custGeom>
             <a:avLst/>
@@ -21552,7 +21540,7 @@
         <p:spPr>
           <a:xfrm>
             <a:off x="333360" y="4238640"/>
-            <a:ext cx="532440" cy="437040"/>
+            <a:ext cx="532080" cy="436680"/>
           </a:xfrm>
           <a:prstGeom prst="rect">
             <a:avLst/>
@@ -21604,7 +21592,7 @@
         <p:spPr>
           <a:xfrm>
             <a:off x="1066680" y="4200480"/>
-            <a:ext cx="10828800" cy="265680"/>
+            <a:ext cx="10828440" cy="265320"/>
           </a:xfrm>
           <a:prstGeom prst="rect">
             <a:avLst/>
@@ -21656,7 +21644,7 @@
         <p:spPr>
           <a:xfrm>
             <a:off x="1066680" y="4505400"/>
-            <a:ext cx="10819440" cy="227520"/>
+            <a:ext cx="10819080" cy="227160"/>
           </a:xfrm>
           <a:prstGeom prst="rect">
             <a:avLst/>
@@ -21718,7 +21706,7 @@
         <p:spPr>
           <a:xfrm>
             <a:off x="380880" y="4971960"/>
-            <a:ext cx="11428920" cy="18000"/>
+            <a:ext cx="11428560" cy="17640"/>
           </a:xfrm>
           <a:custGeom>
             <a:avLst/>
@@ -21769,7 +21757,7 @@
         <p:spPr>
           <a:xfrm>
             <a:off x="380880" y="5210280"/>
-            <a:ext cx="11495520" cy="189360"/>
+            <a:ext cx="11495160" cy="189000"/>
           </a:xfrm>
           <a:prstGeom prst="rect">
             <a:avLst/>
@@ -21797,7 +21785,7 @@
               <a:buNone/>
             </a:pPr>
             <a:r>
-              <a:rPr b="0" lang="en-US" sz="1050" spc="202" strike="noStrike">
+              <a:rPr b="0" lang="en-US" sz="1050" spc="199" strike="noStrike">
                 <a:solidFill>
                   <a:srgbClr val="86868b"/>
                 </a:solidFill>
@@ -21821,7 +21809,7 @@
         <p:spPr>
           <a:xfrm>
             <a:off x="380880" y="5514840"/>
-            <a:ext cx="11524320" cy="265680"/>
+            <a:ext cx="11523960" cy="265320"/>
           </a:xfrm>
           <a:prstGeom prst="rect">
             <a:avLst/>
@@ -21873,7 +21861,7 @@
         <p:spPr>
           <a:xfrm>
             <a:off x="380880" y="5896080"/>
-            <a:ext cx="11514600" cy="265680"/>
+            <a:ext cx="11514240" cy="265320"/>
           </a:xfrm>
           <a:prstGeom prst="rect">
             <a:avLst/>

--- a/assets/libreoffice_impr_njc/456c4488-c4c4-475f-b671-0556dac8696a/The Birthday Paradox.pptx
+++ b/assets/libreoffice_impr_njc/456c4488-c4c4-475f-b671-0556dac8696a/The Birthday Paradox.pptx
@@ -308,7 +308,7 @@
             <a:pPr algn="r">
               <a:buNone/>
             </a:pPr>
-            <a:fld id="{5F482E9B-EC34-4EDF-A787-AB0F7FAA543E}" type="slidenum">
+            <a:fld id="{A6A24918-7986-4F55-A11C-997A54001393}" type="slidenum">
               <a:rPr b="0" lang="en-HK" sz="1400" spc="-1" strike="noStrike">
                 <a:latin typeface="Times New Roman"/>
               </a:rPr>
@@ -356,7 +356,7 @@
         <p:spPr>
           <a:xfrm>
             <a:off x="685800" y="1143000"/>
-            <a:ext cx="5484960" cy="3084840"/>
+            <a:ext cx="5484240" cy="3084120"/>
           </a:xfrm>
           <a:prstGeom prst="rect">
             <a:avLst/>
@@ -379,7 +379,7 @@
         <p:spPr>
           <a:xfrm>
             <a:off x="685800" y="4400640"/>
-            <a:ext cx="5484960" cy="3598920"/>
+            <a:ext cx="5484240" cy="3598200"/>
           </a:xfrm>
           <a:prstGeom prst="rect">
             <a:avLst/>
@@ -413,7 +413,7 @@
         <p:spPr>
           <a:xfrm>
             <a:off x="3884760" y="8685360"/>
-            <a:ext cx="2970360" cy="457200"/>
+            <a:ext cx="2969640" cy="456480"/>
           </a:xfrm>
           <a:prstGeom prst="rect">
             <a:avLst/>
@@ -445,7 +445,7 @@
               </a:lnSpc>
               <a:buNone/>
             </a:pPr>
-            <a:fld id="{F269D744-2B15-480F-A704-99F9651D04E2}" type="slidenum">
+            <a:fld id="{36429C06-678C-488D-8CDC-D5E02A6D8B50}" type="slidenum">
               <a:rPr b="0" lang="en-US" sz="1200" spc="-1" strike="noStrike">
                 <a:latin typeface="Times New Roman"/>
               </a:rPr>
@@ -492,7 +492,7 @@
         <p:spPr>
           <a:xfrm>
             <a:off x="685800" y="1143000"/>
-            <a:ext cx="5484960" cy="3084840"/>
+            <a:ext cx="5484240" cy="3084120"/>
           </a:xfrm>
           <a:prstGeom prst="rect">
             <a:avLst/>
@@ -515,7 +515,7 @@
         <p:spPr>
           <a:xfrm>
             <a:off x="685800" y="4400640"/>
-            <a:ext cx="5484960" cy="3598920"/>
+            <a:ext cx="5484240" cy="3598200"/>
           </a:xfrm>
           <a:prstGeom prst="rect">
             <a:avLst/>
@@ -549,7 +549,7 @@
         <p:spPr>
           <a:xfrm>
             <a:off x="3884760" y="8685360"/>
-            <a:ext cx="2970360" cy="457200"/>
+            <a:ext cx="2969640" cy="456480"/>
           </a:xfrm>
           <a:prstGeom prst="rect">
             <a:avLst/>
@@ -581,7 +581,7 @@
               </a:lnSpc>
               <a:buNone/>
             </a:pPr>
-            <a:fld id="{F41DF54C-D7FF-46BF-A17C-07B3F33D8487}" type="slidenum">
+            <a:fld id="{36321D6D-6D10-4C74-9CC1-6BDCA5914D4B}" type="slidenum">
               <a:rPr b="0" lang="en-US" sz="1200" spc="-1" strike="noStrike">
                 <a:latin typeface="Times New Roman"/>
               </a:rPr>
@@ -628,7 +628,7 @@
         <p:spPr>
           <a:xfrm>
             <a:off x="685800" y="1143000"/>
-            <a:ext cx="5484960" cy="3084840"/>
+            <a:ext cx="5484240" cy="3084120"/>
           </a:xfrm>
           <a:prstGeom prst="rect">
             <a:avLst/>
@@ -651,7 +651,7 @@
         <p:spPr>
           <a:xfrm>
             <a:off x="685800" y="4400640"/>
-            <a:ext cx="5484960" cy="3598920"/>
+            <a:ext cx="5484240" cy="3598200"/>
           </a:xfrm>
           <a:prstGeom prst="rect">
             <a:avLst/>
@@ -685,7 +685,7 @@
         <p:spPr>
           <a:xfrm>
             <a:off x="3884760" y="8685360"/>
-            <a:ext cx="2970360" cy="457200"/>
+            <a:ext cx="2969640" cy="456480"/>
           </a:xfrm>
           <a:prstGeom prst="rect">
             <a:avLst/>
@@ -717,7 +717,7 @@
               </a:lnSpc>
               <a:buNone/>
             </a:pPr>
-            <a:fld id="{4C10C9D2-6D70-4137-B232-629919AD9CD2}" type="slidenum">
+            <a:fld id="{6CE0CFA0-43B8-4B6B-9BCD-2AC6799D0973}" type="slidenum">
               <a:rPr b="0" lang="en-US" sz="1200" spc="-1" strike="noStrike">
                 <a:latin typeface="Times New Roman"/>
               </a:rPr>
@@ -764,7 +764,7 @@
         <p:spPr>
           <a:xfrm>
             <a:off x="685800" y="1143000"/>
-            <a:ext cx="5484960" cy="3084840"/>
+            <a:ext cx="5484240" cy="3084120"/>
           </a:xfrm>
           <a:prstGeom prst="rect">
             <a:avLst/>
@@ -787,7 +787,7 @@
         <p:spPr>
           <a:xfrm>
             <a:off x="685800" y="4400640"/>
-            <a:ext cx="5484960" cy="3598920"/>
+            <a:ext cx="5484240" cy="3598200"/>
           </a:xfrm>
           <a:prstGeom prst="rect">
             <a:avLst/>
@@ -821,7 +821,7 @@
         <p:spPr>
           <a:xfrm>
             <a:off x="3884760" y="8685360"/>
-            <a:ext cx="2970360" cy="457200"/>
+            <a:ext cx="2969640" cy="456480"/>
           </a:xfrm>
           <a:prstGeom prst="rect">
             <a:avLst/>
@@ -853,7 +853,7 @@
               </a:lnSpc>
               <a:buNone/>
             </a:pPr>
-            <a:fld id="{41C93D0C-2D17-41C5-9FF1-9E08672C07DA}" type="slidenum">
+            <a:fld id="{405EDFDF-B29D-48C4-9817-A81618B814DB}" type="slidenum">
               <a:rPr b="0" lang="en-US" sz="1200" spc="-1" strike="noStrike">
                 <a:latin typeface="Times New Roman"/>
               </a:rPr>
@@ -900,7 +900,7 @@
         <p:spPr>
           <a:xfrm>
             <a:off x="685800" y="1143000"/>
-            <a:ext cx="5484960" cy="3084840"/>
+            <a:ext cx="5484240" cy="3084120"/>
           </a:xfrm>
           <a:prstGeom prst="rect">
             <a:avLst/>
@@ -923,7 +923,7 @@
         <p:spPr>
           <a:xfrm>
             <a:off x="685800" y="4400640"/>
-            <a:ext cx="5484960" cy="3598920"/>
+            <a:ext cx="5484240" cy="3598200"/>
           </a:xfrm>
           <a:prstGeom prst="rect">
             <a:avLst/>
@@ -957,7 +957,7 @@
         <p:spPr>
           <a:xfrm>
             <a:off x="3884760" y="8685360"/>
-            <a:ext cx="2970360" cy="457200"/>
+            <a:ext cx="2969640" cy="456480"/>
           </a:xfrm>
           <a:prstGeom prst="rect">
             <a:avLst/>
@@ -989,7 +989,7 @@
               </a:lnSpc>
               <a:buNone/>
             </a:pPr>
-            <a:fld id="{531A743F-1B4F-4B08-BFAD-822573C0479D}" type="slidenum">
+            <a:fld id="{DF135C19-BDA3-49CD-A246-125601A9558E}" type="slidenum">
               <a:rPr b="0" lang="en-US" sz="1200" spc="-1" strike="noStrike">
                 <a:latin typeface="Times New Roman"/>
               </a:rPr>
@@ -1036,7 +1036,7 @@
         <p:spPr>
           <a:xfrm>
             <a:off x="685800" y="1143000"/>
-            <a:ext cx="5484960" cy="3084840"/>
+            <a:ext cx="5484240" cy="3084120"/>
           </a:xfrm>
           <a:prstGeom prst="rect">
             <a:avLst/>
@@ -1059,7 +1059,7 @@
         <p:spPr>
           <a:xfrm>
             <a:off x="685800" y="4400640"/>
-            <a:ext cx="5484960" cy="3598920"/>
+            <a:ext cx="5484240" cy="3598200"/>
           </a:xfrm>
           <a:prstGeom prst="rect">
             <a:avLst/>
@@ -1093,7 +1093,7 @@
         <p:spPr>
           <a:xfrm>
             <a:off x="3884760" y="8685360"/>
-            <a:ext cx="2970360" cy="457200"/>
+            <a:ext cx="2969640" cy="456480"/>
           </a:xfrm>
           <a:prstGeom prst="rect">
             <a:avLst/>
@@ -1125,7 +1125,7 @@
               </a:lnSpc>
               <a:buNone/>
             </a:pPr>
-            <a:fld id="{AF8E0D96-87C4-4DC6-B350-9638831E0FD2}" type="slidenum">
+            <a:fld id="{29D4EA8A-4714-41D0-A32D-DDBA37B65660}" type="slidenum">
               <a:rPr b="0" lang="en-US" sz="1200" spc="-1" strike="noStrike">
                 <a:latin typeface="Times New Roman"/>
               </a:rPr>
@@ -1172,7 +1172,7 @@
         <p:spPr>
           <a:xfrm>
             <a:off x="685800" y="1143000"/>
-            <a:ext cx="5484960" cy="3084840"/>
+            <a:ext cx="5484240" cy="3084120"/>
           </a:xfrm>
           <a:prstGeom prst="rect">
             <a:avLst/>
@@ -1195,7 +1195,7 @@
         <p:spPr>
           <a:xfrm>
             <a:off x="685800" y="4400640"/>
-            <a:ext cx="5484960" cy="3598920"/>
+            <a:ext cx="5484240" cy="3598200"/>
           </a:xfrm>
           <a:prstGeom prst="rect">
             <a:avLst/>
@@ -1229,7 +1229,7 @@
         <p:spPr>
           <a:xfrm>
             <a:off x="3884760" y="8685360"/>
-            <a:ext cx="2970360" cy="457200"/>
+            <a:ext cx="2969640" cy="456480"/>
           </a:xfrm>
           <a:prstGeom prst="rect">
             <a:avLst/>
@@ -1261,7 +1261,7 @@
               </a:lnSpc>
               <a:buNone/>
             </a:pPr>
-            <a:fld id="{4F5DA12C-7576-474F-8BF8-DC9436A93E4F}" type="slidenum">
+            <a:fld id="{DC7C3E45-607E-4712-A732-63DAF805FDED}" type="slidenum">
               <a:rPr b="0" lang="en-US" sz="1200" spc="-1" strike="noStrike">
                 <a:latin typeface="Times New Roman"/>
               </a:rPr>
@@ -1308,7 +1308,7 @@
         <p:spPr>
           <a:xfrm>
             <a:off x="685800" y="1143000"/>
-            <a:ext cx="5484960" cy="3084840"/>
+            <a:ext cx="5484240" cy="3084120"/>
           </a:xfrm>
           <a:prstGeom prst="rect">
             <a:avLst/>
@@ -1331,7 +1331,7 @@
         <p:spPr>
           <a:xfrm>
             <a:off x="685800" y="4400640"/>
-            <a:ext cx="5484960" cy="3598920"/>
+            <a:ext cx="5484240" cy="3598200"/>
           </a:xfrm>
           <a:prstGeom prst="rect">
             <a:avLst/>
@@ -1365,7 +1365,7 @@
         <p:spPr>
           <a:xfrm>
             <a:off x="3884760" y="8685360"/>
-            <a:ext cx="2970360" cy="457200"/>
+            <a:ext cx="2969640" cy="456480"/>
           </a:xfrm>
           <a:prstGeom prst="rect">
             <a:avLst/>
@@ -1397,7 +1397,7 @@
               </a:lnSpc>
               <a:buNone/>
             </a:pPr>
-            <a:fld id="{9B278011-EFD0-40DE-90AE-8D4B4D4EEA04}" type="slidenum">
+            <a:fld id="{C35DD1DA-FCCC-425D-A818-493D9F8E48D6}" type="slidenum">
               <a:rPr b="0" lang="en-US" sz="1200" spc="-1" strike="noStrike">
                 <a:latin typeface="Times New Roman"/>
               </a:rPr>
@@ -1444,7 +1444,7 @@
         <p:spPr>
           <a:xfrm>
             <a:off x="685800" y="1143000"/>
-            <a:ext cx="5484960" cy="3084840"/>
+            <a:ext cx="5484240" cy="3084120"/>
           </a:xfrm>
           <a:prstGeom prst="rect">
             <a:avLst/>
@@ -1467,7 +1467,7 @@
         <p:spPr>
           <a:xfrm>
             <a:off x="685800" y="4400640"/>
-            <a:ext cx="5484960" cy="3598920"/>
+            <a:ext cx="5484240" cy="3598200"/>
           </a:xfrm>
           <a:prstGeom prst="rect">
             <a:avLst/>
@@ -1501,7 +1501,7 @@
         <p:spPr>
           <a:xfrm>
             <a:off x="3884760" y="8685360"/>
-            <a:ext cx="2970360" cy="457200"/>
+            <a:ext cx="2969640" cy="456480"/>
           </a:xfrm>
           <a:prstGeom prst="rect">
             <a:avLst/>
@@ -1533,7 +1533,7 @@
               </a:lnSpc>
               <a:buNone/>
             </a:pPr>
-            <a:fld id="{D9629482-1AA1-4DBB-B075-2317B8EC4010}" type="slidenum">
+            <a:fld id="{47A2A298-8B96-4620-A8A0-A09259AED305}" type="slidenum">
               <a:rPr b="0" lang="en-US" sz="1200" spc="-1" strike="noStrike">
                 <a:latin typeface="Times New Roman"/>
               </a:rPr>
@@ -1580,7 +1580,7 @@
         <p:spPr>
           <a:xfrm>
             <a:off x="685800" y="1143000"/>
-            <a:ext cx="5484960" cy="3084840"/>
+            <a:ext cx="5484240" cy="3084120"/>
           </a:xfrm>
           <a:prstGeom prst="rect">
             <a:avLst/>
@@ -1603,7 +1603,7 @@
         <p:spPr>
           <a:xfrm>
             <a:off x="685800" y="4400640"/>
-            <a:ext cx="5484960" cy="3598920"/>
+            <a:ext cx="5484240" cy="3598200"/>
           </a:xfrm>
           <a:prstGeom prst="rect">
             <a:avLst/>
@@ -1637,7 +1637,7 @@
         <p:spPr>
           <a:xfrm>
             <a:off x="3884760" y="8685360"/>
-            <a:ext cx="2970360" cy="457200"/>
+            <a:ext cx="2969640" cy="456480"/>
           </a:xfrm>
           <a:prstGeom prst="rect">
             <a:avLst/>
@@ -1669,7 +1669,7 @@
               </a:lnSpc>
               <a:buNone/>
             </a:pPr>
-            <a:fld id="{6F5A2478-DF59-4584-849D-7227046C8272}" type="slidenum">
+            <a:fld id="{F31F2D75-521F-4D7D-A98F-5D5C89B82834}" type="slidenum">
               <a:rPr b="0" lang="en-US" sz="1200" spc="-1" strike="noStrike">
                 <a:latin typeface="Times New Roman"/>
               </a:rPr>
@@ -1716,7 +1716,7 @@
         <p:spPr>
           <a:xfrm>
             <a:off x="685800" y="1143000"/>
-            <a:ext cx="5484960" cy="3084840"/>
+            <a:ext cx="5484240" cy="3084120"/>
           </a:xfrm>
           <a:prstGeom prst="rect">
             <a:avLst/>
@@ -1739,7 +1739,7 @@
         <p:spPr>
           <a:xfrm>
             <a:off x="685800" y="4400640"/>
-            <a:ext cx="5484960" cy="3598920"/>
+            <a:ext cx="5484240" cy="3598200"/>
           </a:xfrm>
           <a:prstGeom prst="rect">
             <a:avLst/>
@@ -1773,7 +1773,7 @@
         <p:spPr>
           <a:xfrm>
             <a:off x="3884760" y="8685360"/>
-            <a:ext cx="2970360" cy="457200"/>
+            <a:ext cx="2969640" cy="456480"/>
           </a:xfrm>
           <a:prstGeom prst="rect">
             <a:avLst/>
@@ -1805,7 +1805,7 @@
               </a:lnSpc>
               <a:buNone/>
             </a:pPr>
-            <a:fld id="{FFDD16EA-3464-4612-B3BC-863AEBFD32B3}" type="slidenum">
+            <a:fld id="{3CFA4A5C-B6D9-48DF-B2D9-18A5B69510CD}" type="slidenum">
               <a:rPr b="0" lang="en-US" sz="1200" spc="-1" strike="noStrike">
                 <a:latin typeface="Times New Roman"/>
               </a:rPr>
@@ -1852,7 +1852,7 @@
         <p:spPr>
           <a:xfrm>
             <a:off x="685800" y="1143000"/>
-            <a:ext cx="5484960" cy="3084840"/>
+            <a:ext cx="5484240" cy="3084120"/>
           </a:xfrm>
           <a:prstGeom prst="rect">
             <a:avLst/>
@@ -1875,7 +1875,7 @@
         <p:spPr>
           <a:xfrm>
             <a:off x="685800" y="4400640"/>
-            <a:ext cx="5484960" cy="3598920"/>
+            <a:ext cx="5484240" cy="3598200"/>
           </a:xfrm>
           <a:prstGeom prst="rect">
             <a:avLst/>
@@ -1909,7 +1909,7 @@
         <p:spPr>
           <a:xfrm>
             <a:off x="3884760" y="8685360"/>
-            <a:ext cx="2970360" cy="457200"/>
+            <a:ext cx="2969640" cy="456480"/>
           </a:xfrm>
           <a:prstGeom prst="rect">
             <a:avLst/>
@@ -1941,7 +1941,7 @@
               </a:lnSpc>
               <a:buNone/>
             </a:pPr>
-            <a:fld id="{7D70DC3C-420A-43E2-BA59-A6581B11A928}" type="slidenum">
+            <a:fld id="{5F451976-7C45-42BA-BC23-7A8EAC323C6E}" type="slidenum">
               <a:rPr b="0" lang="en-US" sz="1200" spc="-1" strike="noStrike">
                 <a:latin typeface="Times New Roman"/>
               </a:rPr>
@@ -1988,7 +1988,7 @@
         <p:spPr>
           <a:xfrm>
             <a:off x="685800" y="1143000"/>
-            <a:ext cx="5484960" cy="3084840"/>
+            <a:ext cx="5484240" cy="3084120"/>
           </a:xfrm>
           <a:prstGeom prst="rect">
             <a:avLst/>
@@ -2011,7 +2011,7 @@
         <p:spPr>
           <a:xfrm>
             <a:off x="685800" y="4400640"/>
-            <a:ext cx="5484960" cy="3598920"/>
+            <a:ext cx="5484240" cy="3598200"/>
           </a:xfrm>
           <a:prstGeom prst="rect">
             <a:avLst/>
@@ -2045,7 +2045,7 @@
         <p:spPr>
           <a:xfrm>
             <a:off x="3884760" y="8685360"/>
-            <a:ext cx="2970360" cy="457200"/>
+            <a:ext cx="2969640" cy="456480"/>
           </a:xfrm>
           <a:prstGeom prst="rect">
             <a:avLst/>
@@ -2077,7 +2077,7 @@
               </a:lnSpc>
               <a:buNone/>
             </a:pPr>
-            <a:fld id="{B0EC055A-0B50-413E-AEBA-650F488E59F6}" type="slidenum">
+            <a:fld id="{ABF1504B-40E4-41CB-A6D3-652CBEB0A7B2}" type="slidenum">
               <a:rPr b="0" lang="en-US" sz="1200" spc="-1" strike="noStrike">
                 <a:latin typeface="Times New Roman"/>
               </a:rPr>
@@ -2124,7 +2124,7 @@
         <p:spPr>
           <a:xfrm>
             <a:off x="685800" y="1143000"/>
-            <a:ext cx="5484960" cy="3084840"/>
+            <a:ext cx="5484240" cy="3084120"/>
           </a:xfrm>
           <a:prstGeom prst="rect">
             <a:avLst/>
@@ -2147,7 +2147,7 @@
         <p:spPr>
           <a:xfrm>
             <a:off x="685800" y="4400640"/>
-            <a:ext cx="5484960" cy="3598920"/>
+            <a:ext cx="5484240" cy="3598200"/>
           </a:xfrm>
           <a:prstGeom prst="rect">
             <a:avLst/>
@@ -2181,7 +2181,7 @@
         <p:spPr>
           <a:xfrm>
             <a:off x="3884760" y="8685360"/>
-            <a:ext cx="2970360" cy="457200"/>
+            <a:ext cx="2969640" cy="456480"/>
           </a:xfrm>
           <a:prstGeom prst="rect">
             <a:avLst/>
@@ -2213,7 +2213,7 @@
               </a:lnSpc>
               <a:buNone/>
             </a:pPr>
-            <a:fld id="{CDF30C09-8891-469B-A094-D00D46A5F482}" type="slidenum">
+            <a:fld id="{E41865E6-869D-41C4-806F-F23E9CE17528}" type="slidenum">
               <a:rPr b="0" lang="en-US" sz="1200" spc="-1" strike="noStrike">
                 <a:latin typeface="Times New Roman"/>
               </a:rPr>
@@ -2260,7 +2260,7 @@
         <p:spPr>
           <a:xfrm>
             <a:off x="685800" y="1143000"/>
-            <a:ext cx="5484960" cy="3084840"/>
+            <a:ext cx="5484240" cy="3084120"/>
           </a:xfrm>
           <a:prstGeom prst="rect">
             <a:avLst/>
@@ -2283,7 +2283,7 @@
         <p:spPr>
           <a:xfrm>
             <a:off x="685800" y="4400640"/>
-            <a:ext cx="5484960" cy="3598920"/>
+            <a:ext cx="5484240" cy="3598200"/>
           </a:xfrm>
           <a:prstGeom prst="rect">
             <a:avLst/>
@@ -2317,7 +2317,7 @@
         <p:spPr>
           <a:xfrm>
             <a:off x="3884760" y="8685360"/>
-            <a:ext cx="2970360" cy="457200"/>
+            <a:ext cx="2969640" cy="456480"/>
           </a:xfrm>
           <a:prstGeom prst="rect">
             <a:avLst/>
@@ -2349,7 +2349,7 @@
               </a:lnSpc>
               <a:buNone/>
             </a:pPr>
-            <a:fld id="{353DC3A8-013F-4F2B-84A0-E5177A9051F4}" type="slidenum">
+            <a:fld id="{8C481D6B-B5D0-4683-9F2E-0F329EC5E3F4}" type="slidenum">
               <a:rPr b="0" lang="en-US" sz="1200" spc="-1" strike="noStrike">
                 <a:latin typeface="Times New Roman"/>
               </a:rPr>
@@ -2396,7 +2396,7 @@
         <p:spPr>
           <a:xfrm>
             <a:off x="685800" y="1143000"/>
-            <a:ext cx="5484960" cy="3084840"/>
+            <a:ext cx="5484240" cy="3084120"/>
           </a:xfrm>
           <a:prstGeom prst="rect">
             <a:avLst/>
@@ -2419,7 +2419,7 @@
         <p:spPr>
           <a:xfrm>
             <a:off x="685800" y="4400640"/>
-            <a:ext cx="5484960" cy="3598920"/>
+            <a:ext cx="5484240" cy="3598200"/>
           </a:xfrm>
           <a:prstGeom prst="rect">
             <a:avLst/>
@@ -2453,7 +2453,7 @@
         <p:spPr>
           <a:xfrm>
             <a:off x="3884760" y="8685360"/>
-            <a:ext cx="2970360" cy="457200"/>
+            <a:ext cx="2969640" cy="456480"/>
           </a:xfrm>
           <a:prstGeom prst="rect">
             <a:avLst/>
@@ -2485,7 +2485,7 @@
               </a:lnSpc>
               <a:buNone/>
             </a:pPr>
-            <a:fld id="{3D694038-8904-4D42-B89D-46D3AA140051}" type="slidenum">
+            <a:fld id="{A783B8F6-DC94-424C-BC5B-22C101ECFF47}" type="slidenum">
               <a:rPr b="0" lang="en-US" sz="1200" spc="-1" strike="noStrike">
                 <a:latin typeface="Times New Roman"/>
               </a:rPr>
@@ -2532,7 +2532,7 @@
         <p:spPr>
           <a:xfrm>
             <a:off x="685800" y="1143000"/>
-            <a:ext cx="5484960" cy="3084840"/>
+            <a:ext cx="5484240" cy="3084120"/>
           </a:xfrm>
           <a:prstGeom prst="rect">
             <a:avLst/>
@@ -2555,7 +2555,7 @@
         <p:spPr>
           <a:xfrm>
             <a:off x="685800" y="4400640"/>
-            <a:ext cx="5484960" cy="3598920"/>
+            <a:ext cx="5484240" cy="3598200"/>
           </a:xfrm>
           <a:prstGeom prst="rect">
             <a:avLst/>
@@ -2589,7 +2589,7 @@
         <p:spPr>
           <a:xfrm>
             <a:off x="3884760" y="8685360"/>
-            <a:ext cx="2970360" cy="457200"/>
+            <a:ext cx="2969640" cy="456480"/>
           </a:xfrm>
           <a:prstGeom prst="rect">
             <a:avLst/>
@@ -2621,7 +2621,7 @@
               </a:lnSpc>
               <a:buNone/>
             </a:pPr>
-            <a:fld id="{7CB8DD9B-B62F-499C-AB37-B68664EFF37D}" type="slidenum">
+            <a:fld id="{46356C38-8EA0-4DDF-AA42-1DFA06BA3B9E}" type="slidenum">
               <a:rPr b="0" lang="en-US" sz="1200" spc="-1" strike="noStrike">
                 <a:latin typeface="Times New Roman"/>
               </a:rPr>
@@ -4465,7 +4465,7 @@
         <p:spPr>
           <a:xfrm>
             <a:off x="380880" y="1415520"/>
-            <a:ext cx="608040" cy="17640"/>
+            <a:ext cx="607320" cy="16920"/>
           </a:xfrm>
           <a:custGeom>
             <a:avLst/>
@@ -4515,8 +4515,8 @@
         </p:nvSpPr>
         <p:spPr>
           <a:xfrm>
-            <a:off x="380880" y="1663200"/>
-            <a:ext cx="2151360" cy="189000"/>
+            <a:off x="1980000" y="1663200"/>
+            <a:ext cx="551520" cy="188280"/>
           </a:xfrm>
           <a:prstGeom prst="rect">
             <a:avLst/>
@@ -4544,7 +4544,7 @@
               <a:buNone/>
             </a:pPr>
             <a:r>
-              <a:rPr b="0" i="1" lang="en-US" sz="1050" spc="304" strike="noStrike">
+              <a:rPr b="0" i="1" lang="en-US" sz="1050" spc="299" strike="noStrike">
                 <a:solidFill>
                   <a:srgbClr val="86868b"/>
                 </a:solidFill>
@@ -4553,7 +4553,7 @@
               </a:rPr>
               <a:t>Probability Theory</a:t>
             </a:r>
-            <a:endParaRPr b="0" lang="en-HK" sz="1050" spc="-1" strike="noStrike">
+            <a:endParaRPr b="0" i="1" lang="en-HK" sz="1050" spc="-1" strike="noStrike">
               <a:latin typeface="Arial"/>
             </a:endParaRPr>
           </a:p>
@@ -4567,8 +4567,8 @@
         </p:nvSpPr>
         <p:spPr>
           <a:xfrm>
-            <a:off x="380880" y="2310840"/>
-            <a:ext cx="6608880" cy="2170440"/>
+            <a:off x="4140000" y="3590280"/>
+            <a:ext cx="6608160" cy="2169720"/>
           </a:xfrm>
           <a:prstGeom prst="rect">
             <a:avLst/>
@@ -4596,7 +4596,7 @@
               <a:buNone/>
             </a:pPr>
             <a:r>
-              <a:rPr b="0" lang="en-US" sz="9000" spc="-225" strike="noStrike">
+              <a:rPr b="0" i="1" lang="en-US" sz="9000" spc="-225" strike="noStrike">
                 <a:solidFill>
                   <a:srgbClr val="1d1d1d"/>
                 </a:solidFill>
@@ -4605,7 +4605,7 @@
               </a:rPr>
               <a:t>The Birthday</a:t>
             </a:r>
-            <a:endParaRPr b="0" lang="en-HK" sz="9000" spc="-1" strike="noStrike">
+            <a:endParaRPr b="0" i="1" lang="en-HK" sz="9000" spc="-1" strike="noStrike">
               <a:latin typeface="Arial"/>
             </a:endParaRPr>
           </a:p>
@@ -4617,7 +4617,7 @@
               <a:buNone/>
             </a:pPr>
             <a:r>
-              <a:rPr b="0" lang="en-US" sz="9000" spc="-225" strike="noStrike">
+              <a:rPr b="0" i="1" lang="en-US" sz="9000" spc="-225" strike="noStrike">
                 <a:solidFill>
                   <a:srgbClr val="1d1d1d"/>
                 </a:solidFill>
@@ -4626,7 +4626,7 @@
               </a:rPr>
               <a:t>Paradox</a:t>
             </a:r>
-            <a:endParaRPr b="0" lang="en-HK" sz="9000" spc="-1" strike="noStrike">
+            <a:endParaRPr b="0" i="1" lang="en-HK" sz="9000" spc="-1" strike="noStrike">
               <a:latin typeface="Arial"/>
             </a:endParaRPr>
           </a:p>
@@ -4641,7 +4641,7 @@
         <p:spPr>
           <a:xfrm>
             <a:off x="380880" y="4787640"/>
-            <a:ext cx="4265640" cy="465120"/>
+            <a:ext cx="4264920" cy="464400"/>
           </a:xfrm>
           <a:prstGeom prst="rect">
             <a:avLst/>
@@ -4693,7 +4693,7 @@
         <p:spPr>
           <a:xfrm>
             <a:off x="426240" y="6296040"/>
-            <a:ext cx="127080" cy="169920"/>
+            <a:ext cx="126360" cy="169200"/>
           </a:xfrm>
           <a:custGeom>
             <a:avLst/>
@@ -4998,7 +4998,7 @@
         <p:spPr>
           <a:xfrm>
             <a:off x="709560" y="6286680"/>
-            <a:ext cx="1560600" cy="189000"/>
+            <a:ext cx="1559880" cy="188280"/>
           </a:xfrm>
           <a:prstGeom prst="rect">
             <a:avLst/>
@@ -5050,7 +5050,7 @@
         <p:spPr>
           <a:xfrm>
             <a:off x="2689200" y="6296040"/>
-            <a:ext cx="169920" cy="169920"/>
+            <a:ext cx="169200" cy="169200"/>
           </a:xfrm>
           <a:custGeom>
             <a:avLst/>
@@ -5183,7 +5183,7 @@
         <p:spPr>
           <a:xfrm>
             <a:off x="2994120" y="6286680"/>
-            <a:ext cx="1398600" cy="189000"/>
+            <a:ext cx="1397880" cy="188280"/>
           </a:xfrm>
           <a:prstGeom prst="rect">
             <a:avLst/>
@@ -5272,7 +5272,7 @@
         <p:spPr>
           <a:xfrm>
             <a:off x="380880" y="380880"/>
-            <a:ext cx="11485800" cy="150840"/>
+            <a:ext cx="11485080" cy="150120"/>
           </a:xfrm>
           <a:prstGeom prst="rect">
             <a:avLst/>
@@ -5300,7 +5300,7 @@
               <a:buNone/>
             </a:pPr>
             <a:r>
-              <a:rPr b="0" lang="en-US" sz="900" spc="259" strike="noStrike">
+              <a:rPr b="0" lang="en-US" sz="900" spc="253" strike="noStrike">
                 <a:solidFill>
                   <a:srgbClr val="86868b"/>
                 </a:solidFill>
@@ -5324,7 +5324,7 @@
         <p:spPr>
           <a:xfrm>
             <a:off x="380880" y="609480"/>
-            <a:ext cx="11599920" cy="379440"/>
+            <a:ext cx="11599200" cy="378720"/>
           </a:xfrm>
           <a:prstGeom prst="rect">
             <a:avLst/>
@@ -5376,7 +5376,7 @@
         <p:spPr>
           <a:xfrm>
             <a:off x="380880" y="1995480"/>
-            <a:ext cx="5608800" cy="560520"/>
+            <a:ext cx="5608080" cy="559800"/>
           </a:xfrm>
           <a:prstGeom prst="rect">
             <a:avLst/>
@@ -5448,7 +5448,7 @@
         <p:spPr>
           <a:xfrm>
             <a:off x="385920" y="2786040"/>
-            <a:ext cx="5513400" cy="1417680"/>
+            <a:ext cx="5512680" cy="1416960"/>
           </a:xfrm>
           <a:custGeom>
             <a:avLst/>
@@ -5500,7 +5500,7 @@
         <p:spPr>
           <a:xfrm>
             <a:off x="619200" y="3019320"/>
-            <a:ext cx="5113440" cy="189000"/>
+            <a:ext cx="5112720" cy="188280"/>
           </a:xfrm>
           <a:prstGeom prst="rect">
             <a:avLst/>
@@ -5528,7 +5528,7 @@
               <a:buNone/>
             </a:pPr>
             <a:r>
-              <a:rPr b="0" lang="en-US" sz="1050" spc="199" strike="noStrike">
+              <a:rPr b="0" lang="en-US" sz="1050" spc="194" strike="noStrike">
                 <a:solidFill>
                   <a:srgbClr val="86868b"/>
                 </a:solidFill>
@@ -5552,7 +5552,7 @@
         <p:spPr>
           <a:xfrm>
             <a:off x="619200" y="3324240"/>
-            <a:ext cx="5189760" cy="341640"/>
+            <a:ext cx="5189040" cy="340920"/>
           </a:xfrm>
           <a:prstGeom prst="rect">
             <a:avLst/>
@@ -5604,7 +5604,7 @@
         <p:spPr>
           <a:xfrm>
             <a:off x="619200" y="3743280"/>
-            <a:ext cx="5123160" cy="227160"/>
+            <a:ext cx="5122440" cy="226440"/>
           </a:xfrm>
           <a:prstGeom prst="rect">
             <a:avLst/>
@@ -5656,7 +5656,7 @@
         <p:spPr>
           <a:xfrm>
             <a:off x="6296040" y="1995480"/>
-            <a:ext cx="17640" cy="684360"/>
+            <a:ext cx="16920" cy="683640"/>
           </a:xfrm>
           <a:custGeom>
             <a:avLst/>
@@ -5707,7 +5707,7 @@
         <p:spPr>
           <a:xfrm>
             <a:off x="6496200" y="1995480"/>
-            <a:ext cx="436680" cy="341640"/>
+            <a:ext cx="435960" cy="340920"/>
           </a:xfrm>
           <a:prstGeom prst="rect">
             <a:avLst/>
@@ -5759,7 +5759,7 @@
         <p:spPr>
           <a:xfrm>
             <a:off x="6906960" y="2095560"/>
-            <a:ext cx="532080" cy="227160"/>
+            <a:ext cx="531360" cy="226440"/>
           </a:xfrm>
           <a:prstGeom prst="rect">
             <a:avLst/>
@@ -5811,7 +5811,7 @@
         <p:spPr>
           <a:xfrm>
             <a:off x="6496200" y="2376360"/>
-            <a:ext cx="5427720" cy="303480"/>
+            <a:ext cx="5427000" cy="302760"/>
           </a:xfrm>
           <a:prstGeom prst="rect">
             <a:avLst/>
@@ -5863,7 +5863,7 @@
         <p:spPr>
           <a:xfrm>
             <a:off x="6296040" y="2833560"/>
-            <a:ext cx="17640" cy="989280"/>
+            <a:ext cx="16920" cy="988560"/>
           </a:xfrm>
           <a:custGeom>
             <a:avLst/>
@@ -5914,7 +5914,7 @@
         <p:spPr>
           <a:xfrm>
             <a:off x="6496200" y="2833560"/>
-            <a:ext cx="570240" cy="379440"/>
+            <a:ext cx="569520" cy="378720"/>
           </a:xfrm>
           <a:prstGeom prst="rect">
             <a:avLst/>
@@ -5966,7 +5966,7 @@
         <p:spPr>
           <a:xfrm>
             <a:off x="7011720" y="2943360"/>
-            <a:ext cx="598680" cy="265320"/>
+            <a:ext cx="597960" cy="264600"/>
           </a:xfrm>
           <a:prstGeom prst="rect">
             <a:avLst/>
@@ -6018,7 +6018,7 @@
         <p:spPr>
           <a:xfrm>
             <a:off x="6496200" y="3252960"/>
-            <a:ext cx="5456520" cy="341640"/>
+            <a:ext cx="5455800" cy="340920"/>
           </a:xfrm>
           <a:prstGeom prst="rect">
             <a:avLst/>
@@ -6070,7 +6070,7 @@
         <p:spPr>
           <a:xfrm>
             <a:off x="6496200" y="3633840"/>
-            <a:ext cx="5380200" cy="189000"/>
+            <a:ext cx="5379480" cy="188280"/>
           </a:xfrm>
           <a:prstGeom prst="rect">
             <a:avLst/>
@@ -6122,7 +6122,7 @@
         <p:spPr>
           <a:xfrm>
             <a:off x="6296040" y="3976560"/>
-            <a:ext cx="17640" cy="684360"/>
+            <a:ext cx="16920" cy="683640"/>
           </a:xfrm>
           <a:custGeom>
             <a:avLst/>
@@ -6173,7 +6173,7 @@
         <p:spPr>
           <a:xfrm>
             <a:off x="6496200" y="3976560"/>
-            <a:ext cx="484200" cy="341640"/>
+            <a:ext cx="483480" cy="340920"/>
           </a:xfrm>
           <a:prstGeom prst="rect">
             <a:avLst/>
@@ -6225,7 +6225,7 @@
         <p:spPr>
           <a:xfrm>
             <a:off x="6957360" y="4076640"/>
-            <a:ext cx="532080" cy="227160"/>
+            <a:ext cx="531360" cy="226440"/>
           </a:xfrm>
           <a:prstGeom prst="rect">
             <a:avLst/>
@@ -6277,7 +6277,7 @@
         <p:spPr>
           <a:xfrm>
             <a:off x="6496200" y="4357800"/>
-            <a:ext cx="5427720" cy="303480"/>
+            <a:ext cx="5427000" cy="302760"/>
           </a:xfrm>
           <a:prstGeom prst="rect">
             <a:avLst/>
@@ -6329,7 +6329,7 @@
         <p:spPr>
           <a:xfrm>
             <a:off x="380880" y="4971960"/>
-            <a:ext cx="11428560" cy="7920"/>
+            <a:ext cx="11427840" cy="7200"/>
           </a:xfrm>
           <a:custGeom>
             <a:avLst/>
@@ -6380,7 +6380,7 @@
         <p:spPr>
           <a:xfrm>
             <a:off x="390600" y="5253120"/>
-            <a:ext cx="169920" cy="150840"/>
+            <a:ext cx="169200" cy="150120"/>
           </a:xfrm>
           <a:custGeom>
             <a:avLst/>
@@ -6494,7 +6494,7 @@
         <p:spPr>
           <a:xfrm>
             <a:off x="628560" y="5205240"/>
-            <a:ext cx="11257200" cy="493920"/>
+            <a:ext cx="11256480" cy="493200"/>
           </a:xfrm>
           <a:prstGeom prst="rect">
             <a:avLst/>
@@ -6593,7 +6593,7 @@
         <p:spPr>
           <a:xfrm>
             <a:off x="380880" y="1850760"/>
-            <a:ext cx="760680" cy="17640"/>
+            <a:ext cx="759960" cy="16920"/>
           </a:xfrm>
           <a:custGeom>
             <a:avLst/>
@@ -6644,7 +6644,7 @@
         <p:spPr>
           <a:xfrm>
             <a:off x="380880" y="2174760"/>
-            <a:ext cx="9151920" cy="189000"/>
+            <a:ext cx="9151200" cy="188280"/>
           </a:xfrm>
           <a:prstGeom prst="rect">
             <a:avLst/>
@@ -6672,7 +6672,7 @@
               <a:buNone/>
             </a:pPr>
             <a:r>
-              <a:rPr b="0" lang="en-US" sz="1050" spc="304" strike="noStrike">
+              <a:rPr b="0" lang="en-US" sz="1050" spc="299" strike="noStrike">
                 <a:solidFill>
                   <a:srgbClr val="86868b"/>
                 </a:solidFill>
@@ -6696,7 +6696,7 @@
         <p:spPr>
           <a:xfrm>
             <a:off x="380880" y="2593800"/>
-            <a:ext cx="9542520" cy="1731960"/>
+            <a:ext cx="9541800" cy="1731240"/>
           </a:xfrm>
           <a:prstGeom prst="rect">
             <a:avLst/>
@@ -6769,7 +6769,7 @@
         <p:spPr>
           <a:xfrm>
             <a:off x="380880" y="4635720"/>
-            <a:ext cx="5599440" cy="370080"/>
+            <a:ext cx="5598720" cy="369360"/>
           </a:xfrm>
           <a:prstGeom prst="rect">
             <a:avLst/>
@@ -6821,7 +6821,7 @@
         <p:spPr>
           <a:xfrm>
             <a:off x="9471600" y="2476440"/>
-            <a:ext cx="3294360" cy="1903680"/>
+            <a:ext cx="3293640" cy="1902960"/>
           </a:xfrm>
           <a:prstGeom prst="rect">
             <a:avLst/>
@@ -6910,7 +6910,7 @@
         <p:spPr>
           <a:xfrm>
             <a:off x="380880" y="380880"/>
-            <a:ext cx="11485800" cy="150840"/>
+            <a:ext cx="11485080" cy="150120"/>
           </a:xfrm>
           <a:prstGeom prst="rect">
             <a:avLst/>
@@ -6938,7 +6938,7 @@
               <a:buNone/>
             </a:pPr>
             <a:r>
-              <a:rPr b="0" lang="en-US" sz="900" spc="259" strike="noStrike">
+              <a:rPr b="0" lang="en-US" sz="900" spc="253" strike="noStrike">
                 <a:solidFill>
                   <a:srgbClr val="86868b"/>
                 </a:solidFill>
@@ -6962,7 +6962,7 @@
         <p:spPr>
           <a:xfrm>
             <a:off x="380880" y="609480"/>
-            <a:ext cx="11599920" cy="379440"/>
+            <a:ext cx="11599200" cy="378720"/>
           </a:xfrm>
           <a:prstGeom prst="rect">
             <a:avLst/>
@@ -7014,7 +7014,7 @@
         <p:spPr>
           <a:xfrm>
             <a:off x="380880" y="2019240"/>
-            <a:ext cx="8628120" cy="617760"/>
+            <a:ext cx="8627400" cy="617040"/>
           </a:xfrm>
           <a:prstGeom prst="rect">
             <a:avLst/>
@@ -7106,7 +7106,7 @@
         <p:spPr>
           <a:xfrm>
             <a:off x="380880" y="3029040"/>
-            <a:ext cx="5523120" cy="17640"/>
+            <a:ext cx="5522400" cy="16920"/>
           </a:xfrm>
           <a:custGeom>
             <a:avLst/>
@@ -7157,7 +7157,7 @@
         <p:spPr>
           <a:xfrm>
             <a:off x="380880" y="3267000"/>
-            <a:ext cx="5589720" cy="189000"/>
+            <a:ext cx="5589000" cy="188280"/>
           </a:xfrm>
           <a:prstGeom prst="rect">
             <a:avLst/>
@@ -7185,7 +7185,7 @@
               <a:buNone/>
             </a:pPr>
             <a:r>
-              <a:rPr b="0" lang="en-US" sz="1050" spc="199" strike="noStrike">
+              <a:rPr b="0" lang="en-US" sz="1050" spc="194" strike="noStrike">
                 <a:solidFill>
                   <a:srgbClr val="86868b"/>
                 </a:solidFill>
@@ -7209,7 +7209,7 @@
         <p:spPr>
           <a:xfrm>
             <a:off x="380880" y="3610080"/>
-            <a:ext cx="5751720" cy="455760"/>
+            <a:ext cx="5751000" cy="455040"/>
           </a:xfrm>
           <a:prstGeom prst="rect">
             <a:avLst/>
@@ -7261,7 +7261,7 @@
         <p:spPr>
           <a:xfrm>
             <a:off x="380880" y="4143240"/>
-            <a:ext cx="5599440" cy="227160"/>
+            <a:ext cx="5598720" cy="226440"/>
           </a:xfrm>
           <a:prstGeom prst="rect">
             <a:avLst/>
@@ -7313,7 +7313,7 @@
         <p:spPr>
           <a:xfrm>
             <a:off x="380880" y="4524480"/>
-            <a:ext cx="5599440" cy="246240"/>
+            <a:ext cx="5598720" cy="245520"/>
           </a:xfrm>
           <a:prstGeom prst="rect">
             <a:avLst/>
@@ -7365,7 +7365,7 @@
         <p:spPr>
           <a:xfrm>
             <a:off x="380880" y="4886280"/>
-            <a:ext cx="5599440" cy="246240"/>
+            <a:ext cx="5598720" cy="245520"/>
           </a:xfrm>
           <a:prstGeom prst="rect">
             <a:avLst/>
@@ -7417,7 +7417,7 @@
         <p:spPr>
           <a:xfrm>
             <a:off x="6286680" y="3029040"/>
-            <a:ext cx="5523120" cy="17640"/>
+            <a:ext cx="5522400" cy="16920"/>
           </a:xfrm>
           <a:custGeom>
             <a:avLst/>
@@ -7468,7 +7468,7 @@
         <p:spPr>
           <a:xfrm>
             <a:off x="6286680" y="3267000"/>
-            <a:ext cx="5589720" cy="189000"/>
+            <a:ext cx="5589000" cy="188280"/>
           </a:xfrm>
           <a:prstGeom prst="rect">
             <a:avLst/>
@@ -7496,7 +7496,7 @@
               <a:buNone/>
             </a:pPr>
             <a:r>
-              <a:rPr b="0" lang="en-US" sz="1050" spc="199" strike="noStrike">
+              <a:rPr b="0" lang="en-US" sz="1050" spc="194" strike="noStrike">
                 <a:solidFill>
                   <a:srgbClr val="0071e3"/>
                 </a:solidFill>
@@ -7520,7 +7520,7 @@
         <p:spPr>
           <a:xfrm>
             <a:off x="6286680" y="3610080"/>
-            <a:ext cx="5751720" cy="455760"/>
+            <a:ext cx="5751000" cy="455040"/>
           </a:xfrm>
           <a:prstGeom prst="rect">
             <a:avLst/>
@@ -7572,7 +7572,7 @@
         <p:spPr>
           <a:xfrm>
             <a:off x="6286680" y="4143240"/>
-            <a:ext cx="5599440" cy="227160"/>
+            <a:ext cx="5598720" cy="226440"/>
           </a:xfrm>
           <a:prstGeom prst="rect">
             <a:avLst/>
@@ -7624,7 +7624,7 @@
         <p:spPr>
           <a:xfrm>
             <a:off x="6286680" y="4524480"/>
-            <a:ext cx="5599440" cy="246240"/>
+            <a:ext cx="5598720" cy="245520"/>
           </a:xfrm>
           <a:prstGeom prst="rect">
             <a:avLst/>
@@ -7676,7 +7676,7 @@
         <p:spPr>
           <a:xfrm>
             <a:off x="6286680" y="4886280"/>
-            <a:ext cx="5599440" cy="246240"/>
+            <a:ext cx="5598720" cy="245520"/>
           </a:xfrm>
           <a:prstGeom prst="rect">
             <a:avLst/>
@@ -7728,7 +7728,7 @@
         <p:spPr>
           <a:xfrm>
             <a:off x="380880" y="6091200"/>
-            <a:ext cx="11428560" cy="7920"/>
+            <a:ext cx="11427840" cy="7200"/>
           </a:xfrm>
           <a:custGeom>
             <a:avLst/>
@@ -7779,7 +7779,7 @@
         <p:spPr>
           <a:xfrm>
             <a:off x="399960" y="6286680"/>
-            <a:ext cx="150840" cy="150840"/>
+            <a:ext cx="150120" cy="150120"/>
           </a:xfrm>
           <a:custGeom>
             <a:avLst/>
@@ -7956,7 +7956,7 @@
         <p:spPr>
           <a:xfrm>
             <a:off x="628560" y="6248520"/>
-            <a:ext cx="11257200" cy="227160"/>
+            <a:ext cx="11256480" cy="226440"/>
           </a:xfrm>
           <a:prstGeom prst="rect">
             <a:avLst/>
@@ -8055,7 +8055,7 @@
         <p:spPr>
           <a:xfrm>
             <a:off x="380880" y="380880"/>
-            <a:ext cx="11485800" cy="150840"/>
+            <a:ext cx="11485080" cy="150120"/>
           </a:xfrm>
           <a:prstGeom prst="rect">
             <a:avLst/>
@@ -8083,7 +8083,7 @@
               <a:buNone/>
             </a:pPr>
             <a:r>
-              <a:rPr b="0" lang="en-US" sz="900" spc="259" strike="noStrike">
+              <a:rPr b="0" lang="en-US" sz="900" spc="253" strike="noStrike">
                 <a:solidFill>
                   <a:srgbClr val="86868b"/>
                 </a:solidFill>
@@ -8107,7 +8107,7 @@
         <p:spPr>
           <a:xfrm>
             <a:off x="380880" y="609480"/>
-            <a:ext cx="11599920" cy="379440"/>
+            <a:ext cx="11599200" cy="378720"/>
           </a:xfrm>
           <a:prstGeom prst="rect">
             <a:avLst/>
@@ -8159,7 +8159,7 @@
         <p:spPr>
           <a:xfrm>
             <a:off x="380880" y="1962000"/>
-            <a:ext cx="8628120" cy="617760"/>
+            <a:ext cx="8627400" cy="617040"/>
           </a:xfrm>
           <a:prstGeom prst="rect">
             <a:avLst/>
@@ -8231,7 +8231,7 @@
         <p:spPr>
           <a:xfrm>
             <a:off x="380880" y="2886120"/>
-            <a:ext cx="5589720" cy="189000"/>
+            <a:ext cx="5589000" cy="188280"/>
           </a:xfrm>
           <a:prstGeom prst="rect">
             <a:avLst/>
@@ -8259,7 +8259,7 @@
               <a:buNone/>
             </a:pPr>
             <a:r>
-              <a:rPr b="0" lang="en-US" sz="1050" spc="199" strike="noStrike">
+              <a:rPr b="0" lang="en-US" sz="1050" spc="194" strike="noStrike">
                 <a:solidFill>
                   <a:srgbClr val="86868b"/>
                 </a:solidFill>
@@ -8283,7 +8283,7 @@
         <p:spPr>
           <a:xfrm>
             <a:off x="380880" y="3228840"/>
-            <a:ext cx="989280" cy="227160"/>
+            <a:ext cx="988560" cy="226440"/>
           </a:xfrm>
           <a:prstGeom prst="rect">
             <a:avLst/>
@@ -8335,7 +8335,7 @@
         <p:spPr>
           <a:xfrm>
             <a:off x="1447920" y="3305160"/>
-            <a:ext cx="4456440" cy="74880"/>
+            <a:ext cx="4455720" cy="74160"/>
           </a:xfrm>
           <a:custGeom>
             <a:avLst/>
@@ -8386,7 +8386,7 @@
         <p:spPr>
           <a:xfrm>
             <a:off x="1447920" y="3305160"/>
-            <a:ext cx="893880" cy="74880"/>
+            <a:ext cx="893160" cy="74160"/>
           </a:xfrm>
           <a:custGeom>
             <a:avLst/>
@@ -8437,7 +8437,7 @@
         <p:spPr>
           <a:xfrm>
             <a:off x="380880" y="3571920"/>
-            <a:ext cx="989280" cy="227160"/>
+            <a:ext cx="988560" cy="226440"/>
           </a:xfrm>
           <a:prstGeom prst="rect">
             <a:avLst/>
@@ -8489,7 +8489,7 @@
         <p:spPr>
           <a:xfrm>
             <a:off x="1447920" y="3648240"/>
-            <a:ext cx="4456440" cy="74880"/>
+            <a:ext cx="4455720" cy="74160"/>
           </a:xfrm>
           <a:custGeom>
             <a:avLst/>
@@ -8540,7 +8540,7 @@
         <p:spPr>
           <a:xfrm>
             <a:off x="1447920" y="3648240"/>
-            <a:ext cx="1779840" cy="74880"/>
+            <a:ext cx="1779120" cy="74160"/>
           </a:xfrm>
           <a:custGeom>
             <a:avLst/>
@@ -8591,7 +8591,7 @@
         <p:spPr>
           <a:xfrm>
             <a:off x="380880" y="3914640"/>
-            <a:ext cx="989280" cy="227160"/>
+            <a:ext cx="988560" cy="226440"/>
           </a:xfrm>
           <a:prstGeom prst="rect">
             <a:avLst/>
@@ -8643,7 +8643,7 @@
         <p:spPr>
           <a:xfrm>
             <a:off x="1447920" y="3990960"/>
-            <a:ext cx="4456440" cy="74880"/>
+            <a:ext cx="4455720" cy="74160"/>
           </a:xfrm>
           <a:custGeom>
             <a:avLst/>
@@ -8694,7 +8694,7 @@
         <p:spPr>
           <a:xfrm>
             <a:off x="1447920" y="3990960"/>
-            <a:ext cx="2675160" cy="74880"/>
+            <a:ext cx="2674440" cy="74160"/>
           </a:xfrm>
           <a:custGeom>
             <a:avLst/>
@@ -8745,7 +8745,7 @@
         <p:spPr>
           <a:xfrm>
             <a:off x="380880" y="4295880"/>
-            <a:ext cx="5599440" cy="246240"/>
+            <a:ext cx="5598720" cy="245520"/>
           </a:xfrm>
           <a:prstGeom prst="rect">
             <a:avLst/>
@@ -8797,7 +8797,7 @@
         <p:spPr>
           <a:xfrm>
             <a:off x="6286680" y="2886120"/>
-            <a:ext cx="5589720" cy="189000"/>
+            <a:ext cx="5589000" cy="188280"/>
           </a:xfrm>
           <a:prstGeom prst="rect">
             <a:avLst/>
@@ -8825,7 +8825,7 @@
               <a:buNone/>
             </a:pPr>
             <a:r>
-              <a:rPr b="0" lang="en-US" sz="1050" spc="199" strike="noStrike">
+              <a:rPr b="0" lang="en-US" sz="1050" spc="194" strike="noStrike">
                 <a:solidFill>
                   <a:srgbClr val="0071e3"/>
                 </a:solidFill>
@@ -8849,7 +8849,7 @@
         <p:spPr>
           <a:xfrm>
             <a:off x="6286680" y="3228840"/>
-            <a:ext cx="989280" cy="227160"/>
+            <a:ext cx="988560" cy="226440"/>
           </a:xfrm>
           <a:prstGeom prst="rect">
             <a:avLst/>
@@ -8901,7 +8901,7 @@
         <p:spPr>
           <a:xfrm>
             <a:off x="7353360" y="3305160"/>
-            <a:ext cx="3694320" cy="74880"/>
+            <a:ext cx="3693600" cy="74160"/>
           </a:xfrm>
           <a:custGeom>
             <a:avLst/>
@@ -8952,7 +8952,7 @@
         <p:spPr>
           <a:xfrm>
             <a:off x="7353360" y="3305160"/>
-            <a:ext cx="446400" cy="74880"/>
+            <a:ext cx="445680" cy="74160"/>
           </a:xfrm>
           <a:custGeom>
             <a:avLst/>
@@ -9003,7 +9003,7 @@
         <p:spPr>
           <a:xfrm>
             <a:off x="11201400" y="3247920"/>
-            <a:ext cx="675000" cy="189000"/>
+            <a:ext cx="674280" cy="188280"/>
           </a:xfrm>
           <a:prstGeom prst="rect">
             <a:avLst/>
@@ -9055,7 +9055,7 @@
         <p:spPr>
           <a:xfrm>
             <a:off x="6286680" y="3571920"/>
-            <a:ext cx="989280" cy="227160"/>
+            <a:ext cx="988560" cy="226440"/>
           </a:xfrm>
           <a:prstGeom prst="rect">
             <a:avLst/>
@@ -9107,7 +9107,7 @@
         <p:spPr>
           <a:xfrm>
             <a:off x="7353360" y="3648240"/>
-            <a:ext cx="3694320" cy="74880"/>
+            <a:ext cx="3693600" cy="74160"/>
           </a:xfrm>
           <a:custGeom>
             <a:avLst/>
@@ -9158,7 +9158,7 @@
         <p:spPr>
           <a:xfrm>
             <a:off x="7353360" y="3648240"/>
-            <a:ext cx="1846440" cy="74880"/>
+            <a:ext cx="1845720" cy="74160"/>
           </a:xfrm>
           <a:custGeom>
             <a:avLst/>
@@ -9209,7 +9209,7 @@
         <p:spPr>
           <a:xfrm>
             <a:off x="11201400" y="3591000"/>
-            <a:ext cx="675000" cy="189000"/>
+            <a:ext cx="674280" cy="188280"/>
           </a:xfrm>
           <a:prstGeom prst="rect">
             <a:avLst/>
@@ -9261,7 +9261,7 @@
         <p:spPr>
           <a:xfrm>
             <a:off x="6286680" y="3990960"/>
-            <a:ext cx="989280" cy="227160"/>
+            <a:ext cx="988560" cy="226440"/>
           </a:xfrm>
           <a:prstGeom prst="rect">
             <a:avLst/>
@@ -9313,7 +9313,7 @@
         <p:spPr>
           <a:xfrm>
             <a:off x="7353360" y="4067280"/>
-            <a:ext cx="3694320" cy="74880"/>
+            <a:ext cx="3693600" cy="74160"/>
           </a:xfrm>
           <a:custGeom>
             <a:avLst/>
@@ -9364,7 +9364,7 @@
         <p:spPr>
           <a:xfrm>
             <a:off x="7353360" y="4067280"/>
-            <a:ext cx="3579840" cy="74880"/>
+            <a:ext cx="3579120" cy="74160"/>
           </a:xfrm>
           <a:custGeom>
             <a:avLst/>
@@ -9415,7 +9415,7 @@
         <p:spPr>
           <a:xfrm>
             <a:off x="11201400" y="3914640"/>
-            <a:ext cx="675000" cy="379440"/>
+            <a:ext cx="674280" cy="378720"/>
           </a:xfrm>
           <a:prstGeom prst="rect">
             <a:avLst/>
@@ -9467,7 +9467,7 @@
         <p:spPr>
           <a:xfrm>
             <a:off x="6286680" y="4448160"/>
-            <a:ext cx="5599440" cy="246240"/>
+            <a:ext cx="5598720" cy="245520"/>
           </a:xfrm>
           <a:prstGeom prst="rect">
             <a:avLst/>
@@ -9519,7 +9519,7 @@
         <p:spPr>
           <a:xfrm>
             <a:off x="380880" y="5005440"/>
-            <a:ext cx="11428560" cy="7920"/>
+            <a:ext cx="11427840" cy="7200"/>
           </a:xfrm>
           <a:custGeom>
             <a:avLst/>
@@ -9570,7 +9570,7 @@
         <p:spPr>
           <a:xfrm>
             <a:off x="399960" y="5286240"/>
-            <a:ext cx="150840" cy="150840"/>
+            <a:ext cx="150120" cy="150120"/>
           </a:xfrm>
           <a:custGeom>
             <a:avLst/>
@@ -9712,7 +9712,7 @@
         <p:spPr>
           <a:xfrm>
             <a:off x="628560" y="5238720"/>
-            <a:ext cx="11257200" cy="493920"/>
+            <a:ext cx="11256480" cy="493200"/>
           </a:xfrm>
           <a:prstGeom prst="rect">
             <a:avLst/>
@@ -9811,7 +9811,7 @@
         <p:spPr>
           <a:xfrm>
             <a:off x="380880" y="1850760"/>
-            <a:ext cx="760680" cy="17640"/>
+            <a:ext cx="759960" cy="16920"/>
           </a:xfrm>
           <a:custGeom>
             <a:avLst/>
@@ -9862,7 +9862,7 @@
         <p:spPr>
           <a:xfrm>
             <a:off x="380880" y="2174760"/>
-            <a:ext cx="9161640" cy="189000"/>
+            <a:ext cx="9160920" cy="188280"/>
           </a:xfrm>
           <a:prstGeom prst="rect">
             <a:avLst/>
@@ -9890,7 +9890,7 @@
               <a:buNone/>
             </a:pPr>
             <a:r>
-              <a:rPr b="0" lang="en-US" sz="1050" spc="304" strike="noStrike">
+              <a:rPr b="0" lang="en-US" sz="1050" spc="299" strike="noStrike">
                 <a:solidFill>
                   <a:srgbClr val="86868b"/>
                 </a:solidFill>
@@ -9914,7 +9914,7 @@
         <p:spPr>
           <a:xfrm>
             <a:off x="380880" y="2593800"/>
-            <a:ext cx="9552240" cy="1731960"/>
+            <a:ext cx="9551520" cy="1731240"/>
           </a:xfrm>
           <a:prstGeom prst="rect">
             <a:avLst/>
@@ -9987,7 +9987,7 @@
         <p:spPr>
           <a:xfrm>
             <a:off x="380880" y="4635720"/>
-            <a:ext cx="5599440" cy="370080"/>
+            <a:ext cx="5598720" cy="369360"/>
           </a:xfrm>
           <a:prstGeom prst="rect">
             <a:avLst/>
@@ -10039,7 +10039,7 @@
         <p:spPr>
           <a:xfrm>
             <a:off x="9473400" y="2476440"/>
-            <a:ext cx="3284640" cy="1903680"/>
+            <a:ext cx="3283920" cy="1902960"/>
           </a:xfrm>
           <a:prstGeom prst="rect">
             <a:avLst/>
@@ -10128,7 +10128,7 @@
         <p:spPr>
           <a:xfrm>
             <a:off x="380880" y="380880"/>
-            <a:ext cx="11485800" cy="150840"/>
+            <a:ext cx="11485080" cy="150120"/>
           </a:xfrm>
           <a:prstGeom prst="rect">
             <a:avLst/>
@@ -10156,7 +10156,7 @@
               <a:buNone/>
             </a:pPr>
             <a:r>
-              <a:rPr b="0" lang="en-US" sz="900" spc="259" strike="noStrike">
+              <a:rPr b="0" lang="en-US" sz="900" spc="253" strike="noStrike">
                 <a:solidFill>
                   <a:srgbClr val="86868b"/>
                 </a:solidFill>
@@ -10180,7 +10180,7 @@
         <p:spPr>
           <a:xfrm>
             <a:off x="380880" y="609480"/>
-            <a:ext cx="11599920" cy="379440"/>
+            <a:ext cx="11599200" cy="378720"/>
           </a:xfrm>
           <a:prstGeom prst="rect">
             <a:avLst/>
@@ -10232,7 +10232,7 @@
         <p:spPr>
           <a:xfrm>
             <a:off x="380880" y="1848960"/>
-            <a:ext cx="5608800" cy="560520"/>
+            <a:ext cx="5608080" cy="559800"/>
           </a:xfrm>
           <a:prstGeom prst="rect">
             <a:avLst/>
@@ -10304,7 +10304,7 @@
         <p:spPr>
           <a:xfrm>
             <a:off x="380880" y="2596680"/>
-            <a:ext cx="5599440" cy="493920"/>
+            <a:ext cx="5598720" cy="493200"/>
           </a:xfrm>
           <a:prstGeom prst="rect">
             <a:avLst/>
@@ -10366,7 +10366,7 @@
         <p:spPr>
           <a:xfrm>
             <a:off x="380880" y="3244320"/>
-            <a:ext cx="5599440" cy="493920"/>
+            <a:ext cx="5598720" cy="493200"/>
           </a:xfrm>
           <a:prstGeom prst="rect">
             <a:avLst/>
@@ -10418,7 +10418,7 @@
         <p:spPr>
           <a:xfrm>
             <a:off x="6296040" y="1848960"/>
-            <a:ext cx="17640" cy="798840"/>
+            <a:ext cx="16920" cy="798120"/>
           </a:xfrm>
           <a:custGeom>
             <a:avLst/>
@@ -10469,7 +10469,7 @@
         <p:spPr>
           <a:xfrm>
             <a:off x="6496200" y="1848960"/>
-            <a:ext cx="5380200" cy="189000"/>
+            <a:ext cx="5379480" cy="188280"/>
           </a:xfrm>
           <a:prstGeom prst="rect">
             <a:avLst/>
@@ -10497,7 +10497,7 @@
               <a:buNone/>
             </a:pPr>
             <a:r>
-              <a:rPr b="0" lang="en-US" sz="1050" spc="199" strike="noStrike">
+              <a:rPr b="0" lang="en-US" sz="1050" spc="194" strike="noStrike">
                 <a:solidFill>
                   <a:srgbClr val="0071e3"/>
                 </a:solidFill>
@@ -10521,7 +10521,7 @@
         <p:spPr>
           <a:xfrm>
             <a:off x="6496200" y="2115720"/>
-            <a:ext cx="5427720" cy="303480"/>
+            <a:ext cx="5427000" cy="302760"/>
           </a:xfrm>
           <a:prstGeom prst="rect">
             <a:avLst/>
@@ -10573,7 +10573,7 @@
         <p:spPr>
           <a:xfrm>
             <a:off x="6496200" y="2458800"/>
-            <a:ext cx="5380200" cy="189000"/>
+            <a:ext cx="5379480" cy="188280"/>
           </a:xfrm>
           <a:prstGeom prst="rect">
             <a:avLst/>
@@ -10625,7 +10625,7 @@
         <p:spPr>
           <a:xfrm>
             <a:off x="6296040" y="2801520"/>
-            <a:ext cx="17640" cy="798840"/>
+            <a:ext cx="16920" cy="798120"/>
           </a:xfrm>
           <a:custGeom>
             <a:avLst/>
@@ -10676,7 +10676,7 @@
         <p:spPr>
           <a:xfrm>
             <a:off x="6496200" y="2801520"/>
-            <a:ext cx="5380200" cy="189000"/>
+            <a:ext cx="5379480" cy="188280"/>
           </a:xfrm>
           <a:prstGeom prst="rect">
             <a:avLst/>
@@ -10704,7 +10704,7 @@
               <a:buNone/>
             </a:pPr>
             <a:r>
-              <a:rPr b="0" lang="en-US" sz="1050" spc="199" strike="noStrike">
+              <a:rPr b="0" lang="en-US" sz="1050" spc="194" strike="noStrike">
                 <a:solidFill>
                   <a:srgbClr val="86868b"/>
                 </a:solidFill>
@@ -10728,7 +10728,7 @@
         <p:spPr>
           <a:xfrm>
             <a:off x="6496200" y="3068280"/>
-            <a:ext cx="5427720" cy="303480"/>
+            <a:ext cx="5427000" cy="302760"/>
           </a:xfrm>
           <a:prstGeom prst="rect">
             <a:avLst/>
@@ -10780,7 +10780,7 @@
         <p:spPr>
           <a:xfrm>
             <a:off x="6496200" y="3411000"/>
-            <a:ext cx="5380200" cy="189000"/>
+            <a:ext cx="5379480" cy="188280"/>
           </a:xfrm>
           <a:prstGeom prst="rect">
             <a:avLst/>
@@ -10832,7 +10832,7 @@
         <p:spPr>
           <a:xfrm>
             <a:off x="6296040" y="3754080"/>
-            <a:ext cx="17640" cy="798840"/>
+            <a:ext cx="16920" cy="798120"/>
           </a:xfrm>
           <a:custGeom>
             <a:avLst/>
@@ -10883,7 +10883,7 @@
         <p:spPr>
           <a:xfrm>
             <a:off x="6496200" y="3754080"/>
-            <a:ext cx="5380200" cy="189000"/>
+            <a:ext cx="5379480" cy="188280"/>
           </a:xfrm>
           <a:prstGeom prst="rect">
             <a:avLst/>
@@ -10911,7 +10911,7 @@
               <a:buNone/>
             </a:pPr>
             <a:r>
-              <a:rPr b="0" lang="en-US" sz="1050" spc="199" strike="noStrike">
+              <a:rPr b="0" lang="en-US" sz="1050" spc="194" strike="noStrike">
                 <a:solidFill>
                   <a:srgbClr val="86868b"/>
                 </a:solidFill>
@@ -10935,7 +10935,7 @@
         <p:spPr>
           <a:xfrm>
             <a:off x="6496200" y="4020840"/>
-            <a:ext cx="5427720" cy="303480"/>
+            <a:ext cx="5427000" cy="302760"/>
           </a:xfrm>
           <a:prstGeom prst="rect">
             <a:avLst/>
@@ -10987,7 +10987,7 @@
         <p:spPr>
           <a:xfrm>
             <a:off x="6496200" y="4363560"/>
-            <a:ext cx="5380200" cy="189000"/>
+            <a:ext cx="5379480" cy="188280"/>
           </a:xfrm>
           <a:prstGeom prst="rect">
             <a:avLst/>
@@ -11039,7 +11039,7 @@
         <p:spPr>
           <a:xfrm>
             <a:off x="380880" y="4787640"/>
-            <a:ext cx="11428560" cy="7920"/>
+            <a:ext cx="11427840" cy="7200"/>
           </a:xfrm>
           <a:custGeom>
             <a:avLst/>
@@ -11090,7 +11090,7 @@
         <p:spPr>
           <a:xfrm>
             <a:off x="380880" y="5020920"/>
-            <a:ext cx="11495160" cy="189000"/>
+            <a:ext cx="11494440" cy="188280"/>
           </a:xfrm>
           <a:prstGeom prst="rect">
             <a:avLst/>
@@ -11118,7 +11118,7 @@
               <a:buNone/>
             </a:pPr>
             <a:r>
-              <a:rPr b="0" lang="en-US" sz="1050" spc="199" strike="noStrike">
+              <a:rPr b="0" lang="en-US" sz="1050" spc="194" strike="noStrike">
                 <a:solidFill>
                   <a:srgbClr val="86868b"/>
                 </a:solidFill>
@@ -11142,7 +11142,7 @@
         <p:spPr>
           <a:xfrm>
             <a:off x="380880" y="5363640"/>
-            <a:ext cx="189000" cy="150840"/>
+            <a:ext cx="188280" cy="150120"/>
           </a:xfrm>
           <a:custGeom>
             <a:avLst/>
@@ -11384,7 +11384,7 @@
         <p:spPr>
           <a:xfrm>
             <a:off x="628560" y="5325840"/>
-            <a:ext cx="3484800" cy="227160"/>
+            <a:ext cx="3484080" cy="226440"/>
           </a:xfrm>
           <a:prstGeom prst="rect">
             <a:avLst/>
@@ -11436,7 +11436,7 @@
         <p:spPr>
           <a:xfrm>
             <a:off x="380880" y="5630400"/>
-            <a:ext cx="3722760" cy="217800"/>
+            <a:ext cx="3722040" cy="217080"/>
           </a:xfrm>
           <a:prstGeom prst="rect">
             <a:avLst/>
@@ -11488,7 +11488,7 @@
         <p:spPr>
           <a:xfrm>
             <a:off x="4286160" y="5363640"/>
-            <a:ext cx="150840" cy="150840"/>
+            <a:ext cx="150120" cy="150120"/>
           </a:xfrm>
           <a:custGeom>
             <a:avLst/>
@@ -11586,7 +11586,7 @@
         <p:spPr>
           <a:xfrm>
             <a:off x="4514760" y="5325840"/>
-            <a:ext cx="3484800" cy="227160"/>
+            <a:ext cx="3484080" cy="226440"/>
           </a:xfrm>
           <a:prstGeom prst="rect">
             <a:avLst/>
@@ -11638,7 +11638,7 @@
         <p:spPr>
           <a:xfrm>
             <a:off x="4267080" y="5630400"/>
-            <a:ext cx="3722760" cy="217800"/>
+            <a:ext cx="3722040" cy="217080"/>
           </a:xfrm>
           <a:prstGeom prst="rect">
             <a:avLst/>
@@ -11690,7 +11690,7 @@
         <p:spPr>
           <a:xfrm>
             <a:off x="8172360" y="5363640"/>
-            <a:ext cx="150840" cy="150840"/>
+            <a:ext cx="150120" cy="150120"/>
           </a:xfrm>
           <a:custGeom>
             <a:avLst/>
@@ -11827,7 +11827,7 @@
         <p:spPr>
           <a:xfrm>
             <a:off x="8400960" y="5325840"/>
-            <a:ext cx="3484800" cy="227160"/>
+            <a:ext cx="3484080" cy="226440"/>
           </a:xfrm>
           <a:prstGeom prst="rect">
             <a:avLst/>
@@ -11879,7 +11879,7 @@
         <p:spPr>
           <a:xfrm>
             <a:off x="8153280" y="5630400"/>
-            <a:ext cx="3722760" cy="217800"/>
+            <a:ext cx="3722040" cy="217080"/>
           </a:xfrm>
           <a:prstGeom prst="rect">
             <a:avLst/>
@@ -11968,7 +11968,7 @@
         <p:spPr>
           <a:xfrm>
             <a:off x="380880" y="380880"/>
-            <a:ext cx="11485800" cy="150840"/>
+            <a:ext cx="11485080" cy="150120"/>
           </a:xfrm>
           <a:prstGeom prst="rect">
             <a:avLst/>
@@ -11996,7 +11996,7 @@
               <a:buNone/>
             </a:pPr>
             <a:r>
-              <a:rPr b="0" lang="en-US" sz="900" spc="259" strike="noStrike">
+              <a:rPr b="0" lang="en-US" sz="900" spc="253" strike="noStrike">
                 <a:solidFill>
                   <a:srgbClr val="86868b"/>
                 </a:solidFill>
@@ -12020,7 +12020,7 @@
         <p:spPr>
           <a:xfrm>
             <a:off x="380880" y="609480"/>
-            <a:ext cx="11599920" cy="379440"/>
+            <a:ext cx="11599200" cy="378720"/>
           </a:xfrm>
           <a:prstGeom prst="rect">
             <a:avLst/>
@@ -12072,7 +12072,7 @@
         <p:spPr>
           <a:xfrm>
             <a:off x="380880" y="1886040"/>
-            <a:ext cx="3656160" cy="7920"/>
+            <a:ext cx="3655440" cy="7200"/>
           </a:xfrm>
           <a:custGeom>
             <a:avLst/>
@@ -12123,7 +12123,7 @@
         <p:spPr>
           <a:xfrm>
             <a:off x="409680" y="2081160"/>
-            <a:ext cx="227160" cy="227160"/>
+            <a:ext cx="226440" cy="226440"/>
           </a:xfrm>
           <a:custGeom>
             <a:avLst/>
@@ -12324,7 +12324,7 @@
         <p:spPr>
           <a:xfrm>
             <a:off x="380880" y="2424240"/>
-            <a:ext cx="3751560" cy="265320"/>
+            <a:ext cx="3750840" cy="264600"/>
           </a:xfrm>
           <a:prstGeom prst="rect">
             <a:avLst/>
@@ -12376,7 +12376,7 @@
         <p:spPr>
           <a:xfrm>
             <a:off x="380880" y="2843280"/>
-            <a:ext cx="3732480" cy="493920"/>
+            <a:ext cx="3731760" cy="493200"/>
           </a:xfrm>
           <a:prstGeom prst="rect">
             <a:avLst/>
@@ -12428,7 +12428,7 @@
         <p:spPr>
           <a:xfrm>
             <a:off x="4267080" y="1886040"/>
-            <a:ext cx="3656160" cy="7920"/>
+            <a:ext cx="3655440" cy="7200"/>
           </a:xfrm>
           <a:custGeom>
             <a:avLst/>
@@ -12479,7 +12479,7 @@
         <p:spPr>
           <a:xfrm>
             <a:off x="4324320" y="2081160"/>
-            <a:ext cx="169920" cy="227160"/>
+            <a:ext cx="169200" cy="226440"/>
           </a:xfrm>
           <a:custGeom>
             <a:avLst/>
@@ -12611,7 +12611,7 @@
         <p:spPr>
           <a:xfrm>
             <a:off x="4267080" y="2424240"/>
-            <a:ext cx="3751560" cy="265320"/>
+            <a:ext cx="3750840" cy="264600"/>
           </a:xfrm>
           <a:prstGeom prst="rect">
             <a:avLst/>
@@ -12663,7 +12663,7 @@
         <p:spPr>
           <a:xfrm>
             <a:off x="4267080" y="2843280"/>
-            <a:ext cx="3732480" cy="493920"/>
+            <a:ext cx="3731760" cy="493200"/>
           </a:xfrm>
           <a:prstGeom prst="rect">
             <a:avLst/>
@@ -12715,7 +12715,7 @@
         <p:spPr>
           <a:xfrm>
             <a:off x="8153280" y="1886040"/>
-            <a:ext cx="3656160" cy="7920"/>
+            <a:ext cx="3655440" cy="7200"/>
           </a:xfrm>
           <a:custGeom>
             <a:avLst/>
@@ -12766,7 +12766,7 @@
         <p:spPr>
           <a:xfrm>
             <a:off x="8182080" y="2081160"/>
-            <a:ext cx="227160" cy="227160"/>
+            <a:ext cx="226440" cy="226440"/>
           </a:xfrm>
           <a:custGeom>
             <a:avLst/>
@@ -12989,7 +12989,7 @@
         <p:spPr>
           <a:xfrm>
             <a:off x="8153280" y="2424240"/>
-            <a:ext cx="3751560" cy="265320"/>
+            <a:ext cx="3750840" cy="264600"/>
           </a:xfrm>
           <a:prstGeom prst="rect">
             <a:avLst/>
@@ -13041,7 +13041,7 @@
         <p:spPr>
           <a:xfrm>
             <a:off x="8153280" y="2843280"/>
-            <a:ext cx="3732480" cy="493920"/>
+            <a:ext cx="3731760" cy="493200"/>
           </a:xfrm>
           <a:prstGeom prst="rect">
             <a:avLst/>
@@ -13093,7 +13093,7 @@
         <p:spPr>
           <a:xfrm>
             <a:off x="380880" y="3571920"/>
-            <a:ext cx="3656160" cy="7920"/>
+            <a:ext cx="3655440" cy="7200"/>
           </a:xfrm>
           <a:custGeom>
             <a:avLst/>
@@ -13144,7 +13144,7 @@
         <p:spPr>
           <a:xfrm>
             <a:off x="380880" y="3767040"/>
-            <a:ext cx="284400" cy="227160"/>
+            <a:ext cx="283680" cy="226440"/>
           </a:xfrm>
           <a:custGeom>
             <a:avLst/>
@@ -13360,7 +13360,7 @@
         <p:spPr>
           <a:xfrm>
             <a:off x="380880" y="4110120"/>
-            <a:ext cx="3751560" cy="265320"/>
+            <a:ext cx="3750840" cy="264600"/>
           </a:xfrm>
           <a:prstGeom prst="rect">
             <a:avLst/>
@@ -13412,7 +13412,7 @@
         <p:spPr>
           <a:xfrm>
             <a:off x="380880" y="4529160"/>
-            <a:ext cx="3732480" cy="741600"/>
+            <a:ext cx="3731760" cy="740880"/>
           </a:xfrm>
           <a:prstGeom prst="rect">
             <a:avLst/>
@@ -13464,7 +13464,7 @@
         <p:spPr>
           <a:xfrm>
             <a:off x="4267080" y="3571920"/>
-            <a:ext cx="3656160" cy="7920"/>
+            <a:ext cx="3655440" cy="7200"/>
           </a:xfrm>
           <a:custGeom>
             <a:avLst/>
@@ -13515,7 +13515,7 @@
         <p:spPr>
           <a:xfrm>
             <a:off x="4324320" y="3767040"/>
-            <a:ext cx="169920" cy="227160"/>
+            <a:ext cx="169200" cy="226440"/>
           </a:xfrm>
           <a:custGeom>
             <a:avLst/>
@@ -13714,7 +13714,7 @@
         <p:spPr>
           <a:xfrm>
             <a:off x="4267080" y="4110120"/>
-            <a:ext cx="3751560" cy="265320"/>
+            <a:ext cx="3750840" cy="264600"/>
           </a:xfrm>
           <a:prstGeom prst="rect">
             <a:avLst/>
@@ -13766,7 +13766,7 @@
         <p:spPr>
           <a:xfrm>
             <a:off x="4267080" y="4529160"/>
-            <a:ext cx="3732480" cy="493920"/>
+            <a:ext cx="3731760" cy="493200"/>
           </a:xfrm>
           <a:prstGeom prst="rect">
             <a:avLst/>
@@ -13818,7 +13818,7 @@
         <p:spPr>
           <a:xfrm>
             <a:off x="8153280" y="3571920"/>
-            <a:ext cx="3656160" cy="7920"/>
+            <a:ext cx="3655440" cy="7200"/>
           </a:xfrm>
           <a:custGeom>
             <a:avLst/>
@@ -13869,7 +13869,7 @@
         <p:spPr>
           <a:xfrm>
             <a:off x="8182080" y="3767040"/>
-            <a:ext cx="227160" cy="227160"/>
+            <a:ext cx="226440" cy="226440"/>
           </a:xfrm>
           <a:custGeom>
             <a:avLst/>
@@ -14108,7 +14108,7 @@
         <p:spPr>
           <a:xfrm>
             <a:off x="8153280" y="4110120"/>
-            <a:ext cx="3751560" cy="265320"/>
+            <a:ext cx="3750840" cy="264600"/>
           </a:xfrm>
           <a:prstGeom prst="rect">
             <a:avLst/>
@@ -14160,7 +14160,7 @@
         <p:spPr>
           <a:xfrm>
             <a:off x="8153280" y="4529160"/>
-            <a:ext cx="3732480" cy="493920"/>
+            <a:ext cx="3731760" cy="493200"/>
           </a:xfrm>
           <a:prstGeom prst="rect">
             <a:avLst/>
@@ -14212,7 +14212,7 @@
         <p:spPr>
           <a:xfrm>
             <a:off x="380880" y="6091200"/>
-            <a:ext cx="11428560" cy="7920"/>
+            <a:ext cx="11427840" cy="7200"/>
           </a:xfrm>
           <a:custGeom>
             <a:avLst/>
@@ -14263,7 +14263,7 @@
         <p:spPr>
           <a:xfrm>
             <a:off x="399960" y="6286680"/>
-            <a:ext cx="150840" cy="150840"/>
+            <a:ext cx="150120" cy="150120"/>
           </a:xfrm>
           <a:custGeom>
             <a:avLst/>
@@ -14440,7 +14440,7 @@
         <p:spPr>
           <a:xfrm>
             <a:off x="628560" y="6248520"/>
-            <a:ext cx="11257200" cy="227160"/>
+            <a:ext cx="11256480" cy="226440"/>
           </a:xfrm>
           <a:prstGeom prst="rect">
             <a:avLst/>
@@ -14539,7 +14539,7 @@
         <p:spPr>
           <a:xfrm>
             <a:off x="380880" y="380880"/>
-            <a:ext cx="608040" cy="17640"/>
+            <a:ext cx="607320" cy="16920"/>
           </a:xfrm>
           <a:custGeom>
             <a:avLst/>
@@ -14590,7 +14590,7 @@
         <p:spPr>
           <a:xfrm>
             <a:off x="380880" y="628560"/>
-            <a:ext cx="11495160" cy="189000"/>
+            <a:ext cx="11494440" cy="188280"/>
           </a:xfrm>
           <a:prstGeom prst="rect">
             <a:avLst/>
@@ -14618,7 +14618,7 @@
               <a:buNone/>
             </a:pPr>
             <a:r>
-              <a:rPr b="0" lang="en-US" sz="1050" spc="304" strike="noStrike">
+              <a:rPr b="0" lang="en-US" sz="1050" spc="299" strike="noStrike">
                 <a:solidFill>
                   <a:srgbClr val="86868b"/>
                 </a:solidFill>
@@ -14642,7 +14642,7 @@
         <p:spPr>
           <a:xfrm>
             <a:off x="380880" y="971640"/>
-            <a:ext cx="11714400" cy="570240"/>
+            <a:ext cx="11713680" cy="569520"/>
           </a:xfrm>
           <a:prstGeom prst="rect">
             <a:avLst/>
@@ -14694,7 +14694,7 @@
         <p:spPr>
           <a:xfrm>
             <a:off x="385920" y="2714760"/>
-            <a:ext cx="370080" cy="370080"/>
+            <a:ext cx="369360" cy="369360"/>
           </a:xfrm>
           <a:custGeom>
             <a:avLst/>
@@ -14746,7 +14746,7 @@
         <p:spPr>
           <a:xfrm>
             <a:off x="338040" y="2709720"/>
-            <a:ext cx="446400" cy="360360"/>
+            <a:ext cx="445680" cy="359640"/>
           </a:xfrm>
           <a:prstGeom prst="rect">
             <a:avLst/>
@@ -14798,7 +14798,7 @@
         <p:spPr>
           <a:xfrm>
             <a:off x="914400" y="2709720"/>
-            <a:ext cx="5046840" cy="265320"/>
+            <a:ext cx="5046120" cy="264600"/>
           </a:xfrm>
           <a:prstGeom prst="rect">
             <a:avLst/>
@@ -14850,7 +14850,7 @@
         <p:spPr>
           <a:xfrm>
             <a:off x="914400" y="3052800"/>
-            <a:ext cx="5027760" cy="493920"/>
+            <a:ext cx="5027040" cy="493200"/>
           </a:xfrm>
           <a:prstGeom prst="rect">
             <a:avLst/>
@@ -14922,7 +14922,7 @@
         <p:spPr>
           <a:xfrm>
             <a:off x="6329520" y="2714760"/>
-            <a:ext cx="370080" cy="370080"/>
+            <a:ext cx="369360" cy="369360"/>
           </a:xfrm>
           <a:custGeom>
             <a:avLst/>
@@ -14974,7 +14974,7 @@
         <p:spPr>
           <a:xfrm>
             <a:off x="6281640" y="2709720"/>
-            <a:ext cx="446400" cy="360360"/>
+            <a:ext cx="445680" cy="359640"/>
           </a:xfrm>
           <a:prstGeom prst="rect">
             <a:avLst/>
@@ -15026,7 +15026,7 @@
         <p:spPr>
           <a:xfrm>
             <a:off x="6858000" y="2709720"/>
-            <a:ext cx="5046840" cy="265320"/>
+            <a:ext cx="5046120" cy="264600"/>
           </a:xfrm>
           <a:prstGeom prst="rect">
             <a:avLst/>
@@ -15078,7 +15078,7 @@
         <p:spPr>
           <a:xfrm>
             <a:off x="6858000" y="3052800"/>
-            <a:ext cx="5027760" cy="493920"/>
+            <a:ext cx="5027040" cy="493200"/>
           </a:xfrm>
           <a:prstGeom prst="rect">
             <a:avLst/>
@@ -15150,7 +15150,7 @@
         <p:spPr>
           <a:xfrm>
             <a:off x="385920" y="3781440"/>
-            <a:ext cx="370080" cy="370080"/>
+            <a:ext cx="369360" cy="369360"/>
           </a:xfrm>
           <a:custGeom>
             <a:avLst/>
@@ -15202,7 +15202,7 @@
         <p:spPr>
           <a:xfrm>
             <a:off x="338040" y="3776760"/>
-            <a:ext cx="446400" cy="360360"/>
+            <a:ext cx="445680" cy="359640"/>
           </a:xfrm>
           <a:prstGeom prst="rect">
             <a:avLst/>
@@ -15254,7 +15254,7 @@
         <p:spPr>
           <a:xfrm>
             <a:off x="914400" y="3776760"/>
-            <a:ext cx="5046840" cy="265320"/>
+            <a:ext cx="5046120" cy="264600"/>
           </a:xfrm>
           <a:prstGeom prst="rect">
             <a:avLst/>
@@ -15306,7 +15306,7 @@
         <p:spPr>
           <a:xfrm>
             <a:off x="914400" y="4119480"/>
-            <a:ext cx="5027760" cy="493920"/>
+            <a:ext cx="5027040" cy="493200"/>
           </a:xfrm>
           <a:prstGeom prst="rect">
             <a:avLst/>
@@ -15398,7 +15398,7 @@
         <p:spPr>
           <a:xfrm>
             <a:off x="6329520" y="3781440"/>
-            <a:ext cx="370080" cy="370080"/>
+            <a:ext cx="369360" cy="369360"/>
           </a:xfrm>
           <a:custGeom>
             <a:avLst/>
@@ -15450,7 +15450,7 @@
         <p:spPr>
           <a:xfrm>
             <a:off x="6281640" y="3776760"/>
-            <a:ext cx="446400" cy="360360"/>
+            <a:ext cx="445680" cy="359640"/>
           </a:xfrm>
           <a:prstGeom prst="rect">
             <a:avLst/>
@@ -15502,7 +15502,7 @@
         <p:spPr>
           <a:xfrm>
             <a:off x="6858000" y="3776760"/>
-            <a:ext cx="5046840" cy="265320"/>
+            <a:ext cx="5046120" cy="264600"/>
           </a:xfrm>
           <a:prstGeom prst="rect">
             <a:avLst/>
@@ -15554,7 +15554,7 @@
         <p:spPr>
           <a:xfrm>
             <a:off x="6858000" y="4119480"/>
-            <a:ext cx="5027760" cy="493920"/>
+            <a:ext cx="5027040" cy="493200"/>
           </a:xfrm>
           <a:prstGeom prst="rect">
             <a:avLst/>
@@ -15626,7 +15626,7 @@
         <p:spPr>
           <a:xfrm>
             <a:off x="380880" y="5634000"/>
-            <a:ext cx="11428560" cy="7920"/>
+            <a:ext cx="11427840" cy="7200"/>
           </a:xfrm>
           <a:custGeom>
             <a:avLst/>
@@ -15677,7 +15677,7 @@
         <p:spPr>
           <a:xfrm>
             <a:off x="380880" y="5867280"/>
-            <a:ext cx="7770960" cy="303480"/>
+            <a:ext cx="7770240" cy="302760"/>
           </a:xfrm>
           <a:prstGeom prst="rect">
             <a:avLst/>
@@ -15729,7 +15729,7 @@
         <p:spPr>
           <a:xfrm>
             <a:off x="380880" y="6248520"/>
-            <a:ext cx="7732800" cy="227160"/>
+            <a:ext cx="7732080" cy="226440"/>
           </a:xfrm>
           <a:prstGeom prst="rect">
             <a:avLst/>
@@ -15791,7 +15791,7 @@
         <p:spPr>
           <a:xfrm>
             <a:off x="10064160" y="5981760"/>
-            <a:ext cx="1741680" cy="189000"/>
+            <a:ext cx="1740960" cy="188280"/>
           </a:xfrm>
           <a:prstGeom prst="rect">
             <a:avLst/>
@@ -15843,7 +15843,7 @@
         <p:spPr>
           <a:xfrm>
             <a:off x="10073880" y="6210360"/>
-            <a:ext cx="1731960" cy="150840"/>
+            <a:ext cx="1731240" cy="150120"/>
           </a:xfrm>
           <a:prstGeom prst="rect">
             <a:avLst/>
@@ -15932,7 +15932,7 @@
         <p:spPr>
           <a:xfrm>
             <a:off x="380880" y="380880"/>
-            <a:ext cx="11485800" cy="150840"/>
+            <a:ext cx="11485080" cy="150120"/>
           </a:xfrm>
           <a:prstGeom prst="rect">
             <a:avLst/>
@@ -15960,7 +15960,7 @@
               <a:buNone/>
             </a:pPr>
             <a:r>
-              <a:rPr b="0" lang="en-US" sz="900" spc="259" strike="noStrike">
+              <a:rPr b="0" lang="en-US" sz="900" spc="253" strike="noStrike">
                 <a:solidFill>
                   <a:srgbClr val="86868b"/>
                 </a:solidFill>
@@ -15984,7 +15984,7 @@
         <p:spPr>
           <a:xfrm>
             <a:off x="380880" y="647640"/>
-            <a:ext cx="11657160" cy="455760"/>
+            <a:ext cx="11656440" cy="455040"/>
           </a:xfrm>
           <a:prstGeom prst="rect">
             <a:avLst/>
@@ -16036,7 +16036,7 @@
         <p:spPr>
           <a:xfrm>
             <a:off x="380880" y="1714680"/>
-            <a:ext cx="874800" cy="570240"/>
+            <a:ext cx="874080" cy="569520"/>
           </a:xfrm>
           <a:prstGeom prst="rect">
             <a:avLst/>
@@ -16088,7 +16088,7 @@
         <p:spPr>
           <a:xfrm>
             <a:off x="1202760" y="1790640"/>
-            <a:ext cx="4627800" cy="303480"/>
+            <a:ext cx="4627080" cy="302760"/>
           </a:xfrm>
           <a:prstGeom prst="rect">
             <a:avLst/>
@@ -16140,7 +16140,7 @@
         <p:spPr>
           <a:xfrm>
             <a:off x="1202760" y="2209680"/>
-            <a:ext cx="4589640" cy="493920"/>
+            <a:ext cx="4588920" cy="493200"/>
           </a:xfrm>
           <a:prstGeom prst="rect">
             <a:avLst/>
@@ -16192,7 +16192,7 @@
         <p:spPr>
           <a:xfrm>
             <a:off x="6477120" y="1714680"/>
-            <a:ext cx="979560" cy="570240"/>
+            <a:ext cx="978840" cy="569520"/>
           </a:xfrm>
           <a:prstGeom prst="rect">
             <a:avLst/>
@@ -16244,7 +16244,7 @@
         <p:spPr>
           <a:xfrm>
             <a:off x="7402320" y="1790640"/>
-            <a:ext cx="4523040" cy="303480"/>
+            <a:ext cx="4522320" cy="302760"/>
           </a:xfrm>
           <a:prstGeom prst="rect">
             <a:avLst/>
@@ -16296,7 +16296,7 @@
         <p:spPr>
           <a:xfrm>
             <a:off x="7402320" y="2209680"/>
-            <a:ext cx="4484880" cy="493920"/>
+            <a:ext cx="4484160" cy="493200"/>
           </a:xfrm>
           <a:prstGeom prst="rect">
             <a:avLst/>
@@ -16348,7 +16348,7 @@
         <p:spPr>
           <a:xfrm>
             <a:off x="380880" y="4324320"/>
-            <a:ext cx="989280" cy="570240"/>
+            <a:ext cx="988560" cy="569520"/>
           </a:xfrm>
           <a:prstGeom prst="rect">
             <a:avLst/>
@@ -16400,7 +16400,7 @@
         <p:spPr>
           <a:xfrm>
             <a:off x="1311480" y="4400640"/>
-            <a:ext cx="4513320" cy="303480"/>
+            <a:ext cx="4512600" cy="302760"/>
           </a:xfrm>
           <a:prstGeom prst="rect">
             <a:avLst/>
@@ -16452,7 +16452,7 @@
         <p:spPr>
           <a:xfrm>
             <a:off x="1311480" y="4819680"/>
-            <a:ext cx="4475160" cy="493920"/>
+            <a:ext cx="4474440" cy="493200"/>
           </a:xfrm>
           <a:prstGeom prst="rect">
             <a:avLst/>
@@ -16504,7 +16504,7 @@
         <p:spPr>
           <a:xfrm>
             <a:off x="6477120" y="4324320"/>
-            <a:ext cx="989280" cy="570240"/>
+            <a:ext cx="988560" cy="569520"/>
           </a:xfrm>
           <a:prstGeom prst="rect">
             <a:avLst/>
@@ -16556,7 +16556,7 @@
         <p:spPr>
           <a:xfrm>
             <a:off x="7407000" y="4400640"/>
-            <a:ext cx="4513320" cy="303480"/>
+            <a:ext cx="4512600" cy="302760"/>
           </a:xfrm>
           <a:prstGeom prst="rect">
             <a:avLst/>
@@ -16608,7 +16608,7 @@
         <p:spPr>
           <a:xfrm>
             <a:off x="7407000" y="4819680"/>
-            <a:ext cx="4475160" cy="246240"/>
+            <a:ext cx="4474440" cy="245520"/>
           </a:xfrm>
           <a:prstGeom prst="rect">
             <a:avLst/>
@@ -16697,7 +16697,7 @@
         <p:spPr>
           <a:xfrm>
             <a:off x="380880" y="1665000"/>
-            <a:ext cx="760680" cy="17640"/>
+            <a:ext cx="759960" cy="16920"/>
           </a:xfrm>
           <a:custGeom>
             <a:avLst/>
@@ -16748,7 +16748,7 @@
         <p:spPr>
           <a:xfrm>
             <a:off x="380880" y="1989000"/>
-            <a:ext cx="9514080" cy="189000"/>
+            <a:ext cx="9513360" cy="188280"/>
           </a:xfrm>
           <a:prstGeom prst="rect">
             <a:avLst/>
@@ -16776,7 +16776,7 @@
               <a:buNone/>
             </a:pPr>
             <a:r>
-              <a:rPr b="0" lang="en-US" sz="1050" spc="304" strike="noStrike">
+              <a:rPr b="0" lang="en-US" sz="1050" spc="299" strike="noStrike">
                 <a:solidFill>
                   <a:srgbClr val="86868b"/>
                 </a:solidFill>
@@ -16800,7 +16800,7 @@
         <p:spPr>
           <a:xfrm>
             <a:off x="380880" y="2408040"/>
-            <a:ext cx="9904680" cy="1731960"/>
+            <a:ext cx="9903960" cy="1731240"/>
           </a:xfrm>
           <a:prstGeom prst="rect">
             <a:avLst/>
@@ -16873,7 +16873,7 @@
         <p:spPr>
           <a:xfrm>
             <a:off x="380880" y="4449960"/>
-            <a:ext cx="5599440" cy="741600"/>
+            <a:ext cx="5598720" cy="740880"/>
           </a:xfrm>
           <a:prstGeom prst="rect">
             <a:avLst/>
@@ -16925,7 +16925,7 @@
         <p:spPr>
           <a:xfrm>
             <a:off x="9833760" y="2476440"/>
-            <a:ext cx="2932200" cy="1903680"/>
+            <a:ext cx="2931480" cy="1902960"/>
           </a:xfrm>
           <a:prstGeom prst="rect">
             <a:avLst/>
@@ -17014,7 +17014,7 @@
         <p:spPr>
           <a:xfrm>
             <a:off x="380880" y="380880"/>
-            <a:ext cx="11485800" cy="150840"/>
+            <a:ext cx="11485080" cy="150120"/>
           </a:xfrm>
           <a:prstGeom prst="rect">
             <a:avLst/>
@@ -17042,7 +17042,7 @@
               <a:buNone/>
             </a:pPr>
             <a:r>
-              <a:rPr b="0" lang="en-US" sz="900" spc="259" strike="noStrike">
+              <a:rPr b="0" lang="en-US" sz="900" spc="253" strike="noStrike">
                 <a:solidFill>
                   <a:srgbClr val="86868b"/>
                 </a:solidFill>
@@ -17066,7 +17066,7 @@
         <p:spPr>
           <a:xfrm>
             <a:off x="380880" y="609480"/>
-            <a:ext cx="11599920" cy="379440"/>
+            <a:ext cx="11599200" cy="378720"/>
           </a:xfrm>
           <a:prstGeom prst="rect">
             <a:avLst/>
@@ -17094,19 +17094,17 @@
               <a:buNone/>
             </a:pPr>
             <a:r>
-              <a:rPr b="0" lang="en-US" sz="2700" spc="-1" strike="noStrike">
+              <a:rPr b="0" lang="en-US" sz="2700" spc="-1" strike="noStrike" u="sng">
                 <a:solidFill>
                   <a:srgbClr val="800080"/>
                 </a:solidFill>
+                <a:uFillTx/>
                 <a:latin typeface="Liter"/>
                 <a:ea typeface="Liter"/>
               </a:rPr>
               <a:t>The Surprising Question</a:t>
             </a:r>
             <a:endParaRPr b="0" lang="en-HK" sz="2700" spc="-1" strike="noStrike">
-              <a:solidFill>
-                <a:srgbClr val="800080"/>
-              </a:solidFill>
               <a:latin typeface="Arial"/>
             </a:endParaRPr>
           </a:p>
@@ -17121,7 +17119,7 @@
         <p:spPr>
           <a:xfrm>
             <a:off x="380880" y="1824120"/>
-            <a:ext cx="8647200" cy="741600"/>
+            <a:ext cx="8646480" cy="740880"/>
           </a:xfrm>
           <a:prstGeom prst="rect">
             <a:avLst/>
@@ -17183,7 +17181,7 @@
         <p:spPr>
           <a:xfrm>
             <a:off x="380880" y="3338640"/>
-            <a:ext cx="5484960" cy="17640"/>
+            <a:ext cx="5484240" cy="16920"/>
           </a:xfrm>
           <a:custGeom>
             <a:avLst/>
@@ -17234,7 +17232,7 @@
         <p:spPr>
           <a:xfrm>
             <a:off x="380880" y="3576600"/>
-            <a:ext cx="5551560" cy="189000"/>
+            <a:ext cx="5550840" cy="188280"/>
           </a:xfrm>
           <a:prstGeom prst="rect">
             <a:avLst/>
@@ -17262,7 +17260,7 @@
               <a:buNone/>
             </a:pPr>
             <a:r>
-              <a:rPr b="0" lang="en-US" sz="1050" spc="199" strike="noStrike">
+              <a:rPr b="0" lang="en-US" sz="1050" spc="194" strike="noStrike">
                 <a:solidFill>
                   <a:srgbClr val="86868b"/>
                 </a:solidFill>
@@ -17286,7 +17284,7 @@
         <p:spPr>
           <a:xfrm>
             <a:off x="380880" y="3919680"/>
-            <a:ext cx="1836720" cy="684360"/>
+            <a:ext cx="1836000" cy="683640"/>
           </a:xfrm>
           <a:prstGeom prst="rect">
             <a:avLst/>
@@ -17338,7 +17336,7 @@
         <p:spPr>
           <a:xfrm>
             <a:off x="1991160" y="4286160"/>
-            <a:ext cx="665280" cy="265320"/>
+            <a:ext cx="664560" cy="264600"/>
           </a:xfrm>
           <a:prstGeom prst="rect">
             <a:avLst/>
@@ -17390,7 +17388,7 @@
         <p:spPr>
           <a:xfrm>
             <a:off x="380880" y="4757760"/>
-            <a:ext cx="5561280" cy="246240"/>
+            <a:ext cx="5560560" cy="245520"/>
           </a:xfrm>
           <a:prstGeom prst="rect">
             <a:avLst/>
@@ -17442,7 +17440,7 @@
         <p:spPr>
           <a:xfrm>
             <a:off x="6324480" y="3338640"/>
-            <a:ext cx="5484960" cy="17640"/>
+            <a:ext cx="5484240" cy="16920"/>
           </a:xfrm>
           <a:custGeom>
             <a:avLst/>
@@ -17493,7 +17491,7 @@
         <p:spPr>
           <a:xfrm>
             <a:off x="6324480" y="3576600"/>
-            <a:ext cx="5551560" cy="189000"/>
+            <a:ext cx="5550840" cy="188280"/>
           </a:xfrm>
           <a:prstGeom prst="rect">
             <a:avLst/>
@@ -17521,7 +17519,7 @@
               <a:buNone/>
             </a:pPr>
             <a:r>
-              <a:rPr b="0" lang="en-US" sz="1050" spc="199" strike="noStrike">
+              <a:rPr b="0" lang="en-US" sz="1050" spc="194" strike="noStrike">
                 <a:solidFill>
                   <a:srgbClr val="0071e3"/>
                 </a:solidFill>
@@ -17545,7 +17543,7 @@
         <p:spPr>
           <a:xfrm>
             <a:off x="6324480" y="3919680"/>
-            <a:ext cx="1141560" cy="684360"/>
+            <a:ext cx="1140840" cy="683640"/>
           </a:xfrm>
           <a:prstGeom prst="rect">
             <a:avLst/>
@@ -17597,7 +17595,7 @@
         <p:spPr>
           <a:xfrm>
             <a:off x="7242120" y="4286160"/>
-            <a:ext cx="665280" cy="265320"/>
+            <a:ext cx="664560" cy="264600"/>
           </a:xfrm>
           <a:prstGeom prst="rect">
             <a:avLst/>
@@ -17649,7 +17647,7 @@
         <p:spPr>
           <a:xfrm>
             <a:off x="6324480" y="4757760"/>
-            <a:ext cx="5561280" cy="493920"/>
+            <a:ext cx="5560560" cy="493200"/>
           </a:xfrm>
           <a:prstGeom prst="rect">
             <a:avLst/>
@@ -17721,7 +17719,7 @@
         <p:spPr>
           <a:xfrm>
             <a:off x="380880" y="6014880"/>
-            <a:ext cx="11428560" cy="7920"/>
+            <a:ext cx="11427840" cy="7200"/>
           </a:xfrm>
           <a:custGeom>
             <a:avLst/>
@@ -17772,7 +17770,7 @@
         <p:spPr>
           <a:xfrm>
             <a:off x="419040" y="6286680"/>
-            <a:ext cx="113040" cy="150840"/>
+            <a:ext cx="112320" cy="150120"/>
           </a:xfrm>
           <a:custGeom>
             <a:avLst/>
@@ -17904,7 +17902,7 @@
         <p:spPr>
           <a:xfrm>
             <a:off x="628560" y="6248520"/>
-            <a:ext cx="11257200" cy="227160"/>
+            <a:ext cx="11256480" cy="226440"/>
           </a:xfrm>
           <a:prstGeom prst="rect">
             <a:avLst/>
@@ -18003,7 +18001,7 @@
         <p:spPr>
           <a:xfrm>
             <a:off x="380880" y="380880"/>
-            <a:ext cx="11485800" cy="150840"/>
+            <a:ext cx="11485080" cy="150120"/>
           </a:xfrm>
           <a:prstGeom prst="rect">
             <a:avLst/>
@@ -18031,7 +18029,7 @@
               <a:buNone/>
             </a:pPr>
             <a:r>
-              <a:rPr b="0" lang="en-US" sz="900" spc="259" strike="noStrike">
+              <a:rPr b="0" lang="en-US" sz="900" spc="253" strike="noStrike">
                 <a:solidFill>
                   <a:srgbClr val="86868b"/>
                 </a:solidFill>
@@ -18055,7 +18053,7 @@
         <p:spPr>
           <a:xfrm>
             <a:off x="380880" y="609480"/>
-            <a:ext cx="11599920" cy="379440"/>
+            <a:ext cx="11599200" cy="378720"/>
           </a:xfrm>
           <a:prstGeom prst="rect">
             <a:avLst/>
@@ -18107,7 +18105,7 @@
         <p:spPr>
           <a:xfrm>
             <a:off x="380880" y="1219320"/>
-            <a:ext cx="6113520" cy="5256360"/>
+            <a:ext cx="6112800" cy="5255640"/>
           </a:xfrm>
           <a:prstGeom prst="roundRect">
             <a:avLst>
@@ -18139,7 +18137,7 @@
         <p:spPr>
           <a:xfrm>
             <a:off x="6814080" y="1504800"/>
-            <a:ext cx="17640" cy="989280"/>
+            <a:ext cx="16920" cy="988560"/>
           </a:xfrm>
           <a:custGeom>
             <a:avLst/>
@@ -18190,7 +18188,7 @@
         <p:spPr>
           <a:xfrm>
             <a:off x="7014240" y="1504800"/>
-            <a:ext cx="570240" cy="379440"/>
+            <a:ext cx="569520" cy="378720"/>
           </a:xfrm>
           <a:prstGeom prst="rect">
             <a:avLst/>
@@ -18242,7 +18240,7 @@
         <p:spPr>
           <a:xfrm>
             <a:off x="7530120" y="1614600"/>
-            <a:ext cx="598680" cy="265320"/>
+            <a:ext cx="597960" cy="264600"/>
           </a:xfrm>
           <a:prstGeom prst="rect">
             <a:avLst/>
@@ -18294,7 +18292,7 @@
         <p:spPr>
           <a:xfrm>
             <a:off x="7014240" y="1924200"/>
-            <a:ext cx="4942080" cy="341640"/>
+            <a:ext cx="4941360" cy="340920"/>
           </a:xfrm>
           <a:prstGeom prst="rect">
             <a:avLst/>
@@ -18346,7 +18344,7 @@
         <p:spPr>
           <a:xfrm>
             <a:off x="7014240" y="2305080"/>
-            <a:ext cx="4865760" cy="189000"/>
+            <a:ext cx="4865040" cy="188280"/>
           </a:xfrm>
           <a:prstGeom prst="rect">
             <a:avLst/>
@@ -18398,7 +18396,7 @@
         <p:spPr>
           <a:xfrm>
             <a:off x="6814080" y="2647800"/>
-            <a:ext cx="17640" cy="722520"/>
+            <a:ext cx="16920" cy="721800"/>
           </a:xfrm>
           <a:custGeom>
             <a:avLst/>
@@ -18449,7 +18447,7 @@
         <p:spPr>
           <a:xfrm>
             <a:off x="7014240" y="2647800"/>
-            <a:ext cx="493920" cy="341640"/>
+            <a:ext cx="493200" cy="340920"/>
           </a:xfrm>
           <a:prstGeom prst="rect">
             <a:avLst/>
@@ -18501,7 +18499,7 @@
         <p:spPr>
           <a:xfrm>
             <a:off x="7479360" y="2747880"/>
-            <a:ext cx="532080" cy="227160"/>
+            <a:ext cx="531360" cy="226440"/>
           </a:xfrm>
           <a:prstGeom prst="rect">
             <a:avLst/>
@@ -18553,7 +18551,7 @@
         <p:spPr>
           <a:xfrm>
             <a:off x="7014240" y="3029040"/>
-            <a:ext cx="4913640" cy="303480"/>
+            <a:ext cx="4912920" cy="302760"/>
           </a:xfrm>
           <a:prstGeom prst="rect">
             <a:avLst/>
@@ -18605,7 +18603,7 @@
         <p:spPr>
           <a:xfrm>
             <a:off x="6814080" y="3524400"/>
-            <a:ext cx="17640" cy="722520"/>
+            <a:ext cx="16920" cy="721800"/>
           </a:xfrm>
           <a:custGeom>
             <a:avLst/>
@@ -18656,7 +18654,7 @@
         <p:spPr>
           <a:xfrm>
             <a:off x="7014240" y="3524400"/>
-            <a:ext cx="484200" cy="341640"/>
+            <a:ext cx="483480" cy="340920"/>
           </a:xfrm>
           <a:prstGeom prst="rect">
             <a:avLst/>
@@ -18708,7 +18706,7 @@
         <p:spPr>
           <a:xfrm>
             <a:off x="7475400" y="3624120"/>
-            <a:ext cx="532080" cy="227160"/>
+            <a:ext cx="531360" cy="226440"/>
           </a:xfrm>
           <a:prstGeom prst="rect">
             <a:avLst/>
@@ -18760,7 +18758,7 @@
         <p:spPr>
           <a:xfrm>
             <a:off x="7014240" y="3905280"/>
-            <a:ext cx="4913640" cy="303480"/>
+            <a:ext cx="4912920" cy="302760"/>
           </a:xfrm>
           <a:prstGeom prst="rect">
             <a:avLst/>
@@ -18812,7 +18810,7 @@
         <p:spPr>
           <a:xfrm>
             <a:off x="6814080" y="4400640"/>
-            <a:ext cx="17640" cy="722520"/>
+            <a:ext cx="16920" cy="721800"/>
           </a:xfrm>
           <a:custGeom>
             <a:avLst/>
@@ -18863,7 +18861,7 @@
         <p:spPr>
           <a:xfrm>
             <a:off x="7014240" y="4400640"/>
-            <a:ext cx="493920" cy="341640"/>
+            <a:ext cx="493200" cy="340920"/>
           </a:xfrm>
           <a:prstGeom prst="rect">
             <a:avLst/>
@@ -18915,7 +18913,7 @@
         <p:spPr>
           <a:xfrm>
             <a:off x="7481880" y="4500720"/>
-            <a:ext cx="532080" cy="227160"/>
+            <a:ext cx="531360" cy="226440"/>
           </a:xfrm>
           <a:prstGeom prst="rect">
             <a:avLst/>
@@ -18967,7 +18965,7 @@
         <p:spPr>
           <a:xfrm>
             <a:off x="7014240" y="4781520"/>
-            <a:ext cx="4913640" cy="303480"/>
+            <a:ext cx="4912920" cy="302760"/>
           </a:xfrm>
           <a:prstGeom prst="rect">
             <a:avLst/>
@@ -19019,7 +19017,7 @@
         <p:spPr>
           <a:xfrm>
             <a:off x="6814080" y="5276880"/>
-            <a:ext cx="17640" cy="912960"/>
+            <a:ext cx="16920" cy="912240"/>
           </a:xfrm>
           <a:custGeom>
             <a:avLst/>
@@ -19070,7 +19068,7 @@
         <p:spPr>
           <a:xfrm>
             <a:off x="7014240" y="5276880"/>
-            <a:ext cx="455760" cy="341640"/>
+            <a:ext cx="455040" cy="340920"/>
           </a:xfrm>
           <a:prstGeom prst="rect">
             <a:avLst/>
@@ -19122,7 +19120,7 @@
         <p:spPr>
           <a:xfrm>
             <a:off x="7439400" y="5376960"/>
-            <a:ext cx="532080" cy="227160"/>
+            <a:ext cx="531360" cy="226440"/>
           </a:xfrm>
           <a:prstGeom prst="rect">
             <a:avLst/>
@@ -19174,7 +19172,7 @@
         <p:spPr>
           <a:xfrm>
             <a:off x="7014240" y="5657760"/>
-            <a:ext cx="4913640" cy="303480"/>
+            <a:ext cx="4912920" cy="302760"/>
           </a:xfrm>
           <a:prstGeom prst="rect">
             <a:avLst/>
@@ -19226,7 +19224,7 @@
         <p:spPr>
           <a:xfrm>
             <a:off x="7014240" y="6000840"/>
-            <a:ext cx="4865760" cy="189000"/>
+            <a:ext cx="4865040" cy="188280"/>
           </a:xfrm>
           <a:prstGeom prst="rect">
             <a:avLst/>
@@ -19352,7 +19350,7 @@
         <p:spPr>
           <a:xfrm>
             <a:off x="380880" y="1850760"/>
-            <a:ext cx="760680" cy="17640"/>
+            <a:ext cx="759960" cy="16920"/>
           </a:xfrm>
           <a:custGeom>
             <a:avLst/>
@@ -19403,7 +19401,7 @@
         <p:spPr>
           <a:xfrm>
             <a:off x="380880" y="2174760"/>
-            <a:ext cx="9171000" cy="189000"/>
+            <a:ext cx="9170280" cy="188280"/>
           </a:xfrm>
           <a:prstGeom prst="rect">
             <a:avLst/>
@@ -19431,7 +19429,7 @@
               <a:buNone/>
             </a:pPr>
             <a:r>
-              <a:rPr b="0" lang="en-US" sz="1050" spc="304" strike="noStrike">
+              <a:rPr b="0" lang="en-US" sz="1050" spc="299" strike="noStrike">
                 <a:solidFill>
                   <a:srgbClr val="86868b"/>
                 </a:solidFill>
@@ -19455,7 +19453,7 @@
         <p:spPr>
           <a:xfrm>
             <a:off x="380880" y="2593800"/>
-            <a:ext cx="9561600" cy="1731960"/>
+            <a:ext cx="9560880" cy="1731240"/>
           </a:xfrm>
           <a:prstGeom prst="rect">
             <a:avLst/>
@@ -19528,7 +19526,7 @@
         <p:spPr>
           <a:xfrm>
             <a:off x="380880" y="4635720"/>
-            <a:ext cx="5599440" cy="370080"/>
+            <a:ext cx="5598720" cy="369360"/>
           </a:xfrm>
           <a:prstGeom prst="rect">
             <a:avLst/>
@@ -19580,7 +19578,7 @@
         <p:spPr>
           <a:xfrm>
             <a:off x="9488880" y="2476440"/>
-            <a:ext cx="3275280" cy="1903680"/>
+            <a:ext cx="3274560" cy="1902960"/>
           </a:xfrm>
           <a:prstGeom prst="rect">
             <a:avLst/>
@@ -19669,7 +19667,7 @@
         <p:spPr>
           <a:xfrm>
             <a:off x="380880" y="380880"/>
-            <a:ext cx="11485800" cy="150840"/>
+            <a:ext cx="11485080" cy="150120"/>
           </a:xfrm>
           <a:prstGeom prst="rect">
             <a:avLst/>
@@ -19697,7 +19695,7 @@
               <a:buNone/>
             </a:pPr>
             <a:r>
-              <a:rPr b="0" lang="en-US" sz="900" spc="259" strike="noStrike">
+              <a:rPr b="0" lang="en-US" sz="900" spc="253" strike="noStrike">
                 <a:solidFill>
                   <a:srgbClr val="86868b"/>
                 </a:solidFill>
@@ -19721,7 +19719,7 @@
         <p:spPr>
           <a:xfrm>
             <a:off x="380880" y="609480"/>
-            <a:ext cx="11599920" cy="379440"/>
+            <a:ext cx="11599200" cy="378720"/>
           </a:xfrm>
           <a:prstGeom prst="rect">
             <a:avLst/>
@@ -19773,7 +19771,7 @@
         <p:spPr>
           <a:xfrm>
             <a:off x="380880" y="1952640"/>
-            <a:ext cx="8628120" cy="617760"/>
+            <a:ext cx="8627400" cy="617040"/>
           </a:xfrm>
           <a:prstGeom prst="rect">
             <a:avLst/>
@@ -19865,7 +19863,7 @@
         <p:spPr>
           <a:xfrm>
             <a:off x="385920" y="2805120"/>
-            <a:ext cx="4027680" cy="808200"/>
+            <a:ext cx="4026960" cy="807480"/>
           </a:xfrm>
           <a:custGeom>
             <a:avLst/>
@@ -19917,7 +19915,7 @@
         <p:spPr>
           <a:xfrm>
             <a:off x="695160" y="3038400"/>
-            <a:ext cx="3551400" cy="341640"/>
+            <a:ext cx="3550680" cy="340920"/>
           </a:xfrm>
           <a:prstGeom prst="rect">
             <a:avLst/>
@@ -19969,7 +19967,7 @@
         <p:spPr>
           <a:xfrm>
             <a:off x="380880" y="4000680"/>
-            <a:ext cx="5589720" cy="189000"/>
+            <a:ext cx="5589000" cy="188280"/>
           </a:xfrm>
           <a:prstGeom prst="rect">
             <a:avLst/>
@@ -19997,7 +19995,7 @@
               <a:buNone/>
             </a:pPr>
             <a:r>
-              <a:rPr b="0" lang="en-US" sz="1050" spc="199" strike="noStrike">
+              <a:rPr b="0" lang="en-US" sz="1050" spc="194" strike="noStrike">
                 <a:solidFill>
                   <a:srgbClr val="86868b"/>
                 </a:solidFill>
@@ -20021,7 +20019,7 @@
         <p:spPr>
           <a:xfrm>
             <a:off x="380880" y="4343400"/>
-            <a:ext cx="5599440" cy="493920"/>
+            <a:ext cx="5598720" cy="493200"/>
           </a:xfrm>
           <a:prstGeom prst="rect">
             <a:avLst/>
@@ -20073,7 +20071,7 @@
         <p:spPr>
           <a:xfrm>
             <a:off x="380880" y="4991040"/>
-            <a:ext cx="5599440" cy="246240"/>
+            <a:ext cx="5598720" cy="245520"/>
           </a:xfrm>
           <a:prstGeom prst="rect">
             <a:avLst/>
@@ -20125,7 +20123,7 @@
         <p:spPr>
           <a:xfrm>
             <a:off x="6286680" y="4000680"/>
-            <a:ext cx="5589720" cy="189000"/>
+            <a:ext cx="5589000" cy="188280"/>
           </a:xfrm>
           <a:prstGeom prst="rect">
             <a:avLst/>
@@ -20153,7 +20151,7 @@
               <a:buNone/>
             </a:pPr>
             <a:r>
-              <a:rPr b="0" lang="en-US" sz="1050" spc="199" strike="noStrike">
+              <a:rPr b="0" lang="en-US" sz="1050" spc="194" strike="noStrike">
                 <a:solidFill>
                   <a:srgbClr val="86868b"/>
                 </a:solidFill>
@@ -20177,7 +20175,7 @@
         <p:spPr>
           <a:xfrm>
             <a:off x="6286680" y="4343400"/>
-            <a:ext cx="5599440" cy="493920"/>
+            <a:ext cx="5598720" cy="493200"/>
           </a:xfrm>
           <a:prstGeom prst="rect">
             <a:avLst/>
@@ -20229,7 +20227,7 @@
         <p:spPr>
           <a:xfrm>
             <a:off x="6286680" y="4991040"/>
-            <a:ext cx="5599440" cy="246240"/>
+            <a:ext cx="5598720" cy="245520"/>
           </a:xfrm>
           <a:prstGeom prst="rect">
             <a:avLst/>
@@ -20281,7 +20279,7 @@
         <p:spPr>
           <a:xfrm>
             <a:off x="380880" y="6129360"/>
-            <a:ext cx="11428560" cy="7920"/>
+            <a:ext cx="11427840" cy="7200"/>
           </a:xfrm>
           <a:custGeom>
             <a:avLst/>
@@ -20332,7 +20330,7 @@
         <p:spPr>
           <a:xfrm>
             <a:off x="399960" y="6315120"/>
-            <a:ext cx="131760" cy="131760"/>
+            <a:ext cx="131040" cy="131040"/>
           </a:xfrm>
           <a:custGeom>
             <a:avLst/>
@@ -20475,7 +20473,7 @@
         <p:spPr>
           <a:xfrm>
             <a:off x="609480" y="6286680"/>
-            <a:ext cx="11266560" cy="189000"/>
+            <a:ext cx="11265840" cy="188280"/>
           </a:xfrm>
           <a:prstGeom prst="rect">
             <a:avLst/>
@@ -20574,7 +20572,7 @@
         <p:spPr>
           <a:xfrm>
             <a:off x="380880" y="380880"/>
-            <a:ext cx="11485800" cy="150840"/>
+            <a:ext cx="11485080" cy="150120"/>
           </a:xfrm>
           <a:prstGeom prst="rect">
             <a:avLst/>
@@ -20602,7 +20600,7 @@
               <a:buNone/>
             </a:pPr>
             <a:r>
-              <a:rPr b="0" lang="en-US" sz="900" spc="259" strike="noStrike">
+              <a:rPr b="0" lang="en-US" sz="900" spc="253" strike="noStrike">
                 <a:solidFill>
                   <a:srgbClr val="86868b"/>
                 </a:solidFill>
@@ -20626,7 +20624,7 @@
         <p:spPr>
           <a:xfrm>
             <a:off x="380880" y="609480"/>
-            <a:ext cx="11599920" cy="379440"/>
+            <a:ext cx="11599200" cy="378720"/>
           </a:xfrm>
           <a:prstGeom prst="rect">
             <a:avLst/>
@@ -20678,7 +20676,7 @@
         <p:spPr>
           <a:xfrm>
             <a:off x="385920" y="1576440"/>
-            <a:ext cx="446400" cy="446400"/>
+            <a:ext cx="445680" cy="445680"/>
           </a:xfrm>
           <a:custGeom>
             <a:avLst/>
@@ -20730,7 +20728,7 @@
         <p:spPr>
           <a:xfrm>
             <a:off x="333360" y="1571760"/>
-            <a:ext cx="532080" cy="436680"/>
+            <a:ext cx="531360" cy="435960"/>
           </a:xfrm>
           <a:prstGeom prst="rect">
             <a:avLst/>
@@ -20782,7 +20780,7 @@
         <p:spPr>
           <a:xfrm>
             <a:off x="1066680" y="1533600"/>
-            <a:ext cx="10828440" cy="265320"/>
+            <a:ext cx="10827720" cy="264600"/>
           </a:xfrm>
           <a:prstGeom prst="rect">
             <a:avLst/>
@@ -20834,7 +20832,7 @@
         <p:spPr>
           <a:xfrm>
             <a:off x="1066680" y="1838160"/>
-            <a:ext cx="10819080" cy="227160"/>
+            <a:ext cx="10818360" cy="226440"/>
           </a:xfrm>
           <a:prstGeom prst="rect">
             <a:avLst/>
@@ -20896,7 +20894,7 @@
         <p:spPr>
           <a:xfrm>
             <a:off x="385920" y="2262240"/>
-            <a:ext cx="446400" cy="446400"/>
+            <a:ext cx="445680" cy="445680"/>
           </a:xfrm>
           <a:custGeom>
             <a:avLst/>
@@ -20948,7 +20946,7 @@
         <p:spPr>
           <a:xfrm>
             <a:off x="333360" y="2257560"/>
-            <a:ext cx="532080" cy="436680"/>
+            <a:ext cx="531360" cy="435960"/>
           </a:xfrm>
           <a:prstGeom prst="rect">
             <a:avLst/>
@@ -21000,7 +20998,7 @@
         <p:spPr>
           <a:xfrm>
             <a:off x="1066680" y="2219400"/>
-            <a:ext cx="10828440" cy="265320"/>
+            <a:ext cx="10827720" cy="264600"/>
           </a:xfrm>
           <a:prstGeom prst="rect">
             <a:avLst/>
@@ -21052,7 +21050,7 @@
         <p:spPr>
           <a:xfrm>
             <a:off x="1066680" y="2523960"/>
-            <a:ext cx="10819080" cy="227160"/>
+            <a:ext cx="10818360" cy="226440"/>
           </a:xfrm>
           <a:prstGeom prst="rect">
             <a:avLst/>
@@ -21114,7 +21112,7 @@
         <p:spPr>
           <a:xfrm>
             <a:off x="385920" y="2948040"/>
-            <a:ext cx="446400" cy="446400"/>
+            <a:ext cx="445680" cy="445680"/>
           </a:xfrm>
           <a:custGeom>
             <a:avLst/>
@@ -21166,7 +21164,7 @@
         <p:spPr>
           <a:xfrm>
             <a:off x="333360" y="2943360"/>
-            <a:ext cx="532080" cy="436680"/>
+            <a:ext cx="531360" cy="435960"/>
           </a:xfrm>
           <a:prstGeom prst="rect">
             <a:avLst/>
@@ -21218,7 +21216,7 @@
         <p:spPr>
           <a:xfrm>
             <a:off x="1066680" y="2905200"/>
-            <a:ext cx="10828440" cy="265320"/>
+            <a:ext cx="10827720" cy="264600"/>
           </a:xfrm>
           <a:prstGeom prst="rect">
             <a:avLst/>
@@ -21270,7 +21268,7 @@
         <p:spPr>
           <a:xfrm>
             <a:off x="1066680" y="3209760"/>
-            <a:ext cx="10819080" cy="227160"/>
+            <a:ext cx="10818360" cy="226440"/>
           </a:xfrm>
           <a:prstGeom prst="rect">
             <a:avLst/>
@@ -21332,7 +21330,7 @@
         <p:spPr>
           <a:xfrm>
             <a:off x="385920" y="3595680"/>
-            <a:ext cx="446400" cy="446400"/>
+            <a:ext cx="445680" cy="445680"/>
           </a:xfrm>
           <a:custGeom>
             <a:avLst/>
@@ -21384,7 +21382,7 @@
         <p:spPr>
           <a:xfrm>
             <a:off x="333360" y="3591000"/>
-            <a:ext cx="532080" cy="436680"/>
+            <a:ext cx="531360" cy="435960"/>
           </a:xfrm>
           <a:prstGeom prst="rect">
             <a:avLst/>
@@ -21436,7 +21434,7 @@
         <p:spPr>
           <a:xfrm>
             <a:off x="1066680" y="3686040"/>
-            <a:ext cx="10828440" cy="265320"/>
+            <a:ext cx="10827720" cy="264600"/>
           </a:xfrm>
           <a:prstGeom prst="rect">
             <a:avLst/>
@@ -21488,7 +21486,7 @@
         <p:spPr>
           <a:xfrm>
             <a:off x="385920" y="4243320"/>
-            <a:ext cx="446400" cy="446400"/>
+            <a:ext cx="445680" cy="445680"/>
           </a:xfrm>
           <a:custGeom>
             <a:avLst/>
@@ -21540,7 +21538,7 @@
         <p:spPr>
           <a:xfrm>
             <a:off x="333360" y="4238640"/>
-            <a:ext cx="532080" cy="436680"/>
+            <a:ext cx="531360" cy="435960"/>
           </a:xfrm>
           <a:prstGeom prst="rect">
             <a:avLst/>
@@ -21592,7 +21590,7 @@
         <p:spPr>
           <a:xfrm>
             <a:off x="1066680" y="4200480"/>
-            <a:ext cx="10828440" cy="265320"/>
+            <a:ext cx="10827720" cy="264600"/>
           </a:xfrm>
           <a:prstGeom prst="rect">
             <a:avLst/>
@@ -21644,7 +21642,7 @@
         <p:spPr>
           <a:xfrm>
             <a:off x="1066680" y="4505400"/>
-            <a:ext cx="10819080" cy="227160"/>
+            <a:ext cx="10818360" cy="226440"/>
           </a:xfrm>
           <a:prstGeom prst="rect">
             <a:avLst/>
@@ -21706,7 +21704,7 @@
         <p:spPr>
           <a:xfrm>
             <a:off x="380880" y="4971960"/>
-            <a:ext cx="11428560" cy="17640"/>
+            <a:ext cx="11427840" cy="16920"/>
           </a:xfrm>
           <a:custGeom>
             <a:avLst/>
@@ -21757,7 +21755,7 @@
         <p:spPr>
           <a:xfrm>
             <a:off x="380880" y="5210280"/>
-            <a:ext cx="11495160" cy="189000"/>
+            <a:ext cx="11494440" cy="188280"/>
           </a:xfrm>
           <a:prstGeom prst="rect">
             <a:avLst/>
@@ -21785,7 +21783,7 @@
               <a:buNone/>
             </a:pPr>
             <a:r>
-              <a:rPr b="0" lang="en-US" sz="1050" spc="199" strike="noStrike">
+              <a:rPr b="0" lang="en-US" sz="1050" spc="194" strike="noStrike">
                 <a:solidFill>
                   <a:srgbClr val="86868b"/>
                 </a:solidFill>
@@ -21809,7 +21807,7 @@
         <p:spPr>
           <a:xfrm>
             <a:off x="380880" y="5514840"/>
-            <a:ext cx="11523960" cy="265320"/>
+            <a:ext cx="11523240" cy="264600"/>
           </a:xfrm>
           <a:prstGeom prst="rect">
             <a:avLst/>
@@ -21861,7 +21859,7 @@
         <p:spPr>
           <a:xfrm>
             <a:off x="380880" y="5896080"/>
-            <a:ext cx="11514240" cy="265320"/>
+            <a:ext cx="11513520" cy="264600"/>
           </a:xfrm>
           <a:prstGeom prst="rect">
             <a:avLst/>

--- a/assets/libreoffice_impr_njc/456c4488-c4c4-475f-b671-0556dac8696a/The Birthday Paradox.pptx
+++ b/assets/libreoffice_impr_njc/456c4488-c4c4-475f-b671-0556dac8696a/The Birthday Paradox.pptx
@@ -3,28 +3,29 @@
 <p:presentation xmlns:a="http://schemas.openxmlformats.org/drawingml/2006/main" xmlns:p="http://schemas.openxmlformats.org/presentationml/2006/main" xmlns:r="http://schemas.openxmlformats.org/officeDocument/2006/relationships" xmlns:p14="http://schemas.microsoft.com/office/powerpoint/2010/main" xmlns:p15="http://schemas.microsoft.com/office/powerpoint/2012/main" xmlns:mc="http://schemas.openxmlformats.org/markup-compatibility/2006">
   <p:sldMasterIdLst>
     <p:sldMasterId id="2147483648" r:id="rId2"/>
+    <p:sldMasterId id="2147483661" r:id="rId3"/>
   </p:sldMasterIdLst>
   <p:notesMasterIdLst>
-    <p:notesMasterId r:id="rId3"/>
+    <p:notesMasterId r:id="rId4"/>
   </p:notesMasterIdLst>
   <p:sldIdLst>
-    <p:sldId id="256" r:id="rId4"/>
-    <p:sldId id="257" r:id="rId5"/>
-    <p:sldId id="258" r:id="rId6"/>
-    <p:sldId id="259" r:id="rId7"/>
-    <p:sldId id="260" r:id="rId8"/>
-    <p:sldId id="261" r:id="rId9"/>
-    <p:sldId id="262" r:id="rId10"/>
-    <p:sldId id="263" r:id="rId11"/>
-    <p:sldId id="264" r:id="rId12"/>
-    <p:sldId id="265" r:id="rId13"/>
-    <p:sldId id="266" r:id="rId14"/>
-    <p:sldId id="267" r:id="rId15"/>
-    <p:sldId id="268" r:id="rId16"/>
-    <p:sldId id="269" r:id="rId17"/>
-    <p:sldId id="270" r:id="rId18"/>
-    <p:sldId id="271" r:id="rId19"/>
-    <p:sldId id="272" r:id="rId20"/>
+    <p:sldId id="256" r:id="rId5"/>
+    <p:sldId id="257" r:id="rId6"/>
+    <p:sldId id="258" r:id="rId7"/>
+    <p:sldId id="259" r:id="rId8"/>
+    <p:sldId id="260" r:id="rId9"/>
+    <p:sldId id="261" r:id="rId10"/>
+    <p:sldId id="262" r:id="rId11"/>
+    <p:sldId id="263" r:id="rId12"/>
+    <p:sldId id="264" r:id="rId13"/>
+    <p:sldId id="265" r:id="rId14"/>
+    <p:sldId id="266" r:id="rId15"/>
+    <p:sldId id="267" r:id="rId16"/>
+    <p:sldId id="268" r:id="rId17"/>
+    <p:sldId id="269" r:id="rId18"/>
+    <p:sldId id="270" r:id="rId19"/>
+    <p:sldId id="271" r:id="rId20"/>
+    <p:sldId id="272" r:id="rId21"/>
   </p:sldIdLst>
   <p:sldSz cx="12192000" cy="6858000"/>
   <p:notesSz cx="6858000" cy="12192000"/>
@@ -50,7 +51,7 @@
       </p:grpSpPr>
       <p:sp>
         <p:nvSpPr>
-          <p:cNvPr id="38" name="PlaceHolder 1"/>
+          <p:cNvPr id="76" name="PlaceHolder 1"/>
           <p:cNvSpPr>
             <a:spLocks noGrp="1"/>
           </p:cNvSpPr>
@@ -93,7 +94,7 @@
       </p:sp>
       <p:sp>
         <p:nvSpPr>
-          <p:cNvPr id="39" name="PlaceHolder 2"/>
+          <p:cNvPr id="77" name="PlaceHolder 2"/>
           <p:cNvSpPr>
             <a:spLocks noGrp="1"/>
           </p:cNvSpPr>
@@ -133,7 +134,7 @@
       </p:sp>
       <p:sp>
         <p:nvSpPr>
-          <p:cNvPr id="40" name="PlaceHolder 3"/>
+          <p:cNvPr id="78" name="PlaceHolder 3"/>
           <p:cNvSpPr>
             <a:spLocks noGrp="1"/>
           </p:cNvSpPr>
@@ -173,7 +174,7 @@
       </p:sp>
       <p:sp>
         <p:nvSpPr>
-          <p:cNvPr id="41" name="PlaceHolder 4"/>
+          <p:cNvPr id="79" name="PlaceHolder 4"/>
           <p:cNvSpPr>
             <a:spLocks noGrp="1"/>
           </p:cNvSpPr>
@@ -224,7 +225,7 @@
       </p:sp>
       <p:sp>
         <p:nvSpPr>
-          <p:cNvPr id="42" name="PlaceHolder 5"/>
+          <p:cNvPr id="80" name="PlaceHolder 5"/>
           <p:cNvSpPr>
             <a:spLocks noGrp="1"/>
           </p:cNvSpPr>
@@ -271,7 +272,7 @@
       </p:sp>
       <p:sp>
         <p:nvSpPr>
-          <p:cNvPr id="43" name="PlaceHolder 6"/>
+          <p:cNvPr id="81" name="PlaceHolder 6"/>
           <p:cNvSpPr>
             <a:spLocks noGrp="1"/>
           </p:cNvSpPr>
@@ -308,7 +309,7 @@
             <a:pPr algn="r">
               <a:buNone/>
             </a:pPr>
-            <a:fld id="{A6A24918-7986-4F55-A11C-997A54001393}" type="slidenum">
+            <a:fld id="{38533CBB-843D-4ADC-B95E-88F080DD7ACE}" type="slidenum">
               <a:rPr b="0" lang="en-HK" sz="1400" spc="-1" strike="noStrike">
                 <a:latin typeface="Times New Roman"/>
               </a:rPr>
@@ -345,7 +346,7 @@
       </p:grpSpPr>
       <p:sp>
         <p:nvSpPr>
-          <p:cNvPr id="319" name="PlaceHolder 1"/>
+          <p:cNvPr id="357" name="PlaceHolder 1"/>
           <p:cNvSpPr>
             <a:spLocks noGrp="1"/>
           </p:cNvSpPr>
@@ -356,19 +357,19 @@
         <p:spPr>
           <a:xfrm>
             <a:off x="685800" y="1143000"/>
-            <a:ext cx="5484240" cy="3084120"/>
-          </a:xfrm>
-          <a:prstGeom prst="rect">
-            <a:avLst/>
-          </a:prstGeom>
-          <a:ln w="0">
-            <a:noFill/>
-          </a:ln>
-        </p:spPr>
-      </p:sp>
-      <p:sp>
-        <p:nvSpPr>
-          <p:cNvPr id="320" name="PlaceHolder 2"/>
+            <a:ext cx="5482800" cy="3082680"/>
+          </a:xfrm>
+          <a:prstGeom prst="rect">
+            <a:avLst/>
+          </a:prstGeom>
+          <a:ln w="0">
+            <a:noFill/>
+          </a:ln>
+        </p:spPr>
+      </p:sp>
+      <p:sp>
+        <p:nvSpPr>
+          <p:cNvPr id="358" name="PlaceHolder 2"/>
           <p:cNvSpPr>
             <a:spLocks noGrp="1"/>
           </p:cNvSpPr>
@@ -379,7 +380,7 @@
         <p:spPr>
           <a:xfrm>
             <a:off x="685800" y="4400640"/>
-            <a:ext cx="5484240" cy="3598200"/>
+            <a:ext cx="5482800" cy="3596760"/>
           </a:xfrm>
           <a:prstGeom prst="rect">
             <a:avLst/>
@@ -402,7 +403,7 @@
       </p:sp>
       <p:sp>
         <p:nvSpPr>
-          <p:cNvPr id="321" name="PlaceHolder 3"/>
+          <p:cNvPr id="359" name="PlaceHolder 3"/>
           <p:cNvSpPr>
             <a:spLocks noGrp="1"/>
           </p:cNvSpPr>
@@ -413,7 +414,7 @@
         <p:spPr>
           <a:xfrm>
             <a:off x="3884760" y="8685360"/>
-            <a:ext cx="2969640" cy="456480"/>
+            <a:ext cx="2968200" cy="455040"/>
           </a:xfrm>
           <a:prstGeom prst="rect">
             <a:avLst/>
@@ -445,7 +446,7 @@
               </a:lnSpc>
               <a:buNone/>
             </a:pPr>
-            <a:fld id="{36429C06-678C-488D-8CDC-D5E02A6D8B50}" type="slidenum">
+            <a:fld id="{32911630-8458-4EE6-8E0F-58355DC1E4CC}" type="slidenum">
               <a:rPr b="0" lang="en-US" sz="1200" spc="-1" strike="noStrike">
                 <a:latin typeface="Times New Roman"/>
               </a:rPr>
@@ -481,7 +482,7 @@
       </p:grpSpPr>
       <p:sp>
         <p:nvSpPr>
-          <p:cNvPr id="346" name="PlaceHolder 1"/>
+          <p:cNvPr id="384" name="PlaceHolder 1"/>
           <p:cNvSpPr>
             <a:spLocks noGrp="1"/>
           </p:cNvSpPr>
@@ -492,19 +493,19 @@
         <p:spPr>
           <a:xfrm>
             <a:off x="685800" y="1143000"/>
-            <a:ext cx="5484240" cy="3084120"/>
-          </a:xfrm>
-          <a:prstGeom prst="rect">
-            <a:avLst/>
-          </a:prstGeom>
-          <a:ln w="0">
-            <a:noFill/>
-          </a:ln>
-        </p:spPr>
-      </p:sp>
-      <p:sp>
-        <p:nvSpPr>
-          <p:cNvPr id="347" name="PlaceHolder 2"/>
+            <a:ext cx="5482800" cy="3082680"/>
+          </a:xfrm>
+          <a:prstGeom prst="rect">
+            <a:avLst/>
+          </a:prstGeom>
+          <a:ln w="0">
+            <a:noFill/>
+          </a:ln>
+        </p:spPr>
+      </p:sp>
+      <p:sp>
+        <p:nvSpPr>
+          <p:cNvPr id="385" name="PlaceHolder 2"/>
           <p:cNvSpPr>
             <a:spLocks noGrp="1"/>
           </p:cNvSpPr>
@@ -515,7 +516,7 @@
         <p:spPr>
           <a:xfrm>
             <a:off x="685800" y="4400640"/>
-            <a:ext cx="5484240" cy="3598200"/>
+            <a:ext cx="5482800" cy="3596760"/>
           </a:xfrm>
           <a:prstGeom prst="rect">
             <a:avLst/>
@@ -538,7 +539,7 @@
       </p:sp>
       <p:sp>
         <p:nvSpPr>
-          <p:cNvPr id="348" name="PlaceHolder 3"/>
+          <p:cNvPr id="386" name="PlaceHolder 3"/>
           <p:cNvSpPr>
             <a:spLocks noGrp="1"/>
           </p:cNvSpPr>
@@ -549,7 +550,7 @@
         <p:spPr>
           <a:xfrm>
             <a:off x="3884760" y="8685360"/>
-            <a:ext cx="2969640" cy="456480"/>
+            <a:ext cx="2968200" cy="455040"/>
           </a:xfrm>
           <a:prstGeom prst="rect">
             <a:avLst/>
@@ -581,7 +582,7 @@
               </a:lnSpc>
               <a:buNone/>
             </a:pPr>
-            <a:fld id="{36321D6D-6D10-4C74-9CC1-6BDCA5914D4B}" type="slidenum">
+            <a:fld id="{910BC9B2-7FDF-4962-A1D4-89AA9FEFB02D}" type="slidenum">
               <a:rPr b="0" lang="en-US" sz="1200" spc="-1" strike="noStrike">
                 <a:latin typeface="Times New Roman"/>
               </a:rPr>
@@ -617,7 +618,7 @@
       </p:grpSpPr>
       <p:sp>
         <p:nvSpPr>
-          <p:cNvPr id="349" name="PlaceHolder 1"/>
+          <p:cNvPr id="387" name="PlaceHolder 1"/>
           <p:cNvSpPr>
             <a:spLocks noGrp="1"/>
           </p:cNvSpPr>
@@ -628,19 +629,19 @@
         <p:spPr>
           <a:xfrm>
             <a:off x="685800" y="1143000"/>
-            <a:ext cx="5484240" cy="3084120"/>
-          </a:xfrm>
-          <a:prstGeom prst="rect">
-            <a:avLst/>
-          </a:prstGeom>
-          <a:ln w="0">
-            <a:noFill/>
-          </a:ln>
-        </p:spPr>
-      </p:sp>
-      <p:sp>
-        <p:nvSpPr>
-          <p:cNvPr id="350" name="PlaceHolder 2"/>
+            <a:ext cx="5482800" cy="3082680"/>
+          </a:xfrm>
+          <a:prstGeom prst="rect">
+            <a:avLst/>
+          </a:prstGeom>
+          <a:ln w="0">
+            <a:noFill/>
+          </a:ln>
+        </p:spPr>
+      </p:sp>
+      <p:sp>
+        <p:nvSpPr>
+          <p:cNvPr id="388" name="PlaceHolder 2"/>
           <p:cNvSpPr>
             <a:spLocks noGrp="1"/>
           </p:cNvSpPr>
@@ -651,7 +652,7 @@
         <p:spPr>
           <a:xfrm>
             <a:off x="685800" y="4400640"/>
-            <a:ext cx="5484240" cy="3598200"/>
+            <a:ext cx="5482800" cy="3596760"/>
           </a:xfrm>
           <a:prstGeom prst="rect">
             <a:avLst/>
@@ -674,7 +675,7 @@
       </p:sp>
       <p:sp>
         <p:nvSpPr>
-          <p:cNvPr id="351" name="PlaceHolder 3"/>
+          <p:cNvPr id="389" name="PlaceHolder 3"/>
           <p:cNvSpPr>
             <a:spLocks noGrp="1"/>
           </p:cNvSpPr>
@@ -685,7 +686,7 @@
         <p:spPr>
           <a:xfrm>
             <a:off x="3884760" y="8685360"/>
-            <a:ext cx="2969640" cy="456480"/>
+            <a:ext cx="2968200" cy="455040"/>
           </a:xfrm>
           <a:prstGeom prst="rect">
             <a:avLst/>
@@ -717,7 +718,7 @@
               </a:lnSpc>
               <a:buNone/>
             </a:pPr>
-            <a:fld id="{6CE0CFA0-43B8-4B6B-9BCD-2AC6799D0973}" type="slidenum">
+            <a:fld id="{20C6EBC2-25D9-46F4-96A1-2524BBA3ACA6}" type="slidenum">
               <a:rPr b="0" lang="en-US" sz="1200" spc="-1" strike="noStrike">
                 <a:latin typeface="Times New Roman"/>
               </a:rPr>
@@ -753,7 +754,7 @@
       </p:grpSpPr>
       <p:sp>
         <p:nvSpPr>
-          <p:cNvPr id="352" name="PlaceHolder 1"/>
+          <p:cNvPr id="390" name="PlaceHolder 1"/>
           <p:cNvSpPr>
             <a:spLocks noGrp="1"/>
           </p:cNvSpPr>
@@ -764,19 +765,19 @@
         <p:spPr>
           <a:xfrm>
             <a:off x="685800" y="1143000"/>
-            <a:ext cx="5484240" cy="3084120"/>
-          </a:xfrm>
-          <a:prstGeom prst="rect">
-            <a:avLst/>
-          </a:prstGeom>
-          <a:ln w="0">
-            <a:noFill/>
-          </a:ln>
-        </p:spPr>
-      </p:sp>
-      <p:sp>
-        <p:nvSpPr>
-          <p:cNvPr id="353" name="PlaceHolder 2"/>
+            <a:ext cx="5482800" cy="3082680"/>
+          </a:xfrm>
+          <a:prstGeom prst="rect">
+            <a:avLst/>
+          </a:prstGeom>
+          <a:ln w="0">
+            <a:noFill/>
+          </a:ln>
+        </p:spPr>
+      </p:sp>
+      <p:sp>
+        <p:nvSpPr>
+          <p:cNvPr id="391" name="PlaceHolder 2"/>
           <p:cNvSpPr>
             <a:spLocks noGrp="1"/>
           </p:cNvSpPr>
@@ -787,7 +788,7 @@
         <p:spPr>
           <a:xfrm>
             <a:off x="685800" y="4400640"/>
-            <a:ext cx="5484240" cy="3598200"/>
+            <a:ext cx="5482800" cy="3596760"/>
           </a:xfrm>
           <a:prstGeom prst="rect">
             <a:avLst/>
@@ -810,7 +811,7 @@
       </p:sp>
       <p:sp>
         <p:nvSpPr>
-          <p:cNvPr id="354" name="PlaceHolder 3"/>
+          <p:cNvPr id="392" name="PlaceHolder 3"/>
           <p:cNvSpPr>
             <a:spLocks noGrp="1"/>
           </p:cNvSpPr>
@@ -821,7 +822,7 @@
         <p:spPr>
           <a:xfrm>
             <a:off x="3884760" y="8685360"/>
-            <a:ext cx="2969640" cy="456480"/>
+            <a:ext cx="2968200" cy="455040"/>
           </a:xfrm>
           <a:prstGeom prst="rect">
             <a:avLst/>
@@ -853,7 +854,7 @@
               </a:lnSpc>
               <a:buNone/>
             </a:pPr>
-            <a:fld id="{405EDFDF-B29D-48C4-9817-A81618B814DB}" type="slidenum">
+            <a:fld id="{72DA9B6E-BD91-4F56-A0B5-63FB11CB068F}" type="slidenum">
               <a:rPr b="0" lang="en-US" sz="1200" spc="-1" strike="noStrike">
                 <a:latin typeface="Times New Roman"/>
               </a:rPr>
@@ -889,7 +890,7 @@
       </p:grpSpPr>
       <p:sp>
         <p:nvSpPr>
-          <p:cNvPr id="355" name="PlaceHolder 1"/>
+          <p:cNvPr id="393" name="PlaceHolder 1"/>
           <p:cNvSpPr>
             <a:spLocks noGrp="1"/>
           </p:cNvSpPr>
@@ -900,19 +901,19 @@
         <p:spPr>
           <a:xfrm>
             <a:off x="685800" y="1143000"/>
-            <a:ext cx="5484240" cy="3084120"/>
-          </a:xfrm>
-          <a:prstGeom prst="rect">
-            <a:avLst/>
-          </a:prstGeom>
-          <a:ln w="0">
-            <a:noFill/>
-          </a:ln>
-        </p:spPr>
-      </p:sp>
-      <p:sp>
-        <p:nvSpPr>
-          <p:cNvPr id="356" name="PlaceHolder 2"/>
+            <a:ext cx="5482800" cy="3082680"/>
+          </a:xfrm>
+          <a:prstGeom prst="rect">
+            <a:avLst/>
+          </a:prstGeom>
+          <a:ln w="0">
+            <a:noFill/>
+          </a:ln>
+        </p:spPr>
+      </p:sp>
+      <p:sp>
+        <p:nvSpPr>
+          <p:cNvPr id="394" name="PlaceHolder 2"/>
           <p:cNvSpPr>
             <a:spLocks noGrp="1"/>
           </p:cNvSpPr>
@@ -923,7 +924,7 @@
         <p:spPr>
           <a:xfrm>
             <a:off x="685800" y="4400640"/>
-            <a:ext cx="5484240" cy="3598200"/>
+            <a:ext cx="5482800" cy="3596760"/>
           </a:xfrm>
           <a:prstGeom prst="rect">
             <a:avLst/>
@@ -946,7 +947,7 @@
       </p:sp>
       <p:sp>
         <p:nvSpPr>
-          <p:cNvPr id="357" name="PlaceHolder 3"/>
+          <p:cNvPr id="395" name="PlaceHolder 3"/>
           <p:cNvSpPr>
             <a:spLocks noGrp="1"/>
           </p:cNvSpPr>
@@ -957,7 +958,7 @@
         <p:spPr>
           <a:xfrm>
             <a:off x="3884760" y="8685360"/>
-            <a:ext cx="2969640" cy="456480"/>
+            <a:ext cx="2968200" cy="455040"/>
           </a:xfrm>
           <a:prstGeom prst="rect">
             <a:avLst/>
@@ -989,7 +990,7 @@
               </a:lnSpc>
               <a:buNone/>
             </a:pPr>
-            <a:fld id="{DF135C19-BDA3-49CD-A246-125601A9558E}" type="slidenum">
+            <a:fld id="{F62250D4-61DE-4B1D-9D48-B6E864180A0A}" type="slidenum">
               <a:rPr b="0" lang="en-US" sz="1200" spc="-1" strike="noStrike">
                 <a:latin typeface="Times New Roman"/>
               </a:rPr>
@@ -1025,7 +1026,7 @@
       </p:grpSpPr>
       <p:sp>
         <p:nvSpPr>
-          <p:cNvPr id="358" name="PlaceHolder 1"/>
+          <p:cNvPr id="396" name="PlaceHolder 1"/>
           <p:cNvSpPr>
             <a:spLocks noGrp="1"/>
           </p:cNvSpPr>
@@ -1036,19 +1037,19 @@
         <p:spPr>
           <a:xfrm>
             <a:off x="685800" y="1143000"/>
-            <a:ext cx="5484240" cy="3084120"/>
-          </a:xfrm>
-          <a:prstGeom prst="rect">
-            <a:avLst/>
-          </a:prstGeom>
-          <a:ln w="0">
-            <a:noFill/>
-          </a:ln>
-        </p:spPr>
-      </p:sp>
-      <p:sp>
-        <p:nvSpPr>
-          <p:cNvPr id="359" name="PlaceHolder 2"/>
+            <a:ext cx="5482800" cy="3082680"/>
+          </a:xfrm>
+          <a:prstGeom prst="rect">
+            <a:avLst/>
+          </a:prstGeom>
+          <a:ln w="0">
+            <a:noFill/>
+          </a:ln>
+        </p:spPr>
+      </p:sp>
+      <p:sp>
+        <p:nvSpPr>
+          <p:cNvPr id="397" name="PlaceHolder 2"/>
           <p:cNvSpPr>
             <a:spLocks noGrp="1"/>
           </p:cNvSpPr>
@@ -1059,7 +1060,7 @@
         <p:spPr>
           <a:xfrm>
             <a:off x="685800" y="4400640"/>
-            <a:ext cx="5484240" cy="3598200"/>
+            <a:ext cx="5482800" cy="3596760"/>
           </a:xfrm>
           <a:prstGeom prst="rect">
             <a:avLst/>
@@ -1082,7 +1083,7 @@
       </p:sp>
       <p:sp>
         <p:nvSpPr>
-          <p:cNvPr id="360" name="PlaceHolder 3"/>
+          <p:cNvPr id="398" name="PlaceHolder 3"/>
           <p:cNvSpPr>
             <a:spLocks noGrp="1"/>
           </p:cNvSpPr>
@@ -1093,7 +1094,7 @@
         <p:spPr>
           <a:xfrm>
             <a:off x="3884760" y="8685360"/>
-            <a:ext cx="2969640" cy="456480"/>
+            <a:ext cx="2968200" cy="455040"/>
           </a:xfrm>
           <a:prstGeom prst="rect">
             <a:avLst/>
@@ -1125,7 +1126,7 @@
               </a:lnSpc>
               <a:buNone/>
             </a:pPr>
-            <a:fld id="{29D4EA8A-4714-41D0-A32D-DDBA37B65660}" type="slidenum">
+            <a:fld id="{E59C90D3-5539-4D55-B014-C4FB002A2EF8}" type="slidenum">
               <a:rPr b="0" lang="en-US" sz="1200" spc="-1" strike="noStrike">
                 <a:latin typeface="Times New Roman"/>
               </a:rPr>
@@ -1161,7 +1162,7 @@
       </p:grpSpPr>
       <p:sp>
         <p:nvSpPr>
-          <p:cNvPr id="361" name="PlaceHolder 1"/>
+          <p:cNvPr id="399" name="PlaceHolder 1"/>
           <p:cNvSpPr>
             <a:spLocks noGrp="1"/>
           </p:cNvSpPr>
@@ -1172,19 +1173,19 @@
         <p:spPr>
           <a:xfrm>
             <a:off x="685800" y="1143000"/>
-            <a:ext cx="5484240" cy="3084120"/>
-          </a:xfrm>
-          <a:prstGeom prst="rect">
-            <a:avLst/>
-          </a:prstGeom>
-          <a:ln w="0">
-            <a:noFill/>
-          </a:ln>
-        </p:spPr>
-      </p:sp>
-      <p:sp>
-        <p:nvSpPr>
-          <p:cNvPr id="362" name="PlaceHolder 2"/>
+            <a:ext cx="5482800" cy="3082680"/>
+          </a:xfrm>
+          <a:prstGeom prst="rect">
+            <a:avLst/>
+          </a:prstGeom>
+          <a:ln w="0">
+            <a:noFill/>
+          </a:ln>
+        </p:spPr>
+      </p:sp>
+      <p:sp>
+        <p:nvSpPr>
+          <p:cNvPr id="400" name="PlaceHolder 2"/>
           <p:cNvSpPr>
             <a:spLocks noGrp="1"/>
           </p:cNvSpPr>
@@ -1195,7 +1196,7 @@
         <p:spPr>
           <a:xfrm>
             <a:off x="685800" y="4400640"/>
-            <a:ext cx="5484240" cy="3598200"/>
+            <a:ext cx="5482800" cy="3596760"/>
           </a:xfrm>
           <a:prstGeom prst="rect">
             <a:avLst/>
@@ -1218,7 +1219,7 @@
       </p:sp>
       <p:sp>
         <p:nvSpPr>
-          <p:cNvPr id="363" name="PlaceHolder 3"/>
+          <p:cNvPr id="401" name="PlaceHolder 3"/>
           <p:cNvSpPr>
             <a:spLocks noGrp="1"/>
           </p:cNvSpPr>
@@ -1229,7 +1230,7 @@
         <p:spPr>
           <a:xfrm>
             <a:off x="3884760" y="8685360"/>
-            <a:ext cx="2969640" cy="456480"/>
+            <a:ext cx="2968200" cy="455040"/>
           </a:xfrm>
           <a:prstGeom prst="rect">
             <a:avLst/>
@@ -1261,7 +1262,7 @@
               </a:lnSpc>
               <a:buNone/>
             </a:pPr>
-            <a:fld id="{DC7C3E45-607E-4712-A732-63DAF805FDED}" type="slidenum">
+            <a:fld id="{8817103B-80B6-4EE8-9AA4-A6EB3313AB0E}" type="slidenum">
               <a:rPr b="0" lang="en-US" sz="1200" spc="-1" strike="noStrike">
                 <a:latin typeface="Times New Roman"/>
               </a:rPr>
@@ -1297,7 +1298,7 @@
       </p:grpSpPr>
       <p:sp>
         <p:nvSpPr>
-          <p:cNvPr id="364" name="PlaceHolder 1"/>
+          <p:cNvPr id="402" name="PlaceHolder 1"/>
           <p:cNvSpPr>
             <a:spLocks noGrp="1"/>
           </p:cNvSpPr>
@@ -1308,19 +1309,19 @@
         <p:spPr>
           <a:xfrm>
             <a:off x="685800" y="1143000"/>
-            <a:ext cx="5484240" cy="3084120"/>
-          </a:xfrm>
-          <a:prstGeom prst="rect">
-            <a:avLst/>
-          </a:prstGeom>
-          <a:ln w="0">
-            <a:noFill/>
-          </a:ln>
-        </p:spPr>
-      </p:sp>
-      <p:sp>
-        <p:nvSpPr>
-          <p:cNvPr id="365" name="PlaceHolder 2"/>
+            <a:ext cx="5482800" cy="3082680"/>
+          </a:xfrm>
+          <a:prstGeom prst="rect">
+            <a:avLst/>
+          </a:prstGeom>
+          <a:ln w="0">
+            <a:noFill/>
+          </a:ln>
+        </p:spPr>
+      </p:sp>
+      <p:sp>
+        <p:nvSpPr>
+          <p:cNvPr id="403" name="PlaceHolder 2"/>
           <p:cNvSpPr>
             <a:spLocks noGrp="1"/>
           </p:cNvSpPr>
@@ -1331,7 +1332,7 @@
         <p:spPr>
           <a:xfrm>
             <a:off x="685800" y="4400640"/>
-            <a:ext cx="5484240" cy="3598200"/>
+            <a:ext cx="5482800" cy="3596760"/>
           </a:xfrm>
           <a:prstGeom prst="rect">
             <a:avLst/>
@@ -1354,7 +1355,7 @@
       </p:sp>
       <p:sp>
         <p:nvSpPr>
-          <p:cNvPr id="366" name="PlaceHolder 3"/>
+          <p:cNvPr id="404" name="PlaceHolder 3"/>
           <p:cNvSpPr>
             <a:spLocks noGrp="1"/>
           </p:cNvSpPr>
@@ -1365,7 +1366,7 @@
         <p:spPr>
           <a:xfrm>
             <a:off x="3884760" y="8685360"/>
-            <a:ext cx="2969640" cy="456480"/>
+            <a:ext cx="2968200" cy="455040"/>
           </a:xfrm>
           <a:prstGeom prst="rect">
             <a:avLst/>
@@ -1397,7 +1398,7 @@
               </a:lnSpc>
               <a:buNone/>
             </a:pPr>
-            <a:fld id="{C35DD1DA-FCCC-425D-A818-493D9F8E48D6}" type="slidenum">
+            <a:fld id="{C74071FC-DB68-4405-8599-6EF57BBEA179}" type="slidenum">
               <a:rPr b="0" lang="en-US" sz="1200" spc="-1" strike="noStrike">
                 <a:latin typeface="Times New Roman"/>
               </a:rPr>
@@ -1433,7 +1434,7 @@
       </p:grpSpPr>
       <p:sp>
         <p:nvSpPr>
-          <p:cNvPr id="367" name="PlaceHolder 1"/>
+          <p:cNvPr id="405" name="PlaceHolder 1"/>
           <p:cNvSpPr>
             <a:spLocks noGrp="1"/>
           </p:cNvSpPr>
@@ -1444,19 +1445,19 @@
         <p:spPr>
           <a:xfrm>
             <a:off x="685800" y="1143000"/>
-            <a:ext cx="5484240" cy="3084120"/>
-          </a:xfrm>
-          <a:prstGeom prst="rect">
-            <a:avLst/>
-          </a:prstGeom>
-          <a:ln w="0">
-            <a:noFill/>
-          </a:ln>
-        </p:spPr>
-      </p:sp>
-      <p:sp>
-        <p:nvSpPr>
-          <p:cNvPr id="368" name="PlaceHolder 2"/>
+            <a:ext cx="5482800" cy="3082680"/>
+          </a:xfrm>
+          <a:prstGeom prst="rect">
+            <a:avLst/>
+          </a:prstGeom>
+          <a:ln w="0">
+            <a:noFill/>
+          </a:ln>
+        </p:spPr>
+      </p:sp>
+      <p:sp>
+        <p:nvSpPr>
+          <p:cNvPr id="406" name="PlaceHolder 2"/>
           <p:cNvSpPr>
             <a:spLocks noGrp="1"/>
           </p:cNvSpPr>
@@ -1467,7 +1468,7 @@
         <p:spPr>
           <a:xfrm>
             <a:off x="685800" y="4400640"/>
-            <a:ext cx="5484240" cy="3598200"/>
+            <a:ext cx="5482800" cy="3596760"/>
           </a:xfrm>
           <a:prstGeom prst="rect">
             <a:avLst/>
@@ -1490,7 +1491,7 @@
       </p:sp>
       <p:sp>
         <p:nvSpPr>
-          <p:cNvPr id="369" name="PlaceHolder 3"/>
+          <p:cNvPr id="407" name="PlaceHolder 3"/>
           <p:cNvSpPr>
             <a:spLocks noGrp="1"/>
           </p:cNvSpPr>
@@ -1501,7 +1502,7 @@
         <p:spPr>
           <a:xfrm>
             <a:off x="3884760" y="8685360"/>
-            <a:ext cx="2969640" cy="456480"/>
+            <a:ext cx="2968200" cy="455040"/>
           </a:xfrm>
           <a:prstGeom prst="rect">
             <a:avLst/>
@@ -1533,7 +1534,7 @@
               </a:lnSpc>
               <a:buNone/>
             </a:pPr>
-            <a:fld id="{47A2A298-8B96-4620-A8A0-A09259AED305}" type="slidenum">
+            <a:fld id="{EADDB7F8-7D91-48F3-8EE6-1D94AFBD20CE}" type="slidenum">
               <a:rPr b="0" lang="en-US" sz="1200" spc="-1" strike="noStrike">
                 <a:latin typeface="Times New Roman"/>
               </a:rPr>
@@ -1569,7 +1570,7 @@
       </p:grpSpPr>
       <p:sp>
         <p:nvSpPr>
-          <p:cNvPr id="322" name="PlaceHolder 1"/>
+          <p:cNvPr id="360" name="PlaceHolder 1"/>
           <p:cNvSpPr>
             <a:spLocks noGrp="1"/>
           </p:cNvSpPr>
@@ -1580,19 +1581,19 @@
         <p:spPr>
           <a:xfrm>
             <a:off x="685800" y="1143000"/>
-            <a:ext cx="5484240" cy="3084120"/>
-          </a:xfrm>
-          <a:prstGeom prst="rect">
-            <a:avLst/>
-          </a:prstGeom>
-          <a:ln w="0">
-            <a:noFill/>
-          </a:ln>
-        </p:spPr>
-      </p:sp>
-      <p:sp>
-        <p:nvSpPr>
-          <p:cNvPr id="323" name="PlaceHolder 2"/>
+            <a:ext cx="5482800" cy="3082680"/>
+          </a:xfrm>
+          <a:prstGeom prst="rect">
+            <a:avLst/>
+          </a:prstGeom>
+          <a:ln w="0">
+            <a:noFill/>
+          </a:ln>
+        </p:spPr>
+      </p:sp>
+      <p:sp>
+        <p:nvSpPr>
+          <p:cNvPr id="361" name="PlaceHolder 2"/>
           <p:cNvSpPr>
             <a:spLocks noGrp="1"/>
           </p:cNvSpPr>
@@ -1603,7 +1604,7 @@
         <p:spPr>
           <a:xfrm>
             <a:off x="685800" y="4400640"/>
-            <a:ext cx="5484240" cy="3598200"/>
+            <a:ext cx="5482800" cy="3596760"/>
           </a:xfrm>
           <a:prstGeom prst="rect">
             <a:avLst/>
@@ -1626,7 +1627,7 @@
       </p:sp>
       <p:sp>
         <p:nvSpPr>
-          <p:cNvPr id="324" name="PlaceHolder 3"/>
+          <p:cNvPr id="362" name="PlaceHolder 3"/>
           <p:cNvSpPr>
             <a:spLocks noGrp="1"/>
           </p:cNvSpPr>
@@ -1637,7 +1638,7 @@
         <p:spPr>
           <a:xfrm>
             <a:off x="3884760" y="8685360"/>
-            <a:ext cx="2969640" cy="456480"/>
+            <a:ext cx="2968200" cy="455040"/>
           </a:xfrm>
           <a:prstGeom prst="rect">
             <a:avLst/>
@@ -1669,7 +1670,7 @@
               </a:lnSpc>
               <a:buNone/>
             </a:pPr>
-            <a:fld id="{F31F2D75-521F-4D7D-A98F-5D5C89B82834}" type="slidenum">
+            <a:fld id="{6ED0AABE-7E57-4E49-9EA9-E44B464E71B4}" type="slidenum">
               <a:rPr b="0" lang="en-US" sz="1200" spc="-1" strike="noStrike">
                 <a:latin typeface="Times New Roman"/>
               </a:rPr>
@@ -1705,7 +1706,7 @@
       </p:grpSpPr>
       <p:sp>
         <p:nvSpPr>
-          <p:cNvPr id="325" name="PlaceHolder 1"/>
+          <p:cNvPr id="363" name="PlaceHolder 1"/>
           <p:cNvSpPr>
             <a:spLocks noGrp="1"/>
           </p:cNvSpPr>
@@ -1716,19 +1717,19 @@
         <p:spPr>
           <a:xfrm>
             <a:off x="685800" y="1143000"/>
-            <a:ext cx="5484240" cy="3084120"/>
-          </a:xfrm>
-          <a:prstGeom prst="rect">
-            <a:avLst/>
-          </a:prstGeom>
-          <a:ln w="0">
-            <a:noFill/>
-          </a:ln>
-        </p:spPr>
-      </p:sp>
-      <p:sp>
-        <p:nvSpPr>
-          <p:cNvPr id="326" name="PlaceHolder 2"/>
+            <a:ext cx="5482800" cy="3082680"/>
+          </a:xfrm>
+          <a:prstGeom prst="rect">
+            <a:avLst/>
+          </a:prstGeom>
+          <a:ln w="0">
+            <a:noFill/>
+          </a:ln>
+        </p:spPr>
+      </p:sp>
+      <p:sp>
+        <p:nvSpPr>
+          <p:cNvPr id="364" name="PlaceHolder 2"/>
           <p:cNvSpPr>
             <a:spLocks noGrp="1"/>
           </p:cNvSpPr>
@@ -1739,7 +1740,7 @@
         <p:spPr>
           <a:xfrm>
             <a:off x="685800" y="4400640"/>
-            <a:ext cx="5484240" cy="3598200"/>
+            <a:ext cx="5482800" cy="3596760"/>
           </a:xfrm>
           <a:prstGeom prst="rect">
             <a:avLst/>
@@ -1762,7 +1763,7 @@
       </p:sp>
       <p:sp>
         <p:nvSpPr>
-          <p:cNvPr id="327" name="PlaceHolder 3"/>
+          <p:cNvPr id="365" name="PlaceHolder 3"/>
           <p:cNvSpPr>
             <a:spLocks noGrp="1"/>
           </p:cNvSpPr>
@@ -1773,7 +1774,7 @@
         <p:spPr>
           <a:xfrm>
             <a:off x="3884760" y="8685360"/>
-            <a:ext cx="2969640" cy="456480"/>
+            <a:ext cx="2968200" cy="455040"/>
           </a:xfrm>
           <a:prstGeom prst="rect">
             <a:avLst/>
@@ -1805,7 +1806,7 @@
               </a:lnSpc>
               <a:buNone/>
             </a:pPr>
-            <a:fld id="{3CFA4A5C-B6D9-48DF-B2D9-18A5B69510CD}" type="slidenum">
+            <a:fld id="{7D266E39-9B69-4D93-8EF7-24BDC9AD05E6}" type="slidenum">
               <a:rPr b="0" lang="en-US" sz="1200" spc="-1" strike="noStrike">
                 <a:latin typeface="Times New Roman"/>
               </a:rPr>
@@ -1841,7 +1842,7 @@
       </p:grpSpPr>
       <p:sp>
         <p:nvSpPr>
-          <p:cNvPr id="328" name="PlaceHolder 1"/>
+          <p:cNvPr id="366" name="PlaceHolder 1"/>
           <p:cNvSpPr>
             <a:spLocks noGrp="1"/>
           </p:cNvSpPr>
@@ -1852,19 +1853,19 @@
         <p:spPr>
           <a:xfrm>
             <a:off x="685800" y="1143000"/>
-            <a:ext cx="5484240" cy="3084120"/>
-          </a:xfrm>
-          <a:prstGeom prst="rect">
-            <a:avLst/>
-          </a:prstGeom>
-          <a:ln w="0">
-            <a:noFill/>
-          </a:ln>
-        </p:spPr>
-      </p:sp>
-      <p:sp>
-        <p:nvSpPr>
-          <p:cNvPr id="329" name="PlaceHolder 2"/>
+            <a:ext cx="5482800" cy="3082680"/>
+          </a:xfrm>
+          <a:prstGeom prst="rect">
+            <a:avLst/>
+          </a:prstGeom>
+          <a:ln w="0">
+            <a:noFill/>
+          </a:ln>
+        </p:spPr>
+      </p:sp>
+      <p:sp>
+        <p:nvSpPr>
+          <p:cNvPr id="367" name="PlaceHolder 2"/>
           <p:cNvSpPr>
             <a:spLocks noGrp="1"/>
           </p:cNvSpPr>
@@ -1875,7 +1876,7 @@
         <p:spPr>
           <a:xfrm>
             <a:off x="685800" y="4400640"/>
-            <a:ext cx="5484240" cy="3598200"/>
+            <a:ext cx="5482800" cy="3596760"/>
           </a:xfrm>
           <a:prstGeom prst="rect">
             <a:avLst/>
@@ -1898,7 +1899,7 @@
       </p:sp>
       <p:sp>
         <p:nvSpPr>
-          <p:cNvPr id="330" name="PlaceHolder 3"/>
+          <p:cNvPr id="368" name="PlaceHolder 3"/>
           <p:cNvSpPr>
             <a:spLocks noGrp="1"/>
           </p:cNvSpPr>
@@ -1909,7 +1910,7 @@
         <p:spPr>
           <a:xfrm>
             <a:off x="3884760" y="8685360"/>
-            <a:ext cx="2969640" cy="456480"/>
+            <a:ext cx="2968200" cy="455040"/>
           </a:xfrm>
           <a:prstGeom prst="rect">
             <a:avLst/>
@@ -1941,7 +1942,7 @@
               </a:lnSpc>
               <a:buNone/>
             </a:pPr>
-            <a:fld id="{5F451976-7C45-42BA-BC23-7A8EAC323C6E}" type="slidenum">
+            <a:fld id="{7E91BED3-CE20-4203-9376-635634DC79B6}" type="slidenum">
               <a:rPr b="0" lang="en-US" sz="1200" spc="-1" strike="noStrike">
                 <a:latin typeface="Times New Roman"/>
               </a:rPr>
@@ -1977,7 +1978,7 @@
       </p:grpSpPr>
       <p:sp>
         <p:nvSpPr>
-          <p:cNvPr id="331" name="PlaceHolder 1"/>
+          <p:cNvPr id="369" name="PlaceHolder 1"/>
           <p:cNvSpPr>
             <a:spLocks noGrp="1"/>
           </p:cNvSpPr>
@@ -1988,19 +1989,19 @@
         <p:spPr>
           <a:xfrm>
             <a:off x="685800" y="1143000"/>
-            <a:ext cx="5484240" cy="3084120"/>
-          </a:xfrm>
-          <a:prstGeom prst="rect">
-            <a:avLst/>
-          </a:prstGeom>
-          <a:ln w="0">
-            <a:noFill/>
-          </a:ln>
-        </p:spPr>
-      </p:sp>
-      <p:sp>
-        <p:nvSpPr>
-          <p:cNvPr id="332" name="PlaceHolder 2"/>
+            <a:ext cx="5482800" cy="3082680"/>
+          </a:xfrm>
+          <a:prstGeom prst="rect">
+            <a:avLst/>
+          </a:prstGeom>
+          <a:ln w="0">
+            <a:noFill/>
+          </a:ln>
+        </p:spPr>
+      </p:sp>
+      <p:sp>
+        <p:nvSpPr>
+          <p:cNvPr id="370" name="PlaceHolder 2"/>
           <p:cNvSpPr>
             <a:spLocks noGrp="1"/>
           </p:cNvSpPr>
@@ -2011,7 +2012,7 @@
         <p:spPr>
           <a:xfrm>
             <a:off x="685800" y="4400640"/>
-            <a:ext cx="5484240" cy="3598200"/>
+            <a:ext cx="5482800" cy="3596760"/>
           </a:xfrm>
           <a:prstGeom prst="rect">
             <a:avLst/>
@@ -2034,7 +2035,7 @@
       </p:sp>
       <p:sp>
         <p:nvSpPr>
-          <p:cNvPr id="333" name="PlaceHolder 3"/>
+          <p:cNvPr id="371" name="PlaceHolder 3"/>
           <p:cNvSpPr>
             <a:spLocks noGrp="1"/>
           </p:cNvSpPr>
@@ -2045,7 +2046,7 @@
         <p:spPr>
           <a:xfrm>
             <a:off x="3884760" y="8685360"/>
-            <a:ext cx="2969640" cy="456480"/>
+            <a:ext cx="2968200" cy="455040"/>
           </a:xfrm>
           <a:prstGeom prst="rect">
             <a:avLst/>
@@ -2077,7 +2078,7 @@
               </a:lnSpc>
               <a:buNone/>
             </a:pPr>
-            <a:fld id="{ABF1504B-40E4-41CB-A6D3-652CBEB0A7B2}" type="slidenum">
+            <a:fld id="{69D4158E-D634-4549-BA3A-F9044506B096}" type="slidenum">
               <a:rPr b="0" lang="en-US" sz="1200" spc="-1" strike="noStrike">
                 <a:latin typeface="Times New Roman"/>
               </a:rPr>
@@ -2113,7 +2114,7 @@
       </p:grpSpPr>
       <p:sp>
         <p:nvSpPr>
-          <p:cNvPr id="334" name="PlaceHolder 1"/>
+          <p:cNvPr id="372" name="PlaceHolder 1"/>
           <p:cNvSpPr>
             <a:spLocks noGrp="1"/>
           </p:cNvSpPr>
@@ -2124,19 +2125,19 @@
         <p:spPr>
           <a:xfrm>
             <a:off x="685800" y="1143000"/>
-            <a:ext cx="5484240" cy="3084120"/>
-          </a:xfrm>
-          <a:prstGeom prst="rect">
-            <a:avLst/>
-          </a:prstGeom>
-          <a:ln w="0">
-            <a:noFill/>
-          </a:ln>
-        </p:spPr>
-      </p:sp>
-      <p:sp>
-        <p:nvSpPr>
-          <p:cNvPr id="335" name="PlaceHolder 2"/>
+            <a:ext cx="5482800" cy="3082680"/>
+          </a:xfrm>
+          <a:prstGeom prst="rect">
+            <a:avLst/>
+          </a:prstGeom>
+          <a:ln w="0">
+            <a:noFill/>
+          </a:ln>
+        </p:spPr>
+      </p:sp>
+      <p:sp>
+        <p:nvSpPr>
+          <p:cNvPr id="373" name="PlaceHolder 2"/>
           <p:cNvSpPr>
             <a:spLocks noGrp="1"/>
           </p:cNvSpPr>
@@ -2147,7 +2148,7 @@
         <p:spPr>
           <a:xfrm>
             <a:off x="685800" y="4400640"/>
-            <a:ext cx="5484240" cy="3598200"/>
+            <a:ext cx="5482800" cy="3596760"/>
           </a:xfrm>
           <a:prstGeom prst="rect">
             <a:avLst/>
@@ -2170,7 +2171,7 @@
       </p:sp>
       <p:sp>
         <p:nvSpPr>
-          <p:cNvPr id="336" name="PlaceHolder 3"/>
+          <p:cNvPr id="374" name="PlaceHolder 3"/>
           <p:cNvSpPr>
             <a:spLocks noGrp="1"/>
           </p:cNvSpPr>
@@ -2181,7 +2182,7 @@
         <p:spPr>
           <a:xfrm>
             <a:off x="3884760" y="8685360"/>
-            <a:ext cx="2969640" cy="456480"/>
+            <a:ext cx="2968200" cy="455040"/>
           </a:xfrm>
           <a:prstGeom prst="rect">
             <a:avLst/>
@@ -2213,7 +2214,7 @@
               </a:lnSpc>
               <a:buNone/>
             </a:pPr>
-            <a:fld id="{E41865E6-869D-41C4-806F-F23E9CE17528}" type="slidenum">
+            <a:fld id="{8F82E7A3-F44D-4EB0-9040-99F598242C71}" type="slidenum">
               <a:rPr b="0" lang="en-US" sz="1200" spc="-1" strike="noStrike">
                 <a:latin typeface="Times New Roman"/>
               </a:rPr>
@@ -2249,7 +2250,7 @@
       </p:grpSpPr>
       <p:sp>
         <p:nvSpPr>
-          <p:cNvPr id="337" name="PlaceHolder 1"/>
+          <p:cNvPr id="375" name="PlaceHolder 1"/>
           <p:cNvSpPr>
             <a:spLocks noGrp="1"/>
           </p:cNvSpPr>
@@ -2260,19 +2261,19 @@
         <p:spPr>
           <a:xfrm>
             <a:off x="685800" y="1143000"/>
-            <a:ext cx="5484240" cy="3084120"/>
-          </a:xfrm>
-          <a:prstGeom prst="rect">
-            <a:avLst/>
-          </a:prstGeom>
-          <a:ln w="0">
-            <a:noFill/>
-          </a:ln>
-        </p:spPr>
-      </p:sp>
-      <p:sp>
-        <p:nvSpPr>
-          <p:cNvPr id="338" name="PlaceHolder 2"/>
+            <a:ext cx="5482800" cy="3082680"/>
+          </a:xfrm>
+          <a:prstGeom prst="rect">
+            <a:avLst/>
+          </a:prstGeom>
+          <a:ln w="0">
+            <a:noFill/>
+          </a:ln>
+        </p:spPr>
+      </p:sp>
+      <p:sp>
+        <p:nvSpPr>
+          <p:cNvPr id="376" name="PlaceHolder 2"/>
           <p:cNvSpPr>
             <a:spLocks noGrp="1"/>
           </p:cNvSpPr>
@@ -2283,7 +2284,7 @@
         <p:spPr>
           <a:xfrm>
             <a:off x="685800" y="4400640"/>
-            <a:ext cx="5484240" cy="3598200"/>
+            <a:ext cx="5482800" cy="3596760"/>
           </a:xfrm>
           <a:prstGeom prst="rect">
             <a:avLst/>
@@ -2306,7 +2307,7 @@
       </p:sp>
       <p:sp>
         <p:nvSpPr>
-          <p:cNvPr id="339" name="PlaceHolder 3"/>
+          <p:cNvPr id="377" name="PlaceHolder 3"/>
           <p:cNvSpPr>
             <a:spLocks noGrp="1"/>
           </p:cNvSpPr>
@@ -2317,7 +2318,7 @@
         <p:spPr>
           <a:xfrm>
             <a:off x="3884760" y="8685360"/>
-            <a:ext cx="2969640" cy="456480"/>
+            <a:ext cx="2968200" cy="455040"/>
           </a:xfrm>
           <a:prstGeom prst="rect">
             <a:avLst/>
@@ -2349,7 +2350,7 @@
               </a:lnSpc>
               <a:buNone/>
             </a:pPr>
-            <a:fld id="{8C481D6B-B5D0-4683-9F2E-0F329EC5E3F4}" type="slidenum">
+            <a:fld id="{AD62E674-D229-444C-B679-97CA1D0EC410}" type="slidenum">
               <a:rPr b="0" lang="en-US" sz="1200" spc="-1" strike="noStrike">
                 <a:latin typeface="Times New Roman"/>
               </a:rPr>
@@ -2385,7 +2386,7 @@
       </p:grpSpPr>
       <p:sp>
         <p:nvSpPr>
-          <p:cNvPr id="340" name="PlaceHolder 1"/>
+          <p:cNvPr id="378" name="PlaceHolder 1"/>
           <p:cNvSpPr>
             <a:spLocks noGrp="1"/>
           </p:cNvSpPr>
@@ -2396,19 +2397,19 @@
         <p:spPr>
           <a:xfrm>
             <a:off x="685800" y="1143000"/>
-            <a:ext cx="5484240" cy="3084120"/>
-          </a:xfrm>
-          <a:prstGeom prst="rect">
-            <a:avLst/>
-          </a:prstGeom>
-          <a:ln w="0">
-            <a:noFill/>
-          </a:ln>
-        </p:spPr>
-      </p:sp>
-      <p:sp>
-        <p:nvSpPr>
-          <p:cNvPr id="341" name="PlaceHolder 2"/>
+            <a:ext cx="5482800" cy="3082680"/>
+          </a:xfrm>
+          <a:prstGeom prst="rect">
+            <a:avLst/>
+          </a:prstGeom>
+          <a:ln w="0">
+            <a:noFill/>
+          </a:ln>
+        </p:spPr>
+      </p:sp>
+      <p:sp>
+        <p:nvSpPr>
+          <p:cNvPr id="379" name="PlaceHolder 2"/>
           <p:cNvSpPr>
             <a:spLocks noGrp="1"/>
           </p:cNvSpPr>
@@ -2419,7 +2420,7 @@
         <p:spPr>
           <a:xfrm>
             <a:off x="685800" y="4400640"/>
-            <a:ext cx="5484240" cy="3598200"/>
+            <a:ext cx="5482800" cy="3596760"/>
           </a:xfrm>
           <a:prstGeom prst="rect">
             <a:avLst/>
@@ -2442,7 +2443,7 @@
       </p:sp>
       <p:sp>
         <p:nvSpPr>
-          <p:cNvPr id="342" name="PlaceHolder 3"/>
+          <p:cNvPr id="380" name="PlaceHolder 3"/>
           <p:cNvSpPr>
             <a:spLocks noGrp="1"/>
           </p:cNvSpPr>
@@ -2453,7 +2454,7 @@
         <p:spPr>
           <a:xfrm>
             <a:off x="3884760" y="8685360"/>
-            <a:ext cx="2969640" cy="456480"/>
+            <a:ext cx="2968200" cy="455040"/>
           </a:xfrm>
           <a:prstGeom prst="rect">
             <a:avLst/>
@@ -2485,7 +2486,7 @@
               </a:lnSpc>
               <a:buNone/>
             </a:pPr>
-            <a:fld id="{A783B8F6-DC94-424C-BC5B-22C101ECFF47}" type="slidenum">
+            <a:fld id="{FD0BD2FF-FD25-478A-B649-5C0F3112C855}" type="slidenum">
               <a:rPr b="0" lang="en-US" sz="1200" spc="-1" strike="noStrike">
                 <a:latin typeface="Times New Roman"/>
               </a:rPr>
@@ -2521,7 +2522,7 @@
       </p:grpSpPr>
       <p:sp>
         <p:nvSpPr>
-          <p:cNvPr id="343" name="PlaceHolder 1"/>
+          <p:cNvPr id="381" name="PlaceHolder 1"/>
           <p:cNvSpPr>
             <a:spLocks noGrp="1"/>
           </p:cNvSpPr>
@@ -2532,19 +2533,19 @@
         <p:spPr>
           <a:xfrm>
             <a:off x="685800" y="1143000"/>
-            <a:ext cx="5484240" cy="3084120"/>
-          </a:xfrm>
-          <a:prstGeom prst="rect">
-            <a:avLst/>
-          </a:prstGeom>
-          <a:ln w="0">
-            <a:noFill/>
-          </a:ln>
-        </p:spPr>
-      </p:sp>
-      <p:sp>
-        <p:nvSpPr>
-          <p:cNvPr id="344" name="PlaceHolder 2"/>
+            <a:ext cx="5482800" cy="3082680"/>
+          </a:xfrm>
+          <a:prstGeom prst="rect">
+            <a:avLst/>
+          </a:prstGeom>
+          <a:ln w="0">
+            <a:noFill/>
+          </a:ln>
+        </p:spPr>
+      </p:sp>
+      <p:sp>
+        <p:nvSpPr>
+          <p:cNvPr id="382" name="PlaceHolder 2"/>
           <p:cNvSpPr>
             <a:spLocks noGrp="1"/>
           </p:cNvSpPr>
@@ -2555,7 +2556,7 @@
         <p:spPr>
           <a:xfrm>
             <a:off x="685800" y="4400640"/>
-            <a:ext cx="5484240" cy="3598200"/>
+            <a:ext cx="5482800" cy="3596760"/>
           </a:xfrm>
           <a:prstGeom prst="rect">
             <a:avLst/>
@@ -2578,7 +2579,7 @@
       </p:sp>
       <p:sp>
         <p:nvSpPr>
-          <p:cNvPr id="345" name="PlaceHolder 3"/>
+          <p:cNvPr id="383" name="PlaceHolder 3"/>
           <p:cNvSpPr>
             <a:spLocks noGrp="1"/>
           </p:cNvSpPr>
@@ -2589,7 +2590,7 @@
         <p:spPr>
           <a:xfrm>
             <a:off x="3884760" y="8685360"/>
-            <a:ext cx="2969640" cy="456480"/>
+            <a:ext cx="2968200" cy="455040"/>
           </a:xfrm>
           <a:prstGeom prst="rect">
             <a:avLst/>
@@ -2621,7 +2622,7 @@
               </a:lnSpc>
               <a:buNone/>
             </a:pPr>
-            <a:fld id="{46356C38-8EA0-4DDF-AA42-1DFA06BA3B9E}" type="slidenum">
+            <a:fld id="{B9370204-5872-400E-8BA6-189768923EB2}" type="slidenum">
               <a:rPr b="0" lang="en-US" sz="1200" spc="-1" strike="noStrike">
                 <a:latin typeface="Times New Roman"/>
               </a:rPr>
@@ -3245,6 +3246,623 @@
 </p:sldLayout>
 </file>
 
+<file path=ppt/slideLayouts/slideLayout13.xml><?xml version="1.0" encoding="utf-8"?>
+<p:sldLayout xmlns:a="http://schemas.openxmlformats.org/drawingml/2006/main" xmlns:p="http://schemas.openxmlformats.org/presentationml/2006/main" xmlns:r="http://schemas.openxmlformats.org/officeDocument/2006/relationships" xmlns:p14="http://schemas.microsoft.com/office/powerpoint/2010/main" xmlns:p15="http://schemas.microsoft.com/office/powerpoint/2012/main" xmlns:mc="http://schemas.openxmlformats.org/markup-compatibility/2006" type="blank" preserve="1">
+  <p:cSld name="Blank Slide">
+    <p:spTree>
+      <p:nvGrpSpPr>
+        <p:cNvPr id="1" name=""/>
+        <p:cNvGrpSpPr/>
+        <p:nvPr/>
+      </p:nvGrpSpPr>
+      <p:grpSpPr>
+        <a:xfrm>
+          <a:off x="0" y="0"/>
+          <a:ext cx="0" cy="0"/>
+          <a:chOff x="0" y="0"/>
+          <a:chExt cx="0" cy="0"/>
+        </a:xfrm>
+      </p:grpSpPr>
+    </p:spTree>
+  </p:cSld>
+</p:sldLayout>
+</file>
+
+<file path=ppt/slideLayouts/slideLayout14.xml><?xml version="1.0" encoding="utf-8"?>
+<p:sldLayout xmlns:a="http://schemas.openxmlformats.org/drawingml/2006/main" xmlns:p="http://schemas.openxmlformats.org/presentationml/2006/main" xmlns:r="http://schemas.openxmlformats.org/officeDocument/2006/relationships" xmlns:p14="http://schemas.microsoft.com/office/powerpoint/2010/main" xmlns:p15="http://schemas.microsoft.com/office/powerpoint/2012/main" xmlns:mc="http://schemas.openxmlformats.org/markup-compatibility/2006" type="tx" preserve="1">
+  <p:cSld name="Title Slide">
+    <p:spTree>
+      <p:nvGrpSpPr>
+        <p:cNvPr id="1" name=""/>
+        <p:cNvGrpSpPr/>
+        <p:nvPr/>
+      </p:nvGrpSpPr>
+      <p:grpSpPr>
+        <a:xfrm>
+          <a:off x="0" y="0"/>
+          <a:ext cx="0" cy="0"/>
+          <a:chOff x="0" y="0"/>
+          <a:chExt cx="0" cy="0"/>
+        </a:xfrm>
+      </p:grpSpPr>
+      <p:sp>
+        <p:nvSpPr>
+          <p:cNvPr id="40" name="PlaceHolder 1"/>
+          <p:cNvSpPr>
+            <a:spLocks noGrp="1"/>
+          </p:cNvSpPr>
+          <p:nvPr>
+            <p:ph type="title"/>
+          </p:nvPr>
+        </p:nvSpPr>
+        <p:spPr>
+          <a:xfrm>
+            <a:off x="609480" y="273600"/>
+            <a:ext cx="10972440" cy="1144800"/>
+          </a:xfrm>
+          <a:prstGeom prst="rect">
+            <a:avLst/>
+          </a:prstGeom>
+          <a:noFill/>
+          <a:ln w="0">
+            <a:noFill/>
+          </a:ln>
+        </p:spPr>
+        <p:txBody>
+          <a:bodyPr lIns="0" rIns="0" tIns="0" bIns="0" anchor="ctr">
+            <a:noAutofit/>
+          </a:bodyPr>
+          <a:p>
+            <a:pPr algn="ctr">
+              <a:buNone/>
+            </a:pPr>
+            <a:endParaRPr b="0" lang="en-HK" sz="4400" spc="-1" strike="noStrike">
+              <a:latin typeface="Arial"/>
+            </a:endParaRPr>
+          </a:p>
+        </p:txBody>
+      </p:sp>
+      <p:sp>
+        <p:nvSpPr>
+          <p:cNvPr id="41" name="PlaceHolder 2"/>
+          <p:cNvSpPr>
+            <a:spLocks noGrp="1"/>
+          </p:cNvSpPr>
+          <p:nvPr>
+            <p:ph type="subTitle"/>
+          </p:nvPr>
+        </p:nvSpPr>
+        <p:spPr>
+          <a:xfrm>
+            <a:off x="609480" y="1604520"/>
+            <a:ext cx="10972440" cy="3977280"/>
+          </a:xfrm>
+          <a:prstGeom prst="rect">
+            <a:avLst/>
+          </a:prstGeom>
+          <a:noFill/>
+          <a:ln w="0">
+            <a:noFill/>
+          </a:ln>
+        </p:spPr>
+        <p:txBody>
+          <a:bodyPr lIns="0" rIns="0" tIns="0" bIns="0" anchor="ctr">
+            <a:noAutofit/>
+          </a:bodyPr>
+          <a:p>
+            <a:pPr algn="ctr">
+              <a:buNone/>
+            </a:pPr>
+            <a:endParaRPr b="0" lang="en-HK" sz="3200" spc="-1" strike="noStrike">
+              <a:latin typeface="Arial"/>
+            </a:endParaRPr>
+          </a:p>
+        </p:txBody>
+      </p:sp>
+    </p:spTree>
+  </p:cSld>
+</p:sldLayout>
+</file>
+
+<file path=ppt/slideLayouts/slideLayout15.xml><?xml version="1.0" encoding="utf-8"?>
+<p:sldLayout xmlns:a="http://schemas.openxmlformats.org/drawingml/2006/main" xmlns:p="http://schemas.openxmlformats.org/presentationml/2006/main" xmlns:r="http://schemas.openxmlformats.org/officeDocument/2006/relationships" xmlns:p14="http://schemas.microsoft.com/office/powerpoint/2010/main" xmlns:p15="http://schemas.microsoft.com/office/powerpoint/2012/main" xmlns:mc="http://schemas.openxmlformats.org/markup-compatibility/2006" type="obj" preserve="1">
+  <p:cSld name="Title, Content">
+    <p:spTree>
+      <p:nvGrpSpPr>
+        <p:cNvPr id="1" name=""/>
+        <p:cNvGrpSpPr/>
+        <p:nvPr/>
+      </p:nvGrpSpPr>
+      <p:grpSpPr>
+        <a:xfrm>
+          <a:off x="0" y="0"/>
+          <a:ext cx="0" cy="0"/>
+          <a:chOff x="0" y="0"/>
+          <a:chExt cx="0" cy="0"/>
+        </a:xfrm>
+      </p:grpSpPr>
+      <p:sp>
+        <p:nvSpPr>
+          <p:cNvPr id="42" name="PlaceHolder 1"/>
+          <p:cNvSpPr>
+            <a:spLocks noGrp="1"/>
+          </p:cNvSpPr>
+          <p:nvPr>
+            <p:ph type="title"/>
+          </p:nvPr>
+        </p:nvSpPr>
+        <p:spPr>
+          <a:xfrm>
+            <a:off x="609480" y="273600"/>
+            <a:ext cx="10972440" cy="1144800"/>
+          </a:xfrm>
+          <a:prstGeom prst="rect">
+            <a:avLst/>
+          </a:prstGeom>
+          <a:noFill/>
+          <a:ln w="0">
+            <a:noFill/>
+          </a:ln>
+        </p:spPr>
+        <p:txBody>
+          <a:bodyPr lIns="0" rIns="0" tIns="0" bIns="0" anchor="ctr">
+            <a:noAutofit/>
+          </a:bodyPr>
+          <a:p>
+            <a:pPr algn="ctr">
+              <a:buNone/>
+            </a:pPr>
+            <a:endParaRPr b="0" lang="en-HK" sz="4400" spc="-1" strike="noStrike">
+              <a:latin typeface="Arial"/>
+            </a:endParaRPr>
+          </a:p>
+        </p:txBody>
+      </p:sp>
+      <p:sp>
+        <p:nvSpPr>
+          <p:cNvPr id="43" name="PlaceHolder 2"/>
+          <p:cNvSpPr>
+            <a:spLocks noGrp="1"/>
+          </p:cNvSpPr>
+          <p:nvPr>
+            <p:ph/>
+          </p:nvPr>
+        </p:nvSpPr>
+        <p:spPr>
+          <a:xfrm>
+            <a:off x="609480" y="1604520"/>
+            <a:ext cx="10972440" cy="3977280"/>
+          </a:xfrm>
+          <a:prstGeom prst="rect">
+            <a:avLst/>
+          </a:prstGeom>
+          <a:noFill/>
+          <a:ln w="0">
+            <a:noFill/>
+          </a:ln>
+        </p:spPr>
+        <p:txBody>
+          <a:bodyPr lIns="0" rIns="0" tIns="0" bIns="0" anchor="t">
+            <a:normAutofit/>
+          </a:bodyPr>
+          <a:p>
+            <a:endParaRPr b="0" lang="en-HK" sz="3200" spc="-1" strike="noStrike">
+              <a:latin typeface="Arial"/>
+            </a:endParaRPr>
+          </a:p>
+        </p:txBody>
+      </p:sp>
+    </p:spTree>
+  </p:cSld>
+</p:sldLayout>
+</file>
+
+<file path=ppt/slideLayouts/slideLayout16.xml><?xml version="1.0" encoding="utf-8"?>
+<p:sldLayout xmlns:a="http://schemas.openxmlformats.org/drawingml/2006/main" xmlns:p="http://schemas.openxmlformats.org/presentationml/2006/main" xmlns:r="http://schemas.openxmlformats.org/officeDocument/2006/relationships" xmlns:p14="http://schemas.microsoft.com/office/powerpoint/2010/main" xmlns:p15="http://schemas.microsoft.com/office/powerpoint/2012/main" xmlns:mc="http://schemas.openxmlformats.org/markup-compatibility/2006" type="twoObj" preserve="1">
+  <p:cSld name="Title, 2 Content">
+    <p:spTree>
+      <p:nvGrpSpPr>
+        <p:cNvPr id="1" name=""/>
+        <p:cNvGrpSpPr/>
+        <p:nvPr/>
+      </p:nvGrpSpPr>
+      <p:grpSpPr>
+        <a:xfrm>
+          <a:off x="0" y="0"/>
+          <a:ext cx="0" cy="0"/>
+          <a:chOff x="0" y="0"/>
+          <a:chExt cx="0" cy="0"/>
+        </a:xfrm>
+      </p:grpSpPr>
+      <p:sp>
+        <p:nvSpPr>
+          <p:cNvPr id="44" name="PlaceHolder 1"/>
+          <p:cNvSpPr>
+            <a:spLocks noGrp="1"/>
+          </p:cNvSpPr>
+          <p:nvPr>
+            <p:ph type="title"/>
+          </p:nvPr>
+        </p:nvSpPr>
+        <p:spPr>
+          <a:xfrm>
+            <a:off x="609480" y="273600"/>
+            <a:ext cx="10972440" cy="1144800"/>
+          </a:xfrm>
+          <a:prstGeom prst="rect">
+            <a:avLst/>
+          </a:prstGeom>
+          <a:noFill/>
+          <a:ln w="0">
+            <a:noFill/>
+          </a:ln>
+        </p:spPr>
+        <p:txBody>
+          <a:bodyPr lIns="0" rIns="0" tIns="0" bIns="0" anchor="ctr">
+            <a:noAutofit/>
+          </a:bodyPr>
+          <a:p>
+            <a:pPr algn="ctr">
+              <a:buNone/>
+            </a:pPr>
+            <a:endParaRPr b="0" lang="en-HK" sz="4400" spc="-1" strike="noStrike">
+              <a:latin typeface="Arial"/>
+            </a:endParaRPr>
+          </a:p>
+        </p:txBody>
+      </p:sp>
+      <p:sp>
+        <p:nvSpPr>
+          <p:cNvPr id="45" name="PlaceHolder 2"/>
+          <p:cNvSpPr>
+            <a:spLocks noGrp="1"/>
+          </p:cNvSpPr>
+          <p:nvPr>
+            <p:ph/>
+          </p:nvPr>
+        </p:nvSpPr>
+        <p:spPr>
+          <a:xfrm>
+            <a:off x="609480" y="1604520"/>
+            <a:ext cx="5354280" cy="3977280"/>
+          </a:xfrm>
+          <a:prstGeom prst="rect">
+            <a:avLst/>
+          </a:prstGeom>
+          <a:noFill/>
+          <a:ln w="0">
+            <a:noFill/>
+          </a:ln>
+        </p:spPr>
+        <p:txBody>
+          <a:bodyPr lIns="0" rIns="0" tIns="0" bIns="0" anchor="t">
+            <a:normAutofit/>
+          </a:bodyPr>
+          <a:p>
+            <a:endParaRPr b="0" lang="en-HK" sz="3200" spc="-1" strike="noStrike">
+              <a:latin typeface="Arial"/>
+            </a:endParaRPr>
+          </a:p>
+        </p:txBody>
+      </p:sp>
+      <p:sp>
+        <p:nvSpPr>
+          <p:cNvPr id="46" name="PlaceHolder 3"/>
+          <p:cNvSpPr>
+            <a:spLocks noGrp="1"/>
+          </p:cNvSpPr>
+          <p:nvPr>
+            <p:ph/>
+          </p:nvPr>
+        </p:nvSpPr>
+        <p:spPr>
+          <a:xfrm>
+            <a:off x="6231960" y="1604520"/>
+            <a:ext cx="5354280" cy="3977280"/>
+          </a:xfrm>
+          <a:prstGeom prst="rect">
+            <a:avLst/>
+          </a:prstGeom>
+          <a:noFill/>
+          <a:ln w="0">
+            <a:noFill/>
+          </a:ln>
+        </p:spPr>
+        <p:txBody>
+          <a:bodyPr lIns="0" rIns="0" tIns="0" bIns="0" anchor="t">
+            <a:normAutofit/>
+          </a:bodyPr>
+          <a:p>
+            <a:endParaRPr b="0" lang="en-HK" sz="3200" spc="-1" strike="noStrike">
+              <a:latin typeface="Arial"/>
+            </a:endParaRPr>
+          </a:p>
+        </p:txBody>
+      </p:sp>
+    </p:spTree>
+  </p:cSld>
+</p:sldLayout>
+</file>
+
+<file path=ppt/slideLayouts/slideLayout17.xml><?xml version="1.0" encoding="utf-8"?>
+<p:sldLayout xmlns:a="http://schemas.openxmlformats.org/drawingml/2006/main" xmlns:p="http://schemas.openxmlformats.org/presentationml/2006/main" xmlns:r="http://schemas.openxmlformats.org/officeDocument/2006/relationships" xmlns:p14="http://schemas.microsoft.com/office/powerpoint/2010/main" xmlns:p15="http://schemas.microsoft.com/office/powerpoint/2012/main" xmlns:mc="http://schemas.openxmlformats.org/markup-compatibility/2006" type="titleOnly" preserve="1">
+  <p:cSld name="Title Only">
+    <p:spTree>
+      <p:nvGrpSpPr>
+        <p:cNvPr id="1" name=""/>
+        <p:cNvGrpSpPr/>
+        <p:nvPr/>
+      </p:nvGrpSpPr>
+      <p:grpSpPr>
+        <a:xfrm>
+          <a:off x="0" y="0"/>
+          <a:ext cx="0" cy="0"/>
+          <a:chOff x="0" y="0"/>
+          <a:chExt cx="0" cy="0"/>
+        </a:xfrm>
+      </p:grpSpPr>
+      <p:sp>
+        <p:nvSpPr>
+          <p:cNvPr id="47" name="PlaceHolder 1"/>
+          <p:cNvSpPr>
+            <a:spLocks noGrp="1"/>
+          </p:cNvSpPr>
+          <p:nvPr>
+            <p:ph type="title"/>
+          </p:nvPr>
+        </p:nvSpPr>
+        <p:spPr>
+          <a:xfrm>
+            <a:off x="609480" y="273600"/>
+            <a:ext cx="10972440" cy="1144800"/>
+          </a:xfrm>
+          <a:prstGeom prst="rect">
+            <a:avLst/>
+          </a:prstGeom>
+          <a:noFill/>
+          <a:ln w="0">
+            <a:noFill/>
+          </a:ln>
+        </p:spPr>
+        <p:txBody>
+          <a:bodyPr lIns="0" rIns="0" tIns="0" bIns="0" anchor="ctr">
+            <a:noAutofit/>
+          </a:bodyPr>
+          <a:p>
+            <a:pPr algn="ctr">
+              <a:buNone/>
+            </a:pPr>
+            <a:endParaRPr b="0" lang="en-HK" sz="4400" spc="-1" strike="noStrike">
+              <a:latin typeface="Arial"/>
+            </a:endParaRPr>
+          </a:p>
+        </p:txBody>
+      </p:sp>
+    </p:spTree>
+  </p:cSld>
+</p:sldLayout>
+</file>
+
+<file path=ppt/slideLayouts/slideLayout18.xml><?xml version="1.0" encoding="utf-8"?>
+<p:sldLayout xmlns:a="http://schemas.openxmlformats.org/drawingml/2006/main" xmlns:p="http://schemas.openxmlformats.org/presentationml/2006/main" xmlns:r="http://schemas.openxmlformats.org/officeDocument/2006/relationships" xmlns:p14="http://schemas.microsoft.com/office/powerpoint/2010/main" xmlns:p15="http://schemas.microsoft.com/office/powerpoint/2012/main" xmlns:mc="http://schemas.openxmlformats.org/markup-compatibility/2006" type="objOnly" preserve="1">
+  <p:cSld name="Centered Text">
+    <p:spTree>
+      <p:nvGrpSpPr>
+        <p:cNvPr id="1" name=""/>
+        <p:cNvGrpSpPr/>
+        <p:nvPr/>
+      </p:nvGrpSpPr>
+      <p:grpSpPr>
+        <a:xfrm>
+          <a:off x="0" y="0"/>
+          <a:ext cx="0" cy="0"/>
+          <a:chOff x="0" y="0"/>
+          <a:chExt cx="0" cy="0"/>
+        </a:xfrm>
+      </p:grpSpPr>
+      <p:sp>
+        <p:nvSpPr>
+          <p:cNvPr id="48" name="PlaceHolder 1"/>
+          <p:cNvSpPr>
+            <a:spLocks noGrp="1"/>
+          </p:cNvSpPr>
+          <p:nvPr>
+            <p:ph type="subTitle"/>
+          </p:nvPr>
+        </p:nvSpPr>
+        <p:spPr>
+          <a:xfrm>
+            <a:off x="609480" y="273600"/>
+            <a:ext cx="10972440" cy="5307840"/>
+          </a:xfrm>
+          <a:prstGeom prst="rect">
+            <a:avLst/>
+          </a:prstGeom>
+          <a:noFill/>
+          <a:ln w="0">
+            <a:noFill/>
+          </a:ln>
+        </p:spPr>
+        <p:txBody>
+          <a:bodyPr lIns="0" rIns="0" tIns="0" bIns="0" anchor="ctr">
+            <a:noAutofit/>
+          </a:bodyPr>
+          <a:p>
+            <a:pPr algn="ctr">
+              <a:buNone/>
+            </a:pPr>
+            <a:endParaRPr b="0" lang="en-HK" sz="3200" spc="-1" strike="noStrike">
+              <a:latin typeface="Arial"/>
+            </a:endParaRPr>
+          </a:p>
+        </p:txBody>
+      </p:sp>
+    </p:spTree>
+  </p:cSld>
+</p:sldLayout>
+</file>
+
+<file path=ppt/slideLayouts/slideLayout19.xml><?xml version="1.0" encoding="utf-8"?>
+<p:sldLayout xmlns:a="http://schemas.openxmlformats.org/drawingml/2006/main" xmlns:p="http://schemas.openxmlformats.org/presentationml/2006/main" xmlns:r="http://schemas.openxmlformats.org/officeDocument/2006/relationships" xmlns:p14="http://schemas.microsoft.com/office/powerpoint/2010/main" xmlns:p15="http://schemas.microsoft.com/office/powerpoint/2012/main" xmlns:mc="http://schemas.openxmlformats.org/markup-compatibility/2006" type="twoObjAndObj" preserve="1">
+  <p:cSld name="Title, 2 Content and Content">
+    <p:spTree>
+      <p:nvGrpSpPr>
+        <p:cNvPr id="1" name=""/>
+        <p:cNvGrpSpPr/>
+        <p:nvPr/>
+      </p:nvGrpSpPr>
+      <p:grpSpPr>
+        <a:xfrm>
+          <a:off x="0" y="0"/>
+          <a:ext cx="0" cy="0"/>
+          <a:chOff x="0" y="0"/>
+          <a:chExt cx="0" cy="0"/>
+        </a:xfrm>
+      </p:grpSpPr>
+      <p:sp>
+        <p:nvSpPr>
+          <p:cNvPr id="49" name="PlaceHolder 1"/>
+          <p:cNvSpPr>
+            <a:spLocks noGrp="1"/>
+          </p:cNvSpPr>
+          <p:nvPr>
+            <p:ph type="title"/>
+          </p:nvPr>
+        </p:nvSpPr>
+        <p:spPr>
+          <a:xfrm>
+            <a:off x="609480" y="273600"/>
+            <a:ext cx="10972440" cy="1144800"/>
+          </a:xfrm>
+          <a:prstGeom prst="rect">
+            <a:avLst/>
+          </a:prstGeom>
+          <a:noFill/>
+          <a:ln w="0">
+            <a:noFill/>
+          </a:ln>
+        </p:spPr>
+        <p:txBody>
+          <a:bodyPr lIns="0" rIns="0" tIns="0" bIns="0" anchor="ctr">
+            <a:noAutofit/>
+          </a:bodyPr>
+          <a:p>
+            <a:pPr algn="ctr">
+              <a:buNone/>
+            </a:pPr>
+            <a:endParaRPr b="0" lang="en-HK" sz="4400" spc="-1" strike="noStrike">
+              <a:latin typeface="Arial"/>
+            </a:endParaRPr>
+          </a:p>
+        </p:txBody>
+      </p:sp>
+      <p:sp>
+        <p:nvSpPr>
+          <p:cNvPr id="50" name="PlaceHolder 2"/>
+          <p:cNvSpPr>
+            <a:spLocks noGrp="1"/>
+          </p:cNvSpPr>
+          <p:nvPr>
+            <p:ph/>
+          </p:nvPr>
+        </p:nvSpPr>
+        <p:spPr>
+          <a:xfrm>
+            <a:off x="609480" y="1604520"/>
+            <a:ext cx="5354280" cy="1896840"/>
+          </a:xfrm>
+          <a:prstGeom prst="rect">
+            <a:avLst/>
+          </a:prstGeom>
+          <a:noFill/>
+          <a:ln w="0">
+            <a:noFill/>
+          </a:ln>
+        </p:spPr>
+        <p:txBody>
+          <a:bodyPr lIns="0" rIns="0" tIns="0" bIns="0" anchor="t">
+            <a:normAutofit/>
+          </a:bodyPr>
+          <a:p>
+            <a:endParaRPr b="0" lang="en-HK" sz="3200" spc="-1" strike="noStrike">
+              <a:latin typeface="Arial"/>
+            </a:endParaRPr>
+          </a:p>
+        </p:txBody>
+      </p:sp>
+      <p:sp>
+        <p:nvSpPr>
+          <p:cNvPr id="51" name="PlaceHolder 3"/>
+          <p:cNvSpPr>
+            <a:spLocks noGrp="1"/>
+          </p:cNvSpPr>
+          <p:nvPr>
+            <p:ph/>
+          </p:nvPr>
+        </p:nvSpPr>
+        <p:spPr>
+          <a:xfrm>
+            <a:off x="6231960" y="1604520"/>
+            <a:ext cx="5354280" cy="3977280"/>
+          </a:xfrm>
+          <a:prstGeom prst="rect">
+            <a:avLst/>
+          </a:prstGeom>
+          <a:noFill/>
+          <a:ln w="0">
+            <a:noFill/>
+          </a:ln>
+        </p:spPr>
+        <p:txBody>
+          <a:bodyPr lIns="0" rIns="0" tIns="0" bIns="0" anchor="t">
+            <a:normAutofit/>
+          </a:bodyPr>
+          <a:p>
+            <a:endParaRPr b="0" lang="en-HK" sz="3200" spc="-1" strike="noStrike">
+              <a:latin typeface="Arial"/>
+            </a:endParaRPr>
+          </a:p>
+        </p:txBody>
+      </p:sp>
+      <p:sp>
+        <p:nvSpPr>
+          <p:cNvPr id="52" name="PlaceHolder 4"/>
+          <p:cNvSpPr>
+            <a:spLocks noGrp="1"/>
+          </p:cNvSpPr>
+          <p:nvPr>
+            <p:ph/>
+          </p:nvPr>
+        </p:nvSpPr>
+        <p:spPr>
+          <a:xfrm>
+            <a:off x="609480" y="3682080"/>
+            <a:ext cx="5354280" cy="1896840"/>
+          </a:xfrm>
+          <a:prstGeom prst="rect">
+            <a:avLst/>
+          </a:prstGeom>
+          <a:noFill/>
+          <a:ln w="0">
+            <a:noFill/>
+          </a:ln>
+        </p:spPr>
+        <p:txBody>
+          <a:bodyPr lIns="0" rIns="0" tIns="0" bIns="0" anchor="t">
+            <a:normAutofit/>
+          </a:bodyPr>
+          <a:p>
+            <a:endParaRPr b="0" lang="en-HK" sz="3200" spc="-1" strike="noStrike">
+              <a:latin typeface="Arial"/>
+            </a:endParaRPr>
+          </a:p>
+        </p:txBody>
+      </p:sp>
+    </p:spTree>
+  </p:cSld>
+</p:sldLayout>
+</file>
+
 <file path=ppt/slideLayouts/slideLayout2.xml><?xml version="1.0" encoding="utf-8"?>
 <p:sldLayout xmlns:a="http://schemas.openxmlformats.org/drawingml/2006/main" xmlns:p="http://schemas.openxmlformats.org/presentationml/2006/main" xmlns:r="http://schemas.openxmlformats.org/officeDocument/2006/relationships" xmlns:p14="http://schemas.microsoft.com/office/powerpoint/2010/main" xmlns:p15="http://schemas.microsoft.com/office/powerpoint/2012/main" xmlns:mc="http://schemas.openxmlformats.org/markup-compatibility/2006" type="tx" preserve="1">
   <p:cSld name="Title Slide">
@@ -3330,6 +3948,913 @@
             <a:pPr algn="ctr">
               <a:buNone/>
             </a:pPr>
+            <a:endParaRPr b="0" lang="en-HK" sz="3200" spc="-1" strike="noStrike">
+              <a:latin typeface="Arial"/>
+            </a:endParaRPr>
+          </a:p>
+        </p:txBody>
+      </p:sp>
+    </p:spTree>
+  </p:cSld>
+</p:sldLayout>
+</file>
+
+<file path=ppt/slideLayouts/slideLayout20.xml><?xml version="1.0" encoding="utf-8"?>
+<p:sldLayout xmlns:a="http://schemas.openxmlformats.org/drawingml/2006/main" xmlns:p="http://schemas.openxmlformats.org/presentationml/2006/main" xmlns:r="http://schemas.openxmlformats.org/officeDocument/2006/relationships" xmlns:p14="http://schemas.microsoft.com/office/powerpoint/2010/main" xmlns:p15="http://schemas.microsoft.com/office/powerpoint/2012/main" xmlns:mc="http://schemas.openxmlformats.org/markup-compatibility/2006" type="objAndTwoObj" preserve="1">
+  <p:cSld name="Title Content and 2 Content">
+    <p:spTree>
+      <p:nvGrpSpPr>
+        <p:cNvPr id="1" name=""/>
+        <p:cNvGrpSpPr/>
+        <p:nvPr/>
+      </p:nvGrpSpPr>
+      <p:grpSpPr>
+        <a:xfrm>
+          <a:off x="0" y="0"/>
+          <a:ext cx="0" cy="0"/>
+          <a:chOff x="0" y="0"/>
+          <a:chExt cx="0" cy="0"/>
+        </a:xfrm>
+      </p:grpSpPr>
+      <p:sp>
+        <p:nvSpPr>
+          <p:cNvPr id="53" name="PlaceHolder 1"/>
+          <p:cNvSpPr>
+            <a:spLocks noGrp="1"/>
+          </p:cNvSpPr>
+          <p:nvPr>
+            <p:ph type="title"/>
+          </p:nvPr>
+        </p:nvSpPr>
+        <p:spPr>
+          <a:xfrm>
+            <a:off x="609480" y="273600"/>
+            <a:ext cx="10972440" cy="1144800"/>
+          </a:xfrm>
+          <a:prstGeom prst="rect">
+            <a:avLst/>
+          </a:prstGeom>
+          <a:noFill/>
+          <a:ln w="0">
+            <a:noFill/>
+          </a:ln>
+        </p:spPr>
+        <p:txBody>
+          <a:bodyPr lIns="0" rIns="0" tIns="0" bIns="0" anchor="ctr">
+            <a:noAutofit/>
+          </a:bodyPr>
+          <a:p>
+            <a:pPr algn="ctr">
+              <a:buNone/>
+            </a:pPr>
+            <a:endParaRPr b="0" lang="en-HK" sz="4400" spc="-1" strike="noStrike">
+              <a:latin typeface="Arial"/>
+            </a:endParaRPr>
+          </a:p>
+        </p:txBody>
+      </p:sp>
+      <p:sp>
+        <p:nvSpPr>
+          <p:cNvPr id="54" name="PlaceHolder 2"/>
+          <p:cNvSpPr>
+            <a:spLocks noGrp="1"/>
+          </p:cNvSpPr>
+          <p:nvPr>
+            <p:ph/>
+          </p:nvPr>
+        </p:nvSpPr>
+        <p:spPr>
+          <a:xfrm>
+            <a:off x="609480" y="1604520"/>
+            <a:ext cx="5354280" cy="3977280"/>
+          </a:xfrm>
+          <a:prstGeom prst="rect">
+            <a:avLst/>
+          </a:prstGeom>
+          <a:noFill/>
+          <a:ln w="0">
+            <a:noFill/>
+          </a:ln>
+        </p:spPr>
+        <p:txBody>
+          <a:bodyPr lIns="0" rIns="0" tIns="0" bIns="0" anchor="t">
+            <a:normAutofit/>
+          </a:bodyPr>
+          <a:p>
+            <a:endParaRPr b="0" lang="en-HK" sz="3200" spc="-1" strike="noStrike">
+              <a:latin typeface="Arial"/>
+            </a:endParaRPr>
+          </a:p>
+        </p:txBody>
+      </p:sp>
+      <p:sp>
+        <p:nvSpPr>
+          <p:cNvPr id="55" name="PlaceHolder 3"/>
+          <p:cNvSpPr>
+            <a:spLocks noGrp="1"/>
+          </p:cNvSpPr>
+          <p:nvPr>
+            <p:ph/>
+          </p:nvPr>
+        </p:nvSpPr>
+        <p:spPr>
+          <a:xfrm>
+            <a:off x="6231960" y="1604520"/>
+            <a:ext cx="5354280" cy="1896840"/>
+          </a:xfrm>
+          <a:prstGeom prst="rect">
+            <a:avLst/>
+          </a:prstGeom>
+          <a:noFill/>
+          <a:ln w="0">
+            <a:noFill/>
+          </a:ln>
+        </p:spPr>
+        <p:txBody>
+          <a:bodyPr lIns="0" rIns="0" tIns="0" bIns="0" anchor="t">
+            <a:normAutofit/>
+          </a:bodyPr>
+          <a:p>
+            <a:endParaRPr b="0" lang="en-HK" sz="3200" spc="-1" strike="noStrike">
+              <a:latin typeface="Arial"/>
+            </a:endParaRPr>
+          </a:p>
+        </p:txBody>
+      </p:sp>
+      <p:sp>
+        <p:nvSpPr>
+          <p:cNvPr id="56" name="PlaceHolder 4"/>
+          <p:cNvSpPr>
+            <a:spLocks noGrp="1"/>
+          </p:cNvSpPr>
+          <p:nvPr>
+            <p:ph/>
+          </p:nvPr>
+        </p:nvSpPr>
+        <p:spPr>
+          <a:xfrm>
+            <a:off x="6231960" y="3682080"/>
+            <a:ext cx="5354280" cy="1896840"/>
+          </a:xfrm>
+          <a:prstGeom prst="rect">
+            <a:avLst/>
+          </a:prstGeom>
+          <a:noFill/>
+          <a:ln w="0">
+            <a:noFill/>
+          </a:ln>
+        </p:spPr>
+        <p:txBody>
+          <a:bodyPr lIns="0" rIns="0" tIns="0" bIns="0" anchor="t">
+            <a:normAutofit/>
+          </a:bodyPr>
+          <a:p>
+            <a:endParaRPr b="0" lang="en-HK" sz="3200" spc="-1" strike="noStrike">
+              <a:latin typeface="Arial"/>
+            </a:endParaRPr>
+          </a:p>
+        </p:txBody>
+      </p:sp>
+    </p:spTree>
+  </p:cSld>
+</p:sldLayout>
+</file>
+
+<file path=ppt/slideLayouts/slideLayout21.xml><?xml version="1.0" encoding="utf-8"?>
+<p:sldLayout xmlns:a="http://schemas.openxmlformats.org/drawingml/2006/main" xmlns:p="http://schemas.openxmlformats.org/presentationml/2006/main" xmlns:r="http://schemas.openxmlformats.org/officeDocument/2006/relationships" xmlns:p14="http://schemas.microsoft.com/office/powerpoint/2010/main" xmlns:p15="http://schemas.microsoft.com/office/powerpoint/2012/main" xmlns:mc="http://schemas.openxmlformats.org/markup-compatibility/2006" type="twoObjOverTx" preserve="1">
+  <p:cSld name="Title, 2 Content over Content">
+    <p:spTree>
+      <p:nvGrpSpPr>
+        <p:cNvPr id="1" name=""/>
+        <p:cNvGrpSpPr/>
+        <p:nvPr/>
+      </p:nvGrpSpPr>
+      <p:grpSpPr>
+        <a:xfrm>
+          <a:off x="0" y="0"/>
+          <a:ext cx="0" cy="0"/>
+          <a:chOff x="0" y="0"/>
+          <a:chExt cx="0" cy="0"/>
+        </a:xfrm>
+      </p:grpSpPr>
+      <p:sp>
+        <p:nvSpPr>
+          <p:cNvPr id="57" name="PlaceHolder 1"/>
+          <p:cNvSpPr>
+            <a:spLocks noGrp="1"/>
+          </p:cNvSpPr>
+          <p:nvPr>
+            <p:ph type="title"/>
+          </p:nvPr>
+        </p:nvSpPr>
+        <p:spPr>
+          <a:xfrm>
+            <a:off x="609480" y="273600"/>
+            <a:ext cx="10972440" cy="1144800"/>
+          </a:xfrm>
+          <a:prstGeom prst="rect">
+            <a:avLst/>
+          </a:prstGeom>
+          <a:noFill/>
+          <a:ln w="0">
+            <a:noFill/>
+          </a:ln>
+        </p:spPr>
+        <p:txBody>
+          <a:bodyPr lIns="0" rIns="0" tIns="0" bIns="0" anchor="ctr">
+            <a:noAutofit/>
+          </a:bodyPr>
+          <a:p>
+            <a:pPr algn="ctr">
+              <a:buNone/>
+            </a:pPr>
+            <a:endParaRPr b="0" lang="en-HK" sz="4400" spc="-1" strike="noStrike">
+              <a:latin typeface="Arial"/>
+            </a:endParaRPr>
+          </a:p>
+        </p:txBody>
+      </p:sp>
+      <p:sp>
+        <p:nvSpPr>
+          <p:cNvPr id="58" name="PlaceHolder 2"/>
+          <p:cNvSpPr>
+            <a:spLocks noGrp="1"/>
+          </p:cNvSpPr>
+          <p:nvPr>
+            <p:ph/>
+          </p:nvPr>
+        </p:nvSpPr>
+        <p:spPr>
+          <a:xfrm>
+            <a:off x="609480" y="1604520"/>
+            <a:ext cx="5354280" cy="1896840"/>
+          </a:xfrm>
+          <a:prstGeom prst="rect">
+            <a:avLst/>
+          </a:prstGeom>
+          <a:noFill/>
+          <a:ln w="0">
+            <a:noFill/>
+          </a:ln>
+        </p:spPr>
+        <p:txBody>
+          <a:bodyPr lIns="0" rIns="0" tIns="0" bIns="0" anchor="t">
+            <a:normAutofit/>
+          </a:bodyPr>
+          <a:p>
+            <a:endParaRPr b="0" lang="en-HK" sz="3200" spc="-1" strike="noStrike">
+              <a:latin typeface="Arial"/>
+            </a:endParaRPr>
+          </a:p>
+        </p:txBody>
+      </p:sp>
+      <p:sp>
+        <p:nvSpPr>
+          <p:cNvPr id="59" name="PlaceHolder 3"/>
+          <p:cNvSpPr>
+            <a:spLocks noGrp="1"/>
+          </p:cNvSpPr>
+          <p:nvPr>
+            <p:ph/>
+          </p:nvPr>
+        </p:nvSpPr>
+        <p:spPr>
+          <a:xfrm>
+            <a:off x="6231960" y="1604520"/>
+            <a:ext cx="5354280" cy="1896840"/>
+          </a:xfrm>
+          <a:prstGeom prst="rect">
+            <a:avLst/>
+          </a:prstGeom>
+          <a:noFill/>
+          <a:ln w="0">
+            <a:noFill/>
+          </a:ln>
+        </p:spPr>
+        <p:txBody>
+          <a:bodyPr lIns="0" rIns="0" tIns="0" bIns="0" anchor="t">
+            <a:normAutofit/>
+          </a:bodyPr>
+          <a:p>
+            <a:endParaRPr b="0" lang="en-HK" sz="3200" spc="-1" strike="noStrike">
+              <a:latin typeface="Arial"/>
+            </a:endParaRPr>
+          </a:p>
+        </p:txBody>
+      </p:sp>
+      <p:sp>
+        <p:nvSpPr>
+          <p:cNvPr id="60" name="PlaceHolder 4"/>
+          <p:cNvSpPr>
+            <a:spLocks noGrp="1"/>
+          </p:cNvSpPr>
+          <p:nvPr>
+            <p:ph/>
+          </p:nvPr>
+        </p:nvSpPr>
+        <p:spPr>
+          <a:xfrm>
+            <a:off x="609480" y="3682080"/>
+            <a:ext cx="10972440" cy="1896840"/>
+          </a:xfrm>
+          <a:prstGeom prst="rect">
+            <a:avLst/>
+          </a:prstGeom>
+          <a:noFill/>
+          <a:ln w="0">
+            <a:noFill/>
+          </a:ln>
+        </p:spPr>
+        <p:txBody>
+          <a:bodyPr lIns="0" rIns="0" tIns="0" bIns="0" anchor="t">
+            <a:normAutofit/>
+          </a:bodyPr>
+          <a:p>
+            <a:endParaRPr b="0" lang="en-HK" sz="3200" spc="-1" strike="noStrike">
+              <a:latin typeface="Arial"/>
+            </a:endParaRPr>
+          </a:p>
+        </p:txBody>
+      </p:sp>
+    </p:spTree>
+  </p:cSld>
+</p:sldLayout>
+</file>
+
+<file path=ppt/slideLayouts/slideLayout22.xml><?xml version="1.0" encoding="utf-8"?>
+<p:sldLayout xmlns:a="http://schemas.openxmlformats.org/drawingml/2006/main" xmlns:p="http://schemas.openxmlformats.org/presentationml/2006/main" xmlns:r="http://schemas.openxmlformats.org/officeDocument/2006/relationships" xmlns:p14="http://schemas.microsoft.com/office/powerpoint/2010/main" xmlns:p15="http://schemas.microsoft.com/office/powerpoint/2012/main" xmlns:mc="http://schemas.openxmlformats.org/markup-compatibility/2006" type="objOverTx" preserve="1">
+  <p:cSld name="Title, Content over Content">
+    <p:spTree>
+      <p:nvGrpSpPr>
+        <p:cNvPr id="1" name=""/>
+        <p:cNvGrpSpPr/>
+        <p:nvPr/>
+      </p:nvGrpSpPr>
+      <p:grpSpPr>
+        <a:xfrm>
+          <a:off x="0" y="0"/>
+          <a:ext cx="0" cy="0"/>
+          <a:chOff x="0" y="0"/>
+          <a:chExt cx="0" cy="0"/>
+        </a:xfrm>
+      </p:grpSpPr>
+      <p:sp>
+        <p:nvSpPr>
+          <p:cNvPr id="61" name="PlaceHolder 1"/>
+          <p:cNvSpPr>
+            <a:spLocks noGrp="1"/>
+          </p:cNvSpPr>
+          <p:nvPr>
+            <p:ph type="title"/>
+          </p:nvPr>
+        </p:nvSpPr>
+        <p:spPr>
+          <a:xfrm>
+            <a:off x="609480" y="273600"/>
+            <a:ext cx="10972440" cy="1144800"/>
+          </a:xfrm>
+          <a:prstGeom prst="rect">
+            <a:avLst/>
+          </a:prstGeom>
+          <a:noFill/>
+          <a:ln w="0">
+            <a:noFill/>
+          </a:ln>
+        </p:spPr>
+        <p:txBody>
+          <a:bodyPr lIns="0" rIns="0" tIns="0" bIns="0" anchor="ctr">
+            <a:noAutofit/>
+          </a:bodyPr>
+          <a:p>
+            <a:pPr algn="ctr">
+              <a:buNone/>
+            </a:pPr>
+            <a:endParaRPr b="0" lang="en-HK" sz="4400" spc="-1" strike="noStrike">
+              <a:latin typeface="Arial"/>
+            </a:endParaRPr>
+          </a:p>
+        </p:txBody>
+      </p:sp>
+      <p:sp>
+        <p:nvSpPr>
+          <p:cNvPr id="62" name="PlaceHolder 2"/>
+          <p:cNvSpPr>
+            <a:spLocks noGrp="1"/>
+          </p:cNvSpPr>
+          <p:nvPr>
+            <p:ph/>
+          </p:nvPr>
+        </p:nvSpPr>
+        <p:spPr>
+          <a:xfrm>
+            <a:off x="609480" y="1604520"/>
+            <a:ext cx="10972440" cy="1896840"/>
+          </a:xfrm>
+          <a:prstGeom prst="rect">
+            <a:avLst/>
+          </a:prstGeom>
+          <a:noFill/>
+          <a:ln w="0">
+            <a:noFill/>
+          </a:ln>
+        </p:spPr>
+        <p:txBody>
+          <a:bodyPr lIns="0" rIns="0" tIns="0" bIns="0" anchor="t">
+            <a:normAutofit/>
+          </a:bodyPr>
+          <a:p>
+            <a:endParaRPr b="0" lang="en-HK" sz="3200" spc="-1" strike="noStrike">
+              <a:latin typeface="Arial"/>
+            </a:endParaRPr>
+          </a:p>
+        </p:txBody>
+      </p:sp>
+      <p:sp>
+        <p:nvSpPr>
+          <p:cNvPr id="63" name="PlaceHolder 3"/>
+          <p:cNvSpPr>
+            <a:spLocks noGrp="1"/>
+          </p:cNvSpPr>
+          <p:nvPr>
+            <p:ph/>
+          </p:nvPr>
+        </p:nvSpPr>
+        <p:spPr>
+          <a:xfrm>
+            <a:off x="609480" y="3682080"/>
+            <a:ext cx="10972440" cy="1896840"/>
+          </a:xfrm>
+          <a:prstGeom prst="rect">
+            <a:avLst/>
+          </a:prstGeom>
+          <a:noFill/>
+          <a:ln w="0">
+            <a:noFill/>
+          </a:ln>
+        </p:spPr>
+        <p:txBody>
+          <a:bodyPr lIns="0" rIns="0" tIns="0" bIns="0" anchor="t">
+            <a:normAutofit/>
+          </a:bodyPr>
+          <a:p>
+            <a:endParaRPr b="0" lang="en-HK" sz="3200" spc="-1" strike="noStrike">
+              <a:latin typeface="Arial"/>
+            </a:endParaRPr>
+          </a:p>
+        </p:txBody>
+      </p:sp>
+    </p:spTree>
+  </p:cSld>
+</p:sldLayout>
+</file>
+
+<file path=ppt/slideLayouts/slideLayout23.xml><?xml version="1.0" encoding="utf-8"?>
+<p:sldLayout xmlns:a="http://schemas.openxmlformats.org/drawingml/2006/main" xmlns:p="http://schemas.openxmlformats.org/presentationml/2006/main" xmlns:r="http://schemas.openxmlformats.org/officeDocument/2006/relationships" xmlns:p14="http://schemas.microsoft.com/office/powerpoint/2010/main" xmlns:p15="http://schemas.microsoft.com/office/powerpoint/2012/main" xmlns:mc="http://schemas.openxmlformats.org/markup-compatibility/2006" type="fourObj" preserve="1">
+  <p:cSld name="Title, 4 Content">
+    <p:spTree>
+      <p:nvGrpSpPr>
+        <p:cNvPr id="1" name=""/>
+        <p:cNvGrpSpPr/>
+        <p:nvPr/>
+      </p:nvGrpSpPr>
+      <p:grpSpPr>
+        <a:xfrm>
+          <a:off x="0" y="0"/>
+          <a:ext cx="0" cy="0"/>
+          <a:chOff x="0" y="0"/>
+          <a:chExt cx="0" cy="0"/>
+        </a:xfrm>
+      </p:grpSpPr>
+      <p:sp>
+        <p:nvSpPr>
+          <p:cNvPr id="64" name="PlaceHolder 1"/>
+          <p:cNvSpPr>
+            <a:spLocks noGrp="1"/>
+          </p:cNvSpPr>
+          <p:nvPr>
+            <p:ph type="title"/>
+          </p:nvPr>
+        </p:nvSpPr>
+        <p:spPr>
+          <a:xfrm>
+            <a:off x="609480" y="273600"/>
+            <a:ext cx="10972440" cy="1144800"/>
+          </a:xfrm>
+          <a:prstGeom prst="rect">
+            <a:avLst/>
+          </a:prstGeom>
+          <a:noFill/>
+          <a:ln w="0">
+            <a:noFill/>
+          </a:ln>
+        </p:spPr>
+        <p:txBody>
+          <a:bodyPr lIns="0" rIns="0" tIns="0" bIns="0" anchor="ctr">
+            <a:noAutofit/>
+          </a:bodyPr>
+          <a:p>
+            <a:pPr algn="ctr">
+              <a:buNone/>
+            </a:pPr>
+            <a:endParaRPr b="0" lang="en-HK" sz="4400" spc="-1" strike="noStrike">
+              <a:latin typeface="Arial"/>
+            </a:endParaRPr>
+          </a:p>
+        </p:txBody>
+      </p:sp>
+      <p:sp>
+        <p:nvSpPr>
+          <p:cNvPr id="65" name="PlaceHolder 2"/>
+          <p:cNvSpPr>
+            <a:spLocks noGrp="1"/>
+          </p:cNvSpPr>
+          <p:nvPr>
+            <p:ph/>
+          </p:nvPr>
+        </p:nvSpPr>
+        <p:spPr>
+          <a:xfrm>
+            <a:off x="609480" y="1604520"/>
+            <a:ext cx="5354280" cy="1896840"/>
+          </a:xfrm>
+          <a:prstGeom prst="rect">
+            <a:avLst/>
+          </a:prstGeom>
+          <a:noFill/>
+          <a:ln w="0">
+            <a:noFill/>
+          </a:ln>
+        </p:spPr>
+        <p:txBody>
+          <a:bodyPr lIns="0" rIns="0" tIns="0" bIns="0" anchor="t">
+            <a:normAutofit/>
+          </a:bodyPr>
+          <a:p>
+            <a:endParaRPr b="0" lang="en-HK" sz="3200" spc="-1" strike="noStrike">
+              <a:latin typeface="Arial"/>
+            </a:endParaRPr>
+          </a:p>
+        </p:txBody>
+      </p:sp>
+      <p:sp>
+        <p:nvSpPr>
+          <p:cNvPr id="66" name="PlaceHolder 3"/>
+          <p:cNvSpPr>
+            <a:spLocks noGrp="1"/>
+          </p:cNvSpPr>
+          <p:nvPr>
+            <p:ph/>
+          </p:nvPr>
+        </p:nvSpPr>
+        <p:spPr>
+          <a:xfrm>
+            <a:off x="6231960" y="1604520"/>
+            <a:ext cx="5354280" cy="1896840"/>
+          </a:xfrm>
+          <a:prstGeom prst="rect">
+            <a:avLst/>
+          </a:prstGeom>
+          <a:noFill/>
+          <a:ln w="0">
+            <a:noFill/>
+          </a:ln>
+        </p:spPr>
+        <p:txBody>
+          <a:bodyPr lIns="0" rIns="0" tIns="0" bIns="0" anchor="t">
+            <a:normAutofit/>
+          </a:bodyPr>
+          <a:p>
+            <a:endParaRPr b="0" lang="en-HK" sz="3200" spc="-1" strike="noStrike">
+              <a:latin typeface="Arial"/>
+            </a:endParaRPr>
+          </a:p>
+        </p:txBody>
+      </p:sp>
+      <p:sp>
+        <p:nvSpPr>
+          <p:cNvPr id="67" name="PlaceHolder 4"/>
+          <p:cNvSpPr>
+            <a:spLocks noGrp="1"/>
+          </p:cNvSpPr>
+          <p:nvPr>
+            <p:ph/>
+          </p:nvPr>
+        </p:nvSpPr>
+        <p:spPr>
+          <a:xfrm>
+            <a:off x="609480" y="3682080"/>
+            <a:ext cx="5354280" cy="1896840"/>
+          </a:xfrm>
+          <a:prstGeom prst="rect">
+            <a:avLst/>
+          </a:prstGeom>
+          <a:noFill/>
+          <a:ln w="0">
+            <a:noFill/>
+          </a:ln>
+        </p:spPr>
+        <p:txBody>
+          <a:bodyPr lIns="0" rIns="0" tIns="0" bIns="0" anchor="t">
+            <a:normAutofit/>
+          </a:bodyPr>
+          <a:p>
+            <a:endParaRPr b="0" lang="en-HK" sz="3200" spc="-1" strike="noStrike">
+              <a:latin typeface="Arial"/>
+            </a:endParaRPr>
+          </a:p>
+        </p:txBody>
+      </p:sp>
+      <p:sp>
+        <p:nvSpPr>
+          <p:cNvPr id="68" name="PlaceHolder 5"/>
+          <p:cNvSpPr>
+            <a:spLocks noGrp="1"/>
+          </p:cNvSpPr>
+          <p:nvPr>
+            <p:ph/>
+          </p:nvPr>
+        </p:nvSpPr>
+        <p:spPr>
+          <a:xfrm>
+            <a:off x="6231960" y="3682080"/>
+            <a:ext cx="5354280" cy="1896840"/>
+          </a:xfrm>
+          <a:prstGeom prst="rect">
+            <a:avLst/>
+          </a:prstGeom>
+          <a:noFill/>
+          <a:ln w="0">
+            <a:noFill/>
+          </a:ln>
+        </p:spPr>
+        <p:txBody>
+          <a:bodyPr lIns="0" rIns="0" tIns="0" bIns="0" anchor="t">
+            <a:normAutofit/>
+          </a:bodyPr>
+          <a:p>
+            <a:endParaRPr b="0" lang="en-HK" sz="3200" spc="-1" strike="noStrike">
+              <a:latin typeface="Arial"/>
+            </a:endParaRPr>
+          </a:p>
+        </p:txBody>
+      </p:sp>
+    </p:spTree>
+  </p:cSld>
+</p:sldLayout>
+</file>
+
+<file path=ppt/slideLayouts/slideLayout24.xml><?xml version="1.0" encoding="utf-8"?>
+<p:sldLayout xmlns:a="http://schemas.openxmlformats.org/drawingml/2006/main" xmlns:p="http://schemas.openxmlformats.org/presentationml/2006/main" xmlns:r="http://schemas.openxmlformats.org/officeDocument/2006/relationships" xmlns:p14="http://schemas.microsoft.com/office/powerpoint/2010/main" xmlns:p15="http://schemas.microsoft.com/office/powerpoint/2012/main" xmlns:mc="http://schemas.openxmlformats.org/markup-compatibility/2006" type="blank" preserve="1">
+  <p:cSld name="Title, 6 Content">
+    <p:spTree>
+      <p:nvGrpSpPr>
+        <p:cNvPr id="1" name=""/>
+        <p:cNvGrpSpPr/>
+        <p:nvPr/>
+      </p:nvGrpSpPr>
+      <p:grpSpPr>
+        <a:xfrm>
+          <a:off x="0" y="0"/>
+          <a:ext cx="0" cy="0"/>
+          <a:chOff x="0" y="0"/>
+          <a:chExt cx="0" cy="0"/>
+        </a:xfrm>
+      </p:grpSpPr>
+      <p:sp>
+        <p:nvSpPr>
+          <p:cNvPr id="69" name="PlaceHolder 1"/>
+          <p:cNvSpPr>
+            <a:spLocks noGrp="1"/>
+          </p:cNvSpPr>
+          <p:nvPr>
+            <p:ph type="title"/>
+          </p:nvPr>
+        </p:nvSpPr>
+        <p:spPr>
+          <a:xfrm>
+            <a:off x="609480" y="273600"/>
+            <a:ext cx="10972440" cy="1144800"/>
+          </a:xfrm>
+          <a:prstGeom prst="rect">
+            <a:avLst/>
+          </a:prstGeom>
+          <a:noFill/>
+          <a:ln w="0">
+            <a:noFill/>
+          </a:ln>
+        </p:spPr>
+        <p:txBody>
+          <a:bodyPr lIns="0" rIns="0" tIns="0" bIns="0" anchor="ctr">
+            <a:noAutofit/>
+          </a:bodyPr>
+          <a:p>
+            <a:pPr algn="ctr">
+              <a:buNone/>
+            </a:pPr>
+            <a:endParaRPr b="0" lang="en-HK" sz="4400" spc="-1" strike="noStrike">
+              <a:latin typeface="Arial"/>
+            </a:endParaRPr>
+          </a:p>
+        </p:txBody>
+      </p:sp>
+      <p:sp>
+        <p:nvSpPr>
+          <p:cNvPr id="70" name="PlaceHolder 2"/>
+          <p:cNvSpPr>
+            <a:spLocks noGrp="1"/>
+          </p:cNvSpPr>
+          <p:nvPr>
+            <p:ph/>
+          </p:nvPr>
+        </p:nvSpPr>
+        <p:spPr>
+          <a:xfrm>
+            <a:off x="609480" y="1604520"/>
+            <a:ext cx="3533040" cy="1896840"/>
+          </a:xfrm>
+          <a:prstGeom prst="rect">
+            <a:avLst/>
+          </a:prstGeom>
+          <a:noFill/>
+          <a:ln w="0">
+            <a:noFill/>
+          </a:ln>
+        </p:spPr>
+        <p:txBody>
+          <a:bodyPr lIns="0" rIns="0" tIns="0" bIns="0" anchor="t">
+            <a:normAutofit/>
+          </a:bodyPr>
+          <a:p>
+            <a:endParaRPr b="0" lang="en-HK" sz="3200" spc="-1" strike="noStrike">
+              <a:latin typeface="Arial"/>
+            </a:endParaRPr>
+          </a:p>
+        </p:txBody>
+      </p:sp>
+      <p:sp>
+        <p:nvSpPr>
+          <p:cNvPr id="71" name="PlaceHolder 3"/>
+          <p:cNvSpPr>
+            <a:spLocks noGrp="1"/>
+          </p:cNvSpPr>
+          <p:nvPr>
+            <p:ph/>
+          </p:nvPr>
+        </p:nvSpPr>
+        <p:spPr>
+          <a:xfrm>
+            <a:off x="4319640" y="1604520"/>
+            <a:ext cx="3533040" cy="1896840"/>
+          </a:xfrm>
+          <a:prstGeom prst="rect">
+            <a:avLst/>
+          </a:prstGeom>
+          <a:noFill/>
+          <a:ln w="0">
+            <a:noFill/>
+          </a:ln>
+        </p:spPr>
+        <p:txBody>
+          <a:bodyPr lIns="0" rIns="0" tIns="0" bIns="0" anchor="t">
+            <a:normAutofit/>
+          </a:bodyPr>
+          <a:p>
+            <a:endParaRPr b="0" lang="en-HK" sz="3200" spc="-1" strike="noStrike">
+              <a:latin typeface="Arial"/>
+            </a:endParaRPr>
+          </a:p>
+        </p:txBody>
+      </p:sp>
+      <p:sp>
+        <p:nvSpPr>
+          <p:cNvPr id="72" name="PlaceHolder 4"/>
+          <p:cNvSpPr>
+            <a:spLocks noGrp="1"/>
+          </p:cNvSpPr>
+          <p:nvPr>
+            <p:ph/>
+          </p:nvPr>
+        </p:nvSpPr>
+        <p:spPr>
+          <a:xfrm>
+            <a:off x="8029800" y="1604520"/>
+            <a:ext cx="3533040" cy="1896840"/>
+          </a:xfrm>
+          <a:prstGeom prst="rect">
+            <a:avLst/>
+          </a:prstGeom>
+          <a:noFill/>
+          <a:ln w="0">
+            <a:noFill/>
+          </a:ln>
+        </p:spPr>
+        <p:txBody>
+          <a:bodyPr lIns="0" rIns="0" tIns="0" bIns="0" anchor="t">
+            <a:normAutofit/>
+          </a:bodyPr>
+          <a:p>
+            <a:endParaRPr b="0" lang="en-HK" sz="3200" spc="-1" strike="noStrike">
+              <a:latin typeface="Arial"/>
+            </a:endParaRPr>
+          </a:p>
+        </p:txBody>
+      </p:sp>
+      <p:sp>
+        <p:nvSpPr>
+          <p:cNvPr id="73" name="PlaceHolder 5"/>
+          <p:cNvSpPr>
+            <a:spLocks noGrp="1"/>
+          </p:cNvSpPr>
+          <p:nvPr>
+            <p:ph/>
+          </p:nvPr>
+        </p:nvSpPr>
+        <p:spPr>
+          <a:xfrm>
+            <a:off x="609480" y="3682080"/>
+            <a:ext cx="3533040" cy="1896840"/>
+          </a:xfrm>
+          <a:prstGeom prst="rect">
+            <a:avLst/>
+          </a:prstGeom>
+          <a:noFill/>
+          <a:ln w="0">
+            <a:noFill/>
+          </a:ln>
+        </p:spPr>
+        <p:txBody>
+          <a:bodyPr lIns="0" rIns="0" tIns="0" bIns="0" anchor="t">
+            <a:normAutofit/>
+          </a:bodyPr>
+          <a:p>
+            <a:endParaRPr b="0" lang="en-HK" sz="3200" spc="-1" strike="noStrike">
+              <a:latin typeface="Arial"/>
+            </a:endParaRPr>
+          </a:p>
+        </p:txBody>
+      </p:sp>
+      <p:sp>
+        <p:nvSpPr>
+          <p:cNvPr id="74" name="PlaceHolder 6"/>
+          <p:cNvSpPr>
+            <a:spLocks noGrp="1"/>
+          </p:cNvSpPr>
+          <p:nvPr>
+            <p:ph/>
+          </p:nvPr>
+        </p:nvSpPr>
+        <p:spPr>
+          <a:xfrm>
+            <a:off x="4319640" y="3682080"/>
+            <a:ext cx="3533040" cy="1896840"/>
+          </a:xfrm>
+          <a:prstGeom prst="rect">
+            <a:avLst/>
+          </a:prstGeom>
+          <a:noFill/>
+          <a:ln w="0">
+            <a:noFill/>
+          </a:ln>
+        </p:spPr>
+        <p:txBody>
+          <a:bodyPr lIns="0" rIns="0" tIns="0" bIns="0" anchor="t">
+            <a:normAutofit/>
+          </a:bodyPr>
+          <a:p>
+            <a:endParaRPr b="0" lang="en-HK" sz="3200" spc="-1" strike="noStrike">
+              <a:latin typeface="Arial"/>
+            </a:endParaRPr>
+          </a:p>
+        </p:txBody>
+      </p:sp>
+      <p:sp>
+        <p:nvSpPr>
+          <p:cNvPr id="75" name="PlaceHolder 7"/>
+          <p:cNvSpPr>
+            <a:spLocks noGrp="1"/>
+          </p:cNvSpPr>
+          <p:nvPr>
+            <p:ph/>
+          </p:nvPr>
+        </p:nvSpPr>
+        <p:spPr>
+          <a:xfrm>
+            <a:off x="8029800" y="3682080"/>
+            <a:ext cx="3533040" cy="1896840"/>
+          </a:xfrm>
+          <a:prstGeom prst="rect">
+            <a:avLst/>
+          </a:prstGeom>
+          <a:noFill/>
+          <a:ln w="0">
+            <a:noFill/>
+          </a:ln>
+        </p:spPr>
+        <p:txBody>
+          <a:bodyPr lIns="0" rIns="0" tIns="0" bIns="0" anchor="t">
+            <a:normAutofit/>
+          </a:bodyPr>
+          <a:p>
             <a:endParaRPr b="0" lang="en-HK" sz="3200" spc="-1" strike="noStrike">
               <a:latin typeface="Arial"/>
             </a:endParaRPr>
@@ -4199,7 +5724,7 @@
         <p:spPr>
           <a:xfrm>
             <a:off x="609480" y="273600"/>
-            <a:ext cx="10972440" cy="1144800"/>
+            <a:ext cx="10972080" cy="1144440"/>
           </a:xfrm>
           <a:prstGeom prst="rect">
             <a:avLst/>
@@ -4214,16 +5739,13 @@
             <a:noAutofit/>
           </a:bodyPr>
           <a:p>
-            <a:pPr algn="ctr">
-              <a:buNone/>
-            </a:pPr>
-            <a:r>
-              <a:rPr b="0" lang="en-HK" sz="4400" spc="-1" strike="noStrike">
+            <a:r>
+              <a:rPr b="0" lang="en-HK" sz="1800" spc="-1" strike="noStrike">
                 <a:latin typeface="Arial"/>
               </a:rPr>
               <a:t>Click to edit the title text format</a:t>
             </a:r>
-            <a:endParaRPr b="0" lang="en-HK" sz="4400" spc="-1" strike="noStrike">
+            <a:endParaRPr b="0" lang="en-HK" sz="1800" spc="-1" strike="noStrike">
               <a:latin typeface="Arial"/>
             </a:endParaRPr>
           </a:p>
@@ -4428,6 +5950,276 @@
     <p:sldLayoutId id="2147483658" r:id="rId11"/>
     <p:sldLayoutId id="2147483659" r:id="rId12"/>
     <p:sldLayoutId id="2147483660" r:id="rId13"/>
+  </p:sldLayoutIdLst>
+</p:sldMaster>
+</file>
+
+<file path=ppt/slideMasters/slideMaster2.xml><?xml version="1.0" encoding="utf-8"?>
+<p:sldMaster xmlns:a="http://schemas.openxmlformats.org/drawingml/2006/main" xmlns:p="http://schemas.openxmlformats.org/presentationml/2006/main" xmlns:r="http://schemas.openxmlformats.org/officeDocument/2006/relationships" xmlns:p14="http://schemas.microsoft.com/office/powerpoint/2010/main" xmlns:p15="http://schemas.microsoft.com/office/powerpoint/2012/main" xmlns:mc="http://schemas.openxmlformats.org/markup-compatibility/2006">
+  <p:cSld>
+    <p:bg>
+      <p:bgPr>
+        <a:solidFill>
+          <a:srgbClr val="ffffff"/>
+        </a:solidFill>
+      </p:bgPr>
+    </p:bg>
+    <p:spTree>
+      <p:nvGrpSpPr>
+        <p:cNvPr id="1" name=""/>
+        <p:cNvGrpSpPr/>
+        <p:nvPr/>
+      </p:nvGrpSpPr>
+      <p:grpSpPr>
+        <a:xfrm>
+          <a:off x="0" y="0"/>
+          <a:ext cx="0" cy="0"/>
+          <a:chOff x="0" y="0"/>
+          <a:chExt cx="0" cy="0"/>
+        </a:xfrm>
+      </p:grpSpPr>
+      <p:sp>
+        <p:nvSpPr>
+          <p:cNvPr id="38" name="PlaceHolder 1"/>
+          <p:cNvSpPr>
+            <a:spLocks noGrp="1"/>
+          </p:cNvSpPr>
+          <p:nvPr>
+            <p:ph type="title"/>
+          </p:nvPr>
+        </p:nvSpPr>
+        <p:spPr>
+          <a:xfrm>
+            <a:off x="609480" y="273600"/>
+            <a:ext cx="10972440" cy="1144800"/>
+          </a:xfrm>
+          <a:prstGeom prst="rect">
+            <a:avLst/>
+          </a:prstGeom>
+          <a:noFill/>
+          <a:ln w="0">
+            <a:noFill/>
+          </a:ln>
+        </p:spPr>
+        <p:txBody>
+          <a:bodyPr lIns="0" rIns="0" tIns="0" bIns="0" anchor="ctr">
+            <a:noAutofit/>
+          </a:bodyPr>
+          <a:p>
+            <a:pPr algn="ctr">
+              <a:buNone/>
+            </a:pPr>
+            <a:r>
+              <a:rPr b="0" lang="en-HK" sz="4400" spc="-1" strike="noStrike">
+                <a:latin typeface="Arial"/>
+              </a:rPr>
+              <a:t>Click to edit the title text format</a:t>
+            </a:r>
+            <a:endParaRPr b="0" lang="en-HK" sz="4400" spc="-1" strike="noStrike">
+              <a:latin typeface="Arial"/>
+            </a:endParaRPr>
+          </a:p>
+        </p:txBody>
+      </p:sp>
+      <p:sp>
+        <p:nvSpPr>
+          <p:cNvPr id="39" name="PlaceHolder 2"/>
+          <p:cNvSpPr>
+            <a:spLocks noGrp="1"/>
+          </p:cNvSpPr>
+          <p:nvPr>
+            <p:ph type="body"/>
+          </p:nvPr>
+        </p:nvSpPr>
+        <p:spPr>
+          <a:xfrm>
+            <a:off x="609480" y="1604520"/>
+            <a:ext cx="10972440" cy="3977280"/>
+          </a:xfrm>
+          <a:prstGeom prst="rect">
+            <a:avLst/>
+          </a:prstGeom>
+          <a:noFill/>
+          <a:ln w="0">
+            <a:noFill/>
+          </a:ln>
+        </p:spPr>
+        <p:txBody>
+          <a:bodyPr lIns="0" rIns="0" tIns="0" bIns="0" anchor="t">
+            <a:normAutofit/>
+          </a:bodyPr>
+          <a:p>
+            <a:pPr marL="432000" indent="-324000">
+              <a:spcBef>
+                <a:spcPts val="1417"/>
+              </a:spcBef>
+              <a:buClr>
+                <a:srgbClr val="000000"/>
+              </a:buClr>
+              <a:buSzPct val="45000"/>
+              <a:buFont typeface="Wingdings" charset="2"/>
+              <a:buChar char=""/>
+            </a:pPr>
+            <a:r>
+              <a:rPr b="0" lang="en-HK" sz="3200" spc="-1" strike="noStrike">
+                <a:latin typeface="Arial"/>
+              </a:rPr>
+              <a:t>Click to edit the outline text format</a:t>
+            </a:r>
+            <a:endParaRPr b="0" lang="en-HK" sz="3200" spc="-1" strike="noStrike">
+              <a:latin typeface="Arial"/>
+            </a:endParaRPr>
+          </a:p>
+          <a:p>
+            <a:pPr lvl="1" marL="864000" indent="-324000">
+              <a:spcBef>
+                <a:spcPts val="1134"/>
+              </a:spcBef>
+              <a:buClr>
+                <a:srgbClr val="000000"/>
+              </a:buClr>
+              <a:buSzPct val="75000"/>
+              <a:buFont typeface="Symbol" charset="2"/>
+              <a:buChar char=""/>
+            </a:pPr>
+            <a:r>
+              <a:rPr b="0" lang="en-HK" sz="2800" spc="-1" strike="noStrike">
+                <a:latin typeface="Arial"/>
+              </a:rPr>
+              <a:t>Second Outline Level</a:t>
+            </a:r>
+            <a:endParaRPr b="0" lang="en-HK" sz="2800" spc="-1" strike="noStrike">
+              <a:latin typeface="Arial"/>
+            </a:endParaRPr>
+          </a:p>
+          <a:p>
+            <a:pPr lvl="2" marL="1296000" indent="-288000">
+              <a:spcBef>
+                <a:spcPts val="850"/>
+              </a:spcBef>
+              <a:buClr>
+                <a:srgbClr val="000000"/>
+              </a:buClr>
+              <a:buSzPct val="45000"/>
+              <a:buFont typeface="Wingdings" charset="2"/>
+              <a:buChar char=""/>
+            </a:pPr>
+            <a:r>
+              <a:rPr b="0" lang="en-HK" sz="2400" spc="-1" strike="noStrike">
+                <a:latin typeface="Arial"/>
+              </a:rPr>
+              <a:t>Third Outline Level</a:t>
+            </a:r>
+            <a:endParaRPr b="0" lang="en-HK" sz="2400" spc="-1" strike="noStrike">
+              <a:latin typeface="Arial"/>
+            </a:endParaRPr>
+          </a:p>
+          <a:p>
+            <a:pPr lvl="3" marL="1728000" indent="-216000">
+              <a:spcBef>
+                <a:spcPts val="567"/>
+              </a:spcBef>
+              <a:buClr>
+                <a:srgbClr val="000000"/>
+              </a:buClr>
+              <a:buSzPct val="75000"/>
+              <a:buFont typeface="Symbol" charset="2"/>
+              <a:buChar char=""/>
+            </a:pPr>
+            <a:r>
+              <a:rPr b="0" lang="en-HK" sz="2000" spc="-1" strike="noStrike">
+                <a:latin typeface="Arial"/>
+              </a:rPr>
+              <a:t>Fourth Outline Level</a:t>
+            </a:r>
+            <a:endParaRPr b="0" lang="en-HK" sz="2000" spc="-1" strike="noStrike">
+              <a:latin typeface="Arial"/>
+            </a:endParaRPr>
+          </a:p>
+          <a:p>
+            <a:pPr lvl="4" marL="2160000" indent="-216000">
+              <a:spcBef>
+                <a:spcPts val="283"/>
+              </a:spcBef>
+              <a:buClr>
+                <a:srgbClr val="000000"/>
+              </a:buClr>
+              <a:buSzPct val="45000"/>
+              <a:buFont typeface="Wingdings" charset="2"/>
+              <a:buChar char=""/>
+            </a:pPr>
+            <a:r>
+              <a:rPr b="0" lang="en-HK" sz="2000" spc="-1" strike="noStrike">
+                <a:latin typeface="Arial"/>
+              </a:rPr>
+              <a:t>Fifth Outline Level</a:t>
+            </a:r>
+            <a:endParaRPr b="0" lang="en-HK" sz="2000" spc="-1" strike="noStrike">
+              <a:latin typeface="Arial"/>
+            </a:endParaRPr>
+          </a:p>
+          <a:p>
+            <a:pPr lvl="5" marL="2592000" indent="-216000">
+              <a:spcBef>
+                <a:spcPts val="283"/>
+              </a:spcBef>
+              <a:buClr>
+                <a:srgbClr val="000000"/>
+              </a:buClr>
+              <a:buSzPct val="45000"/>
+              <a:buFont typeface="Wingdings" charset="2"/>
+              <a:buChar char=""/>
+            </a:pPr>
+            <a:r>
+              <a:rPr b="0" lang="en-HK" sz="2000" spc="-1" strike="noStrike">
+                <a:latin typeface="Arial"/>
+              </a:rPr>
+              <a:t>Sixth Outline Level</a:t>
+            </a:r>
+            <a:endParaRPr b="0" lang="en-HK" sz="2000" spc="-1" strike="noStrike">
+              <a:latin typeface="Arial"/>
+            </a:endParaRPr>
+          </a:p>
+          <a:p>
+            <a:pPr lvl="6" marL="3024000" indent="-216000">
+              <a:spcBef>
+                <a:spcPts val="283"/>
+              </a:spcBef>
+              <a:buClr>
+                <a:srgbClr val="000000"/>
+              </a:buClr>
+              <a:buSzPct val="45000"/>
+              <a:buFont typeface="Wingdings" charset="2"/>
+              <a:buChar char=""/>
+            </a:pPr>
+            <a:r>
+              <a:rPr b="0" lang="en-HK" sz="2000" spc="-1" strike="noStrike">
+                <a:latin typeface="Arial"/>
+              </a:rPr>
+              <a:t>Seventh Outline Level</a:t>
+            </a:r>
+            <a:endParaRPr b="0" lang="en-HK" sz="2000" spc="-1" strike="noStrike">
+              <a:latin typeface="Arial"/>
+            </a:endParaRPr>
+          </a:p>
+        </p:txBody>
+      </p:sp>
+    </p:spTree>
+  </p:cSld>
+  <p:clrMap bg1="lt1" bg2="lt2" tx1="dk1" tx2="dk2" accent1="accent1" accent2="accent2" accent3="accent3" accent4="accent4" accent5="accent5" accent6="accent6" hlink="hlink" folHlink="folHlink"/>
+  <p:sldLayoutIdLst>
+    <p:sldLayoutId id="2147483662" r:id="rId2"/>
+    <p:sldLayoutId id="2147483663" r:id="rId3"/>
+    <p:sldLayoutId id="2147483664" r:id="rId4"/>
+    <p:sldLayoutId id="2147483665" r:id="rId5"/>
+    <p:sldLayoutId id="2147483666" r:id="rId6"/>
+    <p:sldLayoutId id="2147483667" r:id="rId7"/>
+    <p:sldLayoutId id="2147483668" r:id="rId8"/>
+    <p:sldLayoutId id="2147483669" r:id="rId9"/>
+    <p:sldLayoutId id="2147483670" r:id="rId10"/>
+    <p:sldLayoutId id="2147483671" r:id="rId11"/>
+    <p:sldLayoutId id="2147483672" r:id="rId12"/>
+    <p:sldLayoutId id="2147483673" r:id="rId13"/>
   </p:sldLayoutIdLst>
 </p:sldMaster>
 </file>
@@ -4458,14 +6250,14 @@
       </p:grpSpPr>
       <p:sp>
         <p:nvSpPr>
-          <p:cNvPr id="44" name="Shape 0"/>
+          <p:cNvPr id="82" name="Shape 0"/>
           <p:cNvSpPr/>
           <p:nvPr/>
         </p:nvSpPr>
         <p:spPr>
           <a:xfrm>
             <a:off x="380880" y="1415520"/>
-            <a:ext cx="607320" cy="16920"/>
+            <a:ext cx="605880" cy="15480"/>
           </a:xfrm>
           <a:custGeom>
             <a:avLst/>
@@ -4509,19 +6301,21 @@
       </p:sp>
       <p:sp>
         <p:nvSpPr>
-          <p:cNvPr id="45" name="Text 1"/>
-          <p:cNvSpPr/>
-          <p:nvPr/>
-        </p:nvSpPr>
-        <p:spPr>
-          <a:xfrm>
-            <a:off x="1980000" y="1663200"/>
-            <a:ext cx="551520" cy="188280"/>
-          </a:xfrm>
-          <a:prstGeom prst="rect">
-            <a:avLst/>
-          </a:prstGeom>
-          <a:noFill/>
+          <p:cNvPr id="83" name="Text 1"/>
+          <p:cNvSpPr/>
+          <p:nvPr/>
+        </p:nvSpPr>
+        <p:spPr>
+          <a:xfrm>
+            <a:off x="380880" y="1663200"/>
+            <a:ext cx="2149200" cy="186840"/>
+          </a:xfrm>
+          <a:prstGeom prst="rect">
+            <a:avLst/>
+          </a:prstGeom>
+          <a:solidFill>
+            <a:srgbClr val="729fcf"/>
+          </a:solidFill>
           <a:ln w="0">
             <a:noFill/>
           </a:ln>
@@ -4544,7 +6338,7 @@
               <a:buNone/>
             </a:pPr>
             <a:r>
-              <a:rPr b="0" i="1" lang="en-US" sz="1050" spc="299" strike="noStrike">
+              <a:rPr b="0" lang="en-US" sz="1050" spc="287" strike="noStrike">
                 <a:solidFill>
                   <a:srgbClr val="86868b"/>
                 </a:solidFill>
@@ -4553,27 +6347,29 @@
               </a:rPr>
               <a:t>Probability Theory</a:t>
             </a:r>
-            <a:endParaRPr b="0" i="1" lang="en-HK" sz="1050" spc="-1" strike="noStrike">
-              <a:latin typeface="Arial"/>
-            </a:endParaRPr>
-          </a:p>
-        </p:txBody>
-      </p:sp>
-      <p:sp>
-        <p:nvSpPr>
-          <p:cNvPr id="46" name="Text 2"/>
-          <p:cNvSpPr/>
-          <p:nvPr/>
-        </p:nvSpPr>
-        <p:spPr>
-          <a:xfrm>
-            <a:off x="4140000" y="3590280"/>
-            <a:ext cx="6608160" cy="2169720"/>
-          </a:xfrm>
-          <a:prstGeom prst="rect">
-            <a:avLst/>
-          </a:prstGeom>
-          <a:noFill/>
+            <a:endParaRPr b="0" lang="en-HK" sz="1050" spc="-1" strike="noStrike">
+              <a:latin typeface="Arial"/>
+            </a:endParaRPr>
+          </a:p>
+        </p:txBody>
+      </p:sp>
+      <p:sp>
+        <p:nvSpPr>
+          <p:cNvPr id="84" name="Text 2"/>
+          <p:cNvSpPr/>
+          <p:nvPr/>
+        </p:nvSpPr>
+        <p:spPr>
+          <a:xfrm>
+            <a:off x="4140000" y="3770640"/>
+            <a:ext cx="6606720" cy="2168280"/>
+          </a:xfrm>
+          <a:prstGeom prst="rect">
+            <a:avLst/>
+          </a:prstGeom>
+          <a:solidFill>
+            <a:srgbClr val="729fcf"/>
+          </a:solidFill>
           <a:ln w="0">
             <a:noFill/>
           </a:ln>
@@ -4595,6 +6391,16 @@
               </a:lnSpc>
               <a:buNone/>
             </a:pPr>
+            <a:r>
+              <a:rPr b="0" lang="en-US" sz="9000" spc="-225" strike="noStrike">
+                <a:solidFill>
+                  <a:srgbClr val="1d1d1d"/>
+                </a:solidFill>
+                <a:latin typeface="Times New Roman"/>
+                <a:ea typeface="Liter"/>
+              </a:rPr>
+              <a:t>The</a:t>
+            </a:r>
             <a:r>
               <a:rPr b="0" i="1" lang="en-US" sz="9000" spc="-225" strike="noStrike">
                 <a:solidFill>
@@ -4603,9 +6409,9 @@
                 <a:latin typeface="Times New Roman"/>
                 <a:ea typeface="Liter"/>
               </a:rPr>
-              <a:t>The Birthday</a:t>
-            </a:r>
-            <a:endParaRPr b="0" i="1" lang="en-HK" sz="9000" spc="-1" strike="noStrike">
+              <a:t> Birthday</a:t>
+            </a:r>
+            <a:endParaRPr b="0" lang="en-HK" sz="9000" spc="-1" strike="noStrike">
               <a:latin typeface="Arial"/>
             </a:endParaRPr>
           </a:p>
@@ -4626,27 +6432,29 @@
               </a:rPr>
               <a:t>Paradox</a:t>
             </a:r>
-            <a:endParaRPr b="0" i="1" lang="en-HK" sz="9000" spc="-1" strike="noStrike">
-              <a:latin typeface="Arial"/>
-            </a:endParaRPr>
-          </a:p>
-        </p:txBody>
-      </p:sp>
-      <p:sp>
-        <p:nvSpPr>
-          <p:cNvPr id="47" name="Text 3"/>
+            <a:endParaRPr b="0" lang="en-HK" sz="9000" spc="-1" strike="noStrike">
+              <a:latin typeface="Arial"/>
+            </a:endParaRPr>
+          </a:p>
+        </p:txBody>
+      </p:sp>
+      <p:sp>
+        <p:nvSpPr>
+          <p:cNvPr id="85" name="Text 3"/>
           <p:cNvSpPr/>
           <p:nvPr/>
         </p:nvSpPr>
         <p:spPr>
           <a:xfrm>
             <a:off x="380880" y="4787640"/>
-            <a:ext cx="4264920" cy="464400"/>
-          </a:xfrm>
-          <a:prstGeom prst="rect">
-            <a:avLst/>
-          </a:prstGeom>
-          <a:noFill/>
+            <a:ext cx="4263480" cy="462960"/>
+          </a:xfrm>
+          <a:prstGeom prst="rect">
+            <a:avLst/>
+          </a:prstGeom>
+          <a:solidFill>
+            <a:srgbClr val="729fcf"/>
+          </a:solidFill>
           <a:ln w="0">
             <a:noFill/>
           </a:ln>
@@ -4668,6 +6476,16 @@
               </a:lnSpc>
               <a:buNone/>
             </a:pPr>
+            <a:r>
+              <a:rPr b="0" i="1" lang="en-US" sz="2250" spc="-1" strike="noStrike">
+                <a:solidFill>
+                  <a:srgbClr val="86868b"/>
+                </a:solidFill>
+                <a:latin typeface="Times New Roman"/>
+                <a:ea typeface="Liter"/>
+              </a:rPr>
+              <a:t>When Probability Defies Intuit</a:t>
+            </a:r>
             <a:r>
               <a:rPr b="0" lang="en-US" sz="2250" spc="-1" strike="noStrike">
                 <a:solidFill>
@@ -4676,7 +6494,7 @@
                 <a:latin typeface="Times New Roman"/>
                 <a:ea typeface="Liter"/>
               </a:rPr>
-              <a:t>When Probability Defies Intuition</a:t>
+              <a:t>ion</a:t>
             </a:r>
             <a:endParaRPr b="0" lang="en-HK" sz="2250" spc="-1" strike="noStrike">
               <a:latin typeface="Arial"/>
@@ -4686,14 +6504,14 @@
       </p:sp>
       <p:sp>
         <p:nvSpPr>
-          <p:cNvPr id="48" name="Shape 4"/>
+          <p:cNvPr id="86" name="Shape 4"/>
           <p:cNvSpPr/>
           <p:nvPr/>
         </p:nvSpPr>
         <p:spPr>
           <a:xfrm>
             <a:off x="426240" y="6296040"/>
-            <a:ext cx="126360" cy="169200"/>
+            <a:ext cx="124920" cy="167760"/>
           </a:xfrm>
           <a:custGeom>
             <a:avLst/>
@@ -4991,19 +6809,21 @@
       </p:sp>
       <p:sp>
         <p:nvSpPr>
-          <p:cNvPr id="49" name="Text 5"/>
+          <p:cNvPr id="87" name="Text 5"/>
           <p:cNvSpPr/>
           <p:nvPr/>
         </p:nvSpPr>
         <p:spPr>
           <a:xfrm>
             <a:off x="709560" y="6286680"/>
-            <a:ext cx="1559880" cy="188280"/>
-          </a:xfrm>
-          <a:prstGeom prst="rect">
-            <a:avLst/>
-          </a:prstGeom>
-          <a:noFill/>
+            <a:ext cx="1558440" cy="186840"/>
+          </a:xfrm>
+          <a:prstGeom prst="rect">
+            <a:avLst/>
+          </a:prstGeom>
+          <a:solidFill>
+            <a:srgbClr val="729fcf"/>
+          </a:solidFill>
           <a:ln w="0">
             <a:noFill/>
           </a:ln>
@@ -5043,14 +6863,14 @@
       </p:sp>
       <p:sp>
         <p:nvSpPr>
-          <p:cNvPr id="50" name="Shape 6"/>
+          <p:cNvPr id="88" name="Shape 6"/>
           <p:cNvSpPr/>
           <p:nvPr/>
         </p:nvSpPr>
         <p:spPr>
           <a:xfrm>
             <a:off x="2689200" y="6296040"/>
-            <a:ext cx="169200" cy="169200"/>
+            <a:ext cx="167760" cy="167760"/>
           </a:xfrm>
           <a:custGeom>
             <a:avLst/>
@@ -5176,19 +6996,21 @@
       </p:sp>
       <p:sp>
         <p:nvSpPr>
-          <p:cNvPr id="51" name="Text 7"/>
+          <p:cNvPr id="89" name="Text 7"/>
           <p:cNvSpPr/>
           <p:nvPr/>
         </p:nvSpPr>
         <p:spPr>
           <a:xfrm>
             <a:off x="2994120" y="6286680"/>
-            <a:ext cx="1397880" cy="188280"/>
-          </a:xfrm>
-          <a:prstGeom prst="rect">
-            <a:avLst/>
-          </a:prstGeom>
-          <a:noFill/>
+            <a:ext cx="1396440" cy="186840"/>
+          </a:xfrm>
+          <a:prstGeom prst="rect">
+            <a:avLst/>
+          </a:prstGeom>
+          <a:solidFill>
+            <a:srgbClr val="729fcf"/>
+          </a:solidFill>
           <a:ln w="0">
             <a:noFill/>
           </a:ln>
@@ -5265,14 +7087,14 @@
       </p:grpSpPr>
       <p:sp>
         <p:nvSpPr>
-          <p:cNvPr id="156" name="Text 0"/>
+          <p:cNvPr id="194" name="Text 0"/>
           <p:cNvSpPr/>
           <p:nvPr/>
         </p:nvSpPr>
         <p:spPr>
           <a:xfrm>
             <a:off x="380880" y="380880"/>
-            <a:ext cx="11485080" cy="150120"/>
+            <a:ext cx="11483640" cy="148680"/>
           </a:xfrm>
           <a:prstGeom prst="rect">
             <a:avLst/>
@@ -5300,7 +7122,7 @@
               <a:buNone/>
             </a:pPr>
             <a:r>
-              <a:rPr b="0" lang="en-US" sz="900" spc="253" strike="noStrike">
+              <a:rPr b="0" lang="en-US" sz="900" spc="242" strike="noStrike">
                 <a:solidFill>
                   <a:srgbClr val="86868b"/>
                 </a:solidFill>
@@ -5317,14 +7139,14 @@
       </p:sp>
       <p:sp>
         <p:nvSpPr>
-          <p:cNvPr id="157" name="Text 1"/>
+          <p:cNvPr id="195" name="Text 1"/>
           <p:cNvSpPr/>
           <p:nvPr/>
         </p:nvSpPr>
         <p:spPr>
           <a:xfrm>
             <a:off x="380880" y="609480"/>
-            <a:ext cx="11599200" cy="378720"/>
+            <a:ext cx="11597760" cy="377280"/>
           </a:xfrm>
           <a:prstGeom prst="rect">
             <a:avLst/>
@@ -5369,14 +7191,14 @@
       </p:sp>
       <p:sp>
         <p:nvSpPr>
-          <p:cNvPr id="158" name="Text 2"/>
+          <p:cNvPr id="196" name="Text 2"/>
           <p:cNvSpPr/>
           <p:nvPr/>
         </p:nvSpPr>
         <p:spPr>
           <a:xfrm>
             <a:off x="380880" y="1995480"/>
-            <a:ext cx="5608080" cy="559800"/>
+            <a:ext cx="5606640" cy="558360"/>
           </a:xfrm>
           <a:prstGeom prst="rect">
             <a:avLst/>
@@ -5441,14 +7263,14 @@
       </p:sp>
       <p:sp>
         <p:nvSpPr>
-          <p:cNvPr id="159" name="Shape 3"/>
+          <p:cNvPr id="197" name="Shape 3"/>
           <p:cNvSpPr/>
           <p:nvPr/>
         </p:nvSpPr>
         <p:spPr>
           <a:xfrm>
             <a:off x="385920" y="2786040"/>
-            <a:ext cx="5512680" cy="1416960"/>
+            <a:ext cx="5511240" cy="1415520"/>
           </a:xfrm>
           <a:custGeom>
             <a:avLst/>
@@ -5477,7 +7299,7 @@
             </a:pathLst>
           </a:custGeom>
           <a:noFill/>
-          <a:ln w="12700">
+          <a:ln w="12600">
             <a:solidFill>
               <a:srgbClr val="e5e5e5"/>
             </a:solidFill>
@@ -5493,14 +7315,14 @@
       </p:sp>
       <p:sp>
         <p:nvSpPr>
-          <p:cNvPr id="160" name="Text 4"/>
+          <p:cNvPr id="198" name="Text 4"/>
           <p:cNvSpPr/>
           <p:nvPr/>
         </p:nvSpPr>
         <p:spPr>
           <a:xfrm>
             <a:off x="619200" y="3019320"/>
-            <a:ext cx="5112720" cy="188280"/>
+            <a:ext cx="5111280" cy="186840"/>
           </a:xfrm>
           <a:prstGeom prst="rect">
             <a:avLst/>
@@ -5528,7 +7350,7 @@
               <a:buNone/>
             </a:pPr>
             <a:r>
-              <a:rPr b="0" lang="en-US" sz="1050" spc="194" strike="noStrike">
+              <a:rPr b="0" lang="en-US" sz="1050" spc="182" strike="noStrike">
                 <a:solidFill>
                   <a:srgbClr val="86868b"/>
                 </a:solidFill>
@@ -5545,14 +7367,14 @@
       </p:sp>
       <p:sp>
         <p:nvSpPr>
-          <p:cNvPr id="161" name="Text 5"/>
+          <p:cNvPr id="199" name="Text 5"/>
           <p:cNvSpPr/>
           <p:nvPr/>
         </p:nvSpPr>
         <p:spPr>
           <a:xfrm>
             <a:off x="619200" y="3324240"/>
-            <a:ext cx="5189040" cy="340920"/>
+            <a:ext cx="5187600" cy="339480"/>
           </a:xfrm>
           <a:prstGeom prst="rect">
             <a:avLst/>
@@ -5597,14 +7419,14 @@
       </p:sp>
       <p:sp>
         <p:nvSpPr>
-          <p:cNvPr id="162" name="Text 6"/>
+          <p:cNvPr id="200" name="Text 6"/>
           <p:cNvSpPr/>
           <p:nvPr/>
         </p:nvSpPr>
         <p:spPr>
           <a:xfrm>
             <a:off x="619200" y="3743280"/>
-            <a:ext cx="5122440" cy="226440"/>
+            <a:ext cx="5121000" cy="225000"/>
           </a:xfrm>
           <a:prstGeom prst="rect">
             <a:avLst/>
@@ -5649,14 +7471,14 @@
       </p:sp>
       <p:sp>
         <p:nvSpPr>
-          <p:cNvPr id="163" name="Shape 7"/>
+          <p:cNvPr id="201" name="Shape 7"/>
           <p:cNvSpPr/>
           <p:nvPr/>
         </p:nvSpPr>
         <p:spPr>
           <a:xfrm>
             <a:off x="6296040" y="1995480"/>
-            <a:ext cx="16920" cy="683640"/>
+            <a:ext cx="15480" cy="682200"/>
           </a:xfrm>
           <a:custGeom>
             <a:avLst/>
@@ -5700,14 +7522,14 @@
       </p:sp>
       <p:sp>
         <p:nvSpPr>
-          <p:cNvPr id="164" name="Text 8"/>
+          <p:cNvPr id="202" name="Text 8"/>
           <p:cNvSpPr/>
           <p:nvPr/>
         </p:nvSpPr>
         <p:spPr>
           <a:xfrm>
             <a:off x="6496200" y="1995480"/>
-            <a:ext cx="435960" cy="340920"/>
+            <a:ext cx="434520" cy="339480"/>
           </a:xfrm>
           <a:prstGeom prst="rect">
             <a:avLst/>
@@ -5752,14 +7574,14 @@
       </p:sp>
       <p:sp>
         <p:nvSpPr>
-          <p:cNvPr id="165" name="Text 9"/>
+          <p:cNvPr id="203" name="Text 9"/>
           <p:cNvSpPr/>
           <p:nvPr/>
         </p:nvSpPr>
         <p:spPr>
           <a:xfrm>
             <a:off x="6906960" y="2095560"/>
-            <a:ext cx="531360" cy="226440"/>
+            <a:ext cx="529920" cy="225000"/>
           </a:xfrm>
           <a:prstGeom prst="rect">
             <a:avLst/>
@@ -5804,14 +7626,14 @@
       </p:sp>
       <p:sp>
         <p:nvSpPr>
-          <p:cNvPr id="166" name="Text 10"/>
+          <p:cNvPr id="204" name="Text 10"/>
           <p:cNvSpPr/>
           <p:nvPr/>
         </p:nvSpPr>
         <p:spPr>
           <a:xfrm>
             <a:off x="6496200" y="2376360"/>
-            <a:ext cx="5427000" cy="302760"/>
+            <a:ext cx="5425560" cy="301320"/>
           </a:xfrm>
           <a:prstGeom prst="rect">
             <a:avLst/>
@@ -5856,14 +7678,14 @@
       </p:sp>
       <p:sp>
         <p:nvSpPr>
-          <p:cNvPr id="167" name="Shape 11"/>
+          <p:cNvPr id="205" name="Shape 11"/>
           <p:cNvSpPr/>
           <p:nvPr/>
         </p:nvSpPr>
         <p:spPr>
           <a:xfrm>
             <a:off x="6296040" y="2833560"/>
-            <a:ext cx="16920" cy="988560"/>
+            <a:ext cx="15480" cy="987120"/>
           </a:xfrm>
           <a:custGeom>
             <a:avLst/>
@@ -5907,14 +7729,14 @@
       </p:sp>
       <p:sp>
         <p:nvSpPr>
-          <p:cNvPr id="168" name="Text 12"/>
+          <p:cNvPr id="206" name="Text 12"/>
           <p:cNvSpPr/>
           <p:nvPr/>
         </p:nvSpPr>
         <p:spPr>
           <a:xfrm>
             <a:off x="6496200" y="2833560"/>
-            <a:ext cx="569520" cy="378720"/>
+            <a:ext cx="568080" cy="377280"/>
           </a:xfrm>
           <a:prstGeom prst="rect">
             <a:avLst/>
@@ -5959,14 +7781,14 @@
       </p:sp>
       <p:sp>
         <p:nvSpPr>
-          <p:cNvPr id="169" name="Text 13"/>
+          <p:cNvPr id="207" name="Text 13"/>
           <p:cNvSpPr/>
           <p:nvPr/>
         </p:nvSpPr>
         <p:spPr>
           <a:xfrm>
             <a:off x="7011720" y="2943360"/>
-            <a:ext cx="597960" cy="264600"/>
+            <a:ext cx="596520" cy="263160"/>
           </a:xfrm>
           <a:prstGeom prst="rect">
             <a:avLst/>
@@ -6011,14 +7833,14 @@
       </p:sp>
       <p:sp>
         <p:nvSpPr>
-          <p:cNvPr id="170" name="Text 14"/>
+          <p:cNvPr id="208" name="Text 14"/>
           <p:cNvSpPr/>
           <p:nvPr/>
         </p:nvSpPr>
         <p:spPr>
           <a:xfrm>
             <a:off x="6496200" y="3252960"/>
-            <a:ext cx="5455800" cy="340920"/>
+            <a:ext cx="5454360" cy="339480"/>
           </a:xfrm>
           <a:prstGeom prst="rect">
             <a:avLst/>
@@ -6063,14 +7885,14 @@
       </p:sp>
       <p:sp>
         <p:nvSpPr>
-          <p:cNvPr id="171" name="Text 15"/>
+          <p:cNvPr id="209" name="Text 15"/>
           <p:cNvSpPr/>
           <p:nvPr/>
         </p:nvSpPr>
         <p:spPr>
           <a:xfrm>
             <a:off x="6496200" y="3633840"/>
-            <a:ext cx="5379480" cy="188280"/>
+            <a:ext cx="5378040" cy="186840"/>
           </a:xfrm>
           <a:prstGeom prst="rect">
             <a:avLst/>
@@ -6115,14 +7937,14 @@
       </p:sp>
       <p:sp>
         <p:nvSpPr>
-          <p:cNvPr id="172" name="Shape 16"/>
+          <p:cNvPr id="210" name="Shape 16"/>
           <p:cNvSpPr/>
           <p:nvPr/>
         </p:nvSpPr>
         <p:spPr>
           <a:xfrm>
             <a:off x="6296040" y="3976560"/>
-            <a:ext cx="16920" cy="683640"/>
+            <a:ext cx="15480" cy="682200"/>
           </a:xfrm>
           <a:custGeom>
             <a:avLst/>
@@ -6166,14 +7988,14 @@
       </p:sp>
       <p:sp>
         <p:nvSpPr>
-          <p:cNvPr id="173" name="Text 17"/>
+          <p:cNvPr id="211" name="Text 17"/>
           <p:cNvSpPr/>
           <p:nvPr/>
         </p:nvSpPr>
         <p:spPr>
           <a:xfrm>
             <a:off x="6496200" y="3976560"/>
-            <a:ext cx="483480" cy="340920"/>
+            <a:ext cx="482040" cy="339480"/>
           </a:xfrm>
           <a:prstGeom prst="rect">
             <a:avLst/>
@@ -6218,14 +8040,14 @@
       </p:sp>
       <p:sp>
         <p:nvSpPr>
-          <p:cNvPr id="174" name="Text 18"/>
+          <p:cNvPr id="212" name="Text 18"/>
           <p:cNvSpPr/>
           <p:nvPr/>
         </p:nvSpPr>
         <p:spPr>
           <a:xfrm>
             <a:off x="6957360" y="4076640"/>
-            <a:ext cx="531360" cy="226440"/>
+            <a:ext cx="529920" cy="225000"/>
           </a:xfrm>
           <a:prstGeom prst="rect">
             <a:avLst/>
@@ -6270,14 +8092,14 @@
       </p:sp>
       <p:sp>
         <p:nvSpPr>
-          <p:cNvPr id="175" name="Text 19"/>
+          <p:cNvPr id="213" name="Text 19"/>
           <p:cNvSpPr/>
           <p:nvPr/>
         </p:nvSpPr>
         <p:spPr>
           <a:xfrm>
             <a:off x="6496200" y="4357800"/>
-            <a:ext cx="5427000" cy="302760"/>
+            <a:ext cx="5425560" cy="301320"/>
           </a:xfrm>
           <a:prstGeom prst="rect">
             <a:avLst/>
@@ -6322,14 +8144,14 @@
       </p:sp>
       <p:sp>
         <p:nvSpPr>
-          <p:cNvPr id="176" name="Shape 20"/>
+          <p:cNvPr id="214" name="Shape 20"/>
           <p:cNvSpPr/>
           <p:nvPr/>
         </p:nvSpPr>
         <p:spPr>
           <a:xfrm>
             <a:off x="380880" y="4971960"/>
-            <a:ext cx="11427840" cy="7200"/>
+            <a:ext cx="11426400" cy="5760"/>
           </a:xfrm>
           <a:custGeom>
             <a:avLst/>
@@ -6373,14 +8195,14 @@
       </p:sp>
       <p:sp>
         <p:nvSpPr>
-          <p:cNvPr id="177" name="Shape 21"/>
+          <p:cNvPr id="215" name="Shape 21"/>
           <p:cNvSpPr/>
           <p:nvPr/>
         </p:nvSpPr>
         <p:spPr>
           <a:xfrm>
             <a:off x="390600" y="5253120"/>
-            <a:ext cx="169200" cy="150120"/>
+            <a:ext cx="167760" cy="148680"/>
           </a:xfrm>
           <a:custGeom>
             <a:avLst/>
@@ -6487,14 +8309,14 @@
       </p:sp>
       <p:sp>
         <p:nvSpPr>
-          <p:cNvPr id="178" name="Text 22"/>
+          <p:cNvPr id="216" name="Text 22"/>
           <p:cNvSpPr/>
           <p:nvPr/>
         </p:nvSpPr>
         <p:spPr>
           <a:xfrm>
             <a:off x="628560" y="5205240"/>
-            <a:ext cx="11256480" cy="493200"/>
+            <a:ext cx="11255040" cy="491760"/>
           </a:xfrm>
           <a:prstGeom prst="rect">
             <a:avLst/>
@@ -6586,14 +8408,14 @@
       </p:grpSpPr>
       <p:sp>
         <p:nvSpPr>
-          <p:cNvPr id="179" name="Shape 0"/>
+          <p:cNvPr id="217" name="Shape 0"/>
           <p:cNvSpPr/>
           <p:nvPr/>
         </p:nvSpPr>
         <p:spPr>
           <a:xfrm>
             <a:off x="380880" y="1850760"/>
-            <a:ext cx="759960" cy="16920"/>
+            <a:ext cx="758520" cy="15480"/>
           </a:xfrm>
           <a:custGeom>
             <a:avLst/>
@@ -6637,14 +8459,14 @@
       </p:sp>
       <p:sp>
         <p:nvSpPr>
-          <p:cNvPr id="180" name="Text 1"/>
+          <p:cNvPr id="218" name="Text 1"/>
           <p:cNvSpPr/>
           <p:nvPr/>
         </p:nvSpPr>
         <p:spPr>
           <a:xfrm>
             <a:off x="380880" y="2174760"/>
-            <a:ext cx="9151200" cy="188280"/>
+            <a:ext cx="9149760" cy="186840"/>
           </a:xfrm>
           <a:prstGeom prst="rect">
             <a:avLst/>
@@ -6672,7 +8494,7 @@
               <a:buNone/>
             </a:pPr>
             <a:r>
-              <a:rPr b="0" lang="en-US" sz="1050" spc="299" strike="noStrike">
+              <a:rPr b="0" lang="en-US" sz="1050" spc="287" strike="noStrike">
                 <a:solidFill>
                   <a:srgbClr val="86868b"/>
                 </a:solidFill>
@@ -6689,14 +8511,14 @@
       </p:sp>
       <p:sp>
         <p:nvSpPr>
-          <p:cNvPr id="181" name="Text 2"/>
+          <p:cNvPr id="219" name="Text 2"/>
           <p:cNvSpPr/>
           <p:nvPr/>
         </p:nvSpPr>
         <p:spPr>
           <a:xfrm>
             <a:off x="380880" y="2593800"/>
-            <a:ext cx="9541800" cy="1731240"/>
+            <a:ext cx="9540360" cy="1729800"/>
           </a:xfrm>
           <a:prstGeom prst="rect">
             <a:avLst/>
@@ -6762,14 +8584,14 @@
       </p:sp>
       <p:sp>
         <p:nvSpPr>
-          <p:cNvPr id="182" name="Text 3"/>
+          <p:cNvPr id="220" name="Text 3"/>
           <p:cNvSpPr/>
           <p:nvPr/>
         </p:nvSpPr>
         <p:spPr>
           <a:xfrm>
             <a:off x="380880" y="4635720"/>
-            <a:ext cx="5598720" cy="369360"/>
+            <a:ext cx="5597280" cy="367920"/>
           </a:xfrm>
           <a:prstGeom prst="rect">
             <a:avLst/>
@@ -6814,14 +8636,14 @@
       </p:sp>
       <p:sp>
         <p:nvSpPr>
-          <p:cNvPr id="183" name="Text 4"/>
+          <p:cNvPr id="221" name="Text 4"/>
           <p:cNvSpPr/>
           <p:nvPr/>
         </p:nvSpPr>
         <p:spPr>
           <a:xfrm>
             <a:off x="9471600" y="2476440"/>
-            <a:ext cx="3293640" cy="1902960"/>
+            <a:ext cx="3292200" cy="1901520"/>
           </a:xfrm>
           <a:prstGeom prst="rect">
             <a:avLst/>
@@ -6903,14 +8725,14 @@
       </p:grpSpPr>
       <p:sp>
         <p:nvSpPr>
-          <p:cNvPr id="184" name="Text 0"/>
+          <p:cNvPr id="222" name="Text 0"/>
           <p:cNvSpPr/>
           <p:nvPr/>
         </p:nvSpPr>
         <p:spPr>
           <a:xfrm>
             <a:off x="380880" y="380880"/>
-            <a:ext cx="11485080" cy="150120"/>
+            <a:ext cx="11483640" cy="148680"/>
           </a:xfrm>
           <a:prstGeom prst="rect">
             <a:avLst/>
@@ -6938,7 +8760,7 @@
               <a:buNone/>
             </a:pPr>
             <a:r>
-              <a:rPr b="0" lang="en-US" sz="900" spc="253" strike="noStrike">
+              <a:rPr b="0" lang="en-US" sz="900" spc="242" strike="noStrike">
                 <a:solidFill>
                   <a:srgbClr val="86868b"/>
                 </a:solidFill>
@@ -6955,14 +8777,14 @@
       </p:sp>
       <p:sp>
         <p:nvSpPr>
-          <p:cNvPr id="185" name="Text 1"/>
+          <p:cNvPr id="223" name="Text 1"/>
           <p:cNvSpPr/>
           <p:nvPr/>
         </p:nvSpPr>
         <p:spPr>
           <a:xfrm>
             <a:off x="380880" y="609480"/>
-            <a:ext cx="11599200" cy="378720"/>
+            <a:ext cx="11597760" cy="377280"/>
           </a:xfrm>
           <a:prstGeom prst="rect">
             <a:avLst/>
@@ -7007,14 +8829,14 @@
       </p:sp>
       <p:sp>
         <p:nvSpPr>
-          <p:cNvPr id="186" name="Text 2"/>
+          <p:cNvPr id="224" name="Text 2"/>
           <p:cNvSpPr/>
           <p:nvPr/>
         </p:nvSpPr>
         <p:spPr>
           <a:xfrm>
             <a:off x="380880" y="2019240"/>
-            <a:ext cx="8627400" cy="617040"/>
+            <a:ext cx="8625960" cy="615600"/>
           </a:xfrm>
           <a:prstGeom prst="rect">
             <a:avLst/>
@@ -7099,14 +8921,14 @@
       </p:sp>
       <p:sp>
         <p:nvSpPr>
-          <p:cNvPr id="187" name="Shape 3"/>
+          <p:cNvPr id="225" name="Shape 3"/>
           <p:cNvSpPr/>
           <p:nvPr/>
         </p:nvSpPr>
         <p:spPr>
           <a:xfrm>
             <a:off x="380880" y="3029040"/>
-            <a:ext cx="5522400" cy="16920"/>
+            <a:ext cx="5520960" cy="15480"/>
           </a:xfrm>
           <a:custGeom>
             <a:avLst/>
@@ -7150,14 +8972,14 @@
       </p:sp>
       <p:sp>
         <p:nvSpPr>
-          <p:cNvPr id="188" name="Text 4"/>
+          <p:cNvPr id="226" name="Text 4"/>
           <p:cNvSpPr/>
           <p:nvPr/>
         </p:nvSpPr>
         <p:spPr>
           <a:xfrm>
             <a:off x="380880" y="3267000"/>
-            <a:ext cx="5589000" cy="188280"/>
+            <a:ext cx="5587560" cy="186840"/>
           </a:xfrm>
           <a:prstGeom prst="rect">
             <a:avLst/>
@@ -7185,7 +9007,7 @@
               <a:buNone/>
             </a:pPr>
             <a:r>
-              <a:rPr b="0" lang="en-US" sz="1050" spc="194" strike="noStrike">
+              <a:rPr b="0" lang="en-US" sz="1050" spc="182" strike="noStrike">
                 <a:solidFill>
                   <a:srgbClr val="86868b"/>
                 </a:solidFill>
@@ -7202,14 +9024,14 @@
       </p:sp>
       <p:sp>
         <p:nvSpPr>
-          <p:cNvPr id="189" name="Text 5"/>
+          <p:cNvPr id="227" name="Text 5"/>
           <p:cNvSpPr/>
           <p:nvPr/>
         </p:nvSpPr>
         <p:spPr>
           <a:xfrm>
             <a:off x="380880" y="3610080"/>
-            <a:ext cx="5751000" cy="455040"/>
+            <a:ext cx="5749560" cy="453600"/>
           </a:xfrm>
           <a:prstGeom prst="rect">
             <a:avLst/>
@@ -7254,14 +9076,14 @@
       </p:sp>
       <p:sp>
         <p:nvSpPr>
-          <p:cNvPr id="190" name="Text 6"/>
+          <p:cNvPr id="228" name="Text 6"/>
           <p:cNvSpPr/>
           <p:nvPr/>
         </p:nvSpPr>
         <p:spPr>
           <a:xfrm>
             <a:off x="380880" y="4143240"/>
-            <a:ext cx="5598720" cy="226440"/>
+            <a:ext cx="5597280" cy="225000"/>
           </a:xfrm>
           <a:prstGeom prst="rect">
             <a:avLst/>
@@ -7306,14 +9128,14 @@
       </p:sp>
       <p:sp>
         <p:nvSpPr>
-          <p:cNvPr id="191" name="Text 7"/>
+          <p:cNvPr id="229" name="Text 7"/>
           <p:cNvSpPr/>
           <p:nvPr/>
         </p:nvSpPr>
         <p:spPr>
           <a:xfrm>
             <a:off x="380880" y="4524480"/>
-            <a:ext cx="5598720" cy="245520"/>
+            <a:ext cx="5597280" cy="244080"/>
           </a:xfrm>
           <a:prstGeom prst="rect">
             <a:avLst/>
@@ -7358,14 +9180,14 @@
       </p:sp>
       <p:sp>
         <p:nvSpPr>
-          <p:cNvPr id="192" name="Text 8"/>
+          <p:cNvPr id="230" name="Text 8"/>
           <p:cNvSpPr/>
           <p:nvPr/>
         </p:nvSpPr>
         <p:spPr>
           <a:xfrm>
             <a:off x="380880" y="4886280"/>
-            <a:ext cx="5598720" cy="245520"/>
+            <a:ext cx="5597280" cy="244080"/>
           </a:xfrm>
           <a:prstGeom prst="rect">
             <a:avLst/>
@@ -7410,14 +9232,14 @@
       </p:sp>
       <p:sp>
         <p:nvSpPr>
-          <p:cNvPr id="193" name="Shape 9"/>
+          <p:cNvPr id="231" name="Shape 9"/>
           <p:cNvSpPr/>
           <p:nvPr/>
         </p:nvSpPr>
         <p:spPr>
           <a:xfrm>
             <a:off x="6286680" y="3029040"/>
-            <a:ext cx="5522400" cy="16920"/>
+            <a:ext cx="5520960" cy="15480"/>
           </a:xfrm>
           <a:custGeom>
             <a:avLst/>
@@ -7461,14 +9283,14 @@
       </p:sp>
       <p:sp>
         <p:nvSpPr>
-          <p:cNvPr id="194" name="Text 10"/>
+          <p:cNvPr id="232" name="Text 10"/>
           <p:cNvSpPr/>
           <p:nvPr/>
         </p:nvSpPr>
         <p:spPr>
           <a:xfrm>
             <a:off x="6286680" y="3267000"/>
-            <a:ext cx="5589000" cy="188280"/>
+            <a:ext cx="5587560" cy="186840"/>
           </a:xfrm>
           <a:prstGeom prst="rect">
             <a:avLst/>
@@ -7496,7 +9318,7 @@
               <a:buNone/>
             </a:pPr>
             <a:r>
-              <a:rPr b="0" lang="en-US" sz="1050" spc="194" strike="noStrike">
+              <a:rPr b="0" lang="en-US" sz="1050" spc="182" strike="noStrike">
                 <a:solidFill>
                   <a:srgbClr val="0071e3"/>
                 </a:solidFill>
@@ -7513,14 +9335,14 @@
       </p:sp>
       <p:sp>
         <p:nvSpPr>
-          <p:cNvPr id="195" name="Text 11"/>
+          <p:cNvPr id="233" name="Text 11"/>
           <p:cNvSpPr/>
           <p:nvPr/>
         </p:nvSpPr>
         <p:spPr>
           <a:xfrm>
             <a:off x="6286680" y="3610080"/>
-            <a:ext cx="5751000" cy="455040"/>
+            <a:ext cx="5749560" cy="453600"/>
           </a:xfrm>
           <a:prstGeom prst="rect">
             <a:avLst/>
@@ -7565,14 +9387,14 @@
       </p:sp>
       <p:sp>
         <p:nvSpPr>
-          <p:cNvPr id="196" name="Text 12"/>
+          <p:cNvPr id="234" name="Text 12"/>
           <p:cNvSpPr/>
           <p:nvPr/>
         </p:nvSpPr>
         <p:spPr>
           <a:xfrm>
             <a:off x="6286680" y="4143240"/>
-            <a:ext cx="5598720" cy="226440"/>
+            <a:ext cx="5597280" cy="225000"/>
           </a:xfrm>
           <a:prstGeom prst="rect">
             <a:avLst/>
@@ -7617,14 +9439,14 @@
       </p:sp>
       <p:sp>
         <p:nvSpPr>
-          <p:cNvPr id="197" name="Text 13"/>
+          <p:cNvPr id="235" name="Text 13"/>
           <p:cNvSpPr/>
           <p:nvPr/>
         </p:nvSpPr>
         <p:spPr>
           <a:xfrm>
             <a:off x="6286680" y="4524480"/>
-            <a:ext cx="5598720" cy="245520"/>
+            <a:ext cx="5597280" cy="244080"/>
           </a:xfrm>
           <a:prstGeom prst="rect">
             <a:avLst/>
@@ -7669,14 +9491,14 @@
       </p:sp>
       <p:sp>
         <p:nvSpPr>
-          <p:cNvPr id="198" name="Text 14"/>
+          <p:cNvPr id="236" name="Text 14"/>
           <p:cNvSpPr/>
           <p:nvPr/>
         </p:nvSpPr>
         <p:spPr>
           <a:xfrm>
             <a:off x="6286680" y="4886280"/>
-            <a:ext cx="5598720" cy="245520"/>
+            <a:ext cx="5597280" cy="244080"/>
           </a:xfrm>
           <a:prstGeom prst="rect">
             <a:avLst/>
@@ -7721,14 +9543,14 @@
       </p:sp>
       <p:sp>
         <p:nvSpPr>
-          <p:cNvPr id="199" name="Shape 15"/>
+          <p:cNvPr id="237" name="Shape 15"/>
           <p:cNvSpPr/>
           <p:nvPr/>
         </p:nvSpPr>
         <p:spPr>
           <a:xfrm>
             <a:off x="380880" y="6091200"/>
-            <a:ext cx="11427840" cy="7200"/>
+            <a:ext cx="11426400" cy="5760"/>
           </a:xfrm>
           <a:custGeom>
             <a:avLst/>
@@ -7772,14 +9594,14 @@
       </p:sp>
       <p:sp>
         <p:nvSpPr>
-          <p:cNvPr id="200" name="Shape 16"/>
+          <p:cNvPr id="238" name="Shape 16"/>
           <p:cNvSpPr/>
           <p:nvPr/>
         </p:nvSpPr>
         <p:spPr>
           <a:xfrm>
             <a:off x="399960" y="6286680"/>
-            <a:ext cx="150120" cy="150120"/>
+            <a:ext cx="148680" cy="148680"/>
           </a:xfrm>
           <a:custGeom>
             <a:avLst/>
@@ -7949,14 +9771,14 @@
       </p:sp>
       <p:sp>
         <p:nvSpPr>
-          <p:cNvPr id="201" name="Text 17"/>
+          <p:cNvPr id="239" name="Text 17"/>
           <p:cNvSpPr/>
           <p:nvPr/>
         </p:nvSpPr>
         <p:spPr>
           <a:xfrm>
             <a:off x="628560" y="6248520"/>
-            <a:ext cx="11256480" cy="226440"/>
+            <a:ext cx="11255040" cy="225000"/>
           </a:xfrm>
           <a:prstGeom prst="rect">
             <a:avLst/>
@@ -8048,14 +9870,14 @@
       </p:grpSpPr>
       <p:sp>
         <p:nvSpPr>
-          <p:cNvPr id="202" name="Text 0"/>
+          <p:cNvPr id="240" name="Text 0"/>
           <p:cNvSpPr/>
           <p:nvPr/>
         </p:nvSpPr>
         <p:spPr>
           <a:xfrm>
             <a:off x="380880" y="380880"/>
-            <a:ext cx="11485080" cy="150120"/>
+            <a:ext cx="11483640" cy="148680"/>
           </a:xfrm>
           <a:prstGeom prst="rect">
             <a:avLst/>
@@ -8083,7 +9905,7 @@
               <a:buNone/>
             </a:pPr>
             <a:r>
-              <a:rPr b="0" lang="en-US" sz="900" spc="253" strike="noStrike">
+              <a:rPr b="0" lang="en-US" sz="900" spc="242" strike="noStrike">
                 <a:solidFill>
                   <a:srgbClr val="86868b"/>
                 </a:solidFill>
@@ -8100,14 +9922,14 @@
       </p:sp>
       <p:sp>
         <p:nvSpPr>
-          <p:cNvPr id="203" name="Text 1"/>
+          <p:cNvPr id="241" name="Text 1"/>
           <p:cNvSpPr/>
           <p:nvPr/>
         </p:nvSpPr>
         <p:spPr>
           <a:xfrm>
             <a:off x="380880" y="609480"/>
-            <a:ext cx="11599200" cy="378720"/>
+            <a:ext cx="11597760" cy="377280"/>
           </a:xfrm>
           <a:prstGeom prst="rect">
             <a:avLst/>
@@ -8152,14 +9974,14 @@
       </p:sp>
       <p:sp>
         <p:nvSpPr>
-          <p:cNvPr id="204" name="Text 2"/>
+          <p:cNvPr id="242" name="Text 2"/>
           <p:cNvSpPr/>
           <p:nvPr/>
         </p:nvSpPr>
         <p:spPr>
           <a:xfrm>
             <a:off x="380880" y="1962000"/>
-            <a:ext cx="8627400" cy="617040"/>
+            <a:ext cx="8625960" cy="615600"/>
           </a:xfrm>
           <a:prstGeom prst="rect">
             <a:avLst/>
@@ -8224,14 +10046,14 @@
       </p:sp>
       <p:sp>
         <p:nvSpPr>
-          <p:cNvPr id="205" name="Text 3"/>
+          <p:cNvPr id="243" name="Text 3"/>
           <p:cNvSpPr/>
           <p:nvPr/>
         </p:nvSpPr>
         <p:spPr>
           <a:xfrm>
             <a:off x="380880" y="2886120"/>
-            <a:ext cx="5589000" cy="188280"/>
+            <a:ext cx="5587560" cy="186840"/>
           </a:xfrm>
           <a:prstGeom prst="rect">
             <a:avLst/>
@@ -8259,7 +10081,7 @@
               <a:buNone/>
             </a:pPr>
             <a:r>
-              <a:rPr b="0" lang="en-US" sz="1050" spc="194" strike="noStrike">
+              <a:rPr b="0" lang="en-US" sz="1050" spc="182" strike="noStrike">
                 <a:solidFill>
                   <a:srgbClr val="86868b"/>
                 </a:solidFill>
@@ -8276,14 +10098,14 @@
       </p:sp>
       <p:sp>
         <p:nvSpPr>
-          <p:cNvPr id="206" name="Text 4"/>
+          <p:cNvPr id="244" name="Text 4"/>
           <p:cNvSpPr/>
           <p:nvPr/>
         </p:nvSpPr>
         <p:spPr>
           <a:xfrm>
             <a:off x="380880" y="3228840"/>
-            <a:ext cx="988560" cy="226440"/>
+            <a:ext cx="987120" cy="225000"/>
           </a:xfrm>
           <a:prstGeom prst="rect">
             <a:avLst/>
@@ -8328,14 +10150,14 @@
       </p:sp>
       <p:sp>
         <p:nvSpPr>
-          <p:cNvPr id="207" name="Shape 5"/>
+          <p:cNvPr id="245" name="Shape 5"/>
           <p:cNvSpPr/>
           <p:nvPr/>
         </p:nvSpPr>
         <p:spPr>
           <a:xfrm>
             <a:off x="1447920" y="3305160"/>
-            <a:ext cx="4455720" cy="74160"/>
+            <a:ext cx="4454280" cy="72720"/>
           </a:xfrm>
           <a:custGeom>
             <a:avLst/>
@@ -8379,14 +10201,14 @@
       </p:sp>
       <p:sp>
         <p:nvSpPr>
-          <p:cNvPr id="208" name="Shape 6"/>
+          <p:cNvPr id="246" name="Shape 6"/>
           <p:cNvSpPr/>
           <p:nvPr/>
         </p:nvSpPr>
         <p:spPr>
           <a:xfrm>
             <a:off x="1447920" y="3305160"/>
-            <a:ext cx="893160" cy="74160"/>
+            <a:ext cx="891720" cy="72720"/>
           </a:xfrm>
           <a:custGeom>
             <a:avLst/>
@@ -8430,14 +10252,14 @@
       </p:sp>
       <p:sp>
         <p:nvSpPr>
-          <p:cNvPr id="209" name="Text 7"/>
+          <p:cNvPr id="247" name="Text 7"/>
           <p:cNvSpPr/>
           <p:nvPr/>
         </p:nvSpPr>
         <p:spPr>
           <a:xfrm>
             <a:off x="380880" y="3571920"/>
-            <a:ext cx="988560" cy="226440"/>
+            <a:ext cx="987120" cy="225000"/>
           </a:xfrm>
           <a:prstGeom prst="rect">
             <a:avLst/>
@@ -8482,14 +10304,14 @@
       </p:sp>
       <p:sp>
         <p:nvSpPr>
-          <p:cNvPr id="210" name="Shape 8"/>
+          <p:cNvPr id="248" name="Shape 8"/>
           <p:cNvSpPr/>
           <p:nvPr/>
         </p:nvSpPr>
         <p:spPr>
           <a:xfrm>
             <a:off x="1447920" y="3648240"/>
-            <a:ext cx="4455720" cy="74160"/>
+            <a:ext cx="4454280" cy="72720"/>
           </a:xfrm>
           <a:custGeom>
             <a:avLst/>
@@ -8533,14 +10355,14 @@
       </p:sp>
       <p:sp>
         <p:nvSpPr>
-          <p:cNvPr id="211" name="Shape 9"/>
+          <p:cNvPr id="249" name="Shape 9"/>
           <p:cNvSpPr/>
           <p:nvPr/>
         </p:nvSpPr>
         <p:spPr>
           <a:xfrm>
             <a:off x="1447920" y="3648240"/>
-            <a:ext cx="1779120" cy="74160"/>
+            <a:ext cx="1777680" cy="72720"/>
           </a:xfrm>
           <a:custGeom>
             <a:avLst/>
@@ -8584,14 +10406,14 @@
       </p:sp>
       <p:sp>
         <p:nvSpPr>
-          <p:cNvPr id="212" name="Text 10"/>
+          <p:cNvPr id="250" name="Text 10"/>
           <p:cNvSpPr/>
           <p:nvPr/>
         </p:nvSpPr>
         <p:spPr>
           <a:xfrm>
             <a:off x="380880" y="3914640"/>
-            <a:ext cx="988560" cy="226440"/>
+            <a:ext cx="987120" cy="225000"/>
           </a:xfrm>
           <a:prstGeom prst="rect">
             <a:avLst/>
@@ -8636,14 +10458,14 @@
       </p:sp>
       <p:sp>
         <p:nvSpPr>
-          <p:cNvPr id="213" name="Shape 11"/>
+          <p:cNvPr id="251" name="Shape 11"/>
           <p:cNvSpPr/>
           <p:nvPr/>
         </p:nvSpPr>
         <p:spPr>
           <a:xfrm>
             <a:off x="1447920" y="3990960"/>
-            <a:ext cx="4455720" cy="74160"/>
+            <a:ext cx="4454280" cy="72720"/>
           </a:xfrm>
           <a:custGeom>
             <a:avLst/>
@@ -8687,14 +10509,14 @@
       </p:sp>
       <p:sp>
         <p:nvSpPr>
-          <p:cNvPr id="214" name="Shape 12"/>
+          <p:cNvPr id="252" name="Shape 12"/>
           <p:cNvSpPr/>
           <p:nvPr/>
         </p:nvSpPr>
         <p:spPr>
           <a:xfrm>
             <a:off x="1447920" y="3990960"/>
-            <a:ext cx="2674440" cy="74160"/>
+            <a:ext cx="2673000" cy="72720"/>
           </a:xfrm>
           <a:custGeom>
             <a:avLst/>
@@ -8738,14 +10560,14 @@
       </p:sp>
       <p:sp>
         <p:nvSpPr>
-          <p:cNvPr id="215" name="Text 13"/>
+          <p:cNvPr id="253" name="Text 13"/>
           <p:cNvSpPr/>
           <p:nvPr/>
         </p:nvSpPr>
         <p:spPr>
           <a:xfrm>
             <a:off x="380880" y="4295880"/>
-            <a:ext cx="5598720" cy="245520"/>
+            <a:ext cx="5597280" cy="244080"/>
           </a:xfrm>
           <a:prstGeom prst="rect">
             <a:avLst/>
@@ -8790,14 +10612,14 @@
       </p:sp>
       <p:sp>
         <p:nvSpPr>
-          <p:cNvPr id="216" name="Text 14"/>
+          <p:cNvPr id="254" name="Text 14"/>
           <p:cNvSpPr/>
           <p:nvPr/>
         </p:nvSpPr>
         <p:spPr>
           <a:xfrm>
             <a:off x="6286680" y="2886120"/>
-            <a:ext cx="5589000" cy="188280"/>
+            <a:ext cx="5587560" cy="186840"/>
           </a:xfrm>
           <a:prstGeom prst="rect">
             <a:avLst/>
@@ -8825,7 +10647,7 @@
               <a:buNone/>
             </a:pPr>
             <a:r>
-              <a:rPr b="0" lang="en-US" sz="1050" spc="194" strike="noStrike">
+              <a:rPr b="0" lang="en-US" sz="1050" spc="182" strike="noStrike">
                 <a:solidFill>
                   <a:srgbClr val="0071e3"/>
                 </a:solidFill>
@@ -8842,14 +10664,14 @@
       </p:sp>
       <p:sp>
         <p:nvSpPr>
-          <p:cNvPr id="217" name="Text 15"/>
+          <p:cNvPr id="255" name="Text 15"/>
           <p:cNvSpPr/>
           <p:nvPr/>
         </p:nvSpPr>
         <p:spPr>
           <a:xfrm>
             <a:off x="6286680" y="3228840"/>
-            <a:ext cx="988560" cy="226440"/>
+            <a:ext cx="987120" cy="225000"/>
           </a:xfrm>
           <a:prstGeom prst="rect">
             <a:avLst/>
@@ -8894,14 +10716,14 @@
       </p:sp>
       <p:sp>
         <p:nvSpPr>
-          <p:cNvPr id="218" name="Shape 16"/>
+          <p:cNvPr id="256" name="Shape 16"/>
           <p:cNvSpPr/>
           <p:nvPr/>
         </p:nvSpPr>
         <p:spPr>
           <a:xfrm>
             <a:off x="7353360" y="3305160"/>
-            <a:ext cx="3693600" cy="74160"/>
+            <a:ext cx="3692160" cy="72720"/>
           </a:xfrm>
           <a:custGeom>
             <a:avLst/>
@@ -8945,14 +10767,14 @@
       </p:sp>
       <p:sp>
         <p:nvSpPr>
-          <p:cNvPr id="219" name="Shape 17"/>
+          <p:cNvPr id="257" name="Shape 17"/>
           <p:cNvSpPr/>
           <p:nvPr/>
         </p:nvSpPr>
         <p:spPr>
           <a:xfrm>
             <a:off x="7353360" y="3305160"/>
-            <a:ext cx="445680" cy="74160"/>
+            <a:ext cx="444240" cy="72720"/>
           </a:xfrm>
           <a:custGeom>
             <a:avLst/>
@@ -8996,14 +10818,14 @@
       </p:sp>
       <p:sp>
         <p:nvSpPr>
-          <p:cNvPr id="220" name="Text 18"/>
+          <p:cNvPr id="258" name="Text 18"/>
           <p:cNvSpPr/>
           <p:nvPr/>
         </p:nvSpPr>
         <p:spPr>
           <a:xfrm>
             <a:off x="11201400" y="3247920"/>
-            <a:ext cx="674280" cy="188280"/>
+            <a:ext cx="672840" cy="186840"/>
           </a:xfrm>
           <a:prstGeom prst="rect">
             <a:avLst/>
@@ -9048,14 +10870,14 @@
       </p:sp>
       <p:sp>
         <p:nvSpPr>
-          <p:cNvPr id="221" name="Text 19"/>
+          <p:cNvPr id="259" name="Text 19"/>
           <p:cNvSpPr/>
           <p:nvPr/>
         </p:nvSpPr>
         <p:spPr>
           <a:xfrm>
             <a:off x="6286680" y="3571920"/>
-            <a:ext cx="988560" cy="226440"/>
+            <a:ext cx="987120" cy="225000"/>
           </a:xfrm>
           <a:prstGeom prst="rect">
             <a:avLst/>
@@ -9100,14 +10922,14 @@
       </p:sp>
       <p:sp>
         <p:nvSpPr>
-          <p:cNvPr id="222" name="Shape 20"/>
+          <p:cNvPr id="260" name="Shape 20"/>
           <p:cNvSpPr/>
           <p:nvPr/>
         </p:nvSpPr>
         <p:spPr>
           <a:xfrm>
             <a:off x="7353360" y="3648240"/>
-            <a:ext cx="3693600" cy="74160"/>
+            <a:ext cx="3692160" cy="72720"/>
           </a:xfrm>
           <a:custGeom>
             <a:avLst/>
@@ -9151,14 +10973,14 @@
       </p:sp>
       <p:sp>
         <p:nvSpPr>
-          <p:cNvPr id="223" name="Shape 21"/>
+          <p:cNvPr id="261" name="Shape 21"/>
           <p:cNvSpPr/>
           <p:nvPr/>
         </p:nvSpPr>
         <p:spPr>
           <a:xfrm>
             <a:off x="7353360" y="3648240"/>
-            <a:ext cx="1845720" cy="74160"/>
+            <a:ext cx="1844280" cy="72720"/>
           </a:xfrm>
           <a:custGeom>
             <a:avLst/>
@@ -9202,14 +11024,14 @@
       </p:sp>
       <p:sp>
         <p:nvSpPr>
-          <p:cNvPr id="224" name="Text 22"/>
+          <p:cNvPr id="262" name="Text 22"/>
           <p:cNvSpPr/>
           <p:nvPr/>
         </p:nvSpPr>
         <p:spPr>
           <a:xfrm>
             <a:off x="11201400" y="3591000"/>
-            <a:ext cx="674280" cy="188280"/>
+            <a:ext cx="672840" cy="186840"/>
           </a:xfrm>
           <a:prstGeom prst="rect">
             <a:avLst/>
@@ -9254,14 +11076,14 @@
       </p:sp>
       <p:sp>
         <p:nvSpPr>
-          <p:cNvPr id="225" name="Text 23"/>
+          <p:cNvPr id="263" name="Text 23"/>
           <p:cNvSpPr/>
           <p:nvPr/>
         </p:nvSpPr>
         <p:spPr>
           <a:xfrm>
             <a:off x="6286680" y="3990960"/>
-            <a:ext cx="988560" cy="226440"/>
+            <a:ext cx="987120" cy="225000"/>
           </a:xfrm>
           <a:prstGeom prst="rect">
             <a:avLst/>
@@ -9306,14 +11128,14 @@
       </p:sp>
       <p:sp>
         <p:nvSpPr>
-          <p:cNvPr id="226" name="Shape 24"/>
+          <p:cNvPr id="264" name="Shape 24"/>
           <p:cNvSpPr/>
           <p:nvPr/>
         </p:nvSpPr>
         <p:spPr>
           <a:xfrm>
             <a:off x="7353360" y="4067280"/>
-            <a:ext cx="3693600" cy="74160"/>
+            <a:ext cx="3692160" cy="72720"/>
           </a:xfrm>
           <a:custGeom>
             <a:avLst/>
@@ -9357,14 +11179,14 @@
       </p:sp>
       <p:sp>
         <p:nvSpPr>
-          <p:cNvPr id="227" name="Shape 25"/>
+          <p:cNvPr id="265" name="Shape 25"/>
           <p:cNvSpPr/>
           <p:nvPr/>
         </p:nvSpPr>
         <p:spPr>
           <a:xfrm>
             <a:off x="7353360" y="4067280"/>
-            <a:ext cx="3579120" cy="74160"/>
+            <a:ext cx="3577680" cy="72720"/>
           </a:xfrm>
           <a:custGeom>
             <a:avLst/>
@@ -9408,14 +11230,14 @@
       </p:sp>
       <p:sp>
         <p:nvSpPr>
-          <p:cNvPr id="228" name="Text 26"/>
+          <p:cNvPr id="266" name="Text 26"/>
           <p:cNvSpPr/>
           <p:nvPr/>
         </p:nvSpPr>
         <p:spPr>
           <a:xfrm>
             <a:off x="11201400" y="3914640"/>
-            <a:ext cx="674280" cy="378720"/>
+            <a:ext cx="672840" cy="377280"/>
           </a:xfrm>
           <a:prstGeom prst="rect">
             <a:avLst/>
@@ -9460,14 +11282,14 @@
       </p:sp>
       <p:sp>
         <p:nvSpPr>
-          <p:cNvPr id="229" name="Text 27"/>
+          <p:cNvPr id="267" name="Text 27"/>
           <p:cNvSpPr/>
           <p:nvPr/>
         </p:nvSpPr>
         <p:spPr>
           <a:xfrm>
             <a:off x="6286680" y="4448160"/>
-            <a:ext cx="5598720" cy="245520"/>
+            <a:ext cx="5597280" cy="244080"/>
           </a:xfrm>
           <a:prstGeom prst="rect">
             <a:avLst/>
@@ -9512,14 +11334,14 @@
       </p:sp>
       <p:sp>
         <p:nvSpPr>
-          <p:cNvPr id="230" name="Shape 28"/>
+          <p:cNvPr id="268" name="Shape 28"/>
           <p:cNvSpPr/>
           <p:nvPr/>
         </p:nvSpPr>
         <p:spPr>
           <a:xfrm>
             <a:off x="380880" y="5005440"/>
-            <a:ext cx="11427840" cy="7200"/>
+            <a:ext cx="11426400" cy="5760"/>
           </a:xfrm>
           <a:custGeom>
             <a:avLst/>
@@ -9563,14 +11385,14 @@
       </p:sp>
       <p:sp>
         <p:nvSpPr>
-          <p:cNvPr id="231" name="Shape 29"/>
+          <p:cNvPr id="269" name="Shape 29"/>
           <p:cNvSpPr/>
           <p:nvPr/>
         </p:nvSpPr>
         <p:spPr>
           <a:xfrm>
             <a:off x="399960" y="5286240"/>
-            <a:ext cx="150120" cy="150120"/>
+            <a:ext cx="148680" cy="148680"/>
           </a:xfrm>
           <a:custGeom>
             <a:avLst/>
@@ -9705,14 +11527,14 @@
       </p:sp>
       <p:sp>
         <p:nvSpPr>
-          <p:cNvPr id="232" name="Text 30"/>
+          <p:cNvPr id="270" name="Text 30"/>
           <p:cNvSpPr/>
           <p:nvPr/>
         </p:nvSpPr>
         <p:spPr>
           <a:xfrm>
             <a:off x="628560" y="5238720"/>
-            <a:ext cx="11256480" cy="493200"/>
+            <a:ext cx="11255040" cy="491760"/>
           </a:xfrm>
           <a:prstGeom prst="rect">
             <a:avLst/>
@@ -9804,14 +11626,14 @@
       </p:grpSpPr>
       <p:sp>
         <p:nvSpPr>
-          <p:cNvPr id="233" name="Shape 0"/>
+          <p:cNvPr id="271" name="Shape 0"/>
           <p:cNvSpPr/>
           <p:nvPr/>
         </p:nvSpPr>
         <p:spPr>
           <a:xfrm>
             <a:off x="380880" y="1850760"/>
-            <a:ext cx="759960" cy="16920"/>
+            <a:ext cx="758520" cy="15480"/>
           </a:xfrm>
           <a:custGeom>
             <a:avLst/>
@@ -9855,14 +11677,14 @@
       </p:sp>
       <p:sp>
         <p:nvSpPr>
-          <p:cNvPr id="234" name="Text 1"/>
+          <p:cNvPr id="272" name="Text 1"/>
           <p:cNvSpPr/>
           <p:nvPr/>
         </p:nvSpPr>
         <p:spPr>
           <a:xfrm>
             <a:off x="380880" y="2174760"/>
-            <a:ext cx="9160920" cy="188280"/>
+            <a:ext cx="9159480" cy="186840"/>
           </a:xfrm>
           <a:prstGeom prst="rect">
             <a:avLst/>
@@ -9890,7 +11712,7 @@
               <a:buNone/>
             </a:pPr>
             <a:r>
-              <a:rPr b="0" lang="en-US" sz="1050" spc="299" strike="noStrike">
+              <a:rPr b="0" lang="en-US" sz="1050" spc="287" strike="noStrike">
                 <a:solidFill>
                   <a:srgbClr val="86868b"/>
                 </a:solidFill>
@@ -9907,14 +11729,14 @@
       </p:sp>
       <p:sp>
         <p:nvSpPr>
-          <p:cNvPr id="235" name="Text 2"/>
+          <p:cNvPr id="273" name="Text 2"/>
           <p:cNvSpPr/>
           <p:nvPr/>
         </p:nvSpPr>
         <p:spPr>
           <a:xfrm>
             <a:off x="380880" y="2593800"/>
-            <a:ext cx="9551520" cy="1731240"/>
+            <a:ext cx="9550080" cy="1729800"/>
           </a:xfrm>
           <a:prstGeom prst="rect">
             <a:avLst/>
@@ -9980,14 +11802,14 @@
       </p:sp>
       <p:sp>
         <p:nvSpPr>
-          <p:cNvPr id="236" name="Text 3"/>
+          <p:cNvPr id="274" name="Text 3"/>
           <p:cNvSpPr/>
           <p:nvPr/>
         </p:nvSpPr>
         <p:spPr>
           <a:xfrm>
             <a:off x="380880" y="4635720"/>
-            <a:ext cx="5598720" cy="369360"/>
+            <a:ext cx="5597280" cy="367920"/>
           </a:xfrm>
           <a:prstGeom prst="rect">
             <a:avLst/>
@@ -10032,14 +11854,14 @@
       </p:sp>
       <p:sp>
         <p:nvSpPr>
-          <p:cNvPr id="237" name="Text 4"/>
+          <p:cNvPr id="275" name="Text 4"/>
           <p:cNvSpPr/>
           <p:nvPr/>
         </p:nvSpPr>
         <p:spPr>
           <a:xfrm>
             <a:off x="9473400" y="2476440"/>
-            <a:ext cx="3283920" cy="1902960"/>
+            <a:ext cx="3282480" cy="1901520"/>
           </a:xfrm>
           <a:prstGeom prst="rect">
             <a:avLst/>
@@ -10121,14 +11943,14 @@
       </p:grpSpPr>
       <p:sp>
         <p:nvSpPr>
-          <p:cNvPr id="238" name="Text 0"/>
+          <p:cNvPr id="276" name="Text 0"/>
           <p:cNvSpPr/>
           <p:nvPr/>
         </p:nvSpPr>
         <p:spPr>
           <a:xfrm>
             <a:off x="380880" y="380880"/>
-            <a:ext cx="11485080" cy="150120"/>
+            <a:ext cx="11483640" cy="148680"/>
           </a:xfrm>
           <a:prstGeom prst="rect">
             <a:avLst/>
@@ -10156,7 +11978,7 @@
               <a:buNone/>
             </a:pPr>
             <a:r>
-              <a:rPr b="0" lang="en-US" sz="900" spc="253" strike="noStrike">
+              <a:rPr b="0" lang="en-US" sz="900" spc="242" strike="noStrike">
                 <a:solidFill>
                   <a:srgbClr val="86868b"/>
                 </a:solidFill>
@@ -10173,14 +11995,14 @@
       </p:sp>
       <p:sp>
         <p:nvSpPr>
-          <p:cNvPr id="239" name="Text 1"/>
+          <p:cNvPr id="277" name="Text 1"/>
           <p:cNvSpPr/>
           <p:nvPr/>
         </p:nvSpPr>
         <p:spPr>
           <a:xfrm>
             <a:off x="380880" y="609480"/>
-            <a:ext cx="11599200" cy="378720"/>
+            <a:ext cx="11597760" cy="377280"/>
           </a:xfrm>
           <a:prstGeom prst="rect">
             <a:avLst/>
@@ -10225,14 +12047,14 @@
       </p:sp>
       <p:sp>
         <p:nvSpPr>
-          <p:cNvPr id="240" name="Text 2"/>
+          <p:cNvPr id="278" name="Text 2"/>
           <p:cNvSpPr/>
           <p:nvPr/>
         </p:nvSpPr>
         <p:spPr>
           <a:xfrm>
             <a:off x="380880" y="1848960"/>
-            <a:ext cx="5608080" cy="559800"/>
+            <a:ext cx="5606640" cy="558360"/>
           </a:xfrm>
           <a:prstGeom prst="rect">
             <a:avLst/>
@@ -10297,14 +12119,14 @@
       </p:sp>
       <p:sp>
         <p:nvSpPr>
-          <p:cNvPr id="241" name="Text 3"/>
+          <p:cNvPr id="279" name="Text 3"/>
           <p:cNvSpPr/>
           <p:nvPr/>
         </p:nvSpPr>
         <p:spPr>
           <a:xfrm>
             <a:off x="380880" y="2596680"/>
-            <a:ext cx="5598720" cy="493200"/>
+            <a:ext cx="5597280" cy="491760"/>
           </a:xfrm>
           <a:prstGeom prst="rect">
             <a:avLst/>
@@ -10359,14 +12181,14 @@
       </p:sp>
       <p:sp>
         <p:nvSpPr>
-          <p:cNvPr id="242" name="Text 4"/>
+          <p:cNvPr id="280" name="Text 4"/>
           <p:cNvSpPr/>
           <p:nvPr/>
         </p:nvSpPr>
         <p:spPr>
           <a:xfrm>
             <a:off x="380880" y="3244320"/>
-            <a:ext cx="5598720" cy="493200"/>
+            <a:ext cx="5597280" cy="491760"/>
           </a:xfrm>
           <a:prstGeom prst="rect">
             <a:avLst/>
@@ -10411,14 +12233,14 @@
       </p:sp>
       <p:sp>
         <p:nvSpPr>
-          <p:cNvPr id="243" name="Shape 5"/>
+          <p:cNvPr id="281" name="Shape 5"/>
           <p:cNvSpPr/>
           <p:nvPr/>
         </p:nvSpPr>
         <p:spPr>
           <a:xfrm>
             <a:off x="6296040" y="1848960"/>
-            <a:ext cx="16920" cy="798120"/>
+            <a:ext cx="15480" cy="796680"/>
           </a:xfrm>
           <a:custGeom>
             <a:avLst/>
@@ -10462,14 +12284,14 @@
       </p:sp>
       <p:sp>
         <p:nvSpPr>
-          <p:cNvPr id="244" name="Text 6"/>
+          <p:cNvPr id="282" name="Text 6"/>
           <p:cNvSpPr/>
           <p:nvPr/>
         </p:nvSpPr>
         <p:spPr>
           <a:xfrm>
             <a:off x="6496200" y="1848960"/>
-            <a:ext cx="5379480" cy="188280"/>
+            <a:ext cx="5378040" cy="186840"/>
           </a:xfrm>
           <a:prstGeom prst="rect">
             <a:avLst/>
@@ -10497,7 +12319,7 @@
               <a:buNone/>
             </a:pPr>
             <a:r>
-              <a:rPr b="0" lang="en-US" sz="1050" spc="194" strike="noStrike">
+              <a:rPr b="0" lang="en-US" sz="1050" spc="182" strike="noStrike">
                 <a:solidFill>
                   <a:srgbClr val="0071e3"/>
                 </a:solidFill>
@@ -10514,14 +12336,14 @@
       </p:sp>
       <p:sp>
         <p:nvSpPr>
-          <p:cNvPr id="245" name="Text 7"/>
+          <p:cNvPr id="283" name="Text 7"/>
           <p:cNvSpPr/>
           <p:nvPr/>
         </p:nvSpPr>
         <p:spPr>
           <a:xfrm>
             <a:off x="6496200" y="2115720"/>
-            <a:ext cx="5427000" cy="302760"/>
+            <a:ext cx="5425560" cy="301320"/>
           </a:xfrm>
           <a:prstGeom prst="rect">
             <a:avLst/>
@@ -10566,14 +12388,14 @@
       </p:sp>
       <p:sp>
         <p:nvSpPr>
-          <p:cNvPr id="246" name="Text 8"/>
+          <p:cNvPr id="284" name="Text 8"/>
           <p:cNvSpPr/>
           <p:nvPr/>
         </p:nvSpPr>
         <p:spPr>
           <a:xfrm>
             <a:off x="6496200" y="2458800"/>
-            <a:ext cx="5379480" cy="188280"/>
+            <a:ext cx="5378040" cy="186840"/>
           </a:xfrm>
           <a:prstGeom prst="rect">
             <a:avLst/>
@@ -10618,14 +12440,14 @@
       </p:sp>
       <p:sp>
         <p:nvSpPr>
-          <p:cNvPr id="247" name="Shape 9"/>
+          <p:cNvPr id="285" name="Shape 9"/>
           <p:cNvSpPr/>
           <p:nvPr/>
         </p:nvSpPr>
         <p:spPr>
           <a:xfrm>
             <a:off x="6296040" y="2801520"/>
-            <a:ext cx="16920" cy="798120"/>
+            <a:ext cx="15480" cy="796680"/>
           </a:xfrm>
           <a:custGeom>
             <a:avLst/>
@@ -10669,14 +12491,14 @@
       </p:sp>
       <p:sp>
         <p:nvSpPr>
-          <p:cNvPr id="248" name="Text 10"/>
+          <p:cNvPr id="286" name="Text 10"/>
           <p:cNvSpPr/>
           <p:nvPr/>
         </p:nvSpPr>
         <p:spPr>
           <a:xfrm>
             <a:off x="6496200" y="2801520"/>
-            <a:ext cx="5379480" cy="188280"/>
+            <a:ext cx="5378040" cy="186840"/>
           </a:xfrm>
           <a:prstGeom prst="rect">
             <a:avLst/>
@@ -10704,7 +12526,7 @@
               <a:buNone/>
             </a:pPr>
             <a:r>
-              <a:rPr b="0" lang="en-US" sz="1050" spc="194" strike="noStrike">
+              <a:rPr b="0" lang="en-US" sz="1050" spc="182" strike="noStrike">
                 <a:solidFill>
                   <a:srgbClr val="86868b"/>
                 </a:solidFill>
@@ -10721,14 +12543,14 @@
       </p:sp>
       <p:sp>
         <p:nvSpPr>
-          <p:cNvPr id="249" name="Text 11"/>
+          <p:cNvPr id="287" name="Text 11"/>
           <p:cNvSpPr/>
           <p:nvPr/>
         </p:nvSpPr>
         <p:spPr>
           <a:xfrm>
             <a:off x="6496200" y="3068280"/>
-            <a:ext cx="5427000" cy="302760"/>
+            <a:ext cx="5425560" cy="301320"/>
           </a:xfrm>
           <a:prstGeom prst="rect">
             <a:avLst/>
@@ -10773,14 +12595,14 @@
       </p:sp>
       <p:sp>
         <p:nvSpPr>
-          <p:cNvPr id="250" name="Text 12"/>
+          <p:cNvPr id="288" name="Text 12"/>
           <p:cNvSpPr/>
           <p:nvPr/>
         </p:nvSpPr>
         <p:spPr>
           <a:xfrm>
             <a:off x="6496200" y="3411000"/>
-            <a:ext cx="5379480" cy="188280"/>
+            <a:ext cx="5378040" cy="186840"/>
           </a:xfrm>
           <a:prstGeom prst="rect">
             <a:avLst/>
@@ -10825,14 +12647,14 @@
       </p:sp>
       <p:sp>
         <p:nvSpPr>
-          <p:cNvPr id="251" name="Shape 13"/>
+          <p:cNvPr id="289" name="Shape 13"/>
           <p:cNvSpPr/>
           <p:nvPr/>
         </p:nvSpPr>
         <p:spPr>
           <a:xfrm>
             <a:off x="6296040" y="3754080"/>
-            <a:ext cx="16920" cy="798120"/>
+            <a:ext cx="15480" cy="796680"/>
           </a:xfrm>
           <a:custGeom>
             <a:avLst/>
@@ -10876,14 +12698,14 @@
       </p:sp>
       <p:sp>
         <p:nvSpPr>
-          <p:cNvPr id="252" name="Text 14"/>
+          <p:cNvPr id="290" name="Text 14"/>
           <p:cNvSpPr/>
           <p:nvPr/>
         </p:nvSpPr>
         <p:spPr>
           <a:xfrm>
             <a:off x="6496200" y="3754080"/>
-            <a:ext cx="5379480" cy="188280"/>
+            <a:ext cx="5378040" cy="186840"/>
           </a:xfrm>
           <a:prstGeom prst="rect">
             <a:avLst/>
@@ -10911,7 +12733,7 @@
               <a:buNone/>
             </a:pPr>
             <a:r>
-              <a:rPr b="0" lang="en-US" sz="1050" spc="194" strike="noStrike">
+              <a:rPr b="0" lang="en-US" sz="1050" spc="182" strike="noStrike">
                 <a:solidFill>
                   <a:srgbClr val="86868b"/>
                 </a:solidFill>
@@ -10928,14 +12750,14 @@
       </p:sp>
       <p:sp>
         <p:nvSpPr>
-          <p:cNvPr id="253" name="Text 15"/>
+          <p:cNvPr id="291" name="Text 15"/>
           <p:cNvSpPr/>
           <p:nvPr/>
         </p:nvSpPr>
         <p:spPr>
           <a:xfrm>
             <a:off x="6496200" y="4020840"/>
-            <a:ext cx="5427000" cy="302760"/>
+            <a:ext cx="5425560" cy="301320"/>
           </a:xfrm>
           <a:prstGeom prst="rect">
             <a:avLst/>
@@ -10980,14 +12802,14 @@
       </p:sp>
       <p:sp>
         <p:nvSpPr>
-          <p:cNvPr id="254" name="Text 16"/>
+          <p:cNvPr id="292" name="Text 16"/>
           <p:cNvSpPr/>
           <p:nvPr/>
         </p:nvSpPr>
         <p:spPr>
           <a:xfrm>
             <a:off x="6496200" y="4363560"/>
-            <a:ext cx="5379480" cy="188280"/>
+            <a:ext cx="5378040" cy="186840"/>
           </a:xfrm>
           <a:prstGeom prst="rect">
             <a:avLst/>
@@ -11032,14 +12854,14 @@
       </p:sp>
       <p:sp>
         <p:nvSpPr>
-          <p:cNvPr id="255" name="Shape 17"/>
+          <p:cNvPr id="293" name="Shape 17"/>
           <p:cNvSpPr/>
           <p:nvPr/>
         </p:nvSpPr>
         <p:spPr>
           <a:xfrm>
             <a:off x="380880" y="4787640"/>
-            <a:ext cx="11427840" cy="7200"/>
+            <a:ext cx="11426400" cy="5760"/>
           </a:xfrm>
           <a:custGeom>
             <a:avLst/>
@@ -11083,14 +12905,14 @@
       </p:sp>
       <p:sp>
         <p:nvSpPr>
-          <p:cNvPr id="256" name="Text 18"/>
+          <p:cNvPr id="294" name="Text 18"/>
           <p:cNvSpPr/>
           <p:nvPr/>
         </p:nvSpPr>
         <p:spPr>
           <a:xfrm>
             <a:off x="380880" y="5020920"/>
-            <a:ext cx="11494440" cy="188280"/>
+            <a:ext cx="11493000" cy="186840"/>
           </a:xfrm>
           <a:prstGeom prst="rect">
             <a:avLst/>
@@ -11118,7 +12940,7 @@
               <a:buNone/>
             </a:pPr>
             <a:r>
-              <a:rPr b="0" lang="en-US" sz="1050" spc="194" strike="noStrike">
+              <a:rPr b="0" lang="en-US" sz="1050" spc="182" strike="noStrike">
                 <a:solidFill>
                   <a:srgbClr val="86868b"/>
                 </a:solidFill>
@@ -11135,14 +12957,14 @@
       </p:sp>
       <p:sp>
         <p:nvSpPr>
-          <p:cNvPr id="257" name="Shape 19"/>
+          <p:cNvPr id="295" name="Shape 19"/>
           <p:cNvSpPr/>
           <p:nvPr/>
         </p:nvSpPr>
         <p:spPr>
           <a:xfrm>
             <a:off x="380880" y="5363640"/>
-            <a:ext cx="188280" cy="150120"/>
+            <a:ext cx="186840" cy="148680"/>
           </a:xfrm>
           <a:custGeom>
             <a:avLst/>
@@ -11377,14 +13199,14 @@
       </p:sp>
       <p:sp>
         <p:nvSpPr>
-          <p:cNvPr id="258" name="Text 20"/>
+          <p:cNvPr id="296" name="Text 20"/>
           <p:cNvSpPr/>
           <p:nvPr/>
         </p:nvSpPr>
         <p:spPr>
           <a:xfrm>
             <a:off x="628560" y="5325840"/>
-            <a:ext cx="3484080" cy="226440"/>
+            <a:ext cx="3482640" cy="225000"/>
           </a:xfrm>
           <a:prstGeom prst="rect">
             <a:avLst/>
@@ -11429,14 +13251,14 @@
       </p:sp>
       <p:sp>
         <p:nvSpPr>
-          <p:cNvPr id="259" name="Text 21"/>
+          <p:cNvPr id="297" name="Text 21"/>
           <p:cNvSpPr/>
           <p:nvPr/>
         </p:nvSpPr>
         <p:spPr>
           <a:xfrm>
             <a:off x="380880" y="5630400"/>
-            <a:ext cx="3722040" cy="217080"/>
+            <a:ext cx="3720600" cy="215640"/>
           </a:xfrm>
           <a:prstGeom prst="rect">
             <a:avLst/>
@@ -11481,14 +13303,14 @@
       </p:sp>
       <p:sp>
         <p:nvSpPr>
-          <p:cNvPr id="260" name="Shape 22"/>
+          <p:cNvPr id="298" name="Shape 22"/>
           <p:cNvSpPr/>
           <p:nvPr/>
         </p:nvSpPr>
         <p:spPr>
           <a:xfrm>
             <a:off x="4286160" y="5363640"/>
-            <a:ext cx="150120" cy="150120"/>
+            <a:ext cx="148680" cy="148680"/>
           </a:xfrm>
           <a:custGeom>
             <a:avLst/>
@@ -11579,14 +13401,14 @@
       </p:sp>
       <p:sp>
         <p:nvSpPr>
-          <p:cNvPr id="261" name="Text 23"/>
+          <p:cNvPr id="299" name="Text 23"/>
           <p:cNvSpPr/>
           <p:nvPr/>
         </p:nvSpPr>
         <p:spPr>
           <a:xfrm>
             <a:off x="4514760" y="5325840"/>
-            <a:ext cx="3484080" cy="226440"/>
+            <a:ext cx="3482640" cy="225000"/>
           </a:xfrm>
           <a:prstGeom prst="rect">
             <a:avLst/>
@@ -11631,14 +13453,14 @@
       </p:sp>
       <p:sp>
         <p:nvSpPr>
-          <p:cNvPr id="262" name="Text 24"/>
+          <p:cNvPr id="300" name="Text 24"/>
           <p:cNvSpPr/>
           <p:nvPr/>
         </p:nvSpPr>
         <p:spPr>
           <a:xfrm>
             <a:off x="4267080" y="5630400"/>
-            <a:ext cx="3722040" cy="217080"/>
+            <a:ext cx="3720600" cy="215640"/>
           </a:xfrm>
           <a:prstGeom prst="rect">
             <a:avLst/>
@@ -11683,14 +13505,14 @@
       </p:sp>
       <p:sp>
         <p:nvSpPr>
-          <p:cNvPr id="263" name="Shape 25"/>
+          <p:cNvPr id="301" name="Shape 25"/>
           <p:cNvSpPr/>
           <p:nvPr/>
         </p:nvSpPr>
         <p:spPr>
           <a:xfrm>
             <a:off x="8172360" y="5363640"/>
-            <a:ext cx="150120" cy="150120"/>
+            <a:ext cx="148680" cy="148680"/>
           </a:xfrm>
           <a:custGeom>
             <a:avLst/>
@@ -11820,14 +13642,14 @@
       </p:sp>
       <p:sp>
         <p:nvSpPr>
-          <p:cNvPr id="264" name="Text 26"/>
+          <p:cNvPr id="302" name="Text 26"/>
           <p:cNvSpPr/>
           <p:nvPr/>
         </p:nvSpPr>
         <p:spPr>
           <a:xfrm>
             <a:off x="8400960" y="5325840"/>
-            <a:ext cx="3484080" cy="226440"/>
+            <a:ext cx="3482640" cy="225000"/>
           </a:xfrm>
           <a:prstGeom prst="rect">
             <a:avLst/>
@@ -11872,14 +13694,14 @@
       </p:sp>
       <p:sp>
         <p:nvSpPr>
-          <p:cNvPr id="265" name="Text 27"/>
+          <p:cNvPr id="303" name="Text 27"/>
           <p:cNvSpPr/>
           <p:nvPr/>
         </p:nvSpPr>
         <p:spPr>
           <a:xfrm>
             <a:off x="8153280" y="5630400"/>
-            <a:ext cx="3722040" cy="217080"/>
+            <a:ext cx="3720600" cy="215640"/>
           </a:xfrm>
           <a:prstGeom prst="rect">
             <a:avLst/>
@@ -11961,14 +13783,14 @@
       </p:grpSpPr>
       <p:sp>
         <p:nvSpPr>
-          <p:cNvPr id="266" name="Text 0"/>
+          <p:cNvPr id="304" name="Text 0"/>
           <p:cNvSpPr/>
           <p:nvPr/>
         </p:nvSpPr>
         <p:spPr>
           <a:xfrm>
             <a:off x="380880" y="380880"/>
-            <a:ext cx="11485080" cy="150120"/>
+            <a:ext cx="11483640" cy="148680"/>
           </a:xfrm>
           <a:prstGeom prst="rect">
             <a:avLst/>
@@ -11996,7 +13818,7 @@
               <a:buNone/>
             </a:pPr>
             <a:r>
-              <a:rPr b="0" lang="en-US" sz="900" spc="253" strike="noStrike">
+              <a:rPr b="0" lang="en-US" sz="900" spc="242" strike="noStrike">
                 <a:solidFill>
                   <a:srgbClr val="86868b"/>
                 </a:solidFill>
@@ -12013,14 +13835,14 @@
       </p:sp>
       <p:sp>
         <p:nvSpPr>
-          <p:cNvPr id="267" name="Text 1"/>
+          <p:cNvPr id="305" name="Text 1"/>
           <p:cNvSpPr/>
           <p:nvPr/>
         </p:nvSpPr>
         <p:spPr>
           <a:xfrm>
             <a:off x="380880" y="609480"/>
-            <a:ext cx="11599200" cy="378720"/>
+            <a:ext cx="11597760" cy="377280"/>
           </a:xfrm>
           <a:prstGeom prst="rect">
             <a:avLst/>
@@ -12065,14 +13887,14 @@
       </p:sp>
       <p:sp>
         <p:nvSpPr>
-          <p:cNvPr id="268" name="Shape 2"/>
+          <p:cNvPr id="306" name="Shape 2"/>
           <p:cNvSpPr/>
           <p:nvPr/>
         </p:nvSpPr>
         <p:spPr>
           <a:xfrm>
             <a:off x="380880" y="1886040"/>
-            <a:ext cx="3655440" cy="7200"/>
+            <a:ext cx="3654000" cy="5760"/>
           </a:xfrm>
           <a:custGeom>
             <a:avLst/>
@@ -12116,14 +13938,14 @@
       </p:sp>
       <p:sp>
         <p:nvSpPr>
-          <p:cNvPr id="269" name="Shape 3"/>
+          <p:cNvPr id="307" name="Shape 3"/>
           <p:cNvSpPr/>
           <p:nvPr/>
         </p:nvSpPr>
         <p:spPr>
           <a:xfrm>
             <a:off x="409680" y="2081160"/>
-            <a:ext cx="226440" cy="226440"/>
+            <a:ext cx="225000" cy="225000"/>
           </a:xfrm>
           <a:custGeom>
             <a:avLst/>
@@ -12317,14 +14139,14 @@
       </p:sp>
       <p:sp>
         <p:nvSpPr>
-          <p:cNvPr id="270" name="Text 4"/>
+          <p:cNvPr id="308" name="Text 4"/>
           <p:cNvSpPr/>
           <p:nvPr/>
         </p:nvSpPr>
         <p:spPr>
           <a:xfrm>
             <a:off x="380880" y="2424240"/>
-            <a:ext cx="3750840" cy="264600"/>
+            <a:ext cx="3749400" cy="263160"/>
           </a:xfrm>
           <a:prstGeom prst="rect">
             <a:avLst/>
@@ -12369,14 +14191,14 @@
       </p:sp>
       <p:sp>
         <p:nvSpPr>
-          <p:cNvPr id="271" name="Text 5"/>
+          <p:cNvPr id="309" name="Text 5"/>
           <p:cNvSpPr/>
           <p:nvPr/>
         </p:nvSpPr>
         <p:spPr>
           <a:xfrm>
             <a:off x="380880" y="2843280"/>
-            <a:ext cx="3731760" cy="493200"/>
+            <a:ext cx="3730320" cy="491760"/>
           </a:xfrm>
           <a:prstGeom prst="rect">
             <a:avLst/>
@@ -12421,14 +14243,14 @@
       </p:sp>
       <p:sp>
         <p:nvSpPr>
-          <p:cNvPr id="272" name="Shape 6"/>
+          <p:cNvPr id="310" name="Shape 6"/>
           <p:cNvSpPr/>
           <p:nvPr/>
         </p:nvSpPr>
         <p:spPr>
           <a:xfrm>
             <a:off x="4267080" y="1886040"/>
-            <a:ext cx="3655440" cy="7200"/>
+            <a:ext cx="3654000" cy="5760"/>
           </a:xfrm>
           <a:custGeom>
             <a:avLst/>
@@ -12472,14 +14294,14 @@
       </p:sp>
       <p:sp>
         <p:nvSpPr>
-          <p:cNvPr id="273" name="Shape 7"/>
+          <p:cNvPr id="311" name="Shape 7"/>
           <p:cNvSpPr/>
           <p:nvPr/>
         </p:nvSpPr>
         <p:spPr>
           <a:xfrm>
             <a:off x="4324320" y="2081160"/>
-            <a:ext cx="169200" cy="226440"/>
+            <a:ext cx="167760" cy="225000"/>
           </a:xfrm>
           <a:custGeom>
             <a:avLst/>
@@ -12604,14 +14426,14 @@
       </p:sp>
       <p:sp>
         <p:nvSpPr>
-          <p:cNvPr id="274" name="Text 8"/>
+          <p:cNvPr id="312" name="Text 8"/>
           <p:cNvSpPr/>
           <p:nvPr/>
         </p:nvSpPr>
         <p:spPr>
           <a:xfrm>
             <a:off x="4267080" y="2424240"/>
-            <a:ext cx="3750840" cy="264600"/>
+            <a:ext cx="3749400" cy="263160"/>
           </a:xfrm>
           <a:prstGeom prst="rect">
             <a:avLst/>
@@ -12656,14 +14478,14 @@
       </p:sp>
       <p:sp>
         <p:nvSpPr>
-          <p:cNvPr id="275" name="Text 9"/>
+          <p:cNvPr id="313" name="Text 9"/>
           <p:cNvSpPr/>
           <p:nvPr/>
         </p:nvSpPr>
         <p:spPr>
           <a:xfrm>
             <a:off x="4267080" y="2843280"/>
-            <a:ext cx="3731760" cy="493200"/>
+            <a:ext cx="3730320" cy="491760"/>
           </a:xfrm>
           <a:prstGeom prst="rect">
             <a:avLst/>
@@ -12708,14 +14530,14 @@
       </p:sp>
       <p:sp>
         <p:nvSpPr>
-          <p:cNvPr id="276" name="Shape 10"/>
+          <p:cNvPr id="314" name="Shape 10"/>
           <p:cNvSpPr/>
           <p:nvPr/>
         </p:nvSpPr>
         <p:spPr>
           <a:xfrm>
             <a:off x="8153280" y="1886040"/>
-            <a:ext cx="3655440" cy="7200"/>
+            <a:ext cx="3654000" cy="5760"/>
           </a:xfrm>
           <a:custGeom>
             <a:avLst/>
@@ -12759,14 +14581,14 @@
       </p:sp>
       <p:sp>
         <p:nvSpPr>
-          <p:cNvPr id="277" name="Shape 11"/>
+          <p:cNvPr id="315" name="Shape 11"/>
           <p:cNvSpPr/>
           <p:nvPr/>
         </p:nvSpPr>
         <p:spPr>
           <a:xfrm>
             <a:off x="8182080" y="2081160"/>
-            <a:ext cx="226440" cy="226440"/>
+            <a:ext cx="225000" cy="225000"/>
           </a:xfrm>
           <a:custGeom>
             <a:avLst/>
@@ -12982,14 +14804,14 @@
       </p:sp>
       <p:sp>
         <p:nvSpPr>
-          <p:cNvPr id="278" name="Text 12"/>
+          <p:cNvPr id="316" name="Text 12"/>
           <p:cNvSpPr/>
           <p:nvPr/>
         </p:nvSpPr>
         <p:spPr>
           <a:xfrm>
             <a:off x="8153280" y="2424240"/>
-            <a:ext cx="3750840" cy="264600"/>
+            <a:ext cx="3749400" cy="263160"/>
           </a:xfrm>
           <a:prstGeom prst="rect">
             <a:avLst/>
@@ -13034,14 +14856,14 @@
       </p:sp>
       <p:sp>
         <p:nvSpPr>
-          <p:cNvPr id="279" name="Text 13"/>
+          <p:cNvPr id="317" name="Text 13"/>
           <p:cNvSpPr/>
           <p:nvPr/>
         </p:nvSpPr>
         <p:spPr>
           <a:xfrm>
             <a:off x="8153280" y="2843280"/>
-            <a:ext cx="3731760" cy="493200"/>
+            <a:ext cx="3730320" cy="491760"/>
           </a:xfrm>
           <a:prstGeom prst="rect">
             <a:avLst/>
@@ -13086,14 +14908,14 @@
       </p:sp>
       <p:sp>
         <p:nvSpPr>
-          <p:cNvPr id="280" name="Shape 14"/>
+          <p:cNvPr id="318" name="Shape 14"/>
           <p:cNvSpPr/>
           <p:nvPr/>
         </p:nvSpPr>
         <p:spPr>
           <a:xfrm>
             <a:off x="380880" y="3571920"/>
-            <a:ext cx="3655440" cy="7200"/>
+            <a:ext cx="3654000" cy="5760"/>
           </a:xfrm>
           <a:custGeom>
             <a:avLst/>
@@ -13137,14 +14959,14 @@
       </p:sp>
       <p:sp>
         <p:nvSpPr>
-          <p:cNvPr id="281" name="Shape 15"/>
+          <p:cNvPr id="319" name="Shape 15"/>
           <p:cNvSpPr/>
           <p:nvPr/>
         </p:nvSpPr>
         <p:spPr>
           <a:xfrm>
             <a:off x="380880" y="3767040"/>
-            <a:ext cx="283680" cy="226440"/>
+            <a:ext cx="282240" cy="225000"/>
           </a:xfrm>
           <a:custGeom>
             <a:avLst/>
@@ -13353,14 +15175,14 @@
       </p:sp>
       <p:sp>
         <p:nvSpPr>
-          <p:cNvPr id="282" name="Text 16"/>
+          <p:cNvPr id="320" name="Text 16"/>
           <p:cNvSpPr/>
           <p:nvPr/>
         </p:nvSpPr>
         <p:spPr>
           <a:xfrm>
             <a:off x="380880" y="4110120"/>
-            <a:ext cx="3750840" cy="264600"/>
+            <a:ext cx="3749400" cy="263160"/>
           </a:xfrm>
           <a:prstGeom prst="rect">
             <a:avLst/>
@@ -13405,14 +15227,14 @@
       </p:sp>
       <p:sp>
         <p:nvSpPr>
-          <p:cNvPr id="283" name="Text 17"/>
+          <p:cNvPr id="321" name="Text 17"/>
           <p:cNvSpPr/>
           <p:nvPr/>
         </p:nvSpPr>
         <p:spPr>
           <a:xfrm>
             <a:off x="380880" y="4529160"/>
-            <a:ext cx="3731760" cy="740880"/>
+            <a:ext cx="3730320" cy="739440"/>
           </a:xfrm>
           <a:prstGeom prst="rect">
             <a:avLst/>
@@ -13457,14 +15279,14 @@
       </p:sp>
       <p:sp>
         <p:nvSpPr>
-          <p:cNvPr id="284" name="Shape 18"/>
+          <p:cNvPr id="322" name="Shape 18"/>
           <p:cNvSpPr/>
           <p:nvPr/>
         </p:nvSpPr>
         <p:spPr>
           <a:xfrm>
             <a:off x="4267080" y="3571920"/>
-            <a:ext cx="3655440" cy="7200"/>
+            <a:ext cx="3654000" cy="5760"/>
           </a:xfrm>
           <a:custGeom>
             <a:avLst/>
@@ -13508,14 +15330,14 @@
       </p:sp>
       <p:sp>
         <p:nvSpPr>
-          <p:cNvPr id="285" name="Shape 19"/>
+          <p:cNvPr id="323" name="Shape 19"/>
           <p:cNvSpPr/>
           <p:nvPr/>
         </p:nvSpPr>
         <p:spPr>
           <a:xfrm>
             <a:off x="4324320" y="3767040"/>
-            <a:ext cx="169200" cy="226440"/>
+            <a:ext cx="167760" cy="225000"/>
           </a:xfrm>
           <a:custGeom>
             <a:avLst/>
@@ -13707,14 +15529,14 @@
       </p:sp>
       <p:sp>
         <p:nvSpPr>
-          <p:cNvPr id="286" name="Text 20"/>
+          <p:cNvPr id="324" name="Text 20"/>
           <p:cNvSpPr/>
           <p:nvPr/>
         </p:nvSpPr>
         <p:spPr>
           <a:xfrm>
             <a:off x="4267080" y="4110120"/>
-            <a:ext cx="3750840" cy="264600"/>
+            <a:ext cx="3749400" cy="263160"/>
           </a:xfrm>
           <a:prstGeom prst="rect">
             <a:avLst/>
@@ -13759,14 +15581,14 @@
       </p:sp>
       <p:sp>
         <p:nvSpPr>
-          <p:cNvPr id="287" name="Text 21"/>
+          <p:cNvPr id="325" name="Text 21"/>
           <p:cNvSpPr/>
           <p:nvPr/>
         </p:nvSpPr>
         <p:spPr>
           <a:xfrm>
             <a:off x="4267080" y="4529160"/>
-            <a:ext cx="3731760" cy="493200"/>
+            <a:ext cx="3730320" cy="491760"/>
           </a:xfrm>
           <a:prstGeom prst="rect">
             <a:avLst/>
@@ -13811,14 +15633,14 @@
       </p:sp>
       <p:sp>
         <p:nvSpPr>
-          <p:cNvPr id="288" name="Shape 22"/>
+          <p:cNvPr id="326" name="Shape 22"/>
           <p:cNvSpPr/>
           <p:nvPr/>
         </p:nvSpPr>
         <p:spPr>
           <a:xfrm>
             <a:off x="8153280" y="3571920"/>
-            <a:ext cx="3655440" cy="7200"/>
+            <a:ext cx="3654000" cy="5760"/>
           </a:xfrm>
           <a:custGeom>
             <a:avLst/>
@@ -13862,14 +15684,14 @@
       </p:sp>
       <p:sp>
         <p:nvSpPr>
-          <p:cNvPr id="289" name="Shape 23"/>
+          <p:cNvPr id="327" name="Shape 23"/>
           <p:cNvSpPr/>
           <p:nvPr/>
         </p:nvSpPr>
         <p:spPr>
           <a:xfrm>
             <a:off x="8182080" y="3767040"/>
-            <a:ext cx="226440" cy="226440"/>
+            <a:ext cx="225000" cy="225000"/>
           </a:xfrm>
           <a:custGeom>
             <a:avLst/>
@@ -14101,14 +15923,14 @@
       </p:sp>
       <p:sp>
         <p:nvSpPr>
-          <p:cNvPr id="290" name="Text 24"/>
+          <p:cNvPr id="328" name="Text 24"/>
           <p:cNvSpPr/>
           <p:nvPr/>
         </p:nvSpPr>
         <p:spPr>
           <a:xfrm>
             <a:off x="8153280" y="4110120"/>
-            <a:ext cx="3750840" cy="264600"/>
+            <a:ext cx="3749400" cy="263160"/>
           </a:xfrm>
           <a:prstGeom prst="rect">
             <a:avLst/>
@@ -14153,14 +15975,14 @@
       </p:sp>
       <p:sp>
         <p:nvSpPr>
-          <p:cNvPr id="291" name="Text 25"/>
+          <p:cNvPr id="329" name="Text 25"/>
           <p:cNvSpPr/>
           <p:nvPr/>
         </p:nvSpPr>
         <p:spPr>
           <a:xfrm>
             <a:off x="8153280" y="4529160"/>
-            <a:ext cx="3731760" cy="493200"/>
+            <a:ext cx="3730320" cy="491760"/>
           </a:xfrm>
           <a:prstGeom prst="rect">
             <a:avLst/>
@@ -14205,14 +16027,14 @@
       </p:sp>
       <p:sp>
         <p:nvSpPr>
-          <p:cNvPr id="292" name="Shape 26"/>
+          <p:cNvPr id="330" name="Shape 26"/>
           <p:cNvSpPr/>
           <p:nvPr/>
         </p:nvSpPr>
         <p:spPr>
           <a:xfrm>
             <a:off x="380880" y="6091200"/>
-            <a:ext cx="11427840" cy="7200"/>
+            <a:ext cx="11426400" cy="5760"/>
           </a:xfrm>
           <a:custGeom>
             <a:avLst/>
@@ -14256,14 +16078,14 @@
       </p:sp>
       <p:sp>
         <p:nvSpPr>
-          <p:cNvPr id="293" name="Shape 27"/>
+          <p:cNvPr id="331" name="Shape 27"/>
           <p:cNvSpPr/>
           <p:nvPr/>
         </p:nvSpPr>
         <p:spPr>
           <a:xfrm>
             <a:off x="399960" y="6286680"/>
-            <a:ext cx="150120" cy="150120"/>
+            <a:ext cx="148680" cy="148680"/>
           </a:xfrm>
           <a:custGeom>
             <a:avLst/>
@@ -14433,14 +16255,14 @@
       </p:sp>
       <p:sp>
         <p:nvSpPr>
-          <p:cNvPr id="294" name="Text 28"/>
+          <p:cNvPr id="332" name="Text 28"/>
           <p:cNvSpPr/>
           <p:nvPr/>
         </p:nvSpPr>
         <p:spPr>
           <a:xfrm>
             <a:off x="628560" y="6248520"/>
-            <a:ext cx="11256480" cy="226440"/>
+            <a:ext cx="11255040" cy="225000"/>
           </a:xfrm>
           <a:prstGeom prst="rect">
             <a:avLst/>
@@ -14532,14 +16354,14 @@
       </p:grpSpPr>
       <p:sp>
         <p:nvSpPr>
-          <p:cNvPr id="295" name="Shape 0"/>
+          <p:cNvPr id="333" name="Shape 0"/>
           <p:cNvSpPr/>
           <p:nvPr/>
         </p:nvSpPr>
         <p:spPr>
           <a:xfrm>
             <a:off x="380880" y="380880"/>
-            <a:ext cx="607320" cy="16920"/>
+            <a:ext cx="605880" cy="15480"/>
           </a:xfrm>
           <a:custGeom>
             <a:avLst/>
@@ -14583,14 +16405,14 @@
       </p:sp>
       <p:sp>
         <p:nvSpPr>
-          <p:cNvPr id="296" name="Text 1"/>
+          <p:cNvPr id="334" name="Text 1"/>
           <p:cNvSpPr/>
           <p:nvPr/>
         </p:nvSpPr>
         <p:spPr>
           <a:xfrm>
             <a:off x="380880" y="628560"/>
-            <a:ext cx="11494440" cy="188280"/>
+            <a:ext cx="11493000" cy="186840"/>
           </a:xfrm>
           <a:prstGeom prst="rect">
             <a:avLst/>
@@ -14618,7 +16440,7 @@
               <a:buNone/>
             </a:pPr>
             <a:r>
-              <a:rPr b="0" lang="en-US" sz="1050" spc="299" strike="noStrike">
+              <a:rPr b="0" lang="en-US" sz="1050" spc="287" strike="noStrike">
                 <a:solidFill>
                   <a:srgbClr val="86868b"/>
                 </a:solidFill>
@@ -14635,14 +16457,14 @@
       </p:sp>
       <p:sp>
         <p:nvSpPr>
-          <p:cNvPr id="297" name="Text 2"/>
+          <p:cNvPr id="335" name="Text 2"/>
           <p:cNvSpPr/>
           <p:nvPr/>
         </p:nvSpPr>
         <p:spPr>
           <a:xfrm>
             <a:off x="380880" y="971640"/>
-            <a:ext cx="11713680" cy="569520"/>
+            <a:ext cx="11712240" cy="568080"/>
           </a:xfrm>
           <a:prstGeom prst="rect">
             <a:avLst/>
@@ -14687,14 +16509,14 @@
       </p:sp>
       <p:sp>
         <p:nvSpPr>
-          <p:cNvPr id="298" name="Shape 3"/>
+          <p:cNvPr id="336" name="Shape 3"/>
           <p:cNvSpPr/>
           <p:nvPr/>
         </p:nvSpPr>
         <p:spPr>
           <a:xfrm>
             <a:off x="385920" y="2714760"/>
-            <a:ext cx="369360" cy="369360"/>
+            <a:ext cx="367920" cy="367920"/>
           </a:xfrm>
           <a:custGeom>
             <a:avLst/>
@@ -14723,7 +16545,7 @@
             </a:pathLst>
           </a:custGeom>
           <a:noFill/>
-          <a:ln w="12700">
+          <a:ln w="12600">
             <a:solidFill>
               <a:srgbClr val="0071e3"/>
             </a:solidFill>
@@ -14739,14 +16561,14 @@
       </p:sp>
       <p:sp>
         <p:nvSpPr>
-          <p:cNvPr id="299" name="Text 4"/>
+          <p:cNvPr id="337" name="Text 4"/>
           <p:cNvSpPr/>
           <p:nvPr/>
         </p:nvSpPr>
         <p:spPr>
           <a:xfrm>
             <a:off x="338040" y="2709720"/>
-            <a:ext cx="445680" cy="359640"/>
+            <a:ext cx="444240" cy="358200"/>
           </a:xfrm>
           <a:prstGeom prst="rect">
             <a:avLst/>
@@ -14791,14 +16613,14 @@
       </p:sp>
       <p:sp>
         <p:nvSpPr>
-          <p:cNvPr id="300" name="Text 5"/>
+          <p:cNvPr id="338" name="Text 5"/>
           <p:cNvSpPr/>
           <p:nvPr/>
         </p:nvSpPr>
         <p:spPr>
           <a:xfrm>
             <a:off x="914400" y="2709720"/>
-            <a:ext cx="5046120" cy="264600"/>
+            <a:ext cx="5044680" cy="263160"/>
           </a:xfrm>
           <a:prstGeom prst="rect">
             <a:avLst/>
@@ -14843,14 +16665,14 @@
       </p:sp>
       <p:sp>
         <p:nvSpPr>
-          <p:cNvPr id="301" name="Text 6"/>
+          <p:cNvPr id="339" name="Text 6"/>
           <p:cNvSpPr/>
           <p:nvPr/>
         </p:nvSpPr>
         <p:spPr>
           <a:xfrm>
             <a:off x="914400" y="3052800"/>
-            <a:ext cx="5027040" cy="493200"/>
+            <a:ext cx="5025600" cy="491760"/>
           </a:xfrm>
           <a:prstGeom prst="rect">
             <a:avLst/>
@@ -14915,14 +16737,14 @@
       </p:sp>
       <p:sp>
         <p:nvSpPr>
-          <p:cNvPr id="302" name="Shape 7"/>
+          <p:cNvPr id="340" name="Shape 7"/>
           <p:cNvSpPr/>
           <p:nvPr/>
         </p:nvSpPr>
         <p:spPr>
           <a:xfrm>
             <a:off x="6329520" y="2714760"/>
-            <a:ext cx="369360" cy="369360"/>
+            <a:ext cx="367920" cy="367920"/>
           </a:xfrm>
           <a:custGeom>
             <a:avLst/>
@@ -14951,7 +16773,7 @@
             </a:pathLst>
           </a:custGeom>
           <a:noFill/>
-          <a:ln w="12700">
+          <a:ln w="12600">
             <a:solidFill>
               <a:srgbClr val="0071e3"/>
             </a:solidFill>
@@ -14967,14 +16789,14 @@
       </p:sp>
       <p:sp>
         <p:nvSpPr>
-          <p:cNvPr id="303" name="Text 8"/>
+          <p:cNvPr id="341" name="Text 8"/>
           <p:cNvSpPr/>
           <p:nvPr/>
         </p:nvSpPr>
         <p:spPr>
           <a:xfrm>
             <a:off x="6281640" y="2709720"/>
-            <a:ext cx="445680" cy="359640"/>
+            <a:ext cx="444240" cy="358200"/>
           </a:xfrm>
           <a:prstGeom prst="rect">
             <a:avLst/>
@@ -15019,14 +16841,14 @@
       </p:sp>
       <p:sp>
         <p:nvSpPr>
-          <p:cNvPr id="304" name="Text 9"/>
+          <p:cNvPr id="342" name="Text 9"/>
           <p:cNvSpPr/>
           <p:nvPr/>
         </p:nvSpPr>
         <p:spPr>
           <a:xfrm>
             <a:off x="6858000" y="2709720"/>
-            <a:ext cx="5046120" cy="264600"/>
+            <a:ext cx="5044680" cy="263160"/>
           </a:xfrm>
           <a:prstGeom prst="rect">
             <a:avLst/>
@@ -15071,14 +16893,14 @@
       </p:sp>
       <p:sp>
         <p:nvSpPr>
-          <p:cNvPr id="305" name="Text 10"/>
+          <p:cNvPr id="343" name="Text 10"/>
           <p:cNvSpPr/>
           <p:nvPr/>
         </p:nvSpPr>
         <p:spPr>
           <a:xfrm>
             <a:off x="6858000" y="3052800"/>
-            <a:ext cx="5027040" cy="493200"/>
+            <a:ext cx="5025600" cy="491760"/>
           </a:xfrm>
           <a:prstGeom prst="rect">
             <a:avLst/>
@@ -15143,14 +16965,14 @@
       </p:sp>
       <p:sp>
         <p:nvSpPr>
-          <p:cNvPr id="306" name="Shape 11"/>
+          <p:cNvPr id="344" name="Shape 11"/>
           <p:cNvSpPr/>
           <p:nvPr/>
         </p:nvSpPr>
         <p:spPr>
           <a:xfrm>
             <a:off x="385920" y="3781440"/>
-            <a:ext cx="369360" cy="369360"/>
+            <a:ext cx="367920" cy="367920"/>
           </a:xfrm>
           <a:custGeom>
             <a:avLst/>
@@ -15179,7 +17001,7 @@
             </a:pathLst>
           </a:custGeom>
           <a:noFill/>
-          <a:ln w="12700">
+          <a:ln w="12600">
             <a:solidFill>
               <a:srgbClr val="0071e3"/>
             </a:solidFill>
@@ -15195,14 +17017,14 @@
       </p:sp>
       <p:sp>
         <p:nvSpPr>
-          <p:cNvPr id="307" name="Text 12"/>
+          <p:cNvPr id="345" name="Text 12"/>
           <p:cNvSpPr/>
           <p:nvPr/>
         </p:nvSpPr>
         <p:spPr>
           <a:xfrm>
             <a:off x="338040" y="3776760"/>
-            <a:ext cx="445680" cy="359640"/>
+            <a:ext cx="444240" cy="358200"/>
           </a:xfrm>
           <a:prstGeom prst="rect">
             <a:avLst/>
@@ -15247,14 +17069,14 @@
       </p:sp>
       <p:sp>
         <p:nvSpPr>
-          <p:cNvPr id="308" name="Text 13"/>
+          <p:cNvPr id="346" name="Text 13"/>
           <p:cNvSpPr/>
           <p:nvPr/>
         </p:nvSpPr>
         <p:spPr>
           <a:xfrm>
             <a:off x="914400" y="3776760"/>
-            <a:ext cx="5046120" cy="264600"/>
+            <a:ext cx="5044680" cy="263160"/>
           </a:xfrm>
           <a:prstGeom prst="rect">
             <a:avLst/>
@@ -15299,14 +17121,14 @@
       </p:sp>
       <p:sp>
         <p:nvSpPr>
-          <p:cNvPr id="309" name="Text 14"/>
+          <p:cNvPr id="347" name="Text 14"/>
           <p:cNvSpPr/>
           <p:nvPr/>
         </p:nvSpPr>
         <p:spPr>
           <a:xfrm>
             <a:off x="914400" y="4119480"/>
-            <a:ext cx="5027040" cy="493200"/>
+            <a:ext cx="5025600" cy="491760"/>
           </a:xfrm>
           <a:prstGeom prst="rect">
             <a:avLst/>
@@ -15391,14 +17213,14 @@
       </p:sp>
       <p:sp>
         <p:nvSpPr>
-          <p:cNvPr id="310" name="Shape 15"/>
+          <p:cNvPr id="348" name="Shape 15"/>
           <p:cNvSpPr/>
           <p:nvPr/>
         </p:nvSpPr>
         <p:spPr>
           <a:xfrm>
             <a:off x="6329520" y="3781440"/>
-            <a:ext cx="369360" cy="369360"/>
+            <a:ext cx="367920" cy="367920"/>
           </a:xfrm>
           <a:custGeom>
             <a:avLst/>
@@ -15427,7 +17249,7 @@
             </a:pathLst>
           </a:custGeom>
           <a:noFill/>
-          <a:ln w="12700">
+          <a:ln w="12600">
             <a:solidFill>
               <a:srgbClr val="0071e3"/>
             </a:solidFill>
@@ -15443,14 +17265,14 @@
       </p:sp>
       <p:sp>
         <p:nvSpPr>
-          <p:cNvPr id="311" name="Text 16"/>
+          <p:cNvPr id="349" name="Text 16"/>
           <p:cNvSpPr/>
           <p:nvPr/>
         </p:nvSpPr>
         <p:spPr>
           <a:xfrm>
             <a:off x="6281640" y="3776760"/>
-            <a:ext cx="445680" cy="359640"/>
+            <a:ext cx="444240" cy="358200"/>
           </a:xfrm>
           <a:prstGeom prst="rect">
             <a:avLst/>
@@ -15495,14 +17317,14 @@
       </p:sp>
       <p:sp>
         <p:nvSpPr>
-          <p:cNvPr id="312" name="Text 17"/>
+          <p:cNvPr id="350" name="Text 17"/>
           <p:cNvSpPr/>
           <p:nvPr/>
         </p:nvSpPr>
         <p:spPr>
           <a:xfrm>
             <a:off x="6858000" y="3776760"/>
-            <a:ext cx="5046120" cy="264600"/>
+            <a:ext cx="5044680" cy="263160"/>
           </a:xfrm>
           <a:prstGeom prst="rect">
             <a:avLst/>
@@ -15547,14 +17369,14 @@
       </p:sp>
       <p:sp>
         <p:nvSpPr>
-          <p:cNvPr id="313" name="Text 18"/>
+          <p:cNvPr id="351" name="Text 18"/>
           <p:cNvSpPr/>
           <p:nvPr/>
         </p:nvSpPr>
         <p:spPr>
           <a:xfrm>
             <a:off x="6858000" y="4119480"/>
-            <a:ext cx="5027040" cy="493200"/>
+            <a:ext cx="5025600" cy="491760"/>
           </a:xfrm>
           <a:prstGeom prst="rect">
             <a:avLst/>
@@ -15619,14 +17441,14 @@
       </p:sp>
       <p:sp>
         <p:nvSpPr>
-          <p:cNvPr id="314" name="Shape 19"/>
+          <p:cNvPr id="352" name="Shape 19"/>
           <p:cNvSpPr/>
           <p:nvPr/>
         </p:nvSpPr>
         <p:spPr>
           <a:xfrm>
             <a:off x="380880" y="5634000"/>
-            <a:ext cx="11427840" cy="7200"/>
+            <a:ext cx="11426400" cy="5760"/>
           </a:xfrm>
           <a:custGeom>
             <a:avLst/>
@@ -15670,14 +17492,14 @@
       </p:sp>
       <p:sp>
         <p:nvSpPr>
-          <p:cNvPr id="315" name="Text 20"/>
+          <p:cNvPr id="353" name="Text 20"/>
           <p:cNvSpPr/>
           <p:nvPr/>
         </p:nvSpPr>
         <p:spPr>
           <a:xfrm>
             <a:off x="380880" y="5867280"/>
-            <a:ext cx="7770240" cy="302760"/>
+            <a:ext cx="7768800" cy="301320"/>
           </a:xfrm>
           <a:prstGeom prst="rect">
             <a:avLst/>
@@ -15722,14 +17544,14 @@
       </p:sp>
       <p:sp>
         <p:nvSpPr>
-          <p:cNvPr id="316" name="Text 21"/>
+          <p:cNvPr id="354" name="Text 21"/>
           <p:cNvSpPr/>
           <p:nvPr/>
         </p:nvSpPr>
         <p:spPr>
           <a:xfrm>
             <a:off x="380880" y="6248520"/>
-            <a:ext cx="7732080" cy="226440"/>
+            <a:ext cx="7730640" cy="225000"/>
           </a:xfrm>
           <a:prstGeom prst="rect">
             <a:avLst/>
@@ -15784,14 +17606,14 @@
       </p:sp>
       <p:sp>
         <p:nvSpPr>
-          <p:cNvPr id="317" name="Text 22"/>
+          <p:cNvPr id="355" name="Text 22"/>
           <p:cNvSpPr/>
           <p:nvPr/>
         </p:nvSpPr>
         <p:spPr>
           <a:xfrm>
             <a:off x="10064160" y="5981760"/>
-            <a:ext cx="1740960" cy="188280"/>
+            <a:ext cx="1739520" cy="186840"/>
           </a:xfrm>
           <a:prstGeom prst="rect">
             <a:avLst/>
@@ -15836,14 +17658,14 @@
       </p:sp>
       <p:sp>
         <p:nvSpPr>
-          <p:cNvPr id="318" name="Text 23"/>
+          <p:cNvPr id="356" name="Text 23"/>
           <p:cNvSpPr/>
           <p:nvPr/>
         </p:nvSpPr>
         <p:spPr>
           <a:xfrm>
             <a:off x="10073880" y="6210360"/>
-            <a:ext cx="1731240" cy="150120"/>
+            <a:ext cx="1729800" cy="148680"/>
           </a:xfrm>
           <a:prstGeom prst="rect">
             <a:avLst/>
@@ -15925,14 +17747,14 @@
       </p:grpSpPr>
       <p:sp>
         <p:nvSpPr>
-          <p:cNvPr id="52" name="Text 0"/>
+          <p:cNvPr id="90" name="Text 0"/>
           <p:cNvSpPr/>
           <p:nvPr/>
         </p:nvSpPr>
         <p:spPr>
           <a:xfrm>
             <a:off x="380880" y="380880"/>
-            <a:ext cx="11485080" cy="150120"/>
+            <a:ext cx="11483640" cy="148680"/>
           </a:xfrm>
           <a:prstGeom prst="rect">
             <a:avLst/>
@@ -15960,7 +17782,7 @@
               <a:buNone/>
             </a:pPr>
             <a:r>
-              <a:rPr b="0" lang="en-US" sz="900" spc="253" strike="noStrike">
+              <a:rPr b="0" lang="en-US" sz="900" spc="242" strike="noStrike">
                 <a:solidFill>
                   <a:srgbClr val="86868b"/>
                 </a:solidFill>
@@ -15977,14 +17799,14 @@
       </p:sp>
       <p:sp>
         <p:nvSpPr>
-          <p:cNvPr id="53" name="Text 1"/>
+          <p:cNvPr id="91" name="Text 1"/>
           <p:cNvSpPr/>
           <p:nvPr/>
         </p:nvSpPr>
         <p:spPr>
           <a:xfrm>
             <a:off x="380880" y="647640"/>
-            <a:ext cx="11656440" cy="455040"/>
+            <a:ext cx="11655000" cy="453600"/>
           </a:xfrm>
           <a:prstGeom prst="rect">
             <a:avLst/>
@@ -16029,14 +17851,14 @@
       </p:sp>
       <p:sp>
         <p:nvSpPr>
-          <p:cNvPr id="54" name="Text 2"/>
+          <p:cNvPr id="92" name="Text 2"/>
           <p:cNvSpPr/>
           <p:nvPr/>
         </p:nvSpPr>
         <p:spPr>
           <a:xfrm>
             <a:off x="380880" y="1714680"/>
-            <a:ext cx="874080" cy="569520"/>
+            <a:ext cx="872640" cy="568080"/>
           </a:xfrm>
           <a:prstGeom prst="rect">
             <a:avLst/>
@@ -16081,14 +17903,14 @@
       </p:sp>
       <p:sp>
         <p:nvSpPr>
-          <p:cNvPr id="55" name="Text 3"/>
+          <p:cNvPr id="93" name="Text 3"/>
           <p:cNvSpPr/>
           <p:nvPr/>
         </p:nvSpPr>
         <p:spPr>
           <a:xfrm>
             <a:off x="1202760" y="1790640"/>
-            <a:ext cx="4627080" cy="302760"/>
+            <a:ext cx="4625640" cy="301320"/>
           </a:xfrm>
           <a:prstGeom prst="rect">
             <a:avLst/>
@@ -16133,14 +17955,14 @@
       </p:sp>
       <p:sp>
         <p:nvSpPr>
-          <p:cNvPr id="56" name="Text 4"/>
+          <p:cNvPr id="94" name="Text 4"/>
           <p:cNvSpPr/>
           <p:nvPr/>
         </p:nvSpPr>
         <p:spPr>
           <a:xfrm>
             <a:off x="1202760" y="2209680"/>
-            <a:ext cx="4588920" cy="493200"/>
+            <a:ext cx="4587480" cy="491760"/>
           </a:xfrm>
           <a:prstGeom prst="rect">
             <a:avLst/>
@@ -16185,14 +18007,14 @@
       </p:sp>
       <p:sp>
         <p:nvSpPr>
-          <p:cNvPr id="57" name="Text 5"/>
+          <p:cNvPr id="95" name="Text 5"/>
           <p:cNvSpPr/>
           <p:nvPr/>
         </p:nvSpPr>
         <p:spPr>
           <a:xfrm>
             <a:off x="6477120" y="1714680"/>
-            <a:ext cx="978840" cy="569520"/>
+            <a:ext cx="977400" cy="568080"/>
           </a:xfrm>
           <a:prstGeom prst="rect">
             <a:avLst/>
@@ -16237,14 +18059,14 @@
       </p:sp>
       <p:sp>
         <p:nvSpPr>
-          <p:cNvPr id="58" name="Text 6"/>
+          <p:cNvPr id="96" name="Text 6"/>
           <p:cNvSpPr/>
           <p:nvPr/>
         </p:nvSpPr>
         <p:spPr>
           <a:xfrm>
             <a:off x="7402320" y="1790640"/>
-            <a:ext cx="4522320" cy="302760"/>
+            <a:ext cx="4520880" cy="301320"/>
           </a:xfrm>
           <a:prstGeom prst="rect">
             <a:avLst/>
@@ -16289,14 +18111,14 @@
       </p:sp>
       <p:sp>
         <p:nvSpPr>
-          <p:cNvPr id="59" name="Text 7"/>
+          <p:cNvPr id="97" name="Text 7"/>
           <p:cNvSpPr/>
           <p:nvPr/>
         </p:nvSpPr>
         <p:spPr>
           <a:xfrm>
             <a:off x="7402320" y="2209680"/>
-            <a:ext cx="4484160" cy="493200"/>
+            <a:ext cx="4482720" cy="491760"/>
           </a:xfrm>
           <a:prstGeom prst="rect">
             <a:avLst/>
@@ -16341,14 +18163,14 @@
       </p:sp>
       <p:sp>
         <p:nvSpPr>
-          <p:cNvPr id="60" name="Text 8"/>
+          <p:cNvPr id="98" name="Text 8"/>
           <p:cNvSpPr/>
           <p:nvPr/>
         </p:nvSpPr>
         <p:spPr>
           <a:xfrm>
             <a:off x="380880" y="4324320"/>
-            <a:ext cx="988560" cy="569520"/>
+            <a:ext cx="987120" cy="568080"/>
           </a:xfrm>
           <a:prstGeom prst="rect">
             <a:avLst/>
@@ -16393,14 +18215,14 @@
       </p:sp>
       <p:sp>
         <p:nvSpPr>
-          <p:cNvPr id="61" name="Text 9"/>
+          <p:cNvPr id="99" name="Text 9"/>
           <p:cNvSpPr/>
           <p:nvPr/>
         </p:nvSpPr>
         <p:spPr>
           <a:xfrm>
             <a:off x="1311480" y="4400640"/>
-            <a:ext cx="4512600" cy="302760"/>
+            <a:ext cx="4511160" cy="301320"/>
           </a:xfrm>
           <a:prstGeom prst="rect">
             <a:avLst/>
@@ -16445,14 +18267,14 @@
       </p:sp>
       <p:sp>
         <p:nvSpPr>
-          <p:cNvPr id="62" name="Text 10"/>
+          <p:cNvPr id="100" name="Text 10"/>
           <p:cNvSpPr/>
           <p:nvPr/>
         </p:nvSpPr>
         <p:spPr>
           <a:xfrm>
             <a:off x="1311480" y="4819680"/>
-            <a:ext cx="4474440" cy="493200"/>
+            <a:ext cx="4473000" cy="491760"/>
           </a:xfrm>
           <a:prstGeom prst="rect">
             <a:avLst/>
@@ -16497,14 +18319,14 @@
       </p:sp>
       <p:sp>
         <p:nvSpPr>
-          <p:cNvPr id="63" name="Text 11"/>
+          <p:cNvPr id="101" name="Text 11"/>
           <p:cNvSpPr/>
           <p:nvPr/>
         </p:nvSpPr>
         <p:spPr>
           <a:xfrm>
             <a:off x="6477120" y="4324320"/>
-            <a:ext cx="988560" cy="569520"/>
+            <a:ext cx="987120" cy="568080"/>
           </a:xfrm>
           <a:prstGeom prst="rect">
             <a:avLst/>
@@ -16549,14 +18371,14 @@
       </p:sp>
       <p:sp>
         <p:nvSpPr>
-          <p:cNvPr id="64" name="Text 12"/>
+          <p:cNvPr id="102" name="Text 12"/>
           <p:cNvSpPr/>
           <p:nvPr/>
         </p:nvSpPr>
         <p:spPr>
           <a:xfrm>
             <a:off x="7407000" y="4400640"/>
-            <a:ext cx="4512600" cy="302760"/>
+            <a:ext cx="4511160" cy="301320"/>
           </a:xfrm>
           <a:prstGeom prst="rect">
             <a:avLst/>
@@ -16601,14 +18423,14 @@
       </p:sp>
       <p:sp>
         <p:nvSpPr>
-          <p:cNvPr id="65" name="Text 13"/>
+          <p:cNvPr id="103" name="Text 13"/>
           <p:cNvSpPr/>
           <p:nvPr/>
         </p:nvSpPr>
         <p:spPr>
           <a:xfrm>
             <a:off x="7407000" y="4819680"/>
-            <a:ext cx="4474440" cy="245520"/>
+            <a:ext cx="4473000" cy="244080"/>
           </a:xfrm>
           <a:prstGeom prst="rect">
             <a:avLst/>
@@ -16690,14 +18512,14 @@
       </p:grpSpPr>
       <p:sp>
         <p:nvSpPr>
-          <p:cNvPr id="66" name="Shape 0"/>
+          <p:cNvPr id="104" name="Shape 0"/>
           <p:cNvSpPr/>
           <p:nvPr/>
         </p:nvSpPr>
         <p:spPr>
           <a:xfrm>
             <a:off x="380880" y="1665000"/>
-            <a:ext cx="759960" cy="16920"/>
+            <a:ext cx="758520" cy="15480"/>
           </a:xfrm>
           <a:custGeom>
             <a:avLst/>
@@ -16741,14 +18563,14 @@
       </p:sp>
       <p:sp>
         <p:nvSpPr>
-          <p:cNvPr id="67" name="Text 1"/>
+          <p:cNvPr id="105" name="Text 1"/>
           <p:cNvSpPr/>
           <p:nvPr/>
         </p:nvSpPr>
         <p:spPr>
           <a:xfrm>
             <a:off x="380880" y="1989000"/>
-            <a:ext cx="9513360" cy="188280"/>
+            <a:ext cx="9511920" cy="186840"/>
           </a:xfrm>
           <a:prstGeom prst="rect">
             <a:avLst/>
@@ -16776,7 +18598,7 @@
               <a:buNone/>
             </a:pPr>
             <a:r>
-              <a:rPr b="0" lang="en-US" sz="1050" spc="299" strike="noStrike">
+              <a:rPr b="0" lang="en-US" sz="1050" spc="287" strike="noStrike">
                 <a:solidFill>
                   <a:srgbClr val="86868b"/>
                 </a:solidFill>
@@ -16793,14 +18615,14 @@
       </p:sp>
       <p:sp>
         <p:nvSpPr>
-          <p:cNvPr id="68" name="Text 2"/>
+          <p:cNvPr id="106" name="Text 2"/>
           <p:cNvSpPr/>
           <p:nvPr/>
         </p:nvSpPr>
         <p:spPr>
           <a:xfrm>
             <a:off x="380880" y="2408040"/>
-            <a:ext cx="9903960" cy="1731240"/>
+            <a:ext cx="9902520" cy="1729800"/>
           </a:xfrm>
           <a:prstGeom prst="rect">
             <a:avLst/>
@@ -16866,14 +18688,14 @@
       </p:sp>
       <p:sp>
         <p:nvSpPr>
-          <p:cNvPr id="69" name="Text 3"/>
+          <p:cNvPr id="107" name="Text 3"/>
           <p:cNvSpPr/>
           <p:nvPr/>
         </p:nvSpPr>
         <p:spPr>
           <a:xfrm>
             <a:off x="380880" y="4449960"/>
-            <a:ext cx="5598720" cy="740880"/>
+            <a:ext cx="5597280" cy="739440"/>
           </a:xfrm>
           <a:prstGeom prst="rect">
             <a:avLst/>
@@ -16918,14 +18740,14 @@
       </p:sp>
       <p:sp>
         <p:nvSpPr>
-          <p:cNvPr id="70" name="Text 4"/>
+          <p:cNvPr id="108" name="Text 4"/>
           <p:cNvSpPr/>
           <p:nvPr/>
         </p:nvSpPr>
         <p:spPr>
           <a:xfrm>
             <a:off x="9833760" y="2476440"/>
-            <a:ext cx="2931480" cy="1902960"/>
+            <a:ext cx="2930040" cy="1901520"/>
           </a:xfrm>
           <a:prstGeom prst="rect">
             <a:avLst/>
@@ -17007,19 +18829,21 @@
       </p:grpSpPr>
       <p:sp>
         <p:nvSpPr>
-          <p:cNvPr id="71" name="Text 0"/>
+          <p:cNvPr id="109" name="Text 0"/>
           <p:cNvSpPr/>
           <p:nvPr/>
         </p:nvSpPr>
         <p:spPr>
           <a:xfrm>
             <a:off x="380880" y="380880"/>
-            <a:ext cx="11485080" cy="150120"/>
-          </a:xfrm>
-          <a:prstGeom prst="rect">
-            <a:avLst/>
-          </a:prstGeom>
-          <a:noFill/>
+            <a:ext cx="11483640" cy="148680"/>
+          </a:xfrm>
+          <a:prstGeom prst="rect">
+            <a:avLst/>
+          </a:prstGeom>
+          <a:solidFill>
+            <a:srgbClr val="800080"/>
+          </a:solidFill>
           <a:ln w="0">
             <a:noFill/>
           </a:ln>
@@ -17042,7 +18866,7 @@
               <a:buNone/>
             </a:pPr>
             <a:r>
-              <a:rPr b="0" lang="en-US" sz="900" spc="253" strike="noStrike">
+              <a:rPr b="0" lang="en-US" sz="900" spc="242" strike="noStrike">
                 <a:solidFill>
                   <a:srgbClr val="86868b"/>
                 </a:solidFill>
@@ -17059,19 +18883,21 @@
       </p:sp>
       <p:sp>
         <p:nvSpPr>
-          <p:cNvPr id="72" name="Text 1"/>
+          <p:cNvPr id="110" name="Text 1"/>
           <p:cNvSpPr/>
           <p:nvPr/>
         </p:nvSpPr>
         <p:spPr>
           <a:xfrm>
             <a:off x="380880" y="609480"/>
-            <a:ext cx="11599200" cy="378720"/>
-          </a:xfrm>
-          <a:prstGeom prst="rect">
-            <a:avLst/>
-          </a:prstGeom>
-          <a:noFill/>
+            <a:ext cx="11597760" cy="377280"/>
+          </a:xfrm>
+          <a:prstGeom prst="rect">
+            <a:avLst/>
+          </a:prstGeom>
+          <a:solidFill>
+            <a:srgbClr val="800080"/>
+          </a:solidFill>
           <a:ln w="0">
             <a:noFill/>
           </a:ln>
@@ -17094,77 +18920,80 @@
               <a:buNone/>
             </a:pPr>
             <a:r>
-              <a:rPr b="0" lang="en-US" sz="2700" spc="-1" strike="noStrike" u="sng">
+              <a:rPr b="0" lang="en-US" sz="2700" spc="-1" strike="noStrike">
                 <a:solidFill>
                   <a:srgbClr val="800080"/>
+                </a:solidFill>
+                <a:latin typeface="Liter"/>
+                <a:ea typeface="Liter"/>
+              </a:rPr>
+              <a:t>The Surprising Question</a:t>
+            </a:r>
+            <a:endParaRPr b="0" lang="en-HK" sz="2700" spc="-1" strike="noStrike">
+              <a:latin typeface="Arial"/>
+            </a:endParaRPr>
+          </a:p>
+        </p:txBody>
+      </p:sp>
+      <p:sp>
+        <p:nvSpPr>
+          <p:cNvPr id="111" name="Text 2"/>
+          <p:cNvSpPr/>
+          <p:nvPr/>
+        </p:nvSpPr>
+        <p:spPr>
+          <a:xfrm>
+            <a:off x="380880" y="1824120"/>
+            <a:ext cx="8645040" cy="739440"/>
+          </a:xfrm>
+          <a:prstGeom prst="rect">
+            <a:avLst/>
+          </a:prstGeom>
+          <a:solidFill>
+            <a:srgbClr val="800080"/>
+          </a:solidFill>
+          <a:ln w="0">
+            <a:noFill/>
+          </a:ln>
+        </p:spPr>
+        <p:style>
+          <a:lnRef idx="0"/>
+          <a:fillRef idx="0"/>
+          <a:effectRef idx="0"/>
+          <a:fontRef idx="minor"/>
+        </p:style>
+        <p:txBody>
+          <a:bodyPr lIns="0" rIns="0" tIns="0" bIns="0" anchor="ctr">
+            <a:noAutofit/>
+          </a:bodyPr>
+          <a:p>
+            <a:pPr>
+              <a:lnSpc>
+                <a:spcPct val="140000"/>
+              </a:lnSpc>
+              <a:buNone/>
+            </a:pPr>
+            <a:r>
+              <a:rPr b="1" lang="en-US" sz="1800" spc="-1" strike="noStrike" u="sng">
+                <a:solidFill>
+                  <a:srgbClr val="e0c2cd"/>
                 </a:solidFill>
                 <a:uFillTx/>
                 <a:latin typeface="Liter"/>
                 <a:ea typeface="Liter"/>
               </a:rPr>
-              <a:t>The Surprising Question</a:t>
-            </a:r>
-            <a:endParaRPr b="0" lang="en-HK" sz="2700" spc="-1" strike="noStrike">
-              <a:latin typeface="Arial"/>
-            </a:endParaRPr>
-          </a:p>
-        </p:txBody>
-      </p:sp>
-      <p:sp>
-        <p:nvSpPr>
-          <p:cNvPr id="73" name="Text 2"/>
-          <p:cNvSpPr/>
-          <p:nvPr/>
-        </p:nvSpPr>
-        <p:spPr>
-          <a:xfrm>
-            <a:off x="380880" y="1824120"/>
-            <a:ext cx="8646480" cy="740880"/>
-          </a:xfrm>
-          <a:prstGeom prst="rect">
-            <a:avLst/>
-          </a:prstGeom>
-          <a:noFill/>
-          <a:ln w="0">
-            <a:noFill/>
-          </a:ln>
-        </p:spPr>
-        <p:style>
-          <a:lnRef idx="0"/>
-          <a:fillRef idx="0"/>
-          <a:effectRef idx="0"/>
-          <a:fontRef idx="minor"/>
-        </p:style>
-        <p:txBody>
-          <a:bodyPr lIns="0" rIns="0" tIns="0" bIns="0" anchor="ctr">
-            <a:noAutofit/>
-          </a:bodyPr>
-          <a:p>
-            <a:pPr>
-              <a:lnSpc>
-                <a:spcPct val="140000"/>
-              </a:lnSpc>
-              <a:buNone/>
-            </a:pPr>
-            <a:r>
-              <a:rPr b="1" lang="en-US" sz="1800" spc="-1" strike="noStrike">
+              <a:t>How many people must be in a room for there to be a greater than 50% chance that at least two of them share the same birt</a:t>
+            </a:r>
+            <a:r>
+              <a:rPr b="1" lang="en-US" sz="1800" spc="-1" strike="noStrike" u="sng">
                 <a:solidFill>
                   <a:srgbClr val="1d1d1d"/>
                 </a:solidFill>
+                <a:uFillTx/>
                 <a:latin typeface="Liter"/>
                 <a:ea typeface="Liter"/>
               </a:rPr>
-              <a:t>How many people must be in a room</a:t>
-            </a:r>
-            <a:r>
-              <a:rPr b="0" lang="en-US" sz="1800" spc="-1" strike="noStrike">
-                <a:solidFill>
-                  <a:srgbClr val="1d1d1d"/>
-                </a:solidFill>
-                <a:latin typeface="Liter"/>
-                <a:ea typeface="Liter"/>
-              </a:rPr>
-              <a:t> for there to be a greater than 50% chance that at least two of them share the same birthday?</a:t>
+              <a:t>hday?</a:t>
             </a:r>
             <a:endParaRPr b="0" lang="en-HK" sz="1800" spc="-1" strike="noStrike">
               <a:latin typeface="Arial"/>
@@ -17174,14 +19003,14 @@
       </p:sp>
       <p:sp>
         <p:nvSpPr>
-          <p:cNvPr id="74" name="Shape 3"/>
+          <p:cNvPr id="112" name="Shape 3"/>
           <p:cNvSpPr/>
           <p:nvPr/>
         </p:nvSpPr>
         <p:spPr>
           <a:xfrm>
             <a:off x="380880" y="3338640"/>
-            <a:ext cx="5484240" cy="16920"/>
+            <a:ext cx="5482800" cy="15480"/>
           </a:xfrm>
           <a:custGeom>
             <a:avLst/>
@@ -17210,7 +19039,7 @@
             </a:pathLst>
           </a:custGeom>
           <a:solidFill>
-            <a:srgbClr val="e5e5e5"/>
+            <a:srgbClr val="800080"/>
           </a:solidFill>
           <a:ln w="0">
             <a:noFill/>
@@ -17225,19 +19054,21 @@
       </p:sp>
       <p:sp>
         <p:nvSpPr>
-          <p:cNvPr id="75" name="Text 4"/>
+          <p:cNvPr id="113" name="Text 4"/>
           <p:cNvSpPr/>
           <p:nvPr/>
         </p:nvSpPr>
         <p:spPr>
           <a:xfrm>
             <a:off x="380880" y="3576600"/>
-            <a:ext cx="5550840" cy="188280"/>
-          </a:xfrm>
-          <a:prstGeom prst="rect">
-            <a:avLst/>
-          </a:prstGeom>
-          <a:noFill/>
+            <a:ext cx="5549400" cy="186840"/>
+          </a:xfrm>
+          <a:prstGeom prst="rect">
+            <a:avLst/>
+          </a:prstGeom>
+          <a:solidFill>
+            <a:srgbClr val="800080"/>
+          </a:solidFill>
           <a:ln w="0">
             <a:noFill/>
           </a:ln>
@@ -17260,7 +19091,7 @@
               <a:buNone/>
             </a:pPr>
             <a:r>
-              <a:rPr b="0" lang="en-US" sz="1050" spc="194" strike="noStrike">
+              <a:rPr b="0" lang="en-US" sz="1050" spc="182" strike="noStrike">
                 <a:solidFill>
                   <a:srgbClr val="86868b"/>
                 </a:solidFill>
@@ -17277,19 +19108,21 @@
       </p:sp>
       <p:sp>
         <p:nvSpPr>
-          <p:cNvPr id="76" name="Text 5"/>
+          <p:cNvPr id="114" name="Text 5"/>
           <p:cNvSpPr/>
           <p:nvPr/>
         </p:nvSpPr>
         <p:spPr>
           <a:xfrm>
             <a:off x="380880" y="3919680"/>
-            <a:ext cx="1836000" cy="683640"/>
-          </a:xfrm>
-          <a:prstGeom prst="rect">
-            <a:avLst/>
-          </a:prstGeom>
-          <a:noFill/>
+            <a:ext cx="1834560" cy="682200"/>
+          </a:xfrm>
+          <a:prstGeom prst="rect">
+            <a:avLst/>
+          </a:prstGeom>
+          <a:solidFill>
+            <a:srgbClr val="800080"/>
+          </a:solidFill>
           <a:ln w="0">
             <a:noFill/>
           </a:ln>
@@ -17329,19 +19162,21 @@
       </p:sp>
       <p:sp>
         <p:nvSpPr>
-          <p:cNvPr id="77" name="Text 6"/>
+          <p:cNvPr id="115" name="Text 6"/>
           <p:cNvSpPr/>
           <p:nvPr/>
         </p:nvSpPr>
         <p:spPr>
           <a:xfrm>
             <a:off x="1991160" y="4286160"/>
-            <a:ext cx="664560" cy="264600"/>
-          </a:xfrm>
-          <a:prstGeom prst="rect">
-            <a:avLst/>
-          </a:prstGeom>
-          <a:noFill/>
+            <a:ext cx="663120" cy="263160"/>
+          </a:xfrm>
+          <a:prstGeom prst="rect">
+            <a:avLst/>
+          </a:prstGeom>
+          <a:solidFill>
+            <a:srgbClr val="800080"/>
+          </a:solidFill>
           <a:ln w="0">
             <a:noFill/>
           </a:ln>
@@ -17381,19 +19216,21 @@
       </p:sp>
       <p:sp>
         <p:nvSpPr>
-          <p:cNvPr id="78" name="Text 7"/>
+          <p:cNvPr id="116" name="Text 7"/>
           <p:cNvSpPr/>
           <p:nvPr/>
         </p:nvSpPr>
         <p:spPr>
           <a:xfrm>
             <a:off x="380880" y="4757760"/>
-            <a:ext cx="5560560" cy="245520"/>
-          </a:xfrm>
-          <a:prstGeom prst="rect">
-            <a:avLst/>
-          </a:prstGeom>
-          <a:noFill/>
+            <a:ext cx="5559120" cy="244080"/>
+          </a:xfrm>
+          <a:prstGeom prst="rect">
+            <a:avLst/>
+          </a:prstGeom>
+          <a:solidFill>
+            <a:srgbClr val="800080"/>
+          </a:solidFill>
           <a:ln w="0">
             <a:noFill/>
           </a:ln>
@@ -17433,14 +19270,14 @@
       </p:sp>
       <p:sp>
         <p:nvSpPr>
-          <p:cNvPr id="79" name="Shape 8"/>
+          <p:cNvPr id="117" name="Shape 8"/>
           <p:cNvSpPr/>
           <p:nvPr/>
         </p:nvSpPr>
         <p:spPr>
           <a:xfrm>
             <a:off x="6324480" y="3338640"/>
-            <a:ext cx="5484240" cy="16920"/>
+            <a:ext cx="5482800" cy="15480"/>
           </a:xfrm>
           <a:custGeom>
             <a:avLst/>
@@ -17469,7 +19306,7 @@
             </a:pathLst>
           </a:custGeom>
           <a:solidFill>
-            <a:srgbClr val="0071e3"/>
+            <a:srgbClr val="800080"/>
           </a:solidFill>
           <a:ln w="0">
             <a:noFill/>
@@ -17484,19 +19321,21 @@
       </p:sp>
       <p:sp>
         <p:nvSpPr>
-          <p:cNvPr id="80" name="Text 9"/>
+          <p:cNvPr id="118" name="Text 9"/>
           <p:cNvSpPr/>
           <p:nvPr/>
         </p:nvSpPr>
         <p:spPr>
           <a:xfrm>
             <a:off x="6324480" y="3576600"/>
-            <a:ext cx="5550840" cy="188280"/>
-          </a:xfrm>
-          <a:prstGeom prst="rect">
-            <a:avLst/>
-          </a:prstGeom>
-          <a:noFill/>
+            <a:ext cx="5549400" cy="186840"/>
+          </a:xfrm>
+          <a:prstGeom prst="rect">
+            <a:avLst/>
+          </a:prstGeom>
+          <a:solidFill>
+            <a:srgbClr val="800080"/>
+          </a:solidFill>
           <a:ln w="0">
             <a:noFill/>
           </a:ln>
@@ -17519,7 +19358,7 @@
               <a:buNone/>
             </a:pPr>
             <a:r>
-              <a:rPr b="0" lang="en-US" sz="1050" spc="194" strike="noStrike">
+              <a:rPr b="0" lang="en-US" sz="1050" spc="182" strike="noStrike">
                 <a:solidFill>
                   <a:srgbClr val="0071e3"/>
                 </a:solidFill>
@@ -17536,19 +19375,21 @@
       </p:sp>
       <p:sp>
         <p:nvSpPr>
-          <p:cNvPr id="81" name="Text 10"/>
+          <p:cNvPr id="119" name="Text 10"/>
           <p:cNvSpPr/>
           <p:nvPr/>
         </p:nvSpPr>
         <p:spPr>
           <a:xfrm>
             <a:off x="6324480" y="3919680"/>
-            <a:ext cx="1140840" cy="683640"/>
-          </a:xfrm>
-          <a:prstGeom prst="rect">
-            <a:avLst/>
-          </a:prstGeom>
-          <a:noFill/>
+            <a:ext cx="1139400" cy="682200"/>
+          </a:xfrm>
+          <a:prstGeom prst="rect">
+            <a:avLst/>
+          </a:prstGeom>
+          <a:solidFill>
+            <a:srgbClr val="800080"/>
+          </a:solidFill>
           <a:ln w="0">
             <a:noFill/>
           </a:ln>
@@ -17588,19 +19429,21 @@
       </p:sp>
       <p:sp>
         <p:nvSpPr>
-          <p:cNvPr id="82" name="Text 11"/>
+          <p:cNvPr id="120" name="Text 11"/>
           <p:cNvSpPr/>
           <p:nvPr/>
         </p:nvSpPr>
         <p:spPr>
           <a:xfrm>
             <a:off x="7242120" y="4286160"/>
-            <a:ext cx="664560" cy="264600"/>
-          </a:xfrm>
-          <a:prstGeom prst="rect">
-            <a:avLst/>
-          </a:prstGeom>
-          <a:noFill/>
+            <a:ext cx="663120" cy="263160"/>
+          </a:xfrm>
+          <a:prstGeom prst="rect">
+            <a:avLst/>
+          </a:prstGeom>
+          <a:solidFill>
+            <a:srgbClr val="800080"/>
+          </a:solidFill>
           <a:ln w="0">
             <a:noFill/>
           </a:ln>
@@ -17640,19 +19483,21 @@
       </p:sp>
       <p:sp>
         <p:nvSpPr>
-          <p:cNvPr id="83" name="Text 12"/>
+          <p:cNvPr id="121" name="Text 12"/>
           <p:cNvSpPr/>
           <p:nvPr/>
         </p:nvSpPr>
         <p:spPr>
           <a:xfrm>
             <a:off x="6324480" y="4757760"/>
-            <a:ext cx="5560560" cy="493200"/>
-          </a:xfrm>
-          <a:prstGeom prst="rect">
-            <a:avLst/>
-          </a:prstGeom>
-          <a:noFill/>
+            <a:ext cx="5559120" cy="491760"/>
+          </a:xfrm>
+          <a:prstGeom prst="rect">
+            <a:avLst/>
+          </a:prstGeom>
+          <a:solidFill>
+            <a:srgbClr val="800080"/>
+          </a:solidFill>
           <a:ln w="0">
             <a:noFill/>
           </a:ln>
@@ -17682,27 +19527,7 @@
                 <a:latin typeface="Liter"/>
                 <a:ea typeface="Liter"/>
               </a:rPr>
-              <a:t>Just 23 people gives you a </a:t>
-            </a:r>
-            <a:r>
-              <a:rPr b="1" lang="en-US" sz="1200" spc="-1" strike="noStrike">
-                <a:solidFill>
-                  <a:srgbClr val="1d1d1d"/>
-                </a:solidFill>
-                <a:latin typeface="Liter"/>
-                <a:ea typeface="Liter"/>
-              </a:rPr>
-              <a:t>50.7%</a:t>
-            </a:r>
-            <a:r>
-              <a:rPr b="0" lang="en-US" sz="1200" spc="-1" strike="noStrike">
-                <a:solidFill>
-                  <a:srgbClr val="1d1d1d"/>
-                </a:solidFill>
-                <a:latin typeface="Liter"/>
-                <a:ea typeface="Liter"/>
-              </a:rPr>
-              <a:t> probability of a shared birthday. This is why it's called a paradox.</a:t>
+              <a:t>Just 23 people gives you a 50.7% probability of a shared birthday. This is why it's called a paradox.</a:t>
             </a:r>
             <a:endParaRPr b="0" lang="en-HK" sz="1200" spc="-1" strike="noStrike">
               <a:latin typeface="Arial"/>
@@ -17712,14 +19537,14 @@
       </p:sp>
       <p:sp>
         <p:nvSpPr>
-          <p:cNvPr id="84" name="Shape 13"/>
+          <p:cNvPr id="122" name="Shape 13"/>
           <p:cNvSpPr/>
           <p:nvPr/>
         </p:nvSpPr>
         <p:spPr>
           <a:xfrm>
             <a:off x="380880" y="6014880"/>
-            <a:ext cx="11427840" cy="7200"/>
+            <a:ext cx="11426400" cy="5760"/>
           </a:xfrm>
           <a:custGeom>
             <a:avLst/>
@@ -17748,7 +19573,7 @@
             </a:pathLst>
           </a:custGeom>
           <a:solidFill>
-            <a:srgbClr val="e5e5e5"/>
+            <a:srgbClr val="800080"/>
           </a:solidFill>
           <a:ln w="0">
             <a:noFill/>
@@ -17763,14 +19588,14 @@
       </p:sp>
       <p:sp>
         <p:nvSpPr>
-          <p:cNvPr id="85" name="Shape 14"/>
+          <p:cNvPr id="123" name="Shape 14"/>
           <p:cNvSpPr/>
           <p:nvPr/>
         </p:nvSpPr>
         <p:spPr>
           <a:xfrm>
             <a:off x="419040" y="6286680"/>
-            <a:ext cx="112320" cy="150120"/>
+            <a:ext cx="110880" cy="148680"/>
           </a:xfrm>
           <a:custGeom>
             <a:avLst/>
@@ -17880,7 +19705,7 @@
             </a:pathLst>
           </a:custGeom>
           <a:solidFill>
-            <a:srgbClr val="0071e3"/>
+            <a:srgbClr val="800080"/>
           </a:solidFill>
           <a:ln w="0">
             <a:noFill/>
@@ -17895,19 +19720,21 @@
       </p:sp>
       <p:sp>
         <p:nvSpPr>
-          <p:cNvPr id="86" name="Text 15"/>
+          <p:cNvPr id="124" name="Text 15"/>
           <p:cNvSpPr/>
           <p:nvPr/>
         </p:nvSpPr>
         <p:spPr>
           <a:xfrm>
             <a:off x="628560" y="6248520"/>
-            <a:ext cx="11256480" cy="226440"/>
-          </a:xfrm>
-          <a:prstGeom prst="rect">
-            <a:avLst/>
-          </a:prstGeom>
-          <a:noFill/>
+            <a:ext cx="11255040" cy="225000"/>
+          </a:xfrm>
+          <a:prstGeom prst="rect">
+            <a:avLst/>
+          </a:prstGeom>
+          <a:solidFill>
+            <a:srgbClr val="800080"/>
+          </a:solidFill>
           <a:ln w="0">
             <a:noFill/>
           </a:ln>
@@ -17929,16 +19756,6 @@
               </a:lnSpc>
               <a:buNone/>
             </a:pPr>
-            <a:r>
-              <a:rPr b="1" lang="en-US" sz="1200" spc="-1" strike="noStrike">
-                <a:solidFill>
-                  <a:srgbClr val="86868b"/>
-                </a:solidFill>
-                <a:latin typeface="Liter"/>
-                <a:ea typeface="Liter"/>
-              </a:rPr>
-              <a:t>The paradox:</a:t>
-            </a:r>
             <a:r>
               <a:rPr b="0" lang="en-US" sz="1200" spc="-1" strike="noStrike">
                 <a:solidFill>
@@ -17947,7 +19764,7 @@
                 <a:latin typeface="Liter"/>
                 <a:ea typeface="Liter"/>
               </a:rPr>
-              <a:t> The result seems wrong but is mathematically proven true.</a:t>
+              <a:t>The paradox: The result seems wrong but is mathematically proven true.</a:t>
             </a:r>
             <a:endParaRPr b="0" lang="en-HK" sz="1200" spc="-1" strike="noStrike">
               <a:latin typeface="Arial"/>
@@ -17994,14 +19811,14 @@
       </p:grpSpPr>
       <p:sp>
         <p:nvSpPr>
-          <p:cNvPr id="87" name="Text 0"/>
+          <p:cNvPr id="125" name="Text 0"/>
           <p:cNvSpPr/>
           <p:nvPr/>
         </p:nvSpPr>
         <p:spPr>
           <a:xfrm>
             <a:off x="380880" y="380880"/>
-            <a:ext cx="11485080" cy="150120"/>
+            <a:ext cx="11483640" cy="148680"/>
           </a:xfrm>
           <a:prstGeom prst="rect">
             <a:avLst/>
@@ -18029,7 +19846,7 @@
               <a:buNone/>
             </a:pPr>
             <a:r>
-              <a:rPr b="0" lang="en-US" sz="900" spc="253" strike="noStrike">
+              <a:rPr b="0" lang="en-US" sz="900" spc="242" strike="noStrike">
                 <a:solidFill>
                   <a:srgbClr val="86868b"/>
                 </a:solidFill>
@@ -18046,14 +19863,14 @@
       </p:sp>
       <p:sp>
         <p:nvSpPr>
-          <p:cNvPr id="88" name="Text 1"/>
+          <p:cNvPr id="126" name="Text 1"/>
           <p:cNvSpPr/>
           <p:nvPr/>
         </p:nvSpPr>
         <p:spPr>
           <a:xfrm>
             <a:off x="380880" y="609480"/>
-            <a:ext cx="11599200" cy="378720"/>
+            <a:ext cx="11597760" cy="377280"/>
           </a:xfrm>
           <a:prstGeom prst="rect">
             <a:avLst/>
@@ -18098,14 +19915,14 @@
       </p:sp>
       <p:sp>
         <p:nvSpPr>
-          <p:cNvPr id="89" name="Image 0"/>
+          <p:cNvPr id="127" name="Image 0"/>
           <p:cNvSpPr/>
           <p:nvPr/>
         </p:nvSpPr>
         <p:spPr>
           <a:xfrm>
             <a:off x="380880" y="1219320"/>
-            <a:ext cx="6112800" cy="5255640"/>
+            <a:ext cx="6111360" cy="5254200"/>
           </a:xfrm>
           <a:prstGeom prst="roundRect">
             <a:avLst>
@@ -18130,14 +19947,14 @@
       </p:sp>
       <p:sp>
         <p:nvSpPr>
-          <p:cNvPr id="90" name="Shape 2"/>
+          <p:cNvPr id="128" name="Shape 2"/>
           <p:cNvSpPr/>
           <p:nvPr/>
         </p:nvSpPr>
         <p:spPr>
           <a:xfrm>
             <a:off x="6814080" y="1504800"/>
-            <a:ext cx="16920" cy="988560"/>
+            <a:ext cx="15480" cy="987120"/>
           </a:xfrm>
           <a:custGeom>
             <a:avLst/>
@@ -18181,14 +19998,14 @@
       </p:sp>
       <p:sp>
         <p:nvSpPr>
-          <p:cNvPr id="91" name="Text 3"/>
+          <p:cNvPr id="129" name="Text 3"/>
           <p:cNvSpPr/>
           <p:nvPr/>
         </p:nvSpPr>
         <p:spPr>
           <a:xfrm>
             <a:off x="7014240" y="1504800"/>
-            <a:ext cx="569520" cy="378720"/>
+            <a:ext cx="568080" cy="377280"/>
           </a:xfrm>
           <a:prstGeom prst="rect">
             <a:avLst/>
@@ -18233,14 +20050,14 @@
       </p:sp>
       <p:sp>
         <p:nvSpPr>
-          <p:cNvPr id="92" name="Text 4"/>
+          <p:cNvPr id="130" name="Text 4"/>
           <p:cNvSpPr/>
           <p:nvPr/>
         </p:nvSpPr>
         <p:spPr>
           <a:xfrm>
             <a:off x="7530120" y="1614600"/>
-            <a:ext cx="597960" cy="264600"/>
+            <a:ext cx="596520" cy="263160"/>
           </a:xfrm>
           <a:prstGeom prst="rect">
             <a:avLst/>
@@ -18285,14 +20102,14 @@
       </p:sp>
       <p:sp>
         <p:nvSpPr>
-          <p:cNvPr id="93" name="Text 5"/>
+          <p:cNvPr id="131" name="Text 5"/>
           <p:cNvSpPr/>
           <p:nvPr/>
         </p:nvSpPr>
         <p:spPr>
           <a:xfrm>
             <a:off x="7014240" y="1924200"/>
-            <a:ext cx="4941360" cy="340920"/>
+            <a:ext cx="4939920" cy="339480"/>
           </a:xfrm>
           <a:prstGeom prst="rect">
             <a:avLst/>
@@ -18337,14 +20154,14 @@
       </p:sp>
       <p:sp>
         <p:nvSpPr>
-          <p:cNvPr id="94" name="Text 6"/>
+          <p:cNvPr id="132" name="Text 6"/>
           <p:cNvSpPr/>
           <p:nvPr/>
         </p:nvSpPr>
         <p:spPr>
           <a:xfrm>
             <a:off x="7014240" y="2305080"/>
-            <a:ext cx="4865040" cy="188280"/>
+            <a:ext cx="4863600" cy="186840"/>
           </a:xfrm>
           <a:prstGeom prst="rect">
             <a:avLst/>
@@ -18389,14 +20206,14 @@
       </p:sp>
       <p:sp>
         <p:nvSpPr>
-          <p:cNvPr id="95" name="Shape 7"/>
+          <p:cNvPr id="133" name="Shape 7"/>
           <p:cNvSpPr/>
           <p:nvPr/>
         </p:nvSpPr>
         <p:spPr>
           <a:xfrm>
             <a:off x="6814080" y="2647800"/>
-            <a:ext cx="16920" cy="721800"/>
+            <a:ext cx="15480" cy="720360"/>
           </a:xfrm>
           <a:custGeom>
             <a:avLst/>
@@ -18440,14 +20257,14 @@
       </p:sp>
       <p:sp>
         <p:nvSpPr>
-          <p:cNvPr id="96" name="Text 8"/>
+          <p:cNvPr id="134" name="Text 8"/>
           <p:cNvSpPr/>
           <p:nvPr/>
         </p:nvSpPr>
         <p:spPr>
           <a:xfrm>
             <a:off x="7014240" y="2647800"/>
-            <a:ext cx="493200" cy="340920"/>
+            <a:ext cx="491760" cy="339480"/>
           </a:xfrm>
           <a:prstGeom prst="rect">
             <a:avLst/>
@@ -18492,14 +20309,14 @@
       </p:sp>
       <p:sp>
         <p:nvSpPr>
-          <p:cNvPr id="97" name="Text 9"/>
+          <p:cNvPr id="135" name="Text 9"/>
           <p:cNvSpPr/>
           <p:nvPr/>
         </p:nvSpPr>
         <p:spPr>
           <a:xfrm>
             <a:off x="7479360" y="2747880"/>
-            <a:ext cx="531360" cy="226440"/>
+            <a:ext cx="529920" cy="225000"/>
           </a:xfrm>
           <a:prstGeom prst="rect">
             <a:avLst/>
@@ -18544,14 +20361,14 @@
       </p:sp>
       <p:sp>
         <p:nvSpPr>
-          <p:cNvPr id="98" name="Text 10"/>
+          <p:cNvPr id="136" name="Text 10"/>
           <p:cNvSpPr/>
           <p:nvPr/>
         </p:nvSpPr>
         <p:spPr>
           <a:xfrm>
             <a:off x="7014240" y="3029040"/>
-            <a:ext cx="4912920" cy="302760"/>
+            <a:ext cx="4911480" cy="301320"/>
           </a:xfrm>
           <a:prstGeom prst="rect">
             <a:avLst/>
@@ -18596,14 +20413,14 @@
       </p:sp>
       <p:sp>
         <p:nvSpPr>
-          <p:cNvPr id="99" name="Shape 11"/>
+          <p:cNvPr id="137" name="Shape 11"/>
           <p:cNvSpPr/>
           <p:nvPr/>
         </p:nvSpPr>
         <p:spPr>
           <a:xfrm>
             <a:off x="6814080" y="3524400"/>
-            <a:ext cx="16920" cy="721800"/>
+            <a:ext cx="15480" cy="720360"/>
           </a:xfrm>
           <a:custGeom>
             <a:avLst/>
@@ -18647,14 +20464,14 @@
       </p:sp>
       <p:sp>
         <p:nvSpPr>
-          <p:cNvPr id="100" name="Text 12"/>
+          <p:cNvPr id="138" name="Text 12"/>
           <p:cNvSpPr/>
           <p:nvPr/>
         </p:nvSpPr>
         <p:spPr>
           <a:xfrm>
             <a:off x="7014240" y="3524400"/>
-            <a:ext cx="483480" cy="340920"/>
+            <a:ext cx="482040" cy="339480"/>
           </a:xfrm>
           <a:prstGeom prst="rect">
             <a:avLst/>
@@ -18699,14 +20516,14 @@
       </p:sp>
       <p:sp>
         <p:nvSpPr>
-          <p:cNvPr id="101" name="Text 13"/>
+          <p:cNvPr id="139" name="Text 13"/>
           <p:cNvSpPr/>
           <p:nvPr/>
         </p:nvSpPr>
         <p:spPr>
           <a:xfrm>
             <a:off x="7475400" y="3624120"/>
-            <a:ext cx="531360" cy="226440"/>
+            <a:ext cx="529920" cy="225000"/>
           </a:xfrm>
           <a:prstGeom prst="rect">
             <a:avLst/>
@@ -18751,14 +20568,14 @@
       </p:sp>
       <p:sp>
         <p:nvSpPr>
-          <p:cNvPr id="102" name="Text 14"/>
+          <p:cNvPr id="140" name="Text 14"/>
           <p:cNvSpPr/>
           <p:nvPr/>
         </p:nvSpPr>
         <p:spPr>
           <a:xfrm>
             <a:off x="7014240" y="3905280"/>
-            <a:ext cx="4912920" cy="302760"/>
+            <a:ext cx="4911480" cy="301320"/>
           </a:xfrm>
           <a:prstGeom prst="rect">
             <a:avLst/>
@@ -18803,14 +20620,14 @@
       </p:sp>
       <p:sp>
         <p:nvSpPr>
-          <p:cNvPr id="103" name="Shape 15"/>
+          <p:cNvPr id="141" name="Shape 15"/>
           <p:cNvSpPr/>
           <p:nvPr/>
         </p:nvSpPr>
         <p:spPr>
           <a:xfrm>
             <a:off x="6814080" y="4400640"/>
-            <a:ext cx="16920" cy="721800"/>
+            <a:ext cx="15480" cy="720360"/>
           </a:xfrm>
           <a:custGeom>
             <a:avLst/>
@@ -18854,14 +20671,14 @@
       </p:sp>
       <p:sp>
         <p:nvSpPr>
-          <p:cNvPr id="104" name="Text 16"/>
+          <p:cNvPr id="142" name="Text 16"/>
           <p:cNvSpPr/>
           <p:nvPr/>
         </p:nvSpPr>
         <p:spPr>
           <a:xfrm>
             <a:off x="7014240" y="4400640"/>
-            <a:ext cx="493200" cy="340920"/>
+            <a:ext cx="491760" cy="339480"/>
           </a:xfrm>
           <a:prstGeom prst="rect">
             <a:avLst/>
@@ -18906,14 +20723,14 @@
       </p:sp>
       <p:sp>
         <p:nvSpPr>
-          <p:cNvPr id="105" name="Text 17"/>
+          <p:cNvPr id="143" name="Text 17"/>
           <p:cNvSpPr/>
           <p:nvPr/>
         </p:nvSpPr>
         <p:spPr>
           <a:xfrm>
             <a:off x="7481880" y="4500720"/>
-            <a:ext cx="531360" cy="226440"/>
+            <a:ext cx="529920" cy="225000"/>
           </a:xfrm>
           <a:prstGeom prst="rect">
             <a:avLst/>
@@ -18958,14 +20775,14 @@
       </p:sp>
       <p:sp>
         <p:nvSpPr>
-          <p:cNvPr id="106" name="Text 18"/>
+          <p:cNvPr id="144" name="Text 18"/>
           <p:cNvSpPr/>
           <p:nvPr/>
         </p:nvSpPr>
         <p:spPr>
           <a:xfrm>
             <a:off x="7014240" y="4781520"/>
-            <a:ext cx="4912920" cy="302760"/>
+            <a:ext cx="4911480" cy="301320"/>
           </a:xfrm>
           <a:prstGeom prst="rect">
             <a:avLst/>
@@ -19010,14 +20827,14 @@
       </p:sp>
       <p:sp>
         <p:nvSpPr>
-          <p:cNvPr id="107" name="Shape 19"/>
+          <p:cNvPr id="145" name="Shape 19"/>
           <p:cNvSpPr/>
           <p:nvPr/>
         </p:nvSpPr>
         <p:spPr>
           <a:xfrm>
             <a:off x="6814080" y="5276880"/>
-            <a:ext cx="16920" cy="912240"/>
+            <a:ext cx="15480" cy="910800"/>
           </a:xfrm>
           <a:custGeom>
             <a:avLst/>
@@ -19061,14 +20878,14 @@
       </p:sp>
       <p:sp>
         <p:nvSpPr>
-          <p:cNvPr id="108" name="Text 20"/>
+          <p:cNvPr id="146" name="Text 20"/>
           <p:cNvSpPr/>
           <p:nvPr/>
         </p:nvSpPr>
         <p:spPr>
           <a:xfrm>
             <a:off x="7014240" y="5276880"/>
-            <a:ext cx="455040" cy="340920"/>
+            <a:ext cx="453600" cy="339480"/>
           </a:xfrm>
           <a:prstGeom prst="rect">
             <a:avLst/>
@@ -19113,14 +20930,14 @@
       </p:sp>
       <p:sp>
         <p:nvSpPr>
-          <p:cNvPr id="109" name="Text 21"/>
+          <p:cNvPr id="147" name="Text 21"/>
           <p:cNvSpPr/>
           <p:nvPr/>
         </p:nvSpPr>
         <p:spPr>
           <a:xfrm>
             <a:off x="7439400" y="5376960"/>
-            <a:ext cx="531360" cy="226440"/>
+            <a:ext cx="529920" cy="225000"/>
           </a:xfrm>
           <a:prstGeom prst="rect">
             <a:avLst/>
@@ -19165,14 +20982,14 @@
       </p:sp>
       <p:sp>
         <p:nvSpPr>
-          <p:cNvPr id="110" name="Text 22"/>
+          <p:cNvPr id="148" name="Text 22"/>
           <p:cNvSpPr/>
           <p:nvPr/>
         </p:nvSpPr>
         <p:spPr>
           <a:xfrm>
             <a:off x="7014240" y="5657760"/>
-            <a:ext cx="4912920" cy="302760"/>
+            <a:ext cx="4911480" cy="301320"/>
           </a:xfrm>
           <a:prstGeom prst="rect">
             <a:avLst/>
@@ -19217,14 +21034,14 @@
       </p:sp>
       <p:sp>
         <p:nvSpPr>
-          <p:cNvPr id="111" name="Text 23"/>
+          <p:cNvPr id="149" name="Text 23"/>
           <p:cNvSpPr/>
           <p:nvPr/>
         </p:nvSpPr>
         <p:spPr>
           <a:xfrm>
             <a:off x="7014240" y="6000840"/>
-            <a:ext cx="4865040" cy="188280"/>
+            <a:ext cx="4863600" cy="186840"/>
           </a:xfrm>
           <a:prstGeom prst="rect">
             <a:avLst/>
@@ -19343,14 +21160,14 @@
       </p:grpSpPr>
       <p:sp>
         <p:nvSpPr>
-          <p:cNvPr id="112" name="Shape 0"/>
+          <p:cNvPr id="150" name="Shape 0"/>
           <p:cNvSpPr/>
           <p:nvPr/>
         </p:nvSpPr>
         <p:spPr>
           <a:xfrm>
             <a:off x="380880" y="1850760"/>
-            <a:ext cx="759960" cy="16920"/>
+            <a:ext cx="758520" cy="15480"/>
           </a:xfrm>
           <a:custGeom>
             <a:avLst/>
@@ -19394,14 +21211,14 @@
       </p:sp>
       <p:sp>
         <p:nvSpPr>
-          <p:cNvPr id="113" name="Text 1"/>
+          <p:cNvPr id="151" name="Text 1"/>
           <p:cNvSpPr/>
           <p:nvPr/>
         </p:nvSpPr>
         <p:spPr>
           <a:xfrm>
             <a:off x="380880" y="2174760"/>
-            <a:ext cx="9170280" cy="188280"/>
+            <a:ext cx="9168840" cy="186840"/>
           </a:xfrm>
           <a:prstGeom prst="rect">
             <a:avLst/>
@@ -19429,7 +21246,7 @@
               <a:buNone/>
             </a:pPr>
             <a:r>
-              <a:rPr b="0" lang="en-US" sz="1050" spc="299" strike="noStrike">
+              <a:rPr b="0" lang="en-US" sz="1050" spc="287" strike="noStrike">
                 <a:solidFill>
                   <a:srgbClr val="86868b"/>
                 </a:solidFill>
@@ -19446,14 +21263,14 @@
       </p:sp>
       <p:sp>
         <p:nvSpPr>
-          <p:cNvPr id="114" name="Text 2"/>
+          <p:cNvPr id="152" name="Text 2"/>
           <p:cNvSpPr/>
           <p:nvPr/>
         </p:nvSpPr>
         <p:spPr>
           <a:xfrm>
             <a:off x="380880" y="2593800"/>
-            <a:ext cx="9560880" cy="1731240"/>
+            <a:ext cx="9559440" cy="1729800"/>
           </a:xfrm>
           <a:prstGeom prst="rect">
             <a:avLst/>
@@ -19519,14 +21336,14 @@
       </p:sp>
       <p:sp>
         <p:nvSpPr>
-          <p:cNvPr id="115" name="Text 3"/>
+          <p:cNvPr id="153" name="Text 3"/>
           <p:cNvSpPr/>
           <p:nvPr/>
         </p:nvSpPr>
         <p:spPr>
           <a:xfrm>
             <a:off x="380880" y="4635720"/>
-            <a:ext cx="5598720" cy="369360"/>
+            <a:ext cx="5597280" cy="367920"/>
           </a:xfrm>
           <a:prstGeom prst="rect">
             <a:avLst/>
@@ -19571,14 +21388,14 @@
       </p:sp>
       <p:sp>
         <p:nvSpPr>
-          <p:cNvPr id="116" name="Text 4"/>
+          <p:cNvPr id="154" name="Text 4"/>
           <p:cNvSpPr/>
           <p:nvPr/>
         </p:nvSpPr>
         <p:spPr>
           <a:xfrm>
             <a:off x="9488880" y="2476440"/>
-            <a:ext cx="3274560" cy="1902960"/>
+            <a:ext cx="3273120" cy="1901520"/>
           </a:xfrm>
           <a:prstGeom prst="rect">
             <a:avLst/>
@@ -19660,14 +21477,14 @@
       </p:grpSpPr>
       <p:sp>
         <p:nvSpPr>
-          <p:cNvPr id="117" name="Text 0"/>
+          <p:cNvPr id="155" name="Text 0"/>
           <p:cNvSpPr/>
           <p:nvPr/>
         </p:nvSpPr>
         <p:spPr>
           <a:xfrm>
             <a:off x="380880" y="380880"/>
-            <a:ext cx="11485080" cy="150120"/>
+            <a:ext cx="11483640" cy="148680"/>
           </a:xfrm>
           <a:prstGeom prst="rect">
             <a:avLst/>
@@ -19695,7 +21512,7 @@
               <a:buNone/>
             </a:pPr>
             <a:r>
-              <a:rPr b="0" lang="en-US" sz="900" spc="253" strike="noStrike">
+              <a:rPr b="0" lang="en-US" sz="900" spc="242" strike="noStrike">
                 <a:solidFill>
                   <a:srgbClr val="86868b"/>
                 </a:solidFill>
@@ -19712,14 +21529,14 @@
       </p:sp>
       <p:sp>
         <p:nvSpPr>
-          <p:cNvPr id="118" name="Text 1"/>
+          <p:cNvPr id="156" name="Text 1"/>
           <p:cNvSpPr/>
           <p:nvPr/>
         </p:nvSpPr>
         <p:spPr>
           <a:xfrm>
             <a:off x="380880" y="609480"/>
-            <a:ext cx="11599200" cy="378720"/>
+            <a:ext cx="11597760" cy="377280"/>
           </a:xfrm>
           <a:prstGeom prst="rect">
             <a:avLst/>
@@ -19764,14 +21581,14 @@
       </p:sp>
       <p:sp>
         <p:nvSpPr>
-          <p:cNvPr id="119" name="Text 2"/>
+          <p:cNvPr id="157" name="Text 2"/>
           <p:cNvSpPr/>
           <p:nvPr/>
         </p:nvSpPr>
         <p:spPr>
           <a:xfrm>
             <a:off x="380880" y="1952640"/>
-            <a:ext cx="8627400" cy="617040"/>
+            <a:ext cx="8625960" cy="615600"/>
           </a:xfrm>
           <a:prstGeom prst="rect">
             <a:avLst/>
@@ -19856,14 +21673,14 @@
       </p:sp>
       <p:sp>
         <p:nvSpPr>
-          <p:cNvPr id="120" name="Shape 3"/>
+          <p:cNvPr id="158" name="Shape 3"/>
           <p:cNvSpPr/>
           <p:nvPr/>
         </p:nvSpPr>
         <p:spPr>
           <a:xfrm>
             <a:off x="385920" y="2805120"/>
-            <a:ext cx="4026960" cy="807480"/>
+            <a:ext cx="4025520" cy="806040"/>
           </a:xfrm>
           <a:custGeom>
             <a:avLst/>
@@ -19892,7 +21709,7 @@
             </a:pathLst>
           </a:custGeom>
           <a:noFill/>
-          <a:ln w="12700">
+          <a:ln w="12600">
             <a:solidFill>
               <a:srgbClr val="e5e5e5"/>
             </a:solidFill>
@@ -19908,14 +21725,14 @@
       </p:sp>
       <p:sp>
         <p:nvSpPr>
-          <p:cNvPr id="121" name="Text 4"/>
+          <p:cNvPr id="159" name="Text 4"/>
           <p:cNvSpPr/>
           <p:nvPr/>
         </p:nvSpPr>
         <p:spPr>
           <a:xfrm>
             <a:off x="695160" y="3038400"/>
-            <a:ext cx="3550680" cy="340920"/>
+            <a:ext cx="3549240" cy="339480"/>
           </a:xfrm>
           <a:prstGeom prst="rect">
             <a:avLst/>
@@ -19960,14 +21777,14 @@
       </p:sp>
       <p:sp>
         <p:nvSpPr>
-          <p:cNvPr id="122" name="Text 5"/>
+          <p:cNvPr id="160" name="Text 5"/>
           <p:cNvSpPr/>
           <p:nvPr/>
         </p:nvSpPr>
         <p:spPr>
           <a:xfrm>
             <a:off x="380880" y="4000680"/>
-            <a:ext cx="5589000" cy="188280"/>
+            <a:ext cx="5587560" cy="186840"/>
           </a:xfrm>
           <a:prstGeom prst="rect">
             <a:avLst/>
@@ -19995,7 +21812,7 @@
               <a:buNone/>
             </a:pPr>
             <a:r>
-              <a:rPr b="0" lang="en-US" sz="1050" spc="194" strike="noStrike">
+              <a:rPr b="0" lang="en-US" sz="1050" spc="182" strike="noStrike">
                 <a:solidFill>
                   <a:srgbClr val="86868b"/>
                 </a:solidFill>
@@ -20012,14 +21829,14 @@
       </p:sp>
       <p:sp>
         <p:nvSpPr>
-          <p:cNvPr id="123" name="Text 6"/>
+          <p:cNvPr id="161" name="Text 6"/>
           <p:cNvSpPr/>
           <p:nvPr/>
         </p:nvSpPr>
         <p:spPr>
           <a:xfrm>
             <a:off x="380880" y="4343400"/>
-            <a:ext cx="5598720" cy="493200"/>
+            <a:ext cx="5597280" cy="491760"/>
           </a:xfrm>
           <a:prstGeom prst="rect">
             <a:avLst/>
@@ -20064,14 +21881,14 @@
       </p:sp>
       <p:sp>
         <p:nvSpPr>
-          <p:cNvPr id="124" name="Text 7"/>
+          <p:cNvPr id="162" name="Text 7"/>
           <p:cNvSpPr/>
           <p:nvPr/>
         </p:nvSpPr>
         <p:spPr>
           <a:xfrm>
             <a:off x="380880" y="4991040"/>
-            <a:ext cx="5598720" cy="245520"/>
+            <a:ext cx="5597280" cy="244080"/>
           </a:xfrm>
           <a:prstGeom prst="rect">
             <a:avLst/>
@@ -20116,14 +21933,14 @@
       </p:sp>
       <p:sp>
         <p:nvSpPr>
-          <p:cNvPr id="125" name="Text 8"/>
+          <p:cNvPr id="163" name="Text 8"/>
           <p:cNvSpPr/>
           <p:nvPr/>
         </p:nvSpPr>
         <p:spPr>
           <a:xfrm>
             <a:off x="6286680" y="4000680"/>
-            <a:ext cx="5589000" cy="188280"/>
+            <a:ext cx="5587560" cy="186840"/>
           </a:xfrm>
           <a:prstGeom prst="rect">
             <a:avLst/>
@@ -20151,7 +21968,7 @@
               <a:buNone/>
             </a:pPr>
             <a:r>
-              <a:rPr b="0" lang="en-US" sz="1050" spc="194" strike="noStrike">
+              <a:rPr b="0" lang="en-US" sz="1050" spc="182" strike="noStrike">
                 <a:solidFill>
                   <a:srgbClr val="86868b"/>
                 </a:solidFill>
@@ -20168,14 +21985,14 @@
       </p:sp>
       <p:sp>
         <p:nvSpPr>
-          <p:cNvPr id="126" name="Text 9"/>
+          <p:cNvPr id="164" name="Text 9"/>
           <p:cNvSpPr/>
           <p:nvPr/>
         </p:nvSpPr>
         <p:spPr>
           <a:xfrm>
             <a:off x="6286680" y="4343400"/>
-            <a:ext cx="5598720" cy="493200"/>
+            <a:ext cx="5597280" cy="491760"/>
           </a:xfrm>
           <a:prstGeom prst="rect">
             <a:avLst/>
@@ -20220,14 +22037,14 @@
       </p:sp>
       <p:sp>
         <p:nvSpPr>
-          <p:cNvPr id="127" name="Text 10"/>
+          <p:cNvPr id="165" name="Text 10"/>
           <p:cNvSpPr/>
           <p:nvPr/>
         </p:nvSpPr>
         <p:spPr>
           <a:xfrm>
             <a:off x="6286680" y="4991040"/>
-            <a:ext cx="5598720" cy="245520"/>
+            <a:ext cx="5597280" cy="244080"/>
           </a:xfrm>
           <a:prstGeom prst="rect">
             <a:avLst/>
@@ -20272,14 +22089,14 @@
       </p:sp>
       <p:sp>
         <p:nvSpPr>
-          <p:cNvPr id="128" name="Shape 11"/>
+          <p:cNvPr id="166" name="Shape 11"/>
           <p:cNvSpPr/>
           <p:nvPr/>
         </p:nvSpPr>
         <p:spPr>
           <a:xfrm>
             <a:off x="380880" y="6129360"/>
-            <a:ext cx="11427840" cy="7200"/>
+            <a:ext cx="11426400" cy="5760"/>
           </a:xfrm>
           <a:custGeom>
             <a:avLst/>
@@ -20323,14 +22140,14 @@
       </p:sp>
       <p:sp>
         <p:nvSpPr>
-          <p:cNvPr id="129" name="Shape 12"/>
+          <p:cNvPr id="167" name="Shape 12"/>
           <p:cNvSpPr/>
           <p:nvPr/>
         </p:nvSpPr>
         <p:spPr>
           <a:xfrm>
             <a:off x="399960" y="6315120"/>
-            <a:ext cx="131040" cy="131040"/>
+            <a:ext cx="129600" cy="129600"/>
           </a:xfrm>
           <a:custGeom>
             <a:avLst/>
@@ -20466,14 +22283,14 @@
       </p:sp>
       <p:sp>
         <p:nvSpPr>
-          <p:cNvPr id="130" name="Text 13"/>
+          <p:cNvPr id="168" name="Text 13"/>
           <p:cNvSpPr/>
           <p:nvPr/>
         </p:nvSpPr>
         <p:spPr>
           <a:xfrm>
             <a:off x="609480" y="6286680"/>
-            <a:ext cx="11265840" cy="188280"/>
+            <a:ext cx="11264400" cy="186840"/>
           </a:xfrm>
           <a:prstGeom prst="rect">
             <a:avLst/>
@@ -20565,14 +22382,14 @@
       </p:grpSpPr>
       <p:sp>
         <p:nvSpPr>
-          <p:cNvPr id="131" name="Text 0"/>
+          <p:cNvPr id="169" name="Text 0"/>
           <p:cNvSpPr/>
           <p:nvPr/>
         </p:nvSpPr>
         <p:spPr>
           <a:xfrm>
             <a:off x="380880" y="380880"/>
-            <a:ext cx="11485080" cy="150120"/>
+            <a:ext cx="11483640" cy="148680"/>
           </a:xfrm>
           <a:prstGeom prst="rect">
             <a:avLst/>
@@ -20600,7 +22417,7 @@
               <a:buNone/>
             </a:pPr>
             <a:r>
-              <a:rPr b="0" lang="en-US" sz="900" spc="253" strike="noStrike">
+              <a:rPr b="0" lang="en-US" sz="900" spc="242" strike="noStrike">
                 <a:solidFill>
                   <a:srgbClr val="86868b"/>
                 </a:solidFill>
@@ -20617,14 +22434,14 @@
       </p:sp>
       <p:sp>
         <p:nvSpPr>
-          <p:cNvPr id="132" name="Text 1"/>
+          <p:cNvPr id="170" name="Text 1"/>
           <p:cNvSpPr/>
           <p:nvPr/>
         </p:nvSpPr>
         <p:spPr>
           <a:xfrm>
             <a:off x="380880" y="609480"/>
-            <a:ext cx="11599200" cy="378720"/>
+            <a:ext cx="11597760" cy="377280"/>
           </a:xfrm>
           <a:prstGeom prst="rect">
             <a:avLst/>
@@ -20669,14 +22486,14 @@
       </p:sp>
       <p:sp>
         <p:nvSpPr>
-          <p:cNvPr id="133" name="Shape 2"/>
+          <p:cNvPr id="171" name="Shape 2"/>
           <p:cNvSpPr/>
           <p:nvPr/>
         </p:nvSpPr>
         <p:spPr>
           <a:xfrm>
             <a:off x="385920" y="1576440"/>
-            <a:ext cx="445680" cy="445680"/>
+            <a:ext cx="444240" cy="444240"/>
           </a:xfrm>
           <a:custGeom>
             <a:avLst/>
@@ -20705,7 +22522,7 @@
             </a:pathLst>
           </a:custGeom>
           <a:noFill/>
-          <a:ln w="12700">
+          <a:ln w="12600">
             <a:solidFill>
               <a:srgbClr val="e5e5e5"/>
             </a:solidFill>
@@ -20721,14 +22538,14 @@
       </p:sp>
       <p:sp>
         <p:nvSpPr>
-          <p:cNvPr id="134" name="Text 3"/>
+          <p:cNvPr id="172" name="Text 3"/>
           <p:cNvSpPr/>
           <p:nvPr/>
         </p:nvSpPr>
         <p:spPr>
           <a:xfrm>
             <a:off x="333360" y="1571760"/>
-            <a:ext cx="531360" cy="435960"/>
+            <a:ext cx="529920" cy="434520"/>
           </a:xfrm>
           <a:prstGeom prst="rect">
             <a:avLst/>
@@ -20773,14 +22590,14 @@
       </p:sp>
       <p:sp>
         <p:nvSpPr>
-          <p:cNvPr id="135" name="Text 4"/>
+          <p:cNvPr id="173" name="Text 4"/>
           <p:cNvSpPr/>
           <p:nvPr/>
         </p:nvSpPr>
         <p:spPr>
           <a:xfrm>
             <a:off x="1066680" y="1533600"/>
-            <a:ext cx="10827720" cy="264600"/>
+            <a:ext cx="10826280" cy="263160"/>
           </a:xfrm>
           <a:prstGeom prst="rect">
             <a:avLst/>
@@ -20825,14 +22642,14 @@
       </p:sp>
       <p:sp>
         <p:nvSpPr>
-          <p:cNvPr id="136" name="Text 5"/>
+          <p:cNvPr id="174" name="Text 5"/>
           <p:cNvSpPr/>
           <p:nvPr/>
         </p:nvSpPr>
         <p:spPr>
           <a:xfrm>
             <a:off x="1066680" y="1838160"/>
-            <a:ext cx="10818360" cy="226440"/>
+            <a:ext cx="10816920" cy="225000"/>
           </a:xfrm>
           <a:prstGeom prst="rect">
             <a:avLst/>
@@ -20887,14 +22704,14 @@
       </p:sp>
       <p:sp>
         <p:nvSpPr>
-          <p:cNvPr id="137" name="Shape 6"/>
+          <p:cNvPr id="175" name="Shape 6"/>
           <p:cNvSpPr/>
           <p:nvPr/>
         </p:nvSpPr>
         <p:spPr>
           <a:xfrm>
             <a:off x="385920" y="2262240"/>
-            <a:ext cx="445680" cy="445680"/>
+            <a:ext cx="444240" cy="444240"/>
           </a:xfrm>
           <a:custGeom>
             <a:avLst/>
@@ -20923,7 +22740,7 @@
             </a:pathLst>
           </a:custGeom>
           <a:noFill/>
-          <a:ln w="12700">
+          <a:ln w="12600">
             <a:solidFill>
               <a:srgbClr val="e5e5e5"/>
             </a:solidFill>
@@ -20939,14 +22756,14 @@
       </p:sp>
       <p:sp>
         <p:nvSpPr>
-          <p:cNvPr id="138" name="Text 7"/>
+          <p:cNvPr id="176" name="Text 7"/>
           <p:cNvSpPr/>
           <p:nvPr/>
         </p:nvSpPr>
         <p:spPr>
           <a:xfrm>
             <a:off x="333360" y="2257560"/>
-            <a:ext cx="531360" cy="435960"/>
+            <a:ext cx="529920" cy="434520"/>
           </a:xfrm>
           <a:prstGeom prst="rect">
             <a:avLst/>
@@ -20991,14 +22808,14 @@
       </p:sp>
       <p:sp>
         <p:nvSpPr>
-          <p:cNvPr id="139" name="Text 8"/>
+          <p:cNvPr id="177" name="Text 8"/>
           <p:cNvSpPr/>
           <p:nvPr/>
         </p:nvSpPr>
         <p:spPr>
           <a:xfrm>
             <a:off x="1066680" y="2219400"/>
-            <a:ext cx="10827720" cy="264600"/>
+            <a:ext cx="10826280" cy="263160"/>
           </a:xfrm>
           <a:prstGeom prst="rect">
             <a:avLst/>
@@ -21043,14 +22860,14 @@
       </p:sp>
       <p:sp>
         <p:nvSpPr>
-          <p:cNvPr id="140" name="Text 9"/>
+          <p:cNvPr id="178" name="Text 9"/>
           <p:cNvSpPr/>
           <p:nvPr/>
         </p:nvSpPr>
         <p:spPr>
           <a:xfrm>
             <a:off x="1066680" y="2523960"/>
-            <a:ext cx="10818360" cy="226440"/>
+            <a:ext cx="10816920" cy="225000"/>
           </a:xfrm>
           <a:prstGeom prst="rect">
             <a:avLst/>
@@ -21105,14 +22922,14 @@
       </p:sp>
       <p:sp>
         <p:nvSpPr>
-          <p:cNvPr id="141" name="Shape 10"/>
+          <p:cNvPr id="179" name="Shape 10"/>
           <p:cNvSpPr/>
           <p:nvPr/>
         </p:nvSpPr>
         <p:spPr>
           <a:xfrm>
             <a:off x="385920" y="2948040"/>
-            <a:ext cx="445680" cy="445680"/>
+            <a:ext cx="444240" cy="444240"/>
           </a:xfrm>
           <a:custGeom>
             <a:avLst/>
@@ -21141,7 +22958,7 @@
             </a:pathLst>
           </a:custGeom>
           <a:noFill/>
-          <a:ln w="12700">
+          <a:ln w="12600">
             <a:solidFill>
               <a:srgbClr val="e5e5e5"/>
             </a:solidFill>
@@ -21157,14 +22974,14 @@
       </p:sp>
       <p:sp>
         <p:nvSpPr>
-          <p:cNvPr id="142" name="Text 11"/>
+          <p:cNvPr id="180" name="Text 11"/>
           <p:cNvSpPr/>
           <p:nvPr/>
         </p:nvSpPr>
         <p:spPr>
           <a:xfrm>
             <a:off x="333360" y="2943360"/>
-            <a:ext cx="531360" cy="435960"/>
+            <a:ext cx="529920" cy="434520"/>
           </a:xfrm>
           <a:prstGeom prst="rect">
             <a:avLst/>
@@ -21209,14 +23026,14 @@
       </p:sp>
       <p:sp>
         <p:nvSpPr>
-          <p:cNvPr id="143" name="Text 12"/>
+          <p:cNvPr id="181" name="Text 12"/>
           <p:cNvSpPr/>
           <p:nvPr/>
         </p:nvSpPr>
         <p:spPr>
           <a:xfrm>
             <a:off x="1066680" y="2905200"/>
-            <a:ext cx="10827720" cy="264600"/>
+            <a:ext cx="10826280" cy="263160"/>
           </a:xfrm>
           <a:prstGeom prst="rect">
             <a:avLst/>
@@ -21261,14 +23078,14 @@
       </p:sp>
       <p:sp>
         <p:nvSpPr>
-          <p:cNvPr id="144" name="Text 13"/>
+          <p:cNvPr id="182" name="Text 13"/>
           <p:cNvSpPr/>
           <p:nvPr/>
         </p:nvSpPr>
         <p:spPr>
           <a:xfrm>
             <a:off x="1066680" y="3209760"/>
-            <a:ext cx="10818360" cy="226440"/>
+            <a:ext cx="10816920" cy="225000"/>
           </a:xfrm>
           <a:prstGeom prst="rect">
             <a:avLst/>
@@ -21323,14 +23140,14 @@
       </p:sp>
       <p:sp>
         <p:nvSpPr>
-          <p:cNvPr id="145" name="Shape 14"/>
+          <p:cNvPr id="183" name="Shape 14"/>
           <p:cNvSpPr/>
           <p:nvPr/>
         </p:nvSpPr>
         <p:spPr>
           <a:xfrm>
             <a:off x="385920" y="3595680"/>
-            <a:ext cx="445680" cy="445680"/>
+            <a:ext cx="444240" cy="444240"/>
           </a:xfrm>
           <a:custGeom>
             <a:avLst/>
@@ -21359,7 +23176,7 @@
             </a:pathLst>
           </a:custGeom>
           <a:noFill/>
-          <a:ln w="12700">
+          <a:ln w="12600">
             <a:solidFill>
               <a:srgbClr val="e5e5e5"/>
             </a:solidFill>
@@ -21375,14 +23192,14 @@
       </p:sp>
       <p:sp>
         <p:nvSpPr>
-          <p:cNvPr id="146" name="Text 15"/>
+          <p:cNvPr id="184" name="Text 15"/>
           <p:cNvSpPr/>
           <p:nvPr/>
         </p:nvSpPr>
         <p:spPr>
           <a:xfrm>
             <a:off x="333360" y="3591000"/>
-            <a:ext cx="531360" cy="435960"/>
+            <a:ext cx="529920" cy="434520"/>
           </a:xfrm>
           <a:prstGeom prst="rect">
             <a:avLst/>
@@ -21427,14 +23244,14 @@
       </p:sp>
       <p:sp>
         <p:nvSpPr>
-          <p:cNvPr id="147" name="Text 16"/>
+          <p:cNvPr id="185" name="Text 16"/>
           <p:cNvSpPr/>
           <p:nvPr/>
         </p:nvSpPr>
         <p:spPr>
           <a:xfrm>
             <a:off x="1066680" y="3686040"/>
-            <a:ext cx="10827720" cy="264600"/>
+            <a:ext cx="10826280" cy="263160"/>
           </a:xfrm>
           <a:prstGeom prst="rect">
             <a:avLst/>
@@ -21479,14 +23296,14 @@
       </p:sp>
       <p:sp>
         <p:nvSpPr>
-          <p:cNvPr id="148" name="Shape 17"/>
+          <p:cNvPr id="186" name="Shape 17"/>
           <p:cNvSpPr/>
           <p:nvPr/>
         </p:nvSpPr>
         <p:spPr>
           <a:xfrm>
             <a:off x="385920" y="4243320"/>
-            <a:ext cx="445680" cy="445680"/>
+            <a:ext cx="444240" cy="444240"/>
           </a:xfrm>
           <a:custGeom>
             <a:avLst/>
@@ -21515,7 +23332,7 @@
             </a:pathLst>
           </a:custGeom>
           <a:noFill/>
-          <a:ln w="12700">
+          <a:ln w="12600">
             <a:solidFill>
               <a:srgbClr val="0071e3"/>
             </a:solidFill>
@@ -21531,14 +23348,14 @@
       </p:sp>
       <p:sp>
         <p:nvSpPr>
-          <p:cNvPr id="149" name="Text 18"/>
+          <p:cNvPr id="187" name="Text 18"/>
           <p:cNvSpPr/>
           <p:nvPr/>
         </p:nvSpPr>
         <p:spPr>
           <a:xfrm>
             <a:off x="333360" y="4238640"/>
-            <a:ext cx="531360" cy="435960"/>
+            <a:ext cx="529920" cy="434520"/>
           </a:xfrm>
           <a:prstGeom prst="rect">
             <a:avLst/>
@@ -21583,14 +23400,14 @@
       </p:sp>
       <p:sp>
         <p:nvSpPr>
-          <p:cNvPr id="150" name="Text 19"/>
+          <p:cNvPr id="188" name="Text 19"/>
           <p:cNvSpPr/>
           <p:nvPr/>
         </p:nvSpPr>
         <p:spPr>
           <a:xfrm>
             <a:off x="1066680" y="4200480"/>
-            <a:ext cx="10827720" cy="264600"/>
+            <a:ext cx="10826280" cy="263160"/>
           </a:xfrm>
           <a:prstGeom prst="rect">
             <a:avLst/>
@@ -21635,14 +23452,14 @@
       </p:sp>
       <p:sp>
         <p:nvSpPr>
-          <p:cNvPr id="151" name="Text 20"/>
+          <p:cNvPr id="189" name="Text 20"/>
           <p:cNvSpPr/>
           <p:nvPr/>
         </p:nvSpPr>
         <p:spPr>
           <a:xfrm>
             <a:off x="1066680" y="4505400"/>
-            <a:ext cx="10818360" cy="226440"/>
+            <a:ext cx="10816920" cy="225000"/>
           </a:xfrm>
           <a:prstGeom prst="rect">
             <a:avLst/>
@@ -21697,14 +23514,14 @@
       </p:sp>
       <p:sp>
         <p:nvSpPr>
-          <p:cNvPr id="152" name="Shape 21"/>
+          <p:cNvPr id="190" name="Shape 21"/>
           <p:cNvSpPr/>
           <p:nvPr/>
         </p:nvSpPr>
         <p:spPr>
           <a:xfrm>
             <a:off x="380880" y="4971960"/>
-            <a:ext cx="11427840" cy="16920"/>
+            <a:ext cx="11426400" cy="15480"/>
           </a:xfrm>
           <a:custGeom>
             <a:avLst/>
@@ -21748,14 +23565,14 @@
       </p:sp>
       <p:sp>
         <p:nvSpPr>
-          <p:cNvPr id="153" name="Text 22"/>
+          <p:cNvPr id="191" name="Text 22"/>
           <p:cNvSpPr/>
           <p:nvPr/>
         </p:nvSpPr>
         <p:spPr>
           <a:xfrm>
             <a:off x="380880" y="5210280"/>
-            <a:ext cx="11494440" cy="188280"/>
+            <a:ext cx="11493000" cy="186840"/>
           </a:xfrm>
           <a:prstGeom prst="rect">
             <a:avLst/>
@@ -21783,7 +23600,7 @@
               <a:buNone/>
             </a:pPr>
             <a:r>
-              <a:rPr b="0" lang="en-US" sz="1050" spc="194" strike="noStrike">
+              <a:rPr b="0" lang="en-US" sz="1050" spc="182" strike="noStrike">
                 <a:solidFill>
                   <a:srgbClr val="86868b"/>
                 </a:solidFill>
@@ -21800,14 +23617,14 @@
       </p:sp>
       <p:sp>
         <p:nvSpPr>
-          <p:cNvPr id="154" name="Text 23"/>
+          <p:cNvPr id="192" name="Text 23"/>
           <p:cNvSpPr/>
           <p:nvPr/>
         </p:nvSpPr>
         <p:spPr>
           <a:xfrm>
             <a:off x="380880" y="5514840"/>
-            <a:ext cx="11523240" cy="264600"/>
+            <a:ext cx="11521800" cy="263160"/>
           </a:xfrm>
           <a:prstGeom prst="rect">
             <a:avLst/>
@@ -21852,14 +23669,14 @@
       </p:sp>
       <p:sp>
         <p:nvSpPr>
-          <p:cNvPr id="155" name="Text 24"/>
+          <p:cNvPr id="193" name="Text 24"/>
           <p:cNvSpPr/>
           <p:nvPr/>
         </p:nvSpPr>
         <p:spPr>
           <a:xfrm>
             <a:off x="380880" y="5896080"/>
-            <a:ext cx="11513520" cy="264600"/>
+            <a:ext cx="11512080" cy="263160"/>
           </a:xfrm>
           <a:prstGeom prst="rect">
             <a:avLst/>
@@ -21936,34 +23753,34 @@
         <a:sysClr val="window" lastClr="FFFFFF"/>
       </a:lt1>
       <a:dk2>
-        <a:srgbClr val="333333"/>
+        <a:srgbClr val="1f497d"/>
       </a:dk2>
       <a:lt2>
-        <a:srgbClr val="eeeeee"/>
+        <a:srgbClr val="eeece1"/>
       </a:lt2>
       <a:accent1>
-        <a:srgbClr val="8daac2"/>
+        <a:srgbClr val="4f81bd"/>
       </a:accent1>
       <a:accent2>
-        <a:srgbClr val="ed7d31"/>
+        <a:srgbClr val="c0504d"/>
       </a:accent2>
       <a:accent3>
-        <a:srgbClr val="a5a5a5"/>
+        <a:srgbClr val="9bbb59"/>
       </a:accent3>
       <a:accent4>
-        <a:srgbClr val="ffc000"/>
+        <a:srgbClr val="8064a2"/>
       </a:accent4>
       <a:accent5>
-        <a:srgbClr val="4472c4"/>
+        <a:srgbClr val="4bacc6"/>
       </a:accent5>
       <a:accent6>
-        <a:srgbClr val="70ad47"/>
+        <a:srgbClr val="f79646"/>
       </a:accent6>
       <a:hlink>
-        <a:srgbClr val="0563c1"/>
+        <a:srgbClr val="0000ff"/>
       </a:hlink>
       <a:folHlink>
-        <a:srgbClr val="954f72"/>
+        <a:srgbClr val="800080"/>
       </a:folHlink>
     </a:clrScheme>
     <a:fontScheme name="Office">
@@ -22162,34 +23979,260 @@
         <a:sysClr val="window" lastClr="FFFFFF"/>
       </a:lt1>
       <a:dk2>
-        <a:srgbClr val="333333"/>
+        <a:srgbClr val="1f497d"/>
       </a:dk2>
       <a:lt2>
-        <a:srgbClr val="eeeeee"/>
+        <a:srgbClr val="eeece1"/>
       </a:lt2>
       <a:accent1>
-        <a:srgbClr val="8daac2"/>
+        <a:srgbClr val="4f81bd"/>
       </a:accent1>
       <a:accent2>
-        <a:srgbClr val="ed7d31"/>
+        <a:srgbClr val="c0504d"/>
       </a:accent2>
       <a:accent3>
-        <a:srgbClr val="a5a5a5"/>
+        <a:srgbClr val="9bbb59"/>
       </a:accent3>
       <a:accent4>
-        <a:srgbClr val="ffc000"/>
+        <a:srgbClr val="8064a2"/>
       </a:accent4>
       <a:accent5>
-        <a:srgbClr val="4472c4"/>
+        <a:srgbClr val="4bacc6"/>
       </a:accent5>
       <a:accent6>
-        <a:srgbClr val="70ad47"/>
+        <a:srgbClr val="f79646"/>
       </a:accent6>
       <a:hlink>
-        <a:srgbClr val="0563c1"/>
+        <a:srgbClr val="0000ff"/>
       </a:hlink>
       <a:folHlink>
-        <a:srgbClr val="954f72"/>
+        <a:srgbClr val="800080"/>
+      </a:folHlink>
+    </a:clrScheme>
+    <a:fontScheme name="Office">
+      <a:majorFont>
+        <a:latin typeface="Arial"/>
+        <a:ea typeface="DejaVu Sans"/>
+        <a:cs typeface="DejaVu Sans"/>
+      </a:majorFont>
+      <a:minorFont>
+        <a:latin typeface="Arial"/>
+        <a:ea typeface="DejaVu Sans"/>
+        <a:cs typeface="DejaVu Sans"/>
+      </a:minorFont>
+    </a:fontScheme>
+    <a:fmtScheme name="Office">
+      <a:fillStyleLst>
+        <a:solidFill>
+          <a:schemeClr val="phClr"/>
+        </a:solidFill>
+        <a:gradFill rotWithShape="1">
+          <a:gsLst>
+            <a:gs pos="0">
+              <a:schemeClr val="phClr">
+                <a:tint val="50000"/>
+                <a:satMod val="300000"/>
+              </a:schemeClr>
+            </a:gs>
+            <a:gs pos="35000">
+              <a:schemeClr val="phClr">
+                <a:tint val="37000"/>
+                <a:satMod val="300000"/>
+              </a:schemeClr>
+            </a:gs>
+            <a:gs pos="100000">
+              <a:schemeClr val="phClr">
+                <a:tint val="15000"/>
+                <a:satMod val="350000"/>
+              </a:schemeClr>
+            </a:gs>
+          </a:gsLst>
+          <a:lin ang="16200000" scaled="1"/>
+        </a:gradFill>
+        <a:gradFill rotWithShape="1">
+          <a:gsLst>
+            <a:gs pos="0">
+              <a:schemeClr val="phClr">
+                <a:shade val="51000"/>
+                <a:satMod val="130000"/>
+              </a:schemeClr>
+            </a:gs>
+            <a:gs pos="80000">
+              <a:schemeClr val="phClr">
+                <a:shade val="93000"/>
+                <a:satMod val="130000"/>
+              </a:schemeClr>
+            </a:gs>
+            <a:gs pos="100000">
+              <a:schemeClr val="phClr">
+                <a:shade val="94000"/>
+                <a:satMod val="135000"/>
+              </a:schemeClr>
+            </a:gs>
+          </a:gsLst>
+          <a:lin ang="16200000" scaled="0"/>
+        </a:gradFill>
+      </a:fillStyleLst>
+      <a:lnStyleLst>
+        <a:ln w="9525" cap="flat" cmpd="sng" algn="ctr">
+          <a:solidFill>
+            <a:schemeClr val="phClr">
+              <a:shade val="95000"/>
+              <a:satMod val="105000"/>
+            </a:schemeClr>
+          </a:solidFill>
+          <a:prstDash val="solid"/>
+          <a:miter/>
+        </a:ln>
+        <a:ln w="25400" cap="flat" cmpd="sng" algn="ctr">
+          <a:solidFill>
+            <a:schemeClr val="phClr"/>
+          </a:solidFill>
+          <a:prstDash val="solid"/>
+          <a:miter/>
+        </a:ln>
+        <a:ln w="38100" cap="flat" cmpd="sng" algn="ctr">
+          <a:solidFill>
+            <a:schemeClr val="phClr"/>
+          </a:solidFill>
+          <a:prstDash val="solid"/>
+          <a:miter/>
+        </a:ln>
+      </a:lnStyleLst>
+      <a:effectStyleLst>
+        <a:effectStyle>
+          <a:effectLst>
+            <a:outerShdw blurRad="40000" dist="20000" dir="5400000" rotWithShape="0">
+              <a:srgbClr val="000000">
+                <a:alpha val="38000"/>
+              </a:srgbClr>
+            </a:outerShdw>
+          </a:effectLst>
+        </a:effectStyle>
+        <a:effectStyle>
+          <a:effectLst>
+            <a:outerShdw blurRad="40000" dist="23000" dir="5400000" rotWithShape="0">
+              <a:srgbClr val="000000">
+                <a:alpha val="35000"/>
+              </a:srgbClr>
+            </a:outerShdw>
+          </a:effectLst>
+        </a:effectStyle>
+        <a:effectStyle>
+          <a:effectLst>
+            <a:outerShdw blurRad="40000" dist="23000" dir="5400000" rotWithShape="0">
+              <a:srgbClr val="000000">
+                <a:alpha val="35000"/>
+              </a:srgbClr>
+            </a:outerShdw>
+          </a:effectLst>
+          <a:scene3d>
+            <a:camera prst="orthographicFront">
+              <a:rot lat="0" lon="0" rev="0"/>
+            </a:camera>
+            <a:lightRig rig="threePt" dir="t">
+              <a:rot lat="0" lon="0" rev="1200000"/>
+            </a:lightRig>
+          </a:scene3d>
+          <a:sp3d>
+            <a:bevelT w="63500" h="25400"/>
+          </a:sp3d>
+        </a:effectStyle>
+      </a:effectStyleLst>
+      <a:bgFillStyleLst>
+        <a:solidFill>
+          <a:schemeClr val="phClr"/>
+        </a:solidFill>
+        <a:gradFill rotWithShape="1">
+          <a:gsLst>
+            <a:gs pos="0">
+              <a:schemeClr val="phClr">
+                <a:tint val="40000"/>
+                <a:satMod val="350000"/>
+              </a:schemeClr>
+            </a:gs>
+            <a:gs pos="40000">
+              <a:schemeClr val="phClr">
+                <a:tint val="45000"/>
+                <a:shade val="99000"/>
+                <a:satMod val="350000"/>
+              </a:schemeClr>
+            </a:gs>
+            <a:gs pos="100000">
+              <a:schemeClr val="phClr">
+                <a:shade val="20000"/>
+                <a:satMod val="255000"/>
+              </a:schemeClr>
+            </a:gs>
+          </a:gsLst>
+          <a:path path="circle">
+            <a:fillToRect l="50000" t="-80000" r="50000" b="180000"/>
+          </a:path>
+        </a:gradFill>
+        <a:gradFill rotWithShape="1">
+          <a:gsLst>
+            <a:gs pos="0">
+              <a:schemeClr val="phClr">
+                <a:tint val="80000"/>
+                <a:satMod val="300000"/>
+              </a:schemeClr>
+            </a:gs>
+            <a:gs pos="100000">
+              <a:schemeClr val="phClr">
+                <a:shade val="30000"/>
+                <a:satMod val="200000"/>
+              </a:schemeClr>
+            </a:gs>
+          </a:gsLst>
+          <a:path path="circle">
+            <a:fillToRect l="50000" t="50000" r="50000" b="50000"/>
+          </a:path>
+        </a:gradFill>
+      </a:bgFillStyleLst>
+    </a:fmtScheme>
+  </a:themeElements>
+</a:theme>
+</file>
+
+<file path=ppt/theme/theme3.xml><?xml version="1.0" encoding="utf-8"?>
+<a:theme xmlns:a="http://schemas.openxmlformats.org/drawingml/2006/main" name="Office Theme">
+  <a:themeElements>
+    <a:clrScheme name="Office">
+      <a:dk1>
+        <a:sysClr val="windowText" lastClr="000000"/>
+      </a:dk1>
+      <a:lt1>
+        <a:sysClr val="window" lastClr="FFFFFF"/>
+      </a:lt1>
+      <a:dk2>
+        <a:srgbClr val="1f497d"/>
+      </a:dk2>
+      <a:lt2>
+        <a:srgbClr val="eeece1"/>
+      </a:lt2>
+      <a:accent1>
+        <a:srgbClr val="4f81bd"/>
+      </a:accent1>
+      <a:accent2>
+        <a:srgbClr val="c0504d"/>
+      </a:accent2>
+      <a:accent3>
+        <a:srgbClr val="9bbb59"/>
+      </a:accent3>
+      <a:accent4>
+        <a:srgbClr val="8064a2"/>
+      </a:accent4>
+      <a:accent5>
+        <a:srgbClr val="4bacc6"/>
+      </a:accent5>
+      <a:accent6>
+        <a:srgbClr val="f79646"/>
+      </a:accent6>
+      <a:hlink>
+        <a:srgbClr val="0000ff"/>
+      </a:hlink>
+      <a:folHlink>
+        <a:srgbClr val="800080"/>
       </a:folHlink>
     </a:clrScheme>
     <a:fontScheme name="Office">
